--- a/outputs/posters/poster_pns_asma_morrison_pt.pptx
+++ b/outputs/posters/poster_pns_asma_morrison_pt.pptx
@@ -3007,7 +3007,7 @@
 </file>
 
 <file path=ppt/slides/slide1.xml><?xml version="1.0" encoding="utf-8"?>
-<p:sld xmlns:p="http://schemas.openxmlformats.org/presentationml/2006/main">
+<p:sld xmlns:a="http://schemas.openxmlformats.org/drawingml/2006/main" xmlns:ns2="http://schemas.microsoft.com/office/drawing/2014/main" xmlns:ns4="http://schemas.microsoft.com/office/powerpoint/2010/main" xmlns:p="http://schemas.openxmlformats.org/presentationml/2006/main" xmlns:r="http://schemas.openxmlformats.org/officeDocument/2006/relationships">
   <p:cSld>
     <p:spTree>
       <p:nvGrpSpPr>
@@ -3016,70 +3016,70 @@
         <p:nvPr/>
       </p:nvGrpSpPr>
       <p:grpSpPr>
-        <a:xfrm xmlns:a="http://schemas.openxmlformats.org/drawingml/2006/main"/>
+        <a:xfrm/>
       </p:grpSpPr>
       <p:sp>
         <p:nvSpPr>
           <p:cNvPr id="4" name="TextBox 3">
-            <a:extLst xmlns:a="http://schemas.openxmlformats.org/drawingml/2006/main">
+            <a:extLst>
               <a:ext uri="{FF2B5EF4-FFF2-40B4-BE49-F238E27FC236}">
-                <a16:creationId xmlns:a16="http://schemas.microsoft.com/office/drawing/2014/main" id="{953F0A63-7DBA-4862-8ADB-634BE2082DC4}"/>
+                <ns2:creationId id="{953F0A63-7DBA-4862-8ADB-634BE2082DC4}"/>
               </a:ext>
             </a:extLst>
           </p:cNvPr>
           <p:cNvSpPr>
-            <a:spLocks xmlns:a="http://schemas.openxmlformats.org/drawingml/2006/main" noGrp="1"/>
+            <a:spLocks noGrp="1"/>
           </p:cNvSpPr>
           <p:nvPr/>
         </p:nvSpPr>
         <p:spPr>
-          <a:xfrm xmlns:a="http://schemas.openxmlformats.org/drawingml/2006/main">
+          <a:xfrm>
             <a:off x="8436429" y="0"/>
             <a:ext cx="26974800" cy="32918400"/>
           </a:xfrm>
-          <a:prstGeom xmlns:a="http://schemas.openxmlformats.org/drawingml/2006/main" prst="rect">
-            <a:avLst/>
-          </a:prstGeom>
-          <a:solidFill xmlns:a="http://schemas.openxmlformats.org/drawingml/2006/main">
+          <a:prstGeom prst="rect">
+            <a:avLst/>
+          </a:prstGeom>
+          <a:solidFill>
             <a:srgbClr val="20425A"/>
           </a:solidFill>
         </p:spPr>
         <p:txBody>
-          <a:bodyPr xmlns:a="http://schemas.openxmlformats.org/drawingml/2006/main" wrap="square">
+          <a:bodyPr wrap="square">
             <a:spAutoFit/>
           </a:bodyPr>
-          <a:lstStyle xmlns:a="http://schemas.openxmlformats.org/drawingml/2006/main"/>
-          <a:p xmlns:a="http://schemas.openxmlformats.org/drawingml/2006/main"/>
+          <a:lstStyle/>
+          <a:p/>
         </p:txBody>
       </p:sp>
       <p:sp>
         <p:nvSpPr>
           <p:cNvPr id="5" name="Title 4">
-            <a:extLst xmlns:a="http://schemas.openxmlformats.org/drawingml/2006/main">
+            <a:extLst>
               <a:ext uri="{FF2B5EF4-FFF2-40B4-BE49-F238E27FC236}">
-                <a16:creationId xmlns:a16="http://schemas.microsoft.com/office/drawing/2014/main" id="{E2B6D61B-B0C1-41B4-91D3-8A4338C302FE}"/>
+                <ns2:creationId id="{E2B6D61B-B0C1-41B4-91D3-8A4338C302FE}"/>
               </a:ext>
             </a:extLst>
           </p:cNvPr>
           <p:cNvSpPr>
-            <a:spLocks xmlns:a="http://schemas.openxmlformats.org/drawingml/2006/main" noGrp="1"/>
+            <a:spLocks noGrp="1"/>
           </p:cNvSpPr>
           <p:nvPr/>
         </p:nvSpPr>
         <p:spPr>
-          <a:xfrm xmlns:a="http://schemas.openxmlformats.org/drawingml/2006/main">
+          <a:xfrm>
             <a:off x="8436429" y="6443810"/>
             <a:ext cx="26974800" cy="11097741"/>
           </a:xfrm>
-          <a:prstGeom xmlns:a="http://schemas.openxmlformats.org/drawingml/2006/main" prst="rect">
+          <a:prstGeom prst="rect">
             <a:avLst/>
           </a:prstGeom>
         </p:spPr>
         <p:txBody>
-          <a:bodyPr xmlns:a="http://schemas.openxmlformats.org/drawingml/2006/main" vert="horz" lIns="914400" rIns="914400" anchor="t">
+          <a:bodyPr vert="horz" lIns="914400" rIns="914400" anchor="t">
             <a:noAutofit/>
           </a:bodyPr>
-          <a:lstStyle xmlns:a="http://schemas.openxmlformats.org/drawingml/2006/main">
+          <a:lstStyle>
             <a:lvl1pPr algn="ctr" defTabSz="3260725">
               <a:spcBef>
                 <a:spcPct val="0"/>
@@ -3234,18 +3234,7 @@
               </a:defRPr>
             </a:lvl9pPr>
           </a:lstStyle>
-          <a:p xmlns:a="http://schemas.openxmlformats.org/drawingml/2006/main">
-            <a:pPr algn="l">
-              <a:lnSpc>
-                <a:spcPct val="150000"/>
-              </a:lnSpc>
-              <a:buNone/>
-              <a:defRPr sz="10350" b="1" i="0">
-                <a:solidFill>
-                  <a:srgbClr val="FFFFFF"/>
-                </a:solidFill>
-              </a:defRPr>
-            </a:pPr>
+          <a:p>
             <a:r>
               <a:rPr sz="10350" b="1" i="0">
                 <a:solidFill>
@@ -3255,31 +3244,32 @@
                 <a:ea typeface="Arial"/>
                 <a:cs typeface="Arial"/>
               </a:rPr>
-              <a:t>Mais diagnóstico de asma, sem queda clara das crises</a:t>
-            </a:r>
+              <a:t>Mais diagnóstico de asma, sem melhora proporcional no controle</a:t>
+            </a:r>
+            <a:endParaRPr/>
           </a:p>
         </p:txBody>
       </p:sp>
       <p:sp>
         <p:nvSpPr>
           <p:cNvPr id="11" name="Graphic 7">
-            <a:extLst xmlns:a="http://schemas.openxmlformats.org/drawingml/2006/main">
+            <a:extLst>
               <a:ext uri="{FF2B5EF4-FFF2-40B4-BE49-F238E27FC236}">
-                <a16:creationId xmlns:a16="http://schemas.microsoft.com/office/drawing/2014/main" id="{6A914F07-9B81-4F27-AA77-A20809DD98D8}"/>
+                <ns2:creationId id="{6A914F07-9B81-4F27-AA77-A20809DD98D8}"/>
               </a:ext>
             </a:extLst>
           </p:cNvPr>
           <p:cNvSpPr>
-            <a:spLocks xmlns:a="http://schemas.openxmlformats.org/drawingml/2006/main" noGrp="1"/>
+            <a:spLocks noGrp="1"/>
           </p:cNvSpPr>
           <p:nvPr/>
         </p:nvSpPr>
         <p:spPr>
-          <a:xfrm xmlns:a="http://schemas.openxmlformats.org/drawingml/2006/main">
+          <a:xfrm>
             <a:off x="17812662" y="25909266"/>
             <a:ext cx="1117158" cy="1932381"/>
           </a:xfrm>
-          <a:custGeom xmlns:a="http://schemas.openxmlformats.org/drawingml/2006/main">
+          <a:custGeom>
             <a:gdLst>
               <a:gd name="connsiteX0" fmla="*/ 321256 w 2089376"/>
               <a:gd name="connsiteY0" fmla="*/ 0 h 3614056"/>
@@ -3522,58 +3512,50 @@
               </a:path>
             </a:pathLst>
           </a:custGeom>
-          <a:solidFill xmlns:a="http://schemas.openxmlformats.org/drawingml/2006/main">
+          <a:solidFill>
             <a:srgbClr val="B9D9EB"/>
           </a:solidFill>
-          <a:ln xmlns:a="http://schemas.openxmlformats.org/drawingml/2006/main" w="56406">
+          <a:ln w="56406">
             <a:noFill/>
             <a:prstDash val="solid"/>
           </a:ln>
         </p:spPr>
         <p:txBody>
-          <a:bodyPr xmlns:a="http://schemas.openxmlformats.org/drawingml/2006/main" anchor="ctr"/>
-          <a:lstStyle xmlns:a="http://schemas.openxmlformats.org/drawingml/2006/main"/>
-          <a:p xmlns:a="http://schemas.openxmlformats.org/drawingml/2006/main"/>
+          <a:bodyPr anchor="ctr"/>
+          <a:lstStyle/>
+          <a:p/>
         </p:txBody>
       </p:sp>
       <p:sp>
         <p:nvSpPr>
           <p:cNvPr id="12" name="TextBox 11">
-            <a:extLst xmlns:a="http://schemas.openxmlformats.org/drawingml/2006/main">
+            <a:extLst>
               <a:ext uri="{FF2B5EF4-FFF2-40B4-BE49-F238E27FC236}">
-                <a16:creationId xmlns:a16="http://schemas.microsoft.com/office/drawing/2014/main" id="{166E3CCB-B3D7-4851-9F10-196B92FE8D0C}"/>
+                <ns2:creationId id="{166E3CCB-B3D7-4851-9F10-196B92FE8D0C}"/>
               </a:ext>
             </a:extLst>
           </p:cNvPr>
           <p:cNvSpPr>
-            <a:spLocks xmlns:a="http://schemas.openxmlformats.org/drawingml/2006/main" noGrp="1"/>
+            <a:spLocks noGrp="1"/>
           </p:cNvSpPr>
           <p:nvPr/>
         </p:nvSpPr>
         <p:spPr>
-          <a:xfrm xmlns:a="http://schemas.openxmlformats.org/drawingml/2006/main">
+          <a:xfrm>
             <a:off x="19306853" y="25997207"/>
             <a:ext cx="7179897" cy="1405641"/>
           </a:xfrm>
-          <a:prstGeom xmlns:a="http://schemas.openxmlformats.org/drawingml/2006/main" prst="rect">
-            <a:avLst/>
-          </a:prstGeom>
-          <a:noFill xmlns:a="http://schemas.openxmlformats.org/drawingml/2006/main"/>
+          <a:prstGeom prst="rect">
+            <a:avLst/>
+          </a:prstGeom>
+          <a:noFill/>
         </p:spPr>
         <p:txBody>
-          <a:bodyPr xmlns:a="http://schemas.openxmlformats.org/drawingml/2006/main" wrap="square">
+          <a:bodyPr wrap="square">
             <a:spAutoFit/>
           </a:bodyPr>
-          <a:lstStyle xmlns:a="http://schemas.openxmlformats.org/drawingml/2006/main"/>
-          <a:p xmlns:a="http://schemas.openxmlformats.org/drawingml/2006/main">
-            <a:pPr algn="l">
-              <a:buNone/>
-              <a:defRPr sz="2325" b="0" i="0">
-                <a:solidFill>
-                  <a:srgbClr val="B9D9EB"/>
-                </a:solidFill>
-              </a:defRPr>
-            </a:pPr>
+          <a:lstStyle/>
+          <a:p>
             <a:r>
               <a:rPr sz="2325" b="0" i="0">
                 <a:solidFill>
@@ -3585,16 +3567,9 @@
               </a:rPr>
               <a:t>Aponte para acessar</a:t>
             </a:r>
-          </a:p>
-          <a:p xmlns:a="http://schemas.openxmlformats.org/drawingml/2006/main">
-            <a:pPr algn="l">
-              <a:buNone/>
-              <a:defRPr sz="2325" b="0" i="0">
-                <a:solidFill>
-                  <a:srgbClr val="B9D9EB"/>
-                </a:solidFill>
-              </a:defRPr>
-            </a:pPr>
+            <a:endParaRPr/>
+          </a:p>
+          <a:p>
             <a:r>
               <a:rPr sz="2325" b="0" i="0">
                 <a:solidFill>
@@ -3604,8 +3579,9 @@
                 <a:ea typeface="Arial"/>
                 <a:cs typeface="Arial"/>
               </a:rPr>
-              <a:t>o repositório</a:t>
-            </a:r>
+              <a:t>o relatório metodológico</a:t>
+            </a:r>
+            <a:endParaRPr/>
           </a:p>
         </p:txBody>
       </p:sp>
@@ -3616,14 +3592,14 @@
           <p:nvPr/>
         </p:nvCxnSpPr>
         <p:spPr>
-          <a:xfrm xmlns:a="http://schemas.openxmlformats.org/drawingml/2006/main" flipH="1">
+          <a:xfrm flipH="1">
             <a:off x="16574285" y="26803752"/>
             <a:ext cx="1153301" cy="0"/>
           </a:xfrm>
-          <a:prstGeom xmlns:a="http://schemas.openxmlformats.org/drawingml/2006/main" prst="straightConnector1">
-            <a:avLst/>
-          </a:prstGeom>
-          <a:ln xmlns:a="http://schemas.openxmlformats.org/drawingml/2006/main" w="66675">
+          <a:prstGeom prst="straightConnector1">
+            <a:avLst/>
+          </a:prstGeom>
+          <a:ln w="66675">
             <a:solidFill>
               <a:srgbClr val="B9D9EB"/>
             </a:solidFill>
@@ -3632,16 +3608,16 @@
           </a:ln>
         </p:spPr>
         <p:style>
-          <a:lnRef xmlns:a="http://schemas.openxmlformats.org/drawingml/2006/main" idx="1">
+          <a:lnRef idx="1">
             <a:schemeClr val="accent1"/>
           </a:lnRef>
-          <a:fillRef xmlns:a="http://schemas.openxmlformats.org/drawingml/2006/main" idx="0">
+          <a:fillRef idx="0">
             <a:schemeClr val="accent1"/>
           </a:fillRef>
-          <a:effectRef xmlns:a="http://schemas.openxmlformats.org/drawingml/2006/main" idx="0">
+          <a:effectRef idx="0">
             <a:schemeClr val="accent1"/>
           </a:effectRef>
-          <a:fontRef xmlns:a="http://schemas.openxmlformats.org/drawingml/2006/main" idx="minor">
+          <a:fontRef idx="minor">
             <a:schemeClr val="tx1"/>
           </a:fontRef>
         </p:style>
@@ -3649,29 +3625,29 @@
       <p:sp>
         <p:nvSpPr>
           <p:cNvPr id="14" name="Rectangle 13">
-            <a:extLst xmlns:a="http://schemas.openxmlformats.org/drawingml/2006/main">
+            <a:extLst>
               <a:ext uri="{FF2B5EF4-FFF2-40B4-BE49-F238E27FC236}">
-                <a16:creationId xmlns:a16="http://schemas.microsoft.com/office/drawing/2014/main" id="{613982A0-69CB-45AD-A5F2-E7F4BB7E86EB}"/>
+                <ns2:creationId id="{613982A0-69CB-45AD-A5F2-E7F4BB7E86EB}"/>
               </a:ext>
             </a:extLst>
           </p:cNvPr>
           <p:cNvSpPr>
-            <a:spLocks xmlns:a="http://schemas.openxmlformats.org/drawingml/2006/main" noGrp="1"/>
+            <a:spLocks noGrp="1"/>
           </p:cNvSpPr>
           <p:nvPr/>
         </p:nvSpPr>
         <p:spPr>
-          <a:xfrm xmlns:a="http://schemas.openxmlformats.org/drawingml/2006/main">
+          <a:xfrm>
             <a:off x="-1" y="0"/>
             <a:ext cx="8436429" cy="32918400"/>
           </a:xfrm>
-          <a:prstGeom xmlns:a="http://schemas.openxmlformats.org/drawingml/2006/main" prst="rect">
-            <a:avLst/>
-          </a:prstGeom>
-          <a:solidFill xmlns:a="http://schemas.openxmlformats.org/drawingml/2006/main">
+          <a:prstGeom prst="rect">
+            <a:avLst/>
+          </a:prstGeom>
+          <a:solidFill>
             <a:schemeClr val="bg1"/>
           </a:solidFill>
-          <a:ln xmlns:a="http://schemas.openxmlformats.org/drawingml/2006/main" w="9525" cmpd="sng">
+          <a:ln w="9525" cmpd="sng">
             <a:noFill/>
             <a:prstDash val="solid"/>
             <a:headEnd type="none" w="med" len="med"/>
@@ -3679,9 +3655,9 @@
           </a:ln>
         </p:spPr>
         <p:txBody>
-          <a:bodyPr xmlns:a="http://schemas.openxmlformats.org/drawingml/2006/main" vert="horz" wrap="square" lIns="91440" tIns="45720" rIns="91440" bIns="45720" anchor="t"/>
-          <a:lstStyle xmlns:a="http://schemas.openxmlformats.org/drawingml/2006/main"/>
-          <a:p xmlns:a="http://schemas.openxmlformats.org/drawingml/2006/main">
+          <a:bodyPr vert="horz" wrap="square" lIns="91440" tIns="45720" rIns="91440" bIns="45720" anchor="t"/>
+          <a:lstStyle/>
+          <a:p>
             <a:pPr marL="0" marR="0" indent="0" algn="l" defTabSz="2665413">
               <a:lnSpc>
                 <a:spcPct val="100000"/>
@@ -3703,29 +3679,29 @@
       <p:sp>
         <p:nvSpPr>
           <p:cNvPr id="17" name="Rectangle 16">
-            <a:extLst xmlns:a="http://schemas.openxmlformats.org/drawingml/2006/main">
+            <a:extLst>
               <a:ext uri="{FF2B5EF4-FFF2-40B4-BE49-F238E27FC236}">
-                <a16:creationId xmlns:a16="http://schemas.microsoft.com/office/drawing/2014/main" id="{3E20FE60-407F-4C94-8E81-E6399E6D12A5}"/>
+                <ns2:creationId id="{3E20FE60-407F-4C94-8E81-E6399E6D12A5}"/>
               </a:ext>
             </a:extLst>
           </p:cNvPr>
           <p:cNvSpPr>
-            <a:spLocks xmlns:a="http://schemas.openxmlformats.org/drawingml/2006/main" noGrp="1"/>
+            <a:spLocks noGrp="1"/>
           </p:cNvSpPr>
           <p:nvPr/>
         </p:nvSpPr>
         <p:spPr>
-          <a:xfrm xmlns:a="http://schemas.openxmlformats.org/drawingml/2006/main">
+          <a:xfrm>
             <a:off x="35411229" y="0"/>
             <a:ext cx="8436429" cy="32918400"/>
           </a:xfrm>
-          <a:prstGeom xmlns:a="http://schemas.openxmlformats.org/drawingml/2006/main" prst="rect">
-            <a:avLst/>
-          </a:prstGeom>
-          <a:solidFill xmlns:a="http://schemas.openxmlformats.org/drawingml/2006/main">
+          <a:prstGeom prst="rect">
+            <a:avLst/>
+          </a:prstGeom>
+          <a:solidFill>
             <a:schemeClr val="bg1"/>
           </a:solidFill>
-          <a:ln xmlns:a="http://schemas.openxmlformats.org/drawingml/2006/main" w="9525" cmpd="sng">
+          <a:ln w="9525" cmpd="sng">
             <a:noFill/>
             <a:prstDash val="solid"/>
             <a:headEnd type="none" w="med" len="med"/>
@@ -3733,9 +3709,9 @@
           </a:ln>
         </p:spPr>
         <p:txBody>
-          <a:bodyPr xmlns:a="http://schemas.openxmlformats.org/drawingml/2006/main" vert="horz" wrap="square" lIns="91440" tIns="45720" rIns="91440" bIns="45720" anchor="t"/>
-          <a:lstStyle xmlns:a="http://schemas.openxmlformats.org/drawingml/2006/main"/>
-          <a:p xmlns:a="http://schemas.openxmlformats.org/drawingml/2006/main">
+          <a:bodyPr vert="horz" wrap="square" lIns="91440" tIns="45720" rIns="91440" bIns="45720" anchor="t"/>
+          <a:lstStyle/>
+          <a:p>
             <a:pPr marL="0" marR="0" indent="0" algn="l" defTabSz="2665413">
               <a:lnSpc>
                 <a:spcPct val="100000"/>
@@ -3758,22 +3734,22 @@
         <p:nvPicPr>
           <p:cNvPr id="127" name="Picture 19"/>
           <p:cNvPicPr>
-            <a:picLocks xmlns:a="http://schemas.openxmlformats.org/drawingml/2006/main" noChangeAspect="1"/>
+            <a:picLocks noChangeAspect="1"/>
           </p:cNvPicPr>
           <p:nvPr/>
         </p:nvPicPr>
         <p:blipFill>
-          <a:blip xmlns:r="http://schemas.openxmlformats.org/officeDocument/2006/relationships" xmlns:a="http://schemas.openxmlformats.org/drawingml/2006/main" r:embed="Rc7226c8fcbba4c3d"/>
-          <a:stretch xmlns:a="http://schemas.openxmlformats.org/drawingml/2006/main">
+          <a:blip r:embed="Rc7226c8fcbba4c3d"/>
+          <a:stretch>
             <a:fillRect l="0" t="0" r="0" b="0"/>
           </a:stretch>
         </p:blipFill>
         <p:spPr>
-          <a:xfrm xmlns:a="http://schemas.openxmlformats.org/drawingml/2006/main">
+          <a:xfrm>
             <a:off x="36419038" y="29678799"/>
             <a:ext cx="2810933" cy="2294467"/>
           </a:xfrm>
-          <a:prstGeom xmlns:a="http://schemas.openxmlformats.org/drawingml/2006/main" prst="rect">
+          <a:prstGeom prst="rect">
             <a:avLst/>
           </a:prstGeom>
         </p:spPr>
@@ -3781,23 +3757,23 @@
       <p:sp>
         <p:nvSpPr>
           <p:cNvPr id="21" name="Graphic 18">
-            <a:extLst xmlns:a="http://schemas.openxmlformats.org/drawingml/2006/main">
+            <a:extLst>
               <a:ext uri="{FF2B5EF4-FFF2-40B4-BE49-F238E27FC236}">
-                <a16:creationId xmlns:a16="http://schemas.microsoft.com/office/drawing/2014/main" id="{DF6CD646-5E36-42FB-96E3-FEB08C25F063}"/>
+                <ns2:creationId id="{DF6CD646-5E36-42FB-96E3-FEB08C25F063}"/>
               </a:ext>
             </a:extLst>
           </p:cNvPr>
           <p:cNvSpPr>
-            <a:spLocks xmlns:a="http://schemas.openxmlformats.org/drawingml/2006/main" noGrp="1"/>
+            <a:spLocks noGrp="1"/>
           </p:cNvSpPr>
           <p:nvPr/>
         </p:nvSpPr>
         <p:spPr>
-          <a:xfrm xmlns:a="http://schemas.openxmlformats.org/drawingml/2006/main" rot="0" flipH="0" flipV="0">
+          <a:xfrm rot="0" flipH="0" flipV="0">
             <a:off x="561452" y="7489285"/>
             <a:ext cx="320382" cy="297952"/>
           </a:xfrm>
-          <a:custGeom xmlns:a="http://schemas.openxmlformats.org/drawingml/2006/main">
+          <a:custGeom>
             <a:gdLst>
               <a:gd name="connsiteX0" fmla="*/ 310594 w 327663"/>
               <a:gd name="connsiteY0" fmla="*/ 219906 h 335196"/>
@@ -3912,43 +3888,43 @@
               </a:path>
             </a:pathLst>
           </a:custGeom>
-          <a:solidFill xmlns:a="http://schemas.openxmlformats.org/drawingml/2006/main">
+          <a:solidFill>
             <a:schemeClr val="tx1">
               <a:lumMod val="50000"/>
               <a:lumOff val="50000"/>
             </a:schemeClr>
           </a:solidFill>
-          <a:ln xmlns:a="http://schemas.openxmlformats.org/drawingml/2006/main" w="3663">
+          <a:ln w="3663">
             <a:noFill/>
             <a:prstDash val="solid"/>
           </a:ln>
         </p:spPr>
         <p:txBody>
-          <a:bodyPr xmlns:a="http://schemas.openxmlformats.org/drawingml/2006/main" anchor="ctr"/>
-          <a:lstStyle xmlns:a="http://schemas.openxmlformats.org/drawingml/2006/main"/>
-          <a:p xmlns:a="http://schemas.openxmlformats.org/drawingml/2006/main"/>
+          <a:bodyPr anchor="ctr"/>
+          <a:lstStyle/>
+          <a:p/>
         </p:txBody>
       </p:sp>
       <p:sp>
         <p:nvSpPr>
           <p:cNvPr id="24" name="Graphic 18">
-            <a:extLst xmlns:a="http://schemas.openxmlformats.org/drawingml/2006/main">
+            <a:extLst>
               <a:ext uri="{FF2B5EF4-FFF2-40B4-BE49-F238E27FC236}">
-                <a16:creationId xmlns:a16="http://schemas.microsoft.com/office/drawing/2014/main" id="{1726A8DA-9186-4C79-926E-2D1215AE14D2}"/>
+                <ns2:creationId id="{1726A8DA-9186-4C79-926E-2D1215AE14D2}"/>
               </a:ext>
             </a:extLst>
           </p:cNvPr>
           <p:cNvSpPr>
-            <a:spLocks xmlns:a="http://schemas.openxmlformats.org/drawingml/2006/main" noGrp="1"/>
+            <a:spLocks noGrp="1"/>
           </p:cNvSpPr>
           <p:nvPr/>
         </p:nvSpPr>
         <p:spPr>
-          <a:xfrm xmlns:a="http://schemas.openxmlformats.org/drawingml/2006/main">
+          <a:xfrm>
             <a:off x="36419038" y="26632748"/>
             <a:ext cx="320382" cy="297952"/>
           </a:xfrm>
-          <a:custGeom xmlns:a="http://schemas.openxmlformats.org/drawingml/2006/main">
+          <a:custGeom>
             <a:gdLst>
               <a:gd name="connsiteX0" fmla="*/ 310594 w 327663"/>
               <a:gd name="connsiteY0" fmla="*/ 219906 h 335196"/>
@@ -4063,42 +4039,42 @@
               </a:path>
             </a:pathLst>
           </a:custGeom>
-          <a:solidFill xmlns:a="http://schemas.openxmlformats.org/drawingml/2006/main">
+          <a:solidFill>
             <a:schemeClr val="tx1">
               <a:lumMod val="50000"/>
               <a:lumOff val="50000"/>
             </a:schemeClr>
           </a:solidFill>
-          <a:ln xmlns:a="http://schemas.openxmlformats.org/drawingml/2006/main" w="3663">
+          <a:ln w="3663">
             <a:noFill/>
             <a:prstDash val="solid"/>
           </a:ln>
         </p:spPr>
         <p:txBody>
-          <a:bodyPr xmlns:a="http://schemas.openxmlformats.org/drawingml/2006/main" anchor="ctr"/>
-          <a:lstStyle xmlns:a="http://schemas.openxmlformats.org/drawingml/2006/main"/>
-          <a:p xmlns:a="http://schemas.openxmlformats.org/drawingml/2006/main"/>
+          <a:bodyPr anchor="ctr"/>
+          <a:lstStyle/>
+          <a:p/>
         </p:txBody>
       </p:sp>
       <p:pic>
         <p:nvPicPr>
           <p:cNvPr id="130" name="Imagem 2"/>
           <p:cNvPicPr>
-            <a:picLocks xmlns:a="http://schemas.openxmlformats.org/drawingml/2006/main" noChangeAspect="1"/>
+            <a:picLocks noChangeAspect="1"/>
           </p:cNvPicPr>
           <p:nvPr/>
         </p:nvPicPr>
         <p:blipFill>
-          <a:blip xmlns:r="http://schemas.openxmlformats.org/officeDocument/2006/relationships" xmlns:a="http://schemas.openxmlformats.org/drawingml/2006/main" r:embed="R9350a78eff9d4db9"/>
-          <a:srcRect xmlns:a="http://schemas.openxmlformats.org/drawingml/2006/main" l="0" t="0" r="0" b="0"/>
-          <a:stretch xmlns:a="http://schemas.openxmlformats.org/drawingml/2006/main"/>
+          <a:blip r:embed="R9350a78eff9d4db9"/>
+          <a:srcRect l="0" t="0" r="0" b="0"/>
+          <a:stretch/>
         </p:blipFill>
         <p:spPr>
-          <a:xfrm xmlns:a="http://schemas.openxmlformats.org/drawingml/2006/main">
+          <a:xfrm>
             <a:off x="40237780" y="28882425"/>
             <a:ext cx="3330899" cy="3731175"/>
           </a:xfrm>
-          <a:prstGeom xmlns:a="http://schemas.openxmlformats.org/drawingml/2006/main" prst="rect">
+          <a:prstGeom prst="rect">
             <a:avLst/>
           </a:prstGeom>
         </p:spPr>
@@ -4107,21 +4083,21 @@
         <p:nvPicPr>
           <p:cNvPr id="131" name="Imagem 15"/>
           <p:cNvPicPr>
-            <a:picLocks xmlns:a="http://schemas.openxmlformats.org/drawingml/2006/main" noChangeAspect="1"/>
+            <a:picLocks noChangeAspect="1"/>
           </p:cNvPicPr>
           <p:nvPr/>
         </p:nvPicPr>
         <p:blipFill>
-          <a:blip xmlns:r="http://schemas.openxmlformats.org/officeDocument/2006/relationships" xmlns:a="http://schemas.openxmlformats.org/drawingml/2006/main" r:embed="R29b2f0bbdb0c4ce0"/>
-          <a:srcRect xmlns:a="http://schemas.openxmlformats.org/drawingml/2006/main" l="0" t="41985" r="50251" b="34197"/>
-          <a:stretch xmlns:a="http://schemas.openxmlformats.org/drawingml/2006/main"/>
+          <a:blip r:embed="R29b2f0bbdb0c4ce0"/>
+          <a:srcRect l="0" t="41985" r="50251" b="34197"/>
+          <a:stretch/>
         </p:blipFill>
         <p:spPr>
-          <a:xfrm xmlns:a="http://schemas.openxmlformats.org/drawingml/2006/main" rot="0" flipH="1" flipV="0">
+          <a:xfrm rot="0" flipH="1" flipV="0">
             <a:off x="17720847" y="1"/>
             <a:ext cx="17829495" cy="4696690"/>
           </a:xfrm>
-          <a:prstGeom xmlns:a="http://schemas.openxmlformats.org/drawingml/2006/main" prst="rect">
+          <a:prstGeom prst="rect">
             <a:avLst/>
           </a:prstGeom>
         </p:spPr>
@@ -4130,21 +4106,21 @@
         <p:nvPicPr>
           <p:cNvPr id="132" name="Imagem 25"/>
           <p:cNvPicPr>
-            <a:picLocks xmlns:a="http://schemas.openxmlformats.org/drawingml/2006/main" noChangeAspect="1"/>
+            <a:picLocks noChangeAspect="1"/>
           </p:cNvPicPr>
           <p:nvPr/>
         </p:nvPicPr>
         <p:blipFill>
-          <a:blip xmlns:r="http://schemas.openxmlformats.org/officeDocument/2006/relationships" xmlns:a="http://schemas.openxmlformats.org/drawingml/2006/main" r:embed="R29b2f0bbdb0c4ce0"/>
-          <a:srcRect xmlns:a="http://schemas.openxmlformats.org/drawingml/2006/main" l="0" t="0" r="0" b="0"/>
-          <a:stretch xmlns:a="http://schemas.openxmlformats.org/drawingml/2006/main"/>
+          <a:blip r:embed="R29b2f0bbdb0c4ce0"/>
+          <a:srcRect l="0" t="0" r="0" b="0"/>
+          <a:stretch/>
         </p:blipFill>
         <p:spPr>
-          <a:xfrm xmlns:a="http://schemas.openxmlformats.org/drawingml/2006/main" rot="0" flipH="0" flipV="0">
+          <a:xfrm rot="0" flipH="0" flipV="0">
             <a:off x="35372905" y="1"/>
             <a:ext cx="8518294" cy="4696690"/>
           </a:xfrm>
-          <a:prstGeom xmlns:a="http://schemas.openxmlformats.org/drawingml/2006/main" prst="rect">
+          <a:prstGeom prst="rect">
             <a:avLst/>
           </a:prstGeom>
         </p:spPr>
@@ -4153,21 +4129,21 @@
         <p:nvPicPr>
           <p:cNvPr id="133" name="Imagem 26"/>
           <p:cNvPicPr>
-            <a:picLocks xmlns:a="http://schemas.openxmlformats.org/drawingml/2006/main" noChangeAspect="1"/>
+            <a:picLocks noChangeAspect="1"/>
           </p:cNvPicPr>
           <p:nvPr/>
         </p:nvPicPr>
         <p:blipFill>
-          <a:blip xmlns:r="http://schemas.openxmlformats.org/officeDocument/2006/relationships" xmlns:a="http://schemas.openxmlformats.org/drawingml/2006/main" r:embed="R29b2f0bbdb0c4ce0"/>
-          <a:srcRect xmlns:a="http://schemas.openxmlformats.org/drawingml/2006/main" l="0" t="41985" r="50251" b="34197"/>
-          <a:stretch xmlns:a="http://schemas.openxmlformats.org/drawingml/2006/main"/>
+          <a:blip r:embed="R29b2f0bbdb0c4ce0"/>
+          <a:srcRect l="0" t="41985" r="50251" b="34197"/>
+          <a:stretch/>
         </p:blipFill>
         <p:spPr>
-          <a:xfrm xmlns:a="http://schemas.openxmlformats.org/drawingml/2006/main" rot="10800000" flipH="1" flipV="0">
+          <a:xfrm rot="10800000" flipH="1" flipV="0">
             <a:off x="0" y="1"/>
             <a:ext cx="17829495" cy="4696690"/>
           </a:xfrm>
-          <a:prstGeom xmlns:a="http://schemas.openxmlformats.org/drawingml/2006/main" prst="rect">
+          <a:prstGeom prst="rect">
             <a:avLst/>
           </a:prstGeom>
         </p:spPr>
@@ -4176,22 +4152,22 @@
         <p:nvPicPr>
           <p:cNvPr id="134" name="Imagem 8"/>
           <p:cNvPicPr>
-            <a:picLocks xmlns:a="http://schemas.openxmlformats.org/drawingml/2006/main" noChangeAspect="1"/>
+            <a:picLocks noChangeAspect="1"/>
           </p:cNvPicPr>
           <p:nvPr/>
         </p:nvPicPr>
         <p:blipFill>
-          <a:blip xmlns:r="http://schemas.openxmlformats.org/officeDocument/2006/relationships" xmlns:a="http://schemas.openxmlformats.org/drawingml/2006/main" r:embed="Rcb7cd4855f5c48de"/>
-          <a:stretch xmlns:a="http://schemas.openxmlformats.org/drawingml/2006/main">
+          <a:blip r:embed="Rcb7cd4855f5c48de"/>
+          <a:stretch>
             <a:fillRect l="0" t="0" r="0" b="0"/>
           </a:stretch>
         </p:blipFill>
         <p:spPr>
-          <a:xfrm xmlns:a="http://schemas.openxmlformats.org/drawingml/2006/main" rot="0" flipH="0" flipV="0">
+          <a:xfrm rot="0" flipH="0" flipV="0">
             <a:off x="1104807" y="998069"/>
             <a:ext cx="12847803" cy="2658990"/>
           </a:xfrm>
-          <a:prstGeom xmlns:a="http://schemas.openxmlformats.org/drawingml/2006/main" prst="rect">
+          <a:prstGeom prst="rect">
             <a:avLst/>
           </a:prstGeom>
         </p:spPr>
@@ -4200,23 +4176,23 @@
         <p:nvPicPr>
           <p:cNvPr id="135" name="Imagem 14"/>
           <p:cNvPicPr>
-            <a:picLocks xmlns:a="http://schemas.openxmlformats.org/drawingml/2006/main" noChangeAspect="1"/>
+            <a:picLocks noChangeAspect="1"/>
           </p:cNvPicPr>
           <p:nvPr/>
         </p:nvPicPr>
         <p:blipFill>
-          <a:blip xmlns:r="http://schemas.openxmlformats.org/officeDocument/2006/relationships" xmlns:a="http://schemas.openxmlformats.org/drawingml/2006/main" r:embed="R6d7bf24421794ec6"/>
-          <a:srcRect xmlns:a="http://schemas.openxmlformats.org/drawingml/2006/main" l="0" t="21190" r="0" b="0"/>
-          <a:stretch xmlns:a="http://schemas.openxmlformats.org/drawingml/2006/main">
+          <a:blip r:embed="R6d7bf24421794ec6"/>
+          <a:srcRect l="0" t="21190" r="0" b="0"/>
+          <a:stretch>
             <a:fillRect l="0" t="0" r="0" b="0"/>
           </a:stretch>
         </p:blipFill>
         <p:spPr>
-          <a:xfrm xmlns:a="http://schemas.openxmlformats.org/drawingml/2006/main" rot="0" flipH="0" flipV="0">
+          <a:xfrm rot="0" flipH="0" flipV="0">
             <a:off x="16751300" y="1901593"/>
             <a:ext cx="23686714" cy="1755466"/>
           </a:xfrm>
-          <a:prstGeom xmlns:a="http://schemas.openxmlformats.org/drawingml/2006/main" prst="rect">
+          <a:prstGeom prst="rect">
             <a:avLst/>
           </a:prstGeom>
         </p:spPr>
@@ -4225,21 +4201,21 @@
         <p:nvPicPr>
           <p:cNvPr id="136" name="Imagem 30"/>
           <p:cNvPicPr>
-            <a:picLocks xmlns:a="http://schemas.openxmlformats.org/drawingml/2006/main" noChangeAspect="1"/>
+            <a:picLocks noChangeAspect="1"/>
           </p:cNvPicPr>
           <p:nvPr/>
         </p:nvPicPr>
         <p:blipFill>
-          <a:blip xmlns:r="http://schemas.openxmlformats.org/officeDocument/2006/relationships" xmlns:a="http://schemas.openxmlformats.org/drawingml/2006/main" r:embed="R29b2f0bbdb0c4ce0"/>
-          <a:srcRect xmlns:a="http://schemas.openxmlformats.org/drawingml/2006/main" l="0" t="41985" r="50251" b="34197"/>
-          <a:stretch xmlns:a="http://schemas.openxmlformats.org/drawingml/2006/main"/>
+          <a:blip r:embed="R29b2f0bbdb0c4ce0"/>
+          <a:srcRect l="0" t="41985" r="50251" b="34197"/>
+          <a:stretch/>
         </p:blipFill>
         <p:spPr>
-          <a:xfrm xmlns:a="http://schemas.openxmlformats.org/drawingml/2006/main" rot="0" flipH="1" flipV="0">
+          <a:xfrm rot="0" flipH="1" flipV="0">
             <a:off x="17873247" y="152401"/>
             <a:ext cx="17829495" cy="4696690"/>
           </a:xfrm>
-          <a:prstGeom xmlns:a="http://schemas.openxmlformats.org/drawingml/2006/main" prst="rect">
+          <a:prstGeom prst="rect">
             <a:avLst/>
           </a:prstGeom>
         </p:spPr>
@@ -4248,21 +4224,21 @@
         <p:nvPicPr>
           <p:cNvPr id="137" name="Imagem 31"/>
           <p:cNvPicPr>
-            <a:picLocks xmlns:a="http://schemas.openxmlformats.org/drawingml/2006/main" noChangeAspect="1"/>
+            <a:picLocks noChangeAspect="1"/>
           </p:cNvPicPr>
           <p:nvPr/>
         </p:nvPicPr>
         <p:blipFill>
-          <a:blip xmlns:r="http://schemas.openxmlformats.org/officeDocument/2006/relationships" xmlns:a="http://schemas.openxmlformats.org/drawingml/2006/main" r:embed="R29b2f0bbdb0c4ce0"/>
-          <a:srcRect xmlns:a="http://schemas.openxmlformats.org/drawingml/2006/main" l="0" t="0" r="0" b="0"/>
-          <a:stretch xmlns:a="http://schemas.openxmlformats.org/drawingml/2006/main"/>
+          <a:blip r:embed="R29b2f0bbdb0c4ce0"/>
+          <a:srcRect l="0" t="0" r="0" b="0"/>
+          <a:stretch/>
         </p:blipFill>
         <p:spPr>
-          <a:xfrm xmlns:a="http://schemas.openxmlformats.org/drawingml/2006/main" rot="0" flipH="0" flipV="0">
+          <a:xfrm rot="0" flipH="0" flipV="0">
             <a:off x="35525305" y="152401"/>
             <a:ext cx="8518294" cy="4696690"/>
           </a:xfrm>
-          <a:prstGeom xmlns:a="http://schemas.openxmlformats.org/drawingml/2006/main" prst="rect">
+          <a:prstGeom prst="rect">
             <a:avLst/>
           </a:prstGeom>
         </p:spPr>
@@ -4271,21 +4247,21 @@
         <p:nvPicPr>
           <p:cNvPr id="138" name="Imagem 32"/>
           <p:cNvPicPr>
-            <a:picLocks xmlns:a="http://schemas.openxmlformats.org/drawingml/2006/main" noChangeAspect="1"/>
+            <a:picLocks noChangeAspect="1"/>
           </p:cNvPicPr>
           <p:nvPr/>
         </p:nvPicPr>
         <p:blipFill>
-          <a:blip xmlns:r="http://schemas.openxmlformats.org/officeDocument/2006/relationships" xmlns:a="http://schemas.openxmlformats.org/drawingml/2006/main" r:embed="R29b2f0bbdb0c4ce0"/>
-          <a:srcRect xmlns:a="http://schemas.openxmlformats.org/drawingml/2006/main" l="0" t="41985" r="50251" b="34197"/>
-          <a:stretch xmlns:a="http://schemas.openxmlformats.org/drawingml/2006/main"/>
+          <a:blip r:embed="R29b2f0bbdb0c4ce0"/>
+          <a:srcRect l="0" t="41985" r="50251" b="34197"/>
+          <a:stretch/>
         </p:blipFill>
         <p:spPr>
-          <a:xfrm xmlns:a="http://schemas.openxmlformats.org/drawingml/2006/main" rot="10800000" flipH="1" flipV="0">
+          <a:xfrm rot="10800000" flipH="1" flipV="0">
             <a:off x="152400" y="152401"/>
             <a:ext cx="17829495" cy="4696690"/>
           </a:xfrm>
-          <a:prstGeom xmlns:a="http://schemas.openxmlformats.org/drawingml/2006/main" prst="rect">
+          <a:prstGeom prst="rect">
             <a:avLst/>
           </a:prstGeom>
         </p:spPr>
@@ -4294,22 +4270,22 @@
         <p:nvPicPr>
           <p:cNvPr id="139" name="Imagem 28"/>
           <p:cNvPicPr>
-            <a:picLocks xmlns:a="http://schemas.openxmlformats.org/drawingml/2006/main" noChangeAspect="1"/>
+            <a:picLocks noChangeAspect="1"/>
           </p:cNvPicPr>
           <p:nvPr/>
         </p:nvPicPr>
         <p:blipFill>
-          <a:blip xmlns:r="http://schemas.openxmlformats.org/officeDocument/2006/relationships" xmlns:a="http://schemas.openxmlformats.org/drawingml/2006/main" r:embed="Rcb7cd4855f5c48de"/>
-          <a:stretch xmlns:a="http://schemas.openxmlformats.org/drawingml/2006/main">
+          <a:blip r:embed="Rcb7cd4855f5c48de"/>
+          <a:stretch>
             <a:fillRect l="0" t="0" r="0" b="0"/>
           </a:stretch>
         </p:blipFill>
         <p:spPr>
-          <a:xfrm xmlns:a="http://schemas.openxmlformats.org/drawingml/2006/main" rot="0" flipH="0" flipV="0">
+          <a:xfrm rot="0" flipH="0" flipV="0">
             <a:off x="1257207" y="1150469"/>
             <a:ext cx="12847803" cy="2658990"/>
           </a:xfrm>
-          <a:prstGeom xmlns:a="http://schemas.openxmlformats.org/drawingml/2006/main" prst="rect">
+          <a:prstGeom prst="rect">
             <a:avLst/>
           </a:prstGeom>
         </p:spPr>
@@ -4318,22 +4294,22 @@
         <p:nvPicPr>
           <p:cNvPr id="140" name="Imagem 34"/>
           <p:cNvPicPr>
-            <a:picLocks xmlns:a="http://schemas.openxmlformats.org/drawingml/2006/main" noChangeAspect="1"/>
+            <a:picLocks noChangeAspect="1"/>
           </p:cNvPicPr>
           <p:nvPr/>
         </p:nvPicPr>
         <p:blipFill>
-          <a:blip xmlns:r="http://schemas.openxmlformats.org/officeDocument/2006/relationships" xmlns:a="http://schemas.openxmlformats.org/drawingml/2006/main" r:embed="Rda4311979b7646cf"/>
-          <a:stretch xmlns:a="http://schemas.openxmlformats.org/drawingml/2006/main">
+          <a:blip r:embed="Rda4311979b7646cf"/>
+          <a:stretch>
             <a:fillRect l="0" t="0" r="0" b="0"/>
           </a:stretch>
         </p:blipFill>
         <p:spPr>
-          <a:xfrm xmlns:a="http://schemas.openxmlformats.org/drawingml/2006/main">
+          <a:xfrm>
             <a:off x="16751301" y="1892510"/>
             <a:ext cx="24396700" cy="1536490"/>
           </a:xfrm>
-          <a:prstGeom xmlns:a="http://schemas.openxmlformats.org/drawingml/2006/main" prst="rect">
+          <a:prstGeom prst="rect">
             <a:avLst/>
           </a:prstGeom>
         </p:spPr>
@@ -4341,43 +4317,35 @@
       <p:sp>
         <p:nvSpPr>
           <p:cNvPr id="39" name="poster-title">
-            <a:extLst xmlns:a="http://schemas.openxmlformats.org/drawingml/2006/main">
+            <a:extLst>
               <a:ext uri="{FF2B5EF4-FFF2-40B4-BE49-F238E27FC236}">
-                <a16:creationId xmlns:a16="http://schemas.microsoft.com/office/drawing/2014/main" id="{CFE118DB-12E8-401C-88FB-C56E4AA5200D}"/>
+                <ns2:creationId id="{CFE118DB-12E8-401C-88FB-C56E4AA5200D}"/>
               </a:ext>
             </a:extLst>
           </p:cNvPr>
           <p:cNvSpPr>
-            <a:spLocks xmlns:a="http://schemas.openxmlformats.org/drawingml/2006/main" noGrp="1"/>
+            <a:spLocks noGrp="1"/>
           </p:cNvSpPr>
           <p:nvPr/>
         </p:nvSpPr>
         <p:spPr>
-          <a:xfrm xmlns:a="http://schemas.openxmlformats.org/drawingml/2006/main">
+          <a:xfrm>
             <a:off x="552450" y="5619750"/>
             <a:ext cx="7067550" cy="1428750"/>
           </a:xfrm>
-          <a:prstGeom xmlns:a="http://schemas.openxmlformats.org/drawingml/2006/main" prst="rect">
-            <a:avLst/>
-          </a:prstGeom>
-          <a:noFill xmlns:a="http://schemas.openxmlformats.org/drawingml/2006/main"/>
-          <a:ln xmlns:a="http://schemas.openxmlformats.org/drawingml/2006/main" w="0">
+          <a:prstGeom prst="rect">
+            <a:avLst/>
+          </a:prstGeom>
+          <a:noFill/>
+          <a:ln w="0">
             <a:noFill/>
             <a:prstDash val="solid"/>
           </a:ln>
         </p:spPr>
         <p:txBody>
-          <a:bodyPr xmlns:a="http://schemas.openxmlformats.org/drawingml/2006/main"/>
-          <a:lstStyle xmlns:a="http://schemas.openxmlformats.org/drawingml/2006/main"/>
-          <a:p xmlns:a="http://schemas.openxmlformats.org/drawingml/2006/main">
-            <a:pPr algn="l">
-              <a:buNone/>
-              <a:defRPr sz="2700" b="1" i="1">
-                <a:solidFill>
-                  <a:srgbClr val="111111"/>
-                </a:solidFill>
-              </a:defRPr>
-            </a:pPr>
+          <a:bodyPr/>
+          <a:lstStyle/>
+          <a:p>
             <a:r>
               <a:rPr sz="2700" b="1" i="1">
                 <a:solidFill>
@@ -4389,16 +4357,9 @@
               </a:rPr>
               <a:t>Evolução da asma no Brasil, 2013-2019</a:t>
             </a:r>
-          </a:p>
-          <a:p xmlns:a="http://schemas.openxmlformats.org/drawingml/2006/main">
-            <a:pPr algn="l">
-              <a:buNone/>
-              <a:defRPr sz="2700" b="1" i="1">
-                <a:solidFill>
-                  <a:srgbClr val="111111"/>
-                </a:solidFill>
-              </a:defRPr>
-            </a:pPr>
+            <a:endParaRPr/>
+          </a:p>
+          <a:p>
             <a:r>
               <a:rPr sz="2700" b="1" i="1">
                 <a:solidFill>
@@ -4408,43 +4369,44 @@
                 <a:ea typeface="Arial"/>
                 <a:cs typeface="Arial"/>
               </a:rPr>
-              <a:t>Estimativas reprodutíveis com microdados da PNS</a:t>
-            </a:r>
+              <a:t>PNS, plano amostral e indicadores reprodutíveis</a:t>
+            </a:r>
+            <a:endParaRPr/>
           </a:p>
         </p:txBody>
       </p:sp>
       <p:sp>
         <p:nvSpPr>
           <p:cNvPr id="40" name="poster-presenter">
-            <a:extLst xmlns:a="http://schemas.openxmlformats.org/drawingml/2006/main">
+            <a:extLst>
               <a:ext uri="{FF2B5EF4-FFF2-40B4-BE49-F238E27FC236}">
-                <a16:creationId xmlns:a16="http://schemas.microsoft.com/office/drawing/2014/main" id="{B04A30FA-0FEC-4851-8992-90FBE5A86597}"/>
+                <ns2:creationId id="{B04A30FA-0FEC-4851-8992-90FBE5A86597}"/>
               </a:ext>
             </a:extLst>
           </p:cNvPr>
           <p:cNvSpPr>
-            <a:spLocks xmlns:a="http://schemas.openxmlformats.org/drawingml/2006/main" noGrp="1"/>
+            <a:spLocks noGrp="1"/>
           </p:cNvSpPr>
           <p:nvPr/>
         </p:nvSpPr>
         <p:spPr>
-          <a:xfrm xmlns:a="http://schemas.openxmlformats.org/drawingml/2006/main">
+          <a:xfrm>
             <a:off x="942975" y="7334250"/>
             <a:ext cx="7048500" cy="552450"/>
           </a:xfrm>
-          <a:prstGeom xmlns:a="http://schemas.openxmlformats.org/drawingml/2006/main" prst="rect">
-            <a:avLst/>
-          </a:prstGeom>
-          <a:noFill xmlns:a="http://schemas.openxmlformats.org/drawingml/2006/main"/>
-          <a:ln xmlns:a="http://schemas.openxmlformats.org/drawingml/2006/main" w="0">
+          <a:prstGeom prst="rect">
+            <a:avLst/>
+          </a:prstGeom>
+          <a:noFill/>
+          <a:ln w="0">
             <a:noFill/>
             <a:prstDash val="solid"/>
           </a:ln>
         </p:spPr>
         <p:txBody>
-          <a:bodyPr xmlns:a="http://schemas.openxmlformats.org/drawingml/2006/main"/>
-          <a:lstStyle xmlns:a="http://schemas.openxmlformats.org/drawingml/2006/main"/>
-          <a:p xmlns:a="http://schemas.openxmlformats.org/drawingml/2006/main">
+          <a:bodyPr/>
+          <a:lstStyle/>
+          <a:p>
             <a:pPr algn="l">
               <a:buNone/>
               <a:defRPr sz="1875" b="0" i="0">
@@ -4470,35 +4432,35 @@
       <p:sp>
         <p:nvSpPr>
           <p:cNvPr id="43" name="poster-authors">
-            <a:extLst xmlns:a="http://schemas.openxmlformats.org/drawingml/2006/main">
+            <a:extLst>
               <a:ext uri="{FF2B5EF4-FFF2-40B4-BE49-F238E27FC236}">
-                <a16:creationId xmlns:a16="http://schemas.microsoft.com/office/drawing/2014/main" id="{6F605D87-2F06-4045-9747-69A26DFAC9DD}"/>
+                <ns2:creationId id="{6F605D87-2F06-4045-9747-69A26DFAC9DD}"/>
               </a:ext>
             </a:extLst>
           </p:cNvPr>
           <p:cNvSpPr>
-            <a:spLocks xmlns:a="http://schemas.openxmlformats.org/drawingml/2006/main" noGrp="1"/>
+            <a:spLocks noGrp="1"/>
           </p:cNvSpPr>
           <p:nvPr/>
         </p:nvSpPr>
         <p:spPr>
-          <a:xfrm xmlns:a="http://schemas.openxmlformats.org/drawingml/2006/main">
+          <a:xfrm>
             <a:off x="36852225" y="26450925"/>
             <a:ext cx="6667500" cy="2000250"/>
           </a:xfrm>
-          <a:prstGeom xmlns:a="http://schemas.openxmlformats.org/drawingml/2006/main" prst="rect">
-            <a:avLst/>
-          </a:prstGeom>
-          <a:noFill xmlns:a="http://schemas.openxmlformats.org/drawingml/2006/main"/>
-          <a:ln xmlns:a="http://schemas.openxmlformats.org/drawingml/2006/main" w="0">
+          <a:prstGeom prst="rect">
+            <a:avLst/>
+          </a:prstGeom>
+          <a:noFill/>
+          <a:ln w="0">
             <a:noFill/>
             <a:prstDash val="solid"/>
           </a:ln>
         </p:spPr>
         <p:txBody>
-          <a:bodyPr xmlns:a="http://schemas.openxmlformats.org/drawingml/2006/main"/>
-          <a:lstStyle xmlns:a="http://schemas.openxmlformats.org/drawingml/2006/main"/>
-          <a:p xmlns:a="http://schemas.openxmlformats.org/drawingml/2006/main">
+          <a:bodyPr/>
+          <a:lstStyle/>
+          <a:p>
             <a:pPr algn="l">
               <a:buNone/>
               <a:defRPr sz="2100" b="0" i="0">
@@ -4519,7 +4481,7 @@
               <a:t>I. Dube; M. E. L. Silva</a:t>
             </a:r>
           </a:p>
-          <a:p xmlns:a="http://schemas.openxmlformats.org/drawingml/2006/main">
+          <a:p>
             <a:pPr algn="l">
               <a:buNone/>
               <a:defRPr sz="2100" b="0" i="0">
@@ -4545,29 +4507,29 @@
       <p:sp>
         <p:nvSpPr>
           <p:cNvPr id="44" name="github-qr-placeholder">
-            <a:extLst xmlns:a="http://schemas.openxmlformats.org/drawingml/2006/main">
+            <a:extLst>
               <a:ext uri="{FF2B5EF4-FFF2-40B4-BE49-F238E27FC236}">
-                <a16:creationId xmlns:a16="http://schemas.microsoft.com/office/drawing/2014/main" id="{D769B753-4009-4F89-910B-19A03CFC4E59}"/>
+                <ns2:creationId id="{D769B753-4009-4F89-910B-19A03CFC4E59}"/>
               </a:ext>
             </a:extLst>
           </p:cNvPr>
           <p:cNvSpPr>
-            <a:spLocks xmlns:a="http://schemas.openxmlformats.org/drawingml/2006/main" noGrp="1"/>
+            <a:spLocks noGrp="1"/>
           </p:cNvSpPr>
           <p:nvPr/>
         </p:nvSpPr>
         <p:spPr>
-          <a:xfrm xmlns:a="http://schemas.openxmlformats.org/drawingml/2006/main">
+          <a:xfrm>
             <a:off x="12049125" y="24574500"/>
             <a:ext cx="4572000" cy="4572000"/>
           </a:xfrm>
-          <a:prstGeom xmlns:a="http://schemas.openxmlformats.org/drawingml/2006/main" prst="rect">
-            <a:avLst/>
-          </a:prstGeom>
-          <a:solidFill xmlns:a="http://schemas.openxmlformats.org/drawingml/2006/main">
+          <a:prstGeom prst="rect">
+            <a:avLst/>
+          </a:prstGeom>
+          <a:solidFill>
             <a:srgbClr val="FFFFFF"/>
           </a:solidFill>
-          <a:ln xmlns:a="http://schemas.openxmlformats.org/drawingml/2006/main" w="57150">
+          <a:ln w="57150">
             <a:solidFill>
               <a:srgbClr val="B9D9EB"/>
             </a:solidFill>
@@ -4578,43 +4540,35 @@
       <p:sp>
         <p:nvSpPr>
           <p:cNvPr id="45" name="github-qr-placeholder-label">
-            <a:extLst xmlns:a="http://schemas.openxmlformats.org/drawingml/2006/main">
+            <a:extLst>
               <a:ext uri="{FF2B5EF4-FFF2-40B4-BE49-F238E27FC236}">
-                <a16:creationId xmlns:a16="http://schemas.microsoft.com/office/drawing/2014/main" id="{B202DFF5-D80F-462E-AF65-E5016D8ACD64}"/>
+                <ns2:creationId id="{B202DFF5-D80F-462E-AF65-E5016D8ACD64}"/>
               </a:ext>
             </a:extLst>
           </p:cNvPr>
           <p:cNvSpPr>
-            <a:spLocks xmlns:a="http://schemas.openxmlformats.org/drawingml/2006/main" noGrp="1"/>
+            <a:spLocks noGrp="1"/>
           </p:cNvSpPr>
           <p:nvPr/>
         </p:nvSpPr>
         <p:spPr>
-          <a:xfrm xmlns:a="http://schemas.openxmlformats.org/drawingml/2006/main">
+          <a:xfrm>
             <a:off x="12334875" y="26098500"/>
             <a:ext cx="4000500" cy="1143000"/>
           </a:xfrm>
-          <a:prstGeom xmlns:a="http://schemas.openxmlformats.org/drawingml/2006/main" prst="rect">
-            <a:avLst/>
-          </a:prstGeom>
-          <a:noFill xmlns:a="http://schemas.openxmlformats.org/drawingml/2006/main"/>
-          <a:ln xmlns:a="http://schemas.openxmlformats.org/drawingml/2006/main" w="0">
+          <a:prstGeom prst="rect">
+            <a:avLst/>
+          </a:prstGeom>
+          <a:noFill/>
+          <a:ln w="0">
             <a:noFill/>
             <a:prstDash val="solid"/>
           </a:ln>
         </p:spPr>
         <p:txBody>
-          <a:bodyPr xmlns:a="http://schemas.openxmlformats.org/drawingml/2006/main"/>
-          <a:lstStyle xmlns:a="http://schemas.openxmlformats.org/drawingml/2006/main"/>
-          <a:p xmlns:a="http://schemas.openxmlformats.org/drawingml/2006/main">
-            <a:pPr algn="ctr">
-              <a:buNone/>
-              <a:defRPr sz="2325" b="1" i="0">
-                <a:solidFill>
-                  <a:srgbClr val="20425A"/>
-                </a:solidFill>
-              </a:defRPr>
-            </a:pPr>
+          <a:bodyPr/>
+          <a:lstStyle/>
+          <a:p>
             <a:r>
               <a:rPr sz="2325" b="1" i="0">
                 <a:solidFill>
@@ -4624,8 +4578,23 @@
                 <a:ea typeface="Arial"/>
                 <a:cs typeface="Arial"/>
               </a:rPr>
-              <a:t>Insira QR code para o GitHub</a:t>
-            </a:r>
+              <a:t>QR Code</a:t>
+            </a:r>
+            <a:endParaRPr/>
+          </a:p>
+          <a:p>
+            <a:r>
+              <a:rPr sz="2325" b="1" i="0">
+                <a:solidFill>
+                  <a:srgbClr val="20425A"/>
+                </a:solidFill>
+                <a:latin typeface="Arial"/>
+                <a:ea typeface="Arial"/>
+                <a:cs typeface="Arial"/>
+              </a:rPr>
+              <a:t>relatório metodológico</a:t>
+            </a:r>
+            <a:endParaRPr/>
           </a:p>
         </p:txBody>
       </p:sp>
@@ -4633,20 +4602,20 @@
         <p:nvPicPr>
           <p:cNvPr id="146" name=""/>
           <p:cNvPicPr>
-            <a:picLocks xmlns:a="http://schemas.openxmlformats.org/drawingml/2006/main" noChangeAspect="1"/>
+            <a:picLocks noChangeAspect="1"/>
           </p:cNvPicPr>
           <p:nvPr/>
         </p:nvPicPr>
         <p:blipFill>
-          <a:blip xmlns:r="http://schemas.openxmlformats.org/officeDocument/2006/relationships" xmlns:a="http://schemas.openxmlformats.org/drawingml/2006/main" r:embed="Ra717ab67737d4009"/>
-          <a:stretch xmlns:a="http://schemas.openxmlformats.org/drawingml/2006/main"/>
+          <a:blip r:embed="Ra717ab67737d4009"/>
+          <a:stretch/>
         </p:blipFill>
         <p:spPr>
-          <a:xfrm xmlns:a="http://schemas.openxmlformats.org/drawingml/2006/main">
+          <a:xfrm>
             <a:off x="9906000" y="13716000"/>
             <a:ext cx="10477500" cy="8096250"/>
           </a:xfrm>
-          <a:prstGeom xmlns:a="http://schemas.openxmlformats.org/drawingml/2006/main" prst="rect">
+          <a:prstGeom prst="rect">
             <a:avLst/>
           </a:prstGeom>
         </p:spPr>
@@ -4655,20 +4624,20 @@
         <p:nvPicPr>
           <p:cNvPr id="147" name=""/>
           <p:cNvPicPr>
-            <a:picLocks xmlns:a="http://schemas.openxmlformats.org/drawingml/2006/main" noChangeAspect="1"/>
+            <a:picLocks noChangeAspect="1"/>
           </p:cNvPicPr>
           <p:nvPr/>
         </p:nvPicPr>
         <p:blipFill>
-          <a:blip xmlns:r="http://schemas.openxmlformats.org/officeDocument/2006/relationships" xmlns:a="http://schemas.openxmlformats.org/drawingml/2006/main" r:embed="Ra4cf05863a65443f"/>
-          <a:stretch xmlns:a="http://schemas.openxmlformats.org/drawingml/2006/main"/>
+          <a:blip r:embed="Ra4cf05863a65443f"/>
+          <a:stretch/>
         </p:blipFill>
         <p:spPr>
-          <a:xfrm xmlns:a="http://schemas.openxmlformats.org/drawingml/2006/main">
+          <a:xfrm>
             <a:off x="23050500" y="13716000"/>
             <a:ext cx="10477500" cy="8096250"/>
           </a:xfrm>
-          <a:prstGeom xmlns:a="http://schemas.openxmlformats.org/drawingml/2006/main" prst="rect">
+          <a:prstGeom prst="rect">
             <a:avLst/>
           </a:prstGeom>
         </p:spPr>
@@ -4677,20 +4646,20 @@
         <p:nvPicPr>
           <p:cNvPr id="148" name=""/>
           <p:cNvPicPr>
-            <a:picLocks xmlns:a="http://schemas.openxmlformats.org/drawingml/2006/main" noChangeAspect="1"/>
+            <a:picLocks noChangeAspect="1"/>
           </p:cNvPicPr>
           <p:nvPr/>
         </p:nvPicPr>
         <p:blipFill>
-          <a:blip xmlns:r="http://schemas.openxmlformats.org/officeDocument/2006/relationships" xmlns:a="http://schemas.openxmlformats.org/drawingml/2006/main" r:embed="R33a642fdcdbc4d9e"/>
-          <a:stretch xmlns:a="http://schemas.openxmlformats.org/drawingml/2006/main"/>
+          <a:blip r:embed="R33a642fdcdbc4d9e"/>
+          <a:stretch/>
         </p:blipFill>
         <p:spPr>
-          <a:xfrm xmlns:a="http://schemas.openxmlformats.org/drawingml/2006/main">
+          <a:xfrm>
             <a:off x="9906000" y="13716000"/>
             <a:ext cx="10477500" cy="8096250"/>
           </a:xfrm>
-          <a:prstGeom xmlns:a="http://schemas.openxmlformats.org/drawingml/2006/main" prst="rect">
+          <a:prstGeom prst="rect">
             <a:avLst/>
           </a:prstGeom>
         </p:spPr>
@@ -4699,20 +4668,20 @@
         <p:nvPicPr>
           <p:cNvPr id="149" name=""/>
           <p:cNvPicPr>
-            <a:picLocks xmlns:a="http://schemas.openxmlformats.org/drawingml/2006/main" noChangeAspect="1"/>
+            <a:picLocks noChangeAspect="1"/>
           </p:cNvPicPr>
           <p:nvPr/>
         </p:nvPicPr>
         <p:blipFill>
-          <a:blip xmlns:r="http://schemas.openxmlformats.org/officeDocument/2006/relationships" xmlns:a="http://schemas.openxmlformats.org/drawingml/2006/main" r:embed="R93e2fce0c76e4357"/>
-          <a:stretch xmlns:a="http://schemas.openxmlformats.org/drawingml/2006/main"/>
+          <a:blip r:embed="R93e2fce0c76e4357"/>
+          <a:stretch/>
         </p:blipFill>
         <p:spPr>
-          <a:xfrm xmlns:a="http://schemas.openxmlformats.org/drawingml/2006/main">
+          <a:xfrm>
             <a:off x="23050500" y="13716000"/>
             <a:ext cx="10477500" cy="8096250"/>
           </a:xfrm>
-          <a:prstGeom xmlns:a="http://schemas.openxmlformats.org/drawingml/2006/main" prst="rect">
+          <a:prstGeom prst="rect">
             <a:avLst/>
           </a:prstGeom>
         </p:spPr>
@@ -4720,44 +4689,39 @@
       <p:sp>
         <p:nvSpPr>
           <p:cNvPr id="115" name="morrison-method-detail">
-            <a:extLst xmlns:a="http://schemas.openxmlformats.org/drawingml/2006/main">
+            <a:extLst>
               <a:ext uri="{FF2B5EF4-FFF2-40B4-BE49-F238E27FC236}">
-                <a16:creationId xmlns:a16="http://schemas.microsoft.com/office/drawing/2014/main" id="{D6FDB93F-4D1B-4B8D-AFAE-346D9F0697FB}"/>
+                <ns2:creationId id="{D6FDB93F-4D1B-4B8D-AFAE-346D9F0697FB}"/>
               </a:ext>
             </a:extLst>
           </p:cNvPr>
           <p:cNvSpPr>
-            <a:spLocks xmlns:a="http://schemas.openxmlformats.org/drawingml/2006/main" noGrp="1"/>
+            <a:spLocks noGrp="1"/>
           </p:cNvSpPr>
           <p:nvPr/>
         </p:nvSpPr>
         <p:spPr>
-          <a:xfrm xmlns:a="http://schemas.openxmlformats.org/drawingml/2006/main">
+          <a:xfrm>
             <a:off x="495300" y="8667750"/>
-            <a:ext cx="7239000" cy="15049500"/>
-          </a:xfrm>
-          <a:prstGeom xmlns:a="http://schemas.openxmlformats.org/drawingml/2006/main" prst="rect">
-            <a:avLst/>
-          </a:prstGeom>
-          <a:noFill xmlns:a="http://schemas.openxmlformats.org/drawingml/2006/main"/>
-          <a:ln xmlns:a="http://schemas.openxmlformats.org/drawingml/2006/main" w="0">
+            <a:ext cx="7239000" cy="5600000"/>
+            <a:off y="8667750"/>
+            <a:ext cy="6150000"/>
+          </a:xfrm>
+          <a:prstGeom prst="rect">
+            <a:avLst/>
+          </a:prstGeom>
+          <a:noFill/>
+          <a:ln w="0">
             <a:noFill/>
             <a:prstDash val="solid"/>
           </a:ln>
         </p:spPr>
         <p:txBody>
-          <a:bodyPr xmlns:a="http://schemas.openxmlformats.org/drawingml/2006/main"/>
-          <a:lstStyle xmlns:a="http://schemas.openxmlformats.org/drawingml/2006/main"/>
-          <a:p xmlns:a="http://schemas.openxmlformats.org/drawingml/2006/main">
-            <a:pPr algn="l">
-              <a:defRPr sz="1875" b="0" i="0">
-                <a:solidFill>
-                  <a:srgbClr val="111111"/>
-                </a:solidFill>
-              </a:defRPr>
-            </a:pPr>
-            <a:r>
-              <a:rPr sz="1875" b="0" i="0">
+          <a:bodyPr/>
+          <a:lstStyle/>
+          <a:p>
+            <a:r>
+              <a:rPr sz="660" b="1" i="0">
                 <a:solidFill>
                   <a:srgbClr val="111111"/>
                 </a:solidFill>
@@ -4765,19 +4729,13 @@
                 <a:ea typeface="Arial"/>
                 <a:cs typeface="Arial"/>
               </a:rPr>
-              <a:t>INTRO:</a:t>
-            </a:r>
-          </a:p>
-          <a:p xmlns:a="http://schemas.openxmlformats.org/drawingml/2006/main">
-            <a:pPr algn="l">
-              <a:defRPr sz="1875" b="0" i="0">
-                <a:solidFill>
-                  <a:srgbClr val="111111"/>
-                </a:solidFill>
-              </a:defRPr>
-            </a:pPr>
-            <a:r>
-              <a:rPr sz="1875" b="0" i="0">
+              <a:t>INTRO</a:t>
+            </a:r>
+            <a:endParaRPr/>
+          </a:p>
+          <a:p>
+            <a:r>
+              <a:rPr sz="660" b="0" i="0">
                 <a:solidFill>
                   <a:srgbClr val="111111"/>
                 </a:solidFill>
@@ -4785,24 +4743,41 @@
                 <a:ea typeface="Arial"/>
                 <a:cs typeface="Arial"/>
               </a:rPr>
-              <a:t>A asma combina carga crônica, crises recorrentes e necessidade de manejo contínuo.</a:t>
-            </a:r>
-          </a:p>
-          <a:p xmlns:a="http://schemas.openxmlformats.org/drawingml/2006/main">
-            <a:r>
-              <a:t/>
-            </a:r>
-          </a:p>
-          <a:p xmlns:a="http://schemas.openxmlformats.org/drawingml/2006/main">
-            <a:pPr algn="l">
-              <a:defRPr sz="1875" b="0" i="0">
+              <a:t>• A asma combina carga crônica, crises e manejo contínuo.</a:t>
+            </a:r>
+            <a:endParaRPr/>
+          </a:p>
+          <a:p>
+            <a:r>
+              <a:rPr sz="660" b="0" i="0">
                 <a:solidFill>
                   <a:srgbClr val="111111"/>
                 </a:solidFill>
-              </a:defRPr>
-            </a:pPr>
-            <a:r>
-              <a:rPr sz="1875" b="0" i="0">
+                <a:latin typeface="Arial"/>
+                <a:ea typeface="Arial"/>
+                <a:cs typeface="Arial"/>
+              </a:rPr>
+              <a:t>• Indicadores da PNS orientam vigilância e políticas públicas.</a:t>
+            </a:r>
+            <a:endParaRPr/>
+          </a:p>
+          <a:p>
+            <a:r>
+              <a:rPr sz="660" b="0" i="0">
+                <a:solidFill>
+                  <a:srgbClr val="111111"/>
+                </a:solidFill>
+                <a:latin typeface="Arial"/>
+                <a:ea typeface="Arial"/>
+                <a:cs typeface="Arial"/>
+              </a:rPr>
+              <a:t/>
+            </a:r>
+            <a:endParaRPr/>
+          </a:p>
+          <a:p>
+            <a:r>
+              <a:rPr sz="660" b="0" i="0">
                 <a:solidFill>
                   <a:srgbClr val="111111"/>
                 </a:solidFill>
@@ -4812,17 +4787,11 @@
               </a:rPr>
               <a:t>MÉTODOS</a:t>
             </a:r>
-          </a:p>
-          <a:p xmlns:a="http://schemas.openxmlformats.org/drawingml/2006/main">
-            <a:pPr algn="l">
-              <a:defRPr sz="1875" b="0" i="0">
-                <a:solidFill>
-                  <a:srgbClr val="111111"/>
-                </a:solidFill>
-              </a:defRPr>
-            </a:pPr>
-            <a:r>
-              <a:rPr sz="1875" b="0" i="0">
+            <a:endParaRPr/>
+          </a:p>
+          <a:p>
+            <a:r>
+              <a:rPr sz="660" b="0" i="0">
                 <a:solidFill>
                   <a:srgbClr val="111111"/>
                 </a:solidFill>
@@ -4830,19 +4799,13 @@
                 <a:ea typeface="Arial"/>
                 <a:cs typeface="Arial"/>
               </a:rPr>
-              <a:t>1. Microdados PNS 2013/2019.</a:t>
-            </a:r>
-          </a:p>
-          <a:p xmlns:a="http://schemas.openxmlformats.org/drawingml/2006/main">
-            <a:pPr algn="l">
-              <a:defRPr sz="1875" b="0" i="0">
-                <a:solidFill>
-                  <a:srgbClr val="111111"/>
-                </a:solidFill>
-              </a:defRPr>
-            </a:pPr>
-            <a:r>
-              <a:rPr sz="1875" b="0" i="0">
+              <a:t>• Microdados PNS 2013/2019; morador selecionado.</a:t>
+            </a:r>
+            <a:endParaRPr/>
+          </a:p>
+          <a:p>
+            <a:r>
+              <a:rPr sz="660" b="0" i="0">
                 <a:solidFill>
                   <a:srgbClr val="111111"/>
                 </a:solidFill>
@@ -4850,19 +4813,13 @@
                 <a:ea typeface="Arial"/>
                 <a:cs typeface="Arial"/>
               </a:rPr>
-              <a:t>2. Desenho: UPA, estratos e pesos via `pns_design()`.</a:t>
-            </a:r>
-          </a:p>
-          <a:p xmlns:a="http://schemas.openxmlformats.org/drawingml/2006/main">
-            <a:pPr algn="l">
-              <a:defRPr sz="1875" b="0" i="0">
-                <a:solidFill>
-                  <a:srgbClr val="111111"/>
-                </a:solidFill>
-              </a:defRPr>
-            </a:pPr>
-            <a:r>
-              <a:rPr sz="1875" b="0" i="0">
+              <a:t>• Desenho complexo: UPA, estratos e pesos via `pns_design()`.</a:t>
+            </a:r>
+            <a:endParaRPr/>
+          </a:p>
+          <a:p>
+            <a:r>
+              <a:rPr sz="660" b="0" i="0">
                 <a:solidFill>
                   <a:srgbClr val="111111"/>
                 </a:solidFill>
@@ -4870,175 +4827,44 @@
                 <a:ea typeface="Arial"/>
                 <a:cs typeface="Arial"/>
               </a:rPr>
-              <a:t>3. p_hat = sum(w_i y_i) / sum(w_i).</a:t>
-            </a:r>
-          </a:p>
-          <a:p xmlns:a="http://schemas.openxmlformats.org/drawingml/2006/main">
-            <a:pPr algn="l">
-              <a:defRPr sz="1875" b="0" i="0">
-                <a:solidFill>
-                  <a:srgbClr val="111111"/>
-                </a:solidFill>
-              </a:defRPr>
-            </a:pPr>
-            <a:r>
-              <a:rPr sz="1875" b="0" i="0">
-                <a:solidFill>
-                  <a:srgbClr val="111111"/>
-                </a:solidFill>
-                <a:latin typeface="Arial"/>
-                <a:ea typeface="Arial"/>
-                <a:cs typeface="Arial"/>
-              </a:rPr>
-              <a:t>4. % = 100*p_hat; taxa_100k = 100000*p_hat.</a:t>
-            </a:r>
-          </a:p>
-          <a:p xmlns:a="http://schemas.openxmlformats.org/drawingml/2006/main">
-            <a:pPr algn="l">
-              <a:defRPr sz="1875" b="0" i="0">
-                <a:solidFill>
-                  <a:srgbClr val="111111"/>
-                </a:solidFill>
-              </a:defRPr>
-            </a:pPr>
-            <a:r>
-              <a:rPr sz="1875" b="0" i="0">
-                <a:solidFill>
-                  <a:srgbClr val="111111"/>
-                </a:solidFill>
-                <a:latin typeface="Arial"/>
-                <a:ea typeface="Arial"/>
-                <a:cs typeface="Arial"/>
-              </a:rPr>
-              <a:t>5. IC95%: `svyciprop(method = "beta")`.</a:t>
-            </a:r>
-          </a:p>
-          <a:p xmlns:a="http://schemas.openxmlformats.org/drawingml/2006/main">
-            <a:r>
-              <a:t/>
-            </a:r>
-          </a:p>
-          <a:p xmlns:a="http://schemas.openxmlformats.org/drawingml/2006/main">
-            <a:pPr algn="l">
-              <a:defRPr sz="1875" b="0" i="0">
-                <a:solidFill>
-                  <a:srgbClr val="111111"/>
-                </a:solidFill>
-              </a:defRPr>
-            </a:pPr>
-            <a:r>
-              <a:rPr sz="1875" b="0" i="0">
-                <a:solidFill>
-                  <a:srgbClr val="111111"/>
-                </a:solidFill>
-                <a:latin typeface="Arial"/>
-                <a:ea typeface="Arial"/>
-                <a:cs typeface="Arial"/>
-              </a:rPr>
-              <a:t>RESULTADOS</a:t>
-            </a:r>
-          </a:p>
-          <a:p xmlns:a="http://schemas.openxmlformats.org/drawingml/2006/main">
-            <a:pPr algn="l">
-              <a:defRPr sz="1875" b="0" i="0">
-                <a:solidFill>
-                  <a:srgbClr val="111111"/>
-                </a:solidFill>
-              </a:defRPr>
-            </a:pPr>
-            <a:r>
-              <a:rPr sz="1875" b="0" i="0">
-                <a:solidFill>
-                  <a:srgbClr val="111111"/>
-                </a:solidFill>
-                <a:latin typeface="Arial"/>
-                <a:ea typeface="Arial"/>
-                <a:cs typeface="Arial"/>
-              </a:rPr>
-              <a:t>• Asma: 4,41% -&gt; 5,40%.</a:t>
-            </a:r>
-          </a:p>
-          <a:p xmlns:a="http://schemas.openxmlformats.org/drawingml/2006/main">
-            <a:pPr algn="l">
-              <a:defRPr sz="1875" b="0" i="0">
-                <a:solidFill>
-                  <a:srgbClr val="111111"/>
-                </a:solidFill>
-              </a:defRPr>
-            </a:pPr>
-            <a:r>
-              <a:rPr sz="1875" b="0" i="0">
-                <a:solidFill>
-                  <a:srgbClr val="111111"/>
-                </a:solidFill>
-                <a:latin typeface="Arial"/>
-                <a:ea typeface="Arial"/>
-                <a:cs typeface="Arial"/>
-              </a:rPr>
-              <a:t>• Crises: 38,3% -&gt; 37,7%.</a:t>
-            </a:r>
-          </a:p>
-          <a:p xmlns:a="http://schemas.openxmlformats.org/drawingml/2006/main">
-            <a:pPr algn="l">
-              <a:defRPr sz="1875" b="0" i="0">
-                <a:solidFill>
-                  <a:srgbClr val="111111"/>
-                </a:solidFill>
-              </a:defRPr>
-            </a:pPr>
-            <a:r>
-              <a:rPr sz="1875" b="0" i="0">
-                <a:solidFill>
-                  <a:srgbClr val="111111"/>
-                </a:solidFill>
-                <a:latin typeface="Arial"/>
-                <a:ea typeface="Arial"/>
-                <a:cs typeface="Arial"/>
-              </a:rPr>
-              <a:t>• Medicamentos: 81,5% -&gt; 64,4%.</a:t>
-            </a:r>
+              <a:t>• IC95% beta: adequado para proporções e domínios pequenos.</a:t>
+            </a:r>
+            <a:endParaRPr/>
           </a:p>
         </p:txBody>
       </p:sp>
       <p:sp>
         <p:nvSpPr>
           <p:cNvPr id="116" name="morrison-resource-detail">
-            <a:extLst xmlns:a="http://schemas.openxmlformats.org/drawingml/2006/main">
+            <a:extLst>
               <a:ext uri="{FF2B5EF4-FFF2-40B4-BE49-F238E27FC236}">
-                <a16:creationId xmlns:a16="http://schemas.microsoft.com/office/drawing/2014/main" id="{82D93542-35C1-4915-9FAB-BFAD5413ED49}"/>
+                <ns2:creationId id="{82D93542-35C1-4915-9FAB-BFAD5413ED49}"/>
               </a:ext>
             </a:extLst>
           </p:cNvPr>
           <p:cNvSpPr>
-            <a:spLocks xmlns:a="http://schemas.openxmlformats.org/drawingml/2006/main" noGrp="1"/>
+            <a:spLocks noGrp="1"/>
           </p:cNvSpPr>
           <p:nvPr/>
         </p:nvSpPr>
         <p:spPr>
-          <a:xfrm xmlns:a="http://schemas.openxmlformats.org/drawingml/2006/main">
+          <a:xfrm>
             <a:off x="36223575" y="5686425"/>
             <a:ext cx="6905625" cy="14668500"/>
           </a:xfrm>
-          <a:prstGeom xmlns:a="http://schemas.openxmlformats.org/drawingml/2006/main" prst="rect">
-            <a:avLst/>
-          </a:prstGeom>
-          <a:noFill xmlns:a="http://schemas.openxmlformats.org/drawingml/2006/main"/>
-          <a:ln xmlns:a="http://schemas.openxmlformats.org/drawingml/2006/main" w="0">
+          <a:prstGeom prst="rect">
+            <a:avLst/>
+          </a:prstGeom>
+          <a:noFill/>
+          <a:ln w="0">
             <a:noFill/>
             <a:prstDash val="solid"/>
           </a:ln>
         </p:spPr>
         <p:txBody>
-          <a:bodyPr xmlns:a="http://schemas.openxmlformats.org/drawingml/2006/main"/>
-          <a:lstStyle xmlns:a="http://schemas.openxmlformats.org/drawingml/2006/main"/>
-          <a:p xmlns:a="http://schemas.openxmlformats.org/drawingml/2006/main">
-            <a:pPr algn="l">
-              <a:defRPr sz="1875" b="0" i="0">
-                <a:solidFill>
-                  <a:srgbClr val="111111"/>
-                </a:solidFill>
-              </a:defRPr>
-            </a:pPr>
+          <a:bodyPr/>
+          <a:lstStyle/>
+          <a:p>
             <a:r>
               <a:rPr sz="1875" b="0" i="0">
                 <a:solidFill>
@@ -5050,20 +4876,9 @@
               </a:rPr>
               <a:t>RECURSOS</a:t>
             </a:r>
-          </a:p>
-          <a:p xmlns:a="http://schemas.openxmlformats.org/drawingml/2006/main">
-            <a:r>
-              <a:t/>
-            </a:r>
-          </a:p>
-          <a:p xmlns:a="http://schemas.openxmlformats.org/drawingml/2006/main">
-            <a:pPr algn="l">
-              <a:defRPr sz="1875" b="0" i="0">
-                <a:solidFill>
-                  <a:srgbClr val="111111"/>
-                </a:solidFill>
-              </a:defRPr>
-            </a:pPr>
+            <a:endParaRPr/>
+          </a:p>
+          <a:p>
             <a:r>
               <a:rPr sz="1875" b="0" i="0">
                 <a:solidFill>
@@ -5073,22 +4888,11 @@
                 <a:ea typeface="Arial"/>
                 <a:cs typeface="Arial"/>
               </a:rPr>
-              <a:t>Espaço reservado para QR code do GitHub.</a:t>
-            </a:r>
-          </a:p>
-          <a:p xmlns:a="http://schemas.openxmlformats.org/drawingml/2006/main">
-            <a:r>
-              <a:t/>
-            </a:r>
-          </a:p>
-          <a:p xmlns:a="http://schemas.openxmlformats.org/drawingml/2006/main">
-            <a:pPr algn="l">
-              <a:defRPr sz="1875" b="0" i="0">
-                <a:solidFill>
-                  <a:srgbClr val="111111"/>
-                </a:solidFill>
-              </a:defRPr>
-            </a:pPr>
+              <a:t>• QR: relatório metodológico, códigos e gráficos reprodutíveis.</a:t>
+            </a:r>
+            <a:endParaRPr/>
+          </a:p>
+          <a:p>
             <a:r>
               <a:rPr sz="1875" b="0" i="0">
                 <a:solidFill>
@@ -5098,17 +4902,11 @@
                 <a:ea typeface="Arial"/>
                 <a:cs typeface="Arial"/>
               </a:rPr>
-              <a:t>Código reprodutível:</a:t>
-            </a:r>
-          </a:p>
-          <a:p xmlns:a="http://schemas.openxmlformats.org/drawingml/2006/main">
-            <a:pPr algn="l">
-              <a:defRPr sz="1875" b="0" i="0">
-                <a:solidFill>
-                  <a:srgbClr val="111111"/>
-                </a:solidFill>
-              </a:defRPr>
-            </a:pPr>
+              <a:t>• Link: ingodube.github.io/PNS_2013_2019/metodologia.html</a:t>
+            </a:r>
+            <a:endParaRPr/>
+          </a:p>
+          <a:p>
             <a:r>
               <a:rPr sz="1875" b="0" i="0">
                 <a:solidFill>
@@ -5118,22 +4916,11 @@
                 <a:ea typeface="Arial"/>
                 <a:cs typeface="Arial"/>
               </a:rPr>
-              <a:t>https://github.com/ingodube/PNS_2013_2019</a:t>
-            </a:r>
-          </a:p>
-          <a:p xmlns:a="http://schemas.openxmlformats.org/drawingml/2006/main">
-            <a:r>
               <a:t/>
             </a:r>
-          </a:p>
-          <a:p xmlns:a="http://schemas.openxmlformats.org/drawingml/2006/main">
-            <a:pPr algn="l">
-              <a:defRPr sz="1875" b="0" i="0">
-                <a:solidFill>
-                  <a:srgbClr val="111111"/>
-                </a:solidFill>
-              </a:defRPr>
-            </a:pPr>
+            <a:endParaRPr/>
+          </a:p>
+          <a:p>
             <a:r>
               <a:rPr sz="1875" b="0" i="0">
                 <a:solidFill>
@@ -5143,17 +4930,11 @@
                 <a:ea typeface="Arial"/>
                 <a:cs typeface="Arial"/>
               </a:rPr>
-              <a:t>Interpretação:</a:t>
-            </a:r>
-          </a:p>
-          <a:p xmlns:a="http://schemas.openxmlformats.org/drawingml/2006/main">
-            <a:pPr algn="l">
-              <a:defRPr sz="1875" b="0" i="0">
-                <a:solidFill>
-                  <a:srgbClr val="111111"/>
-                </a:solidFill>
-              </a:defRPr>
-            </a:pPr>
+              <a:t>INTERPRETAÇÃO</a:t>
+            </a:r>
+            <a:endParaRPr/>
+          </a:p>
+          <a:p>
             <a:r>
               <a:rPr sz="1875" b="0" i="0">
                 <a:solidFill>
@@ -5163,17 +4944,11 @@
                 <a:ea typeface="Arial"/>
                 <a:cs typeface="Arial"/>
               </a:rPr>
-              <a:t>• ICs sem sobreposição sustentam aumento nacional da asma.</a:t>
-            </a:r>
-          </a:p>
-          <a:p xmlns:a="http://schemas.openxmlformats.org/drawingml/2006/main">
-            <a:pPr algn="l">
-              <a:defRPr sz="1875" b="0" i="0">
-                <a:solidFill>
-                  <a:srgbClr val="111111"/>
-                </a:solidFill>
-              </a:defRPr>
-            </a:pPr>
+              <a:t>• ICs sem sobreposição sustentam aumento nacional do diagnóstico.</a:t>
+            </a:r>
+            <a:endParaRPr/>
+          </a:p>
+          <a:p>
             <a:r>
               <a:rPr sz="1875" b="0" i="0">
                 <a:solidFill>
@@ -5183,17 +4958,11 @@
                 <a:ea typeface="Arial"/>
                 <a:cs typeface="Arial"/>
               </a:rPr>
-              <a:t>• ICs sobrepostos limitam conclusões por UF.</a:t>
-            </a:r>
-          </a:p>
-          <a:p xmlns:a="http://schemas.openxmlformats.org/drawingml/2006/main">
-            <a:pPr algn="l">
-              <a:defRPr sz="1875" b="0" i="0">
-                <a:solidFill>
-                  <a:srgbClr val="111111"/>
-                </a:solidFill>
-              </a:defRPr>
-            </a:pPr>
+              <a:t>• ICs sobrepostos limitam conclusões em várias UFs.</a:t>
+            </a:r>
+            <a:endParaRPr/>
+          </a:p>
+          <a:p>
             <a:r>
               <a:rPr sz="1875" b="0" i="0">
                 <a:solidFill>
@@ -5203,17 +4972,11 @@
                 <a:ea typeface="Arial"/>
                 <a:cs typeface="Arial"/>
               </a:rPr>
-              <a:t>• Estabilidade de crises sugere manejo ainda insuficiente.</a:t>
-            </a:r>
-          </a:p>
-          <a:p xmlns:a="http://schemas.openxmlformats.org/drawingml/2006/main">
-            <a:pPr algn="l">
-              <a:defRPr sz="1875" b="0" i="0">
-                <a:solidFill>
-                  <a:srgbClr val="111111"/>
-                </a:solidFill>
-              </a:defRPr>
-            </a:pPr>
+              <a:t>• Estabilidade das crises sugere manejo ainda insuficiente.</a:t>
+            </a:r>
+            <a:endParaRPr/>
+          </a:p>
+          <a:p>
             <a:r>
               <a:rPr sz="1875" b="0" i="0">
                 <a:solidFill>
@@ -5223,8 +4986,107 @@
                 <a:ea typeface="Arial"/>
                 <a:cs typeface="Arial"/>
               </a:rPr>
-              <a:t>• Queda no percentual de medicamentos deve ser lida junto à taxa populacional.</a:t>
-            </a:r>
+              <a:t>• Tabagismo caiu, mas não explica isoladamente o aumento do diagnóstico.</a:t>
+            </a:r>
+            <a:endParaRPr/>
+          </a:p>
+          <a:p>
+            <a:r>
+              <a:rPr sz="1875" b="0" i="0">
+                <a:solidFill>
+                  <a:srgbClr val="111111"/>
+                </a:solidFill>
+                <a:latin typeface="Arial"/>
+                <a:ea typeface="Arial"/>
+                <a:cs typeface="Arial"/>
+              </a:rPr>
+              <a:t/>
+            </a:r>
+            <a:endParaRPr/>
+          </a:p>
+          <a:p>
+            <a:r>
+              <a:rPr sz="1875" b="0" i="0">
+                <a:solidFill>
+                  <a:srgbClr val="111111"/>
+                </a:solidFill>
+                <a:latin typeface="Arial"/>
+                <a:ea typeface="Arial"/>
+                <a:cs typeface="Arial"/>
+              </a:rPr>
+              <a:t>DADOS OBSERVACIONAIS</a:t>
+            </a:r>
+            <a:endParaRPr/>
+          </a:p>
+          <a:p>
+            <a:r>
+              <a:rPr sz="1875" b="0" i="0">
+                <a:solidFill>
+                  <a:srgbClr val="111111"/>
+                </a:solidFill>
+                <a:latin typeface="Arial"/>
+                <a:ea typeface="Arial"/>
+                <a:cs typeface="Arial"/>
+              </a:rPr>
+              <a:t>• Fluxo analítico segue lógica ETL.</a:t>
+            </a:r>
+            <a:endParaRPr/>
+          </a:p>
+          <a:p>
+            <a:r>
+              <a:rPr sz="1875" b="0" i="0">
+                <a:solidFill>
+                  <a:srgbClr val="111111"/>
+                </a:solidFill>
+                <a:latin typeface="Arial"/>
+                <a:ea typeface="Arial"/>
+                <a:cs typeface="Arial"/>
+              </a:rPr>
+              <a:t>• OMOP/OHDSI inspira padronização, interoperabilidade e comparação futura com bases assistenciais.</a:t>
+            </a:r>
+            <a:endParaRPr/>
+          </a:p>
+          <a:p>
+            <a:r>
+              <a:rPr sz="1875" b="0" i="0">
+                <a:solidFill>
+                  <a:srgbClr val="111111"/>
+                </a:solidFill>
+                <a:latin typeface="Arial"/>
+                <a:ea typeface="Arial"/>
+                <a:cs typeface="Arial"/>
+              </a:rPr>
+              <a:t/>
+            </a:r>
+            <a:endParaRPr/>
+          </a:p>
+          <a:p>
+            <a:r>
+              <a:rPr sz="1875" b="0" i="0">
+                <a:solidFill>
+                  <a:srgbClr val="111111"/>
+                </a:solidFill>
+                <a:latin typeface="Arial"/>
+                <a:ea typeface="Arial"/>
+                <a:cs typeface="Arial"/>
+              </a:rPr>
+              <a:t>REFERÊNCIAS</a:t>
+            </a:r>
+            <a:endParaRPr/>
+          </a:p>
+          <a:p>
+            <a:r>
+              <a:rPr sz="1875" b="0" i="0">
+                <a:solidFill>
+                  <a:srgbClr val="111111"/>
+                </a:solidFill>
+                <a:latin typeface="Arial"/>
+                <a:ea typeface="Arial"/>
+                <a:cs typeface="Arial"/>
+              </a:rPr>
+              <a:t>[1] GAN 2022; [2] Souza-Júnior 2015; [3] Dube/Silva 2026; [4] Menezes 2015; [5] Santos 2018; [6] Brown 2001; [7] Korn 1998.</a:t>
+            </a:r>
+            <a:endParaRPr/>
           </a:p>
         </p:txBody>
       </p:sp>
@@ -5232,20 +5094,20 @@
         <p:nvPicPr>
           <p:cNvPr id="152" name=""/>
           <p:cNvPicPr>
-            <a:picLocks xmlns:a="http://schemas.openxmlformats.org/drawingml/2006/main" noChangeAspect="1"/>
+            <a:picLocks noChangeAspect="1"/>
           </p:cNvPicPr>
           <p:nvPr/>
         </p:nvPicPr>
         <p:blipFill>
-          <a:blip xmlns:r="http://schemas.openxmlformats.org/officeDocument/2006/relationships" xmlns:a="http://schemas.openxmlformats.org/drawingml/2006/main" r:embed="Rc0dc40d83a404b6d"/>
-          <a:stretch xmlns:a="http://schemas.openxmlformats.org/drawingml/2006/main"/>
+          <a:blip r:embed="Rc0dc40d83a404b6d"/>
+          <a:stretch/>
         </p:blipFill>
         <p:spPr>
-          <a:xfrm xmlns:a="http://schemas.openxmlformats.org/drawingml/2006/main">
+          <a:xfrm>
             <a:off x="9906000" y="13716000"/>
             <a:ext cx="10477500" cy="8096250"/>
           </a:xfrm>
-          <a:prstGeom xmlns:a="http://schemas.openxmlformats.org/drawingml/2006/main" prst="rect">
+          <a:prstGeom prst="rect">
             <a:avLst/>
           </a:prstGeom>
         </p:spPr>
@@ -5254,20 +5116,20 @@
         <p:nvPicPr>
           <p:cNvPr id="153" name=""/>
           <p:cNvPicPr>
-            <a:picLocks xmlns:a="http://schemas.openxmlformats.org/drawingml/2006/main" noChangeAspect="1"/>
+            <a:picLocks noChangeAspect="1"/>
           </p:cNvPicPr>
           <p:nvPr/>
         </p:nvPicPr>
         <p:blipFill>
-          <a:blip xmlns:r="http://schemas.openxmlformats.org/officeDocument/2006/relationships" xmlns:a="http://schemas.openxmlformats.org/drawingml/2006/main" r:embed="R3c339897eee5483f"/>
-          <a:stretch xmlns:a="http://schemas.openxmlformats.org/drawingml/2006/main"/>
+          <a:blip r:embed="R3c339897eee5483f"/>
+          <a:stretch/>
         </p:blipFill>
         <p:spPr>
-          <a:xfrm xmlns:a="http://schemas.openxmlformats.org/drawingml/2006/main">
+          <a:xfrm>
             <a:off x="23050500" y="13716000"/>
             <a:ext cx="10477500" cy="8096250"/>
           </a:xfrm>
-          <a:prstGeom xmlns:a="http://schemas.openxmlformats.org/drawingml/2006/main" prst="rect">
+          <a:prstGeom prst="rect">
             <a:avLst/>
           </a:prstGeom>
         </p:spPr>
@@ -5275,42 +5137,35 @@
       <p:sp>
         <p:nvSpPr>
           <p:cNvPr id="119" name="morrison-chart-note">
-            <a:extLst xmlns:a="http://schemas.openxmlformats.org/drawingml/2006/main">
+            <a:extLst>
               <a:ext uri="{FF2B5EF4-FFF2-40B4-BE49-F238E27FC236}">
-                <a16:creationId xmlns:a16="http://schemas.microsoft.com/office/drawing/2014/main" id="{B40F3A6E-9286-4BF6-A4DA-84A73CB4D9E6}"/>
+                <ns2:creationId id="{B40F3A6E-9286-4BF6-A4DA-84A73CB4D9E6}"/>
               </a:ext>
             </a:extLst>
           </p:cNvPr>
           <p:cNvSpPr>
-            <a:spLocks xmlns:a="http://schemas.openxmlformats.org/drawingml/2006/main" noGrp="1"/>
+            <a:spLocks noGrp="1"/>
           </p:cNvSpPr>
           <p:nvPr/>
         </p:nvSpPr>
         <p:spPr>
-          <a:xfrm xmlns:a="http://schemas.openxmlformats.org/drawingml/2006/main">
+          <a:xfrm>
             <a:off x="9334500" y="22145625"/>
             <a:ext cx="24765000" cy="1238250"/>
           </a:xfrm>
-          <a:prstGeom xmlns:a="http://schemas.openxmlformats.org/drawingml/2006/main" prst="rect">
-            <a:avLst/>
-          </a:prstGeom>
-          <a:noFill xmlns:a="http://schemas.openxmlformats.org/drawingml/2006/main"/>
-          <a:ln xmlns:a="http://schemas.openxmlformats.org/drawingml/2006/main" w="0">
+          <a:prstGeom prst="rect">
+            <a:avLst/>
+          </a:prstGeom>
+          <a:noFill/>
+          <a:ln w="0">
             <a:noFill/>
             <a:prstDash val="solid"/>
           </a:ln>
         </p:spPr>
         <p:txBody>
-          <a:bodyPr xmlns:a="http://schemas.openxmlformats.org/drawingml/2006/main"/>
-          <a:lstStyle xmlns:a="http://schemas.openxmlformats.org/drawingml/2006/main"/>
-          <a:p xmlns:a="http://schemas.openxmlformats.org/drawingml/2006/main">
-            <a:pPr algn="ctr">
-              <a:defRPr sz="2325" b="0" i="0">
-                <a:solidFill>
-                  <a:srgbClr val="B9D9EB"/>
-                </a:solidFill>
-              </a:defRPr>
-            </a:pPr>
+          <a:bodyPr/>
+          <a:lstStyle/>
+          <a:p>
             <a:r>
               <a:rPr sz="2325" b="0" i="0">
                 <a:solidFill>
@@ -5320,15 +5175,151 @@
                 <a:ea typeface="Arial"/>
                 <a:cs typeface="Arial"/>
               </a:rPr>
-              <a:t>Gráficos exportados dos scripts R: `geom_col`, `geom_errorbar`, `coord_flip`, IC95% e paleta original.</a:t>
-            </a:r>
+              <a:t>Gráficos exportados dos códigos R: barras horizontais por UF, comparação 2013/2019, IC95% e paleta original.</a:t>
+            </a:r>
+            <a:endParaRPr/>
+          </a:p>
+        </p:txBody>
+      </p:sp>
+      <p:sp>
+        <p:nvSpPr>
+          <p:cNvPr id="154" name="formula-box-morrison-pt"/>
+          <p:cNvSpPr txBox="1"/>
+          <p:nvPr/>
+        </p:nvSpPr>
+        <p:spPr>
+          <a:xfrm>
+            <a:off x="495300" y="14550000"/>
+            <a:ext cx="7239000" cy="1600000"/>
+            <a:off x="495300" y="14950000"/>
+            <a:ext cx="7239000" cy="2450000"/>
+          </a:xfrm>
+          <a:prstGeom prst="rect">
+            <a:avLst/>
+          </a:prstGeom>
+          <a:solidFill>
+            <a:srgbClr val="F8FBFD"/>
+          </a:solidFill>
+          <a:ln w="12700">
+            <a:solidFill>
+              <a:srgbClr val="1F4E79"/>
+            </a:solidFill>
+          </a:ln>
+        </p:spPr>
+        <p:txBody>
+          <a:bodyPr wrap="square" lIns="76200" rIns="76200" tIns="76200" bIns="76200" anchor="ctr"/>
+          <a:lstStyle/>
+          <a:p>
+            <a:pPr algn="ctr"/>
+            <a:r>
+              <a:rPr lang="pt-BR" sz="960" b="1">
+                <a:latin typeface="Cambria Math"/>
+              </a:rPr>
+              <a:t>FÓRMULAS</a:t>
+            </a:r>
+            <a:endParaRPr/>
+          </a:p>
+          <a:p>
+            <a:pPr algn="ctr"/>
+            <a:r>
+              <a:rPr lang="pt-BR" sz="960" b="0">
+                <a:latin typeface="Cambria Math"/>
+              </a:rPr>
+              <a:t>p̂ = Σ wᵢyᵢ / Σ wᵢ</a:t>
+            </a:r>
+            <a:endParaRPr/>
+          </a:p>
+          <a:p>
+            <a:pPr algn="ctr"/>
+            <a:r>
+              <a:rPr lang="pt-BR" sz="960" b="0">
+                <a:latin typeface="Cambria Math"/>
+              </a:rPr>
+              <a:t>% = 100 × p̂</a:t>
+            </a:r>
+            <a:endParaRPr/>
+          </a:p>
+          <a:p>
+            <a:pPr algn="ctr"/>
+            <a:r>
+              <a:rPr lang="pt-BR" sz="960" b="0">
+                <a:latin typeface="Cambria Math"/>
+              </a:rPr>
+              <a:t>taxa₁₀₀k = 100000 × p̂</a:t>
+            </a:r>
+            <a:endParaRPr/>
+          </a:p>
+        </p:txBody>
+      </p:sp>
+      <p:sp>
+        <p:nvSpPr>
+          <p:cNvPr id="155" name="results-box-morrison-pt"/>
+          <p:cNvSpPr txBox="1"/>
+          <p:nvPr/>
+        </p:nvSpPr>
+        <p:spPr>
+          <a:xfrm>
+            <a:off x="495300" y="16450000"/>
+            <a:ext cx="7239000" cy="4700000"/>
+            <a:off x="495300" y="17650000"/>
+            <a:ext cx="7239000" cy="3600000"/>
+          </a:xfrm>
+          <a:prstGeom prst="rect">
+            <a:avLst/>
+          </a:prstGeom>
+          <a:solidFill>
+            <a:srgbClr val="F8FBFD"/>
+          </a:solidFill>
+          <a:ln w="12700">
+            <a:solidFill>
+              <a:srgbClr val="1F4E79"/>
+            </a:solidFill>
+          </a:ln>
+        </p:spPr>
+        <p:txBody>
+          <a:bodyPr wrap="square" lIns="76200" rIns="76200" tIns="76200" bIns="76200" anchor="ctr"/>
+          <a:lstStyle/>
+          <a:p>
+            <a:r>
+              <a:rPr lang="pt-BR" sz="740" b="1"/>
+              <a:t>RESULTADOS</a:t>
+            </a:r>
+            <a:endParaRPr/>
+          </a:p>
+          <a:p>
+            <a:r>
+              <a:rPr lang="pt-BR" sz="740" b="0"/>
+              <a:t>• Asma: 4,41% -&gt; 5,40%.</a:t>
+            </a:r>
+            <a:endParaRPr/>
+          </a:p>
+          <a:p>
+            <a:r>
+              <a:rPr lang="pt-BR" sz="740" b="0"/>
+              <a:t>• Crises: 38,3% -&gt; 37,7%.</a:t>
+            </a:r>
+            <a:endParaRPr/>
+          </a:p>
+          <a:p>
+            <a:r>
+              <a:rPr lang="pt-BR" sz="740" b="0"/>
+              <a:t>• Medicamentos: 81,5% -&gt; 64,4%.</a:t>
+            </a:r>
+            <a:endParaRPr/>
+          </a:p>
+          <a:p>
+            <a:r>
+              <a:rPr lang="pt-BR" sz="740" b="0"/>
+              <a:t>• IC95% orienta comparações entre anos e UFs.</a:t>
+            </a:r>
+            <a:endParaRPr/>
           </a:p>
         </p:txBody>
       </p:sp>
     </p:spTree>
     <p:extLst>
       <p:ext uri="{BB962C8B-B14F-4D97-AF65-F5344CB8AC3E}">
-        <p14:creationId xmlns:p14="http://schemas.microsoft.com/office/powerpoint/2010/main" val="2440222578"/>
+        <ns4:creationId val="2440222578"/>
       </p:ext>
     </p:extLst>
   </p:cSld>

--- a/outputs/posters/poster_pns_asma_morrison_pt.pptx
+++ b/outputs/posters/poster_pns_asma_morrison_pt.pptx
@@ -3007,7 +3007,7 @@
 </file>
 
 <file path=ppt/slides/slide1.xml><?xml version="1.0" encoding="utf-8"?>
-<p:sld xmlns:a="http://schemas.openxmlformats.org/drawingml/2006/main" xmlns:ns2="http://schemas.microsoft.com/office/drawing/2014/main" xmlns:ns4="http://schemas.microsoft.com/office/powerpoint/2010/main" xmlns:p="http://schemas.openxmlformats.org/presentationml/2006/main" xmlns:r="http://schemas.openxmlformats.org/officeDocument/2006/relationships">
+<p:sld xmlns:a="http://schemas.openxmlformats.org/drawingml/2006/main" xmlns:ns2="http://schemas.microsoft.com/office/drawing/2014/main" xmlns:ns3="http://schemas.openxmlformats.org/officeDocument/2006/relationships" xmlns:ns4="http://schemas.microsoft.com/office/powerpoint/2010/main" xmlns:p="http://schemas.openxmlformats.org/presentationml/2006/main">
   <p:cSld>
     <p:spTree>
       <p:nvGrpSpPr>
@@ -3068,15 +3068,15 @@
         </p:nvSpPr>
         <p:spPr>
           <a:xfrm>
-            <a:off x="8436429" y="6443810"/>
-            <a:ext cx="26974800" cy="11097741"/>
+            <a:off x="8436429" y="5700000"/>
+            <a:ext cx="26974800" cy="3700000"/>
           </a:xfrm>
           <a:prstGeom prst="rect">
             <a:avLst/>
           </a:prstGeom>
         </p:spPr>
         <p:txBody>
-          <a:bodyPr vert="horz" lIns="914400" rIns="914400" anchor="t">
+          <a:bodyPr vert="horz" lIns="914400" rIns="914400" anchor="t" wrap="square">
             <a:noAutofit/>
           </a:bodyPr>
           <a:lstStyle>
@@ -3235,16 +3235,32 @@
             </a:lvl9pPr>
           </a:lstStyle>
           <a:p>
-            <a:r>
-              <a:rPr sz="10350" b="1" i="0">
+            <a:pPr algn="ctr"/>
+            <a:r>
+              <a:rPr sz="3100" b="1" i="0">
+                <a:latin typeface="Arial"/>
+                <a:ea typeface="Arial"/>
+                <a:cs typeface="Arial"/>
                 <a:solidFill>
                   <a:srgbClr val="FFFFFF"/>
                 </a:solidFill>
-                <a:latin typeface="Arial"/>
-                <a:ea typeface="Arial"/>
-                <a:cs typeface="Arial"/>
-              </a:rPr>
-              <a:t>Mais diagnóstico de asma, sem melhora proporcional no controle</a:t>
+              </a:rPr>
+              <a:t>Diagnóstico de asma aumentou; controle e acesso</a:t>
+            </a:r>
+            <a:endParaRPr/>
+          </a:p>
+          <a:p>
+            <a:pPr algn="ctr"/>
+            <a:r>
+              <a:rPr sz="3100" b="0" i="0">
+                <a:latin typeface="Arial"/>
+                <a:ea typeface="Arial"/>
+                <a:cs typeface="Arial"/>
+                <a:solidFill>
+                  <a:srgbClr val="FFFFFF"/>
+                </a:solidFill>
+              </a:rPr>
+              <a:t>terapêutico não acompanharam na mesma proporção</a:t>
             </a:r>
             <a:endParaRPr/>
           </a:p>
@@ -3739,7 +3755,7 @@
           <p:nvPr/>
         </p:nvPicPr>
         <p:blipFill>
-          <a:blip r:embed="Rc7226c8fcbba4c3d"/>
+          <a:blip ns3:embed="Rc7226c8fcbba4c3d"/>
           <a:stretch>
             <a:fillRect l="0" t="0" r="0" b="0"/>
           </a:stretch>
@@ -4065,7 +4081,7 @@
           <p:nvPr/>
         </p:nvPicPr>
         <p:blipFill>
-          <a:blip r:embed="R9350a78eff9d4db9"/>
+          <a:blip ns3:embed="R9350a78eff9d4db9"/>
           <a:srcRect l="0" t="0" r="0" b="0"/>
           <a:stretch/>
         </p:blipFill>
@@ -4088,7 +4104,7 @@
           <p:nvPr/>
         </p:nvPicPr>
         <p:blipFill>
-          <a:blip r:embed="R29b2f0bbdb0c4ce0"/>
+          <a:blip ns3:embed="R29b2f0bbdb0c4ce0"/>
           <a:srcRect l="0" t="41985" r="50251" b="34197"/>
           <a:stretch/>
         </p:blipFill>
@@ -4111,7 +4127,7 @@
           <p:nvPr/>
         </p:nvPicPr>
         <p:blipFill>
-          <a:blip r:embed="R29b2f0bbdb0c4ce0"/>
+          <a:blip ns3:embed="R29b2f0bbdb0c4ce0"/>
           <a:srcRect l="0" t="0" r="0" b="0"/>
           <a:stretch/>
         </p:blipFill>
@@ -4134,7 +4150,7 @@
           <p:nvPr/>
         </p:nvPicPr>
         <p:blipFill>
-          <a:blip r:embed="R29b2f0bbdb0c4ce0"/>
+          <a:blip ns3:embed="R29b2f0bbdb0c4ce0"/>
           <a:srcRect l="0" t="41985" r="50251" b="34197"/>
           <a:stretch/>
         </p:blipFill>
@@ -4157,7 +4173,7 @@
           <p:nvPr/>
         </p:nvPicPr>
         <p:blipFill>
-          <a:blip r:embed="Rcb7cd4855f5c48de"/>
+          <a:blip ns3:embed="Rcb7cd4855f5c48de"/>
           <a:stretch>
             <a:fillRect l="0" t="0" r="0" b="0"/>
           </a:stretch>
@@ -4181,7 +4197,7 @@
           <p:nvPr/>
         </p:nvPicPr>
         <p:blipFill>
-          <a:blip r:embed="R6d7bf24421794ec6"/>
+          <a:blip ns3:embed="R6d7bf24421794ec6"/>
           <a:srcRect l="0" t="21190" r="0" b="0"/>
           <a:stretch>
             <a:fillRect l="0" t="0" r="0" b="0"/>
@@ -4206,7 +4222,7 @@
           <p:nvPr/>
         </p:nvPicPr>
         <p:blipFill>
-          <a:blip r:embed="R29b2f0bbdb0c4ce0"/>
+          <a:blip ns3:embed="R29b2f0bbdb0c4ce0"/>
           <a:srcRect l="0" t="41985" r="50251" b="34197"/>
           <a:stretch/>
         </p:blipFill>
@@ -4229,7 +4245,7 @@
           <p:nvPr/>
         </p:nvPicPr>
         <p:blipFill>
-          <a:blip r:embed="R29b2f0bbdb0c4ce0"/>
+          <a:blip ns3:embed="R29b2f0bbdb0c4ce0"/>
           <a:srcRect l="0" t="0" r="0" b="0"/>
           <a:stretch/>
         </p:blipFill>
@@ -4252,7 +4268,7 @@
           <p:nvPr/>
         </p:nvPicPr>
         <p:blipFill>
-          <a:blip r:embed="R29b2f0bbdb0c4ce0"/>
+          <a:blip ns3:embed="R29b2f0bbdb0c4ce0"/>
           <a:srcRect l="0" t="41985" r="50251" b="34197"/>
           <a:stretch/>
         </p:blipFill>
@@ -4275,7 +4291,7 @@
           <p:nvPr/>
         </p:nvPicPr>
         <p:blipFill>
-          <a:blip r:embed="Rcb7cd4855f5c48de"/>
+          <a:blip ns3:embed="Rcb7cd4855f5c48de"/>
           <a:stretch>
             <a:fillRect l="0" t="0" r="0" b="0"/>
           </a:stretch>
@@ -4299,7 +4315,7 @@
           <p:nvPr/>
         </p:nvPicPr>
         <p:blipFill>
-          <a:blip r:embed="Rda4311979b7646cf"/>
+          <a:blip ns3:embed="Rda4311979b7646cf"/>
           <a:stretch>
             <a:fillRect l="0" t="0" r="0" b="0"/>
           </a:stretch>
@@ -4343,33 +4359,47 @@
           </a:ln>
         </p:spPr>
         <p:txBody>
-          <a:bodyPr/>
+          <a:bodyPr wrap="square"/>
           <a:lstStyle/>
           <a:p>
             <a:r>
-              <a:rPr sz="2700" b="1" i="1">
-                <a:solidFill>
-                  <a:srgbClr val="111111"/>
-                </a:solidFill>
-                <a:latin typeface="Arial"/>
-                <a:ea typeface="Arial"/>
-                <a:cs typeface="Arial"/>
-              </a:rPr>
-              <a:t>Evolução da asma no Brasil, 2013-2019</a:t>
-            </a:r>
-            <a:endParaRPr/>
-          </a:p>
-          <a:p>
-            <a:r>
-              <a:rPr sz="2700" b="1" i="1">
-                <a:solidFill>
-                  <a:srgbClr val="111111"/>
-                </a:solidFill>
-                <a:latin typeface="Arial"/>
-                <a:ea typeface="Arial"/>
-                <a:cs typeface="Arial"/>
-              </a:rPr>
-              <a:t>PNS, plano amostral e indicadores reprodutíveis</a:t>
+              <a:rPr sz="770" b="1" i="1">
+                <a:solidFill>
+                  <a:srgbClr val="111111"/>
+                </a:solidFill>
+                <a:latin typeface="Arial"/>
+                <a:ea typeface="Arial"/>
+                <a:cs typeface="Arial"/>
+              </a:rPr>
+              <a:t>Asma no Brasil, 2013-2019</a:t>
+            </a:r>
+            <a:endParaRPr/>
+          </a:p>
+          <a:p>
+            <a:r>
+              <a:rPr sz="770" b="0" i="1">
+                <a:solidFill>
+                  <a:srgbClr val="111111"/>
+                </a:solidFill>
+                <a:latin typeface="Arial"/>
+                <a:ea typeface="Arial"/>
+                <a:cs typeface="Arial"/>
+              </a:rPr>
+              <a:t>PNS, plano amostral complexo e</a:t>
+            </a:r>
+            <a:endParaRPr/>
+          </a:p>
+          <a:p>
+            <a:r>
+              <a:rPr sz="770" b="0" i="1">
+                <a:solidFill>
+                  <a:srgbClr val="111111"/>
+                </a:solidFill>
+                <a:latin typeface="Arial"/>
+                <a:ea typeface="Arial"/>
+                <a:cs typeface="Arial"/>
+              </a:rPr>
+              <a:t>indicadores reprodutíveis</a:t>
             </a:r>
             <a:endParaRPr/>
           </a:p>
@@ -4553,8 +4583,8 @@
         </p:nvSpPr>
         <p:spPr>
           <a:xfrm>
-            <a:off x="12334875" y="26098500"/>
-            <a:ext cx="4000500" cy="1143000"/>
+            <a:off x="12190000" y="25520000"/>
+            <a:ext cx="4300000" cy="1900000"/>
           </a:xfrm>
           <a:prstGeom prst="rect">
             <a:avLst/>
@@ -4566,11 +4596,12 @@
           </a:ln>
         </p:spPr>
         <p:txBody>
-          <a:bodyPr/>
+          <a:bodyPr wrap="square"/>
           <a:lstStyle/>
           <a:p>
-            <a:r>
-              <a:rPr sz="2325" b="1" i="0">
+            <a:pPr algn="ctr"/>
+            <a:r>
+              <a:rPr sz="660" b="1" i="0">
                 <a:solidFill>
                   <a:srgbClr val="20425A"/>
                 </a:solidFill>
@@ -4583,8 +4614,9 @@
             <a:endParaRPr/>
           </a:p>
           <a:p>
-            <a:r>
-              <a:rPr sz="2325" b="1" i="0">
+            <a:pPr algn="ctr"/>
+            <a:r>
+              <a:rPr sz="660" b="0" i="0">
                 <a:solidFill>
                   <a:srgbClr val="20425A"/>
                 </a:solidFill>
@@ -4592,7 +4624,37 @@
                 <a:ea typeface="Arial"/>
                 <a:cs typeface="Arial"/>
               </a:rPr>
-              <a:t>relatório metodológico</a:t>
+              <a:t>Relatório metodológico, códigos e</a:t>
+            </a:r>
+            <a:endParaRPr/>
+          </a:p>
+          <a:p>
+            <a:pPr algn="ctr"/>
+            <a:r>
+              <a:rPr sz="660" b="0" i="0">
+                <a:solidFill>
+                  <a:srgbClr val="20425A"/>
+                </a:solidFill>
+                <a:latin typeface="Arial"/>
+                <a:ea typeface="Arial"/>
+                <a:cs typeface="Arial"/>
+              </a:rPr>
+              <a:t>gráficos reprodutíveis</a:t>
+            </a:r>
+            <a:endParaRPr/>
+          </a:p>
+          <a:p>
+            <a:pPr algn="ctr"/>
+            <a:r>
+              <a:rPr sz="660" b="0" i="0">
+                <a:solidFill>
+                  <a:srgbClr val="20425A"/>
+                </a:solidFill>
+                <a:latin typeface="Arial"/>
+                <a:ea typeface="Arial"/>
+                <a:cs typeface="Arial"/>
+              </a:rPr>
+              <a:t>https://ingodube.github.io/PNS_2013_2019/metodologia.html</a:t>
             </a:r>
             <a:endParaRPr/>
           </a:p>
@@ -4607,7 +4669,7 @@
           <p:nvPr/>
         </p:nvPicPr>
         <p:blipFill>
-          <a:blip r:embed="Ra717ab67737d4009"/>
+          <a:blip ns3:embed="Ra717ab67737d4009"/>
           <a:stretch/>
         </p:blipFill>
         <p:spPr>
@@ -4629,7 +4691,7 @@
           <p:nvPr/>
         </p:nvPicPr>
         <p:blipFill>
-          <a:blip r:embed="Ra4cf05863a65443f"/>
+          <a:blip ns3:embed="Ra4cf05863a65443f"/>
           <a:stretch/>
         </p:blipFill>
         <p:spPr>
@@ -4651,7 +4713,7 @@
           <p:nvPr/>
         </p:nvPicPr>
         <p:blipFill>
-          <a:blip r:embed="R33a642fdcdbc4d9e"/>
+          <a:blip ns3:embed="R33a642fdcdbc4d9e"/>
           <a:stretch/>
         </p:blipFill>
         <p:spPr>
@@ -4673,7 +4735,7 @@
           <p:nvPr/>
         </p:nvPicPr>
         <p:blipFill>
-          <a:blip r:embed="R93e2fce0c76e4357"/>
+          <a:blip ns3:embed="R93e2fce0c76e4357"/>
           <a:stretch/>
         </p:blipFill>
         <p:spPr>
@@ -4702,8 +4764,8 @@
         </p:nvSpPr>
         <p:spPr>
           <a:xfrm>
-            <a:off x="495300" y="8667750"/>
-            <a:ext cx="7239000" cy="5600000"/>
+            <a:off x="495300" y="7900000"/>
+            <a:ext cx="7239000" cy="7000000"/>
             <a:off y="8667750"/>
             <a:ext cy="6150000"/>
           </a:xfrm>
@@ -4717,53 +4779,109 @@
           </a:ln>
         </p:spPr>
         <p:txBody>
-          <a:bodyPr/>
+          <a:bodyPr wrap="square"/>
           <a:lstStyle/>
           <a:p>
             <a:r>
-              <a:rPr sz="660" b="1" i="0">
-                <a:solidFill>
-                  <a:srgbClr val="111111"/>
-                </a:solidFill>
-                <a:latin typeface="Arial"/>
-                <a:ea typeface="Arial"/>
-                <a:cs typeface="Arial"/>
-              </a:rPr>
-              <a:t>INTRO</a:t>
-            </a:r>
-            <a:endParaRPr/>
-          </a:p>
-          <a:p>
-            <a:r>
-              <a:rPr sz="660" b="0" i="0">
-                <a:solidFill>
-                  <a:srgbClr val="111111"/>
-                </a:solidFill>
-                <a:latin typeface="Arial"/>
-                <a:ea typeface="Arial"/>
-                <a:cs typeface="Arial"/>
-              </a:rPr>
-              <a:t>• A asma combina carga crônica, crises e manejo contínuo.</a:t>
-            </a:r>
-            <a:endParaRPr/>
-          </a:p>
-          <a:p>
-            <a:r>
-              <a:rPr sz="660" b="0" i="0">
-                <a:solidFill>
-                  <a:srgbClr val="111111"/>
-                </a:solidFill>
-                <a:latin typeface="Arial"/>
-                <a:ea typeface="Arial"/>
-                <a:cs typeface="Arial"/>
-              </a:rPr>
-              <a:t>• Indicadores da PNS orientam vigilância e políticas públicas.</a:t>
-            </a:r>
-            <a:endParaRPr/>
-          </a:p>
-          <a:p>
-            <a:r>
-              <a:rPr sz="660" b="0" i="0">
+              <a:rPr sz="590" b="1" i="0">
+                <a:solidFill>
+                  <a:srgbClr val="111111"/>
+                </a:solidFill>
+                <a:latin typeface="Arial"/>
+                <a:ea typeface="Arial"/>
+                <a:cs typeface="Arial"/>
+              </a:rPr>
+              <a:t>CONTEXTO</a:t>
+            </a:r>
+            <a:endParaRPr/>
+          </a:p>
+          <a:p>
+            <a:r>
+              <a:rPr sz="590" b="0" i="0">
+                <a:solidFill>
+                  <a:srgbClr val="111111"/>
+                </a:solidFill>
+                <a:latin typeface="Arial"/>
+                <a:ea typeface="Arial"/>
+                <a:cs typeface="Arial"/>
+              </a:rPr>
+              <a:t>• A PNS é inquérito domiciliar</a:t>
+            </a:r>
+            <a:endParaRPr/>
+          </a:p>
+          <a:p>
+            <a:r>
+              <a:rPr sz="590" b="0" i="0">
+                <a:solidFill>
+                  <a:srgbClr val="111111"/>
+                </a:solidFill>
+                <a:latin typeface="Arial"/>
+                <a:ea typeface="Arial"/>
+                <a:cs typeface="Arial"/>
+              </a:rPr>
+              <a:t>  amostral; unidade de análise: morador</a:t>
+            </a:r>
+            <a:endParaRPr/>
+          </a:p>
+          <a:p>
+            <a:r>
+              <a:rPr sz="590" b="0" i="0">
+                <a:solidFill>
+                  <a:srgbClr val="111111"/>
+                </a:solidFill>
+                <a:latin typeface="Arial"/>
+                <a:ea typeface="Arial"/>
+                <a:cs typeface="Arial"/>
+              </a:rPr>
+              <a:t>  selecionado.</a:t>
+            </a:r>
+            <a:endParaRPr/>
+          </a:p>
+          <a:p>
+            <a:r>
+              <a:rPr sz="590" b="0" i="0">
+                <a:solidFill>
+                  <a:srgbClr val="111111"/>
+                </a:solidFill>
+                <a:latin typeface="Arial"/>
+                <a:ea typeface="Arial"/>
+                <a:cs typeface="Arial"/>
+              </a:rPr>
+              <a:t>• Indicadores epidemiológicos traduzem</a:t>
+            </a:r>
+            <a:endParaRPr/>
+          </a:p>
+          <a:p>
+            <a:r>
+              <a:rPr sz="590" b="0" i="0">
+                <a:solidFill>
+                  <a:srgbClr val="111111"/>
+                </a:solidFill>
+                <a:latin typeface="Arial"/>
+                <a:ea typeface="Arial"/>
+                <a:cs typeface="Arial"/>
+              </a:rPr>
+              <a:t>  respostas individuais em evidência</a:t>
+            </a:r>
+            <a:endParaRPr/>
+          </a:p>
+          <a:p>
+            <a:r>
+              <a:rPr sz="590" b="0" i="0">
+                <a:solidFill>
+                  <a:srgbClr val="111111"/>
+                </a:solidFill>
+                <a:latin typeface="Arial"/>
+                <a:ea typeface="Arial"/>
+                <a:cs typeface="Arial"/>
+              </a:rPr>
+              <a:t>  para vigilância e planejamento.</a:t>
+            </a:r>
+            <a:endParaRPr/>
+          </a:p>
+          <a:p>
+            <a:r>
+              <a:rPr sz="590" b="0" i="0">
                 <a:solidFill>
                   <a:srgbClr val="111111"/>
                 </a:solidFill>
@@ -4777,57 +4895,169 @@
           </a:p>
           <a:p>
             <a:r>
-              <a:rPr sz="660" b="0" i="0">
-                <a:solidFill>
-                  <a:srgbClr val="111111"/>
-                </a:solidFill>
-                <a:latin typeface="Arial"/>
-                <a:ea typeface="Arial"/>
-                <a:cs typeface="Arial"/>
-              </a:rPr>
-              <a:t>MÉTODOS</a:t>
-            </a:r>
-            <a:endParaRPr/>
-          </a:p>
-          <a:p>
-            <a:r>
-              <a:rPr sz="660" b="0" i="0">
-                <a:solidFill>
-                  <a:srgbClr val="111111"/>
-                </a:solidFill>
-                <a:latin typeface="Arial"/>
-                <a:ea typeface="Arial"/>
-                <a:cs typeface="Arial"/>
-              </a:rPr>
-              <a:t>• Microdados PNS 2013/2019; morador selecionado.</a:t>
-            </a:r>
-            <a:endParaRPr/>
-          </a:p>
-          <a:p>
-            <a:r>
-              <a:rPr sz="660" b="0" i="0">
-                <a:solidFill>
-                  <a:srgbClr val="111111"/>
-                </a:solidFill>
-                <a:latin typeface="Arial"/>
-                <a:ea typeface="Arial"/>
-                <a:cs typeface="Arial"/>
-              </a:rPr>
-              <a:t>• Desenho complexo: UPA, estratos e pesos via `pns_design()`.</a:t>
-            </a:r>
-            <a:endParaRPr/>
-          </a:p>
-          <a:p>
-            <a:r>
-              <a:rPr sz="660" b="0" i="0">
-                <a:solidFill>
-                  <a:srgbClr val="111111"/>
-                </a:solidFill>
-                <a:latin typeface="Arial"/>
-                <a:ea typeface="Arial"/>
-                <a:cs typeface="Arial"/>
-              </a:rPr>
-              <a:t>• IC95% beta: adequado para proporções e domínios pequenos.</a:t>
+              <a:rPr sz="590" b="0" i="0">
+                <a:solidFill>
+                  <a:srgbClr val="111111"/>
+                </a:solidFill>
+                <a:latin typeface="Arial"/>
+                <a:ea typeface="Arial"/>
+                <a:cs typeface="Arial"/>
+              </a:rPr>
+              <a:t>MÉTODO</a:t>
+            </a:r>
+            <a:endParaRPr/>
+          </a:p>
+          <a:p>
+            <a:r>
+              <a:rPr sz="590" b="0" i="0">
+                <a:solidFill>
+                  <a:srgbClr val="111111"/>
+                </a:solidFill>
+                <a:latin typeface="Arial"/>
+                <a:ea typeface="Arial"/>
+                <a:cs typeface="Arial"/>
+              </a:rPr>
+              <a:t>• `pns_design()` incorpora UPA/PSU,</a:t>
+            </a:r>
+            <a:endParaRPr/>
+          </a:p>
+          <a:p>
+            <a:r>
+              <a:rPr sz="590" b="0" i="0">
+                <a:solidFill>
+                  <a:srgbClr val="111111"/>
+                </a:solidFill>
+                <a:latin typeface="Arial"/>
+                <a:ea typeface="Arial"/>
+                <a:cs typeface="Arial"/>
+              </a:rPr>
+              <a:t>  estratos e pesos calibrados.</a:t>
+            </a:r>
+            <a:endParaRPr/>
+          </a:p>
+          <a:p>
+            <a:r>
+              <a:rPr sz="590" b="0" i="0">
+                <a:solidFill>
+                  <a:srgbClr val="111111"/>
+                </a:solidFill>
+                <a:latin typeface="Arial"/>
+                <a:ea typeface="Arial"/>
+                <a:cs typeface="Arial"/>
+              </a:rPr>
+              <a:t>• Variáveis: Q074 diagnóstico, Q076</a:t>
+            </a:r>
+            <a:endParaRPr/>
+          </a:p>
+          <a:p>
+            <a:r>
+              <a:rPr sz="590" b="0" i="0">
+                <a:solidFill>
+                  <a:srgbClr val="111111"/>
+                </a:solidFill>
+                <a:latin typeface="Arial"/>
+                <a:ea typeface="Arial"/>
+                <a:cs typeface="Arial"/>
+              </a:rPr>
+              <a:t>  crise, Q077* medicamento, P050</a:t>
+            </a:r>
+            <a:endParaRPr/>
+          </a:p>
+          <a:p>
+            <a:r>
+              <a:rPr sz="590" b="0" i="0">
+                <a:solidFill>
+                  <a:srgbClr val="111111"/>
+                </a:solidFill>
+                <a:latin typeface="Arial"/>
+                <a:ea typeface="Arial"/>
+                <a:cs typeface="Arial"/>
+              </a:rPr>
+              <a:t>  tabagismo.</a:t>
+            </a:r>
+            <a:endParaRPr/>
+          </a:p>
+          <a:p>
+            <a:r>
+              <a:rPr sz="590" b="0" i="0">
+                <a:solidFill>
+                  <a:srgbClr val="111111"/>
+                </a:solidFill>
+                <a:latin typeface="Arial"/>
+                <a:ea typeface="Arial"/>
+                <a:cs typeface="Arial"/>
+              </a:rPr>
+              <a:t>• Denominadores: população, asmáticos,</a:t>
+            </a:r>
+            <a:endParaRPr/>
+          </a:p>
+          <a:p>
+            <a:r>
+              <a:rPr sz="590" b="0" i="0">
+                <a:solidFill>
+                  <a:srgbClr val="111111"/>
+                </a:solidFill>
+                <a:latin typeface="Arial"/>
+                <a:ea typeface="Arial"/>
+                <a:cs typeface="Arial"/>
+              </a:rPr>
+              <a:t>  asmáticos com crise ou respostas</a:t>
+            </a:r>
+            <a:endParaRPr/>
+          </a:p>
+          <a:p>
+            <a:r>
+              <a:rPr sz="590" b="0" i="0">
+                <a:solidFill>
+                  <a:srgbClr val="111111"/>
+                </a:solidFill>
+                <a:latin typeface="Arial"/>
+                <a:ea typeface="Arial"/>
+                <a:cs typeface="Arial"/>
+              </a:rPr>
+              <a:t>  válidas.</a:t>
+            </a:r>
+            <a:endParaRPr/>
+          </a:p>
+          <a:p>
+            <a:r>
+              <a:rPr sz="590" b="0" i="0">
+                <a:solidFill>
+                  <a:srgbClr val="111111"/>
+                </a:solidFill>
+                <a:latin typeface="Arial"/>
+                <a:ea typeface="Arial"/>
+                <a:cs typeface="Arial"/>
+              </a:rPr>
+              <a:t>• Comparações: estimativa pontual,</a:t>
+            </a:r>
+            <a:endParaRPr/>
+          </a:p>
+          <a:p>
+            <a:r>
+              <a:rPr sz="590" b="0" i="0">
+                <a:solidFill>
+                  <a:srgbClr val="111111"/>
+                </a:solidFill>
+                <a:latin typeface="Arial"/>
+                <a:ea typeface="Arial"/>
+                <a:cs typeface="Arial"/>
+              </a:rPr>
+              <a:t>  IC95% beta, magnitude e sobreposição</a:t>
+            </a:r>
+            <a:endParaRPr/>
+          </a:p>
+          <a:p>
+            <a:r>
+              <a:rPr sz="590" b="0" i="0">
+                <a:solidFill>
+                  <a:srgbClr val="111111"/>
+                </a:solidFill>
+                <a:latin typeface="Arial"/>
+                <a:ea typeface="Arial"/>
+                <a:cs typeface="Arial"/>
+              </a:rPr>
+              <a:t>  dos intervalos.</a:t>
             </a:r>
             <a:endParaRPr/>
           </a:p>
@@ -4849,8 +5079,8 @@
         </p:nvSpPr>
         <p:spPr>
           <a:xfrm>
-            <a:off x="36223575" y="5686425"/>
-            <a:ext cx="6905625" cy="14668500"/>
+            <a:off x="36223575" y="5270000"/>
+            <a:ext cx="6905625" cy="21700000"/>
           </a:xfrm>
           <a:prstGeom prst="rect">
             <a:avLst/>
@@ -4862,53 +5092,109 @@
           </a:ln>
         </p:spPr>
         <p:txBody>
-          <a:bodyPr/>
+          <a:bodyPr wrap="square"/>
           <a:lstStyle/>
           <a:p>
             <a:r>
-              <a:rPr sz="1875" b="0" i="0">
-                <a:solidFill>
-                  <a:srgbClr val="111111"/>
-                </a:solidFill>
-                <a:latin typeface="Arial"/>
-                <a:ea typeface="Arial"/>
-                <a:cs typeface="Arial"/>
-              </a:rPr>
-              <a:t>RECURSOS</a:t>
-            </a:r>
-            <a:endParaRPr/>
-          </a:p>
-          <a:p>
-            <a:r>
-              <a:rPr sz="1875" b="0" i="0">
-                <a:solidFill>
-                  <a:srgbClr val="111111"/>
-                </a:solidFill>
-                <a:latin typeface="Arial"/>
-                <a:ea typeface="Arial"/>
-                <a:cs typeface="Arial"/>
-              </a:rPr>
-              <a:t>• QR: relatório metodológico, códigos e gráficos reprodutíveis.</a:t>
-            </a:r>
-            <a:endParaRPr/>
-          </a:p>
-          <a:p>
-            <a:r>
-              <a:rPr sz="1875" b="0" i="0">
-                <a:solidFill>
-                  <a:srgbClr val="111111"/>
-                </a:solidFill>
-                <a:latin typeface="Arial"/>
-                <a:ea typeface="Arial"/>
-                <a:cs typeface="Arial"/>
-              </a:rPr>
-              <a:t>• Link: ingodube.github.io/PNS_2013_2019/metodologia.html</a:t>
-            </a:r>
-            <a:endParaRPr/>
-          </a:p>
-          <a:p>
-            <a:r>
-              <a:rPr sz="1875" b="0" i="0">
+              <a:rPr sz="385" b="1" i="0">
+                <a:solidFill>
+                  <a:srgbClr val="111111"/>
+                </a:solidFill>
+                <a:latin typeface="Arial"/>
+                <a:ea typeface="Arial"/>
+                <a:cs typeface="Arial"/>
+              </a:rPr>
+              <a:t>INTERPRETAÇÃO ESTATÍSTICA</a:t>
+            </a:r>
+            <a:endParaRPr/>
+          </a:p>
+          <a:p>
+            <a:r>
+              <a:rPr sz="385" b="0" i="0">
+                <a:solidFill>
+                  <a:srgbClr val="111111"/>
+                </a:solidFill>
+                <a:latin typeface="Arial"/>
+                <a:ea typeface="Arial"/>
+                <a:cs typeface="Arial"/>
+              </a:rPr>
+              <a:t>• IC beta respeita limites 0-1 e é mais</a:t>
+            </a:r>
+            <a:endParaRPr/>
+          </a:p>
+          <a:p>
+            <a:r>
+              <a:rPr sz="385" b="0" i="0">
+                <a:solidFill>
+                  <a:srgbClr val="111111"/>
+                </a:solidFill>
+                <a:latin typeface="Arial"/>
+                <a:ea typeface="Arial"/>
+                <a:cs typeface="Arial"/>
+              </a:rPr>
+              <a:t>  robusto que Wald para proporções e</a:t>
+            </a:r>
+            <a:endParaRPr/>
+          </a:p>
+          <a:p>
+            <a:r>
+              <a:rPr sz="385" b="0" i="0">
+                <a:solidFill>
+                  <a:srgbClr val="111111"/>
+                </a:solidFill>
+                <a:latin typeface="Arial"/>
+                <a:ea typeface="Arial"/>
+                <a:cs typeface="Arial"/>
+              </a:rPr>
+              <a:t>  domínios pequenos.</a:t>
+            </a:r>
+            <a:endParaRPr/>
+          </a:p>
+          <a:p>
+            <a:r>
+              <a:rPr sz="385" b="0" i="0">
+                <a:solidFill>
+                  <a:srgbClr val="111111"/>
+                </a:solidFill>
+                <a:latin typeface="Arial"/>
+                <a:ea typeface="Arial"/>
+                <a:cs typeface="Arial"/>
+              </a:rPr>
+              <a:t>• ICs sem sobreposição sustentam aumento</a:t>
+            </a:r>
+            <a:endParaRPr/>
+          </a:p>
+          <a:p>
+            <a:r>
+              <a:rPr sz="385" b="0" i="0">
+                <a:solidFill>
+                  <a:srgbClr val="111111"/>
+                </a:solidFill>
+                <a:latin typeface="Arial"/>
+                <a:ea typeface="Arial"/>
+                <a:cs typeface="Arial"/>
+              </a:rPr>
+              <a:t>  nacional; ICs sobrepostos limitam</a:t>
+            </a:r>
+            <a:endParaRPr/>
+          </a:p>
+          <a:p>
+            <a:r>
+              <a:rPr sz="385" b="0" i="0">
+                <a:solidFill>
+                  <a:srgbClr val="111111"/>
+                </a:solidFill>
+                <a:latin typeface="Arial"/>
+                <a:ea typeface="Arial"/>
+                <a:cs typeface="Arial"/>
+              </a:rPr>
+              <a:t>  conclusões em muitas UFs.</a:t>
+            </a:r>
+            <a:endParaRPr/>
+          </a:p>
+          <a:p>
+            <a:r>
+              <a:rPr sz="385" b="0" i="0">
                 <a:solidFill>
                   <a:srgbClr val="111111"/>
                 </a:solidFill>
@@ -4922,77 +5208,175 @@
           </a:p>
           <a:p>
             <a:r>
-              <a:rPr sz="1875" b="0" i="0">
-                <a:solidFill>
-                  <a:srgbClr val="111111"/>
-                </a:solidFill>
-                <a:latin typeface="Arial"/>
-                <a:ea typeface="Arial"/>
-                <a:cs typeface="Arial"/>
-              </a:rPr>
-              <a:t>INTERPRETAÇÃO</a:t>
-            </a:r>
-            <a:endParaRPr/>
-          </a:p>
-          <a:p>
-            <a:r>
-              <a:rPr sz="1875" b="0" i="0">
-                <a:solidFill>
-                  <a:srgbClr val="111111"/>
-                </a:solidFill>
-                <a:latin typeface="Arial"/>
-                <a:ea typeface="Arial"/>
-                <a:cs typeface="Arial"/>
-              </a:rPr>
-              <a:t>• ICs sem sobreposição sustentam aumento nacional do diagnóstico.</a:t>
-            </a:r>
-            <a:endParaRPr/>
-          </a:p>
-          <a:p>
-            <a:r>
-              <a:rPr sz="1875" b="0" i="0">
-                <a:solidFill>
-                  <a:srgbClr val="111111"/>
-                </a:solidFill>
-                <a:latin typeface="Arial"/>
-                <a:ea typeface="Arial"/>
-                <a:cs typeface="Arial"/>
-              </a:rPr>
-              <a:t>• ICs sobrepostos limitam conclusões em várias UFs.</a:t>
-            </a:r>
-            <a:endParaRPr/>
-          </a:p>
-          <a:p>
-            <a:r>
-              <a:rPr sz="1875" b="0" i="0">
-                <a:solidFill>
-                  <a:srgbClr val="111111"/>
-                </a:solidFill>
-                <a:latin typeface="Arial"/>
-                <a:ea typeface="Arial"/>
-                <a:cs typeface="Arial"/>
-              </a:rPr>
-              <a:t>• Estabilidade das crises sugere manejo ainda insuficiente.</a:t>
-            </a:r>
-            <a:endParaRPr/>
-          </a:p>
-          <a:p>
-            <a:r>
-              <a:rPr sz="1875" b="0" i="0">
-                <a:solidFill>
-                  <a:srgbClr val="111111"/>
-                </a:solidFill>
-                <a:latin typeface="Arial"/>
-                <a:ea typeface="Arial"/>
-                <a:cs typeface="Arial"/>
-              </a:rPr>
-              <a:t>• Tabagismo caiu, mas não explica isoladamente o aumento do diagnóstico.</a:t>
-            </a:r>
-            <a:endParaRPr/>
-          </a:p>
-          <a:p>
-            <a:r>
-              <a:rPr sz="1875" b="0" i="0">
+              <a:rPr sz="385" b="0" i="0">
+                <a:solidFill>
+                  <a:srgbClr val="111111"/>
+                </a:solidFill>
+                <a:latin typeface="Arial"/>
+                <a:ea typeface="Arial"/>
+                <a:cs typeface="Arial"/>
+              </a:rPr>
+              <a:t>DADOS OBSERVACIONAIS E INTEROPERABILIDADE</a:t>
+            </a:r>
+            <a:endParaRPr/>
+          </a:p>
+          <a:p>
+            <a:r>
+              <a:rPr sz="385" b="0" i="0">
+                <a:solidFill>
+                  <a:srgbClr val="111111"/>
+                </a:solidFill>
+                <a:latin typeface="Arial"/>
+                <a:ea typeface="Arial"/>
+                <a:cs typeface="Arial"/>
+              </a:rPr>
+              <a:t>• Fluxo ETL: extrair microdados,</a:t>
+            </a:r>
+            <a:endParaRPr/>
+          </a:p>
+          <a:p>
+            <a:r>
+              <a:rPr sz="385" b="0" i="0">
+                <a:solidFill>
+                  <a:srgbClr val="111111"/>
+                </a:solidFill>
+                <a:latin typeface="Arial"/>
+                <a:ea typeface="Arial"/>
+                <a:cs typeface="Arial"/>
+              </a:rPr>
+              <a:t>  transformar variáveis, documentar regras</a:t>
+            </a:r>
+            <a:endParaRPr/>
+          </a:p>
+          <a:p>
+            <a:r>
+              <a:rPr sz="385" b="0" i="0">
+                <a:solidFill>
+                  <a:srgbClr val="111111"/>
+                </a:solidFill>
+                <a:latin typeface="Arial"/>
+                <a:ea typeface="Arial"/>
+                <a:cs typeface="Arial"/>
+              </a:rPr>
+              <a:t>  e carregar tabelas analíticas.</a:t>
+            </a:r>
+            <a:endParaRPr/>
+          </a:p>
+          <a:p>
+            <a:r>
+              <a:rPr sz="385" b="0" i="0">
+                <a:solidFill>
+                  <a:srgbClr val="111111"/>
+                </a:solidFill>
+                <a:latin typeface="Arial"/>
+                <a:ea typeface="Arial"/>
+                <a:cs typeface="Arial"/>
+              </a:rPr>
+              <a:t>• PNS não é base clínica longitudinal;</a:t>
+            </a:r>
+            <a:endParaRPr/>
+          </a:p>
+          <a:p>
+            <a:r>
+              <a:rPr sz="385" b="0" i="0">
+                <a:solidFill>
+                  <a:srgbClr val="111111"/>
+                </a:solidFill>
+                <a:latin typeface="Arial"/>
+                <a:ea typeface="Arial"/>
+                <a:cs typeface="Arial"/>
+              </a:rPr>
+              <a:t>  OMOP/OHDSI orienta padronização,</a:t>
+            </a:r>
+            <a:endParaRPr/>
+          </a:p>
+          <a:p>
+            <a:r>
+              <a:rPr sz="385" b="0" i="0">
+                <a:solidFill>
+                  <a:srgbClr val="111111"/>
+                </a:solidFill>
+                <a:latin typeface="Arial"/>
+                <a:ea typeface="Arial"/>
+                <a:cs typeface="Arial"/>
+              </a:rPr>
+              <a:t>  vocabulários e comparação futura com</a:t>
+            </a:r>
+            <a:endParaRPr/>
+          </a:p>
+          <a:p>
+            <a:r>
+              <a:rPr sz="385" b="0" i="0">
+                <a:solidFill>
+                  <a:srgbClr val="111111"/>
+                </a:solidFill>
+                <a:latin typeface="Arial"/>
+                <a:ea typeface="Arial"/>
+                <a:cs typeface="Arial"/>
+              </a:rPr>
+              <a:t>  bases assistenciais.</a:t>
+            </a:r>
+            <a:endParaRPr/>
+          </a:p>
+          <a:p>
+            <a:r>
+              <a:rPr sz="385" b="0" i="0">
+                <a:solidFill>
+                  <a:srgbClr val="111111"/>
+                </a:solidFill>
+                <a:latin typeface="Arial"/>
+                <a:ea typeface="Arial"/>
+                <a:cs typeface="Arial"/>
+              </a:rPr>
+              <a:t>• A camada populacional ajuda a</a:t>
+            </a:r>
+            <a:endParaRPr/>
+          </a:p>
+          <a:p>
+            <a:r>
+              <a:rPr sz="385" b="0" i="0">
+                <a:solidFill>
+                  <a:srgbClr val="111111"/>
+                </a:solidFill>
+                <a:latin typeface="Arial"/>
+                <a:ea typeface="Arial"/>
+                <a:cs typeface="Arial"/>
+              </a:rPr>
+              <a:t>  contextualizar trajetórias clínicas,</a:t>
+            </a:r>
+            <a:endParaRPr/>
+          </a:p>
+          <a:p>
+            <a:r>
+              <a:rPr sz="385" b="0" i="0">
+                <a:solidFill>
+                  <a:srgbClr val="111111"/>
+                </a:solidFill>
+                <a:latin typeface="Arial"/>
+                <a:ea typeface="Arial"/>
+                <a:cs typeface="Arial"/>
+              </a:rPr>
+              <a:t>  dispensação, exacerbações e uso de</a:t>
+            </a:r>
+            <a:endParaRPr/>
+          </a:p>
+          <a:p>
+            <a:r>
+              <a:rPr sz="385" b="0" i="0">
+                <a:solidFill>
+                  <a:srgbClr val="111111"/>
+                </a:solidFill>
+                <a:latin typeface="Arial"/>
+                <a:ea typeface="Arial"/>
+                <a:cs typeface="Arial"/>
+              </a:rPr>
+              <a:t>  serviços.</a:t>
+            </a:r>
+            <a:endParaRPr/>
+          </a:p>
+          <a:p>
+            <a:r>
+              <a:rPr sz="385" b="0" i="0">
                 <a:solidFill>
                   <a:srgbClr val="111111"/>
                 </a:solidFill>
@@ -5006,63 +5390,7 @@
           </a:p>
           <a:p>
             <a:r>
-              <a:rPr sz="1875" b="0" i="0">
-                <a:solidFill>
-                  <a:srgbClr val="111111"/>
-                </a:solidFill>
-                <a:latin typeface="Arial"/>
-                <a:ea typeface="Arial"/>
-                <a:cs typeface="Arial"/>
-              </a:rPr>
-              <a:t>DADOS OBSERVACIONAIS</a:t>
-            </a:r>
-            <a:endParaRPr/>
-          </a:p>
-          <a:p>
-            <a:r>
-              <a:rPr sz="1875" b="0" i="0">
-                <a:solidFill>
-                  <a:srgbClr val="111111"/>
-                </a:solidFill>
-                <a:latin typeface="Arial"/>
-                <a:ea typeface="Arial"/>
-                <a:cs typeface="Arial"/>
-              </a:rPr>
-              <a:t>• Fluxo analítico segue lógica ETL.</a:t>
-            </a:r>
-            <a:endParaRPr/>
-          </a:p>
-          <a:p>
-            <a:r>
-              <a:rPr sz="1875" b="0" i="0">
-                <a:solidFill>
-                  <a:srgbClr val="111111"/>
-                </a:solidFill>
-                <a:latin typeface="Arial"/>
-                <a:ea typeface="Arial"/>
-                <a:cs typeface="Arial"/>
-              </a:rPr>
-              <a:t>• OMOP/OHDSI inspira padronização, interoperabilidade e comparação futura com bases assistenciais.</a:t>
-            </a:r>
-            <a:endParaRPr/>
-          </a:p>
-          <a:p>
-            <a:r>
-              <a:rPr sz="1875" b="0" i="0">
-                <a:solidFill>
-                  <a:srgbClr val="111111"/>
-                </a:solidFill>
-                <a:latin typeface="Arial"/>
-                <a:ea typeface="Arial"/>
-                <a:cs typeface="Arial"/>
-              </a:rPr>
-              <a:t/>
-            </a:r>
-            <a:endParaRPr/>
-          </a:p>
-          <a:p>
-            <a:r>
-              <a:rPr sz="1875" b="0" i="0">
+              <a:rPr sz="385" b="0" i="0">
                 <a:solidFill>
                   <a:srgbClr val="111111"/>
                 </a:solidFill>
@@ -5076,15 +5404,883 @@
           </a:p>
           <a:p>
             <a:r>
-              <a:rPr sz="1875" b="0" i="0">
-                <a:solidFill>
-                  <a:srgbClr val="111111"/>
-                </a:solidFill>
-                <a:latin typeface="Arial"/>
-                <a:ea typeface="Arial"/>
-                <a:cs typeface="Arial"/>
-              </a:rPr>
-              <a:t>[1] GAN 2022; [2] Souza-Júnior 2015; [3] Dube/Silva 2026; [4] Menezes 2015; [5] Santos 2018; [6] Brown 2001; [7] Korn 1998.</a:t>
+              <a:rPr sz="385" b="0" i="0">
+                <a:solidFill>
+                  <a:srgbClr val="111111"/>
+                </a:solidFill>
+                <a:latin typeface="Arial"/>
+                <a:ea typeface="Arial"/>
+                <a:cs typeface="Arial"/>
+              </a:rPr>
+              <a:t>[1] GLOBAL ASTHMA NETWORK. Global Asthma</a:t>
+            </a:r>
+            <a:endParaRPr/>
+          </a:p>
+          <a:p>
+            <a:r>
+              <a:rPr sz="385" b="0" i="0">
+                <a:solidFill>
+                  <a:srgbClr val="111111"/>
+                </a:solidFill>
+                <a:latin typeface="Arial"/>
+                <a:ea typeface="Arial"/>
+                <a:cs typeface="Arial"/>
+              </a:rPr>
+              <a:t>    Report 2022. Auckland, New Zealand:</a:t>
+            </a:r>
+            <a:endParaRPr/>
+          </a:p>
+          <a:p>
+            <a:r>
+              <a:rPr sz="385" b="0" i="0">
+                <a:solidFill>
+                  <a:srgbClr val="111111"/>
+                </a:solidFill>
+                <a:latin typeface="Arial"/>
+                <a:ea typeface="Arial"/>
+                <a:cs typeface="Arial"/>
+              </a:rPr>
+              <a:t>    Global Asthma Network, 2022. Disponível</a:t>
+            </a:r>
+            <a:endParaRPr/>
+          </a:p>
+          <a:p>
+            <a:r>
+              <a:rPr sz="385" b="0" i="0">
+                <a:solidFill>
+                  <a:srgbClr val="111111"/>
+                </a:solidFill>
+                <a:latin typeface="Arial"/>
+                <a:ea typeface="Arial"/>
+                <a:cs typeface="Arial"/>
+              </a:rPr>
+              <a:t>    em:</a:t>
+            </a:r>
+            <a:endParaRPr/>
+          </a:p>
+          <a:p>
+            <a:r>
+              <a:rPr sz="385" b="0" i="0">
+                <a:solidFill>
+                  <a:srgbClr val="111111"/>
+                </a:solidFill>
+                <a:latin typeface="Arial"/>
+                <a:ea typeface="Arial"/>
+                <a:cs typeface="Arial"/>
+              </a:rPr>
+              <a:t>    https://globalasthmareport.org/resources/Global_Asthma_Report_2022.pdf.</a:t>
+            </a:r>
+            <a:endParaRPr/>
+          </a:p>
+          <a:p>
+            <a:r>
+              <a:rPr sz="385" b="0" i="0">
+                <a:solidFill>
+                  <a:srgbClr val="111111"/>
+                </a:solidFill>
+                <a:latin typeface="Arial"/>
+                <a:ea typeface="Arial"/>
+                <a:cs typeface="Arial"/>
+              </a:rPr>
+              <a:t>    Acesso em: 19 set. 2025.</a:t>
+            </a:r>
+            <a:endParaRPr/>
+          </a:p>
+          <a:p>
+            <a:r>
+              <a:rPr sz="385" b="0" i="0">
+                <a:solidFill>
+                  <a:srgbClr val="111111"/>
+                </a:solidFill>
+                <a:latin typeface="Arial"/>
+                <a:ea typeface="Arial"/>
+                <a:cs typeface="Arial"/>
+              </a:rPr>
+              <a:t>[2] SOUZA-JÚNIOR, Paulo Roberto Borges de</a:t>
+            </a:r>
+            <a:endParaRPr/>
+          </a:p>
+          <a:p>
+            <a:r>
+              <a:rPr sz="385" b="0" i="0">
+                <a:solidFill>
+                  <a:srgbClr val="111111"/>
+                </a:solidFill>
+                <a:latin typeface="Arial"/>
+                <a:ea typeface="Arial"/>
+                <a:cs typeface="Arial"/>
+              </a:rPr>
+              <a:t>    et al. Desenho da amostra da Pesquisa</a:t>
+            </a:r>
+            <a:endParaRPr/>
+          </a:p>
+          <a:p>
+            <a:r>
+              <a:rPr sz="385" b="0" i="0">
+                <a:solidFill>
+                  <a:srgbClr val="111111"/>
+                </a:solidFill>
+                <a:latin typeface="Arial"/>
+                <a:ea typeface="Arial"/>
+                <a:cs typeface="Arial"/>
+              </a:rPr>
+              <a:t>    Nacional de Saúde 2013. Epidemiologia e</a:t>
+            </a:r>
+            <a:endParaRPr/>
+          </a:p>
+          <a:p>
+            <a:r>
+              <a:rPr sz="385" b="0" i="0">
+                <a:solidFill>
+                  <a:srgbClr val="111111"/>
+                </a:solidFill>
+                <a:latin typeface="Arial"/>
+                <a:ea typeface="Arial"/>
+                <a:cs typeface="Arial"/>
+              </a:rPr>
+              <a:t>    Serviços de Saúde, v. 24, p. 207-216,</a:t>
+            </a:r>
+            <a:endParaRPr/>
+          </a:p>
+          <a:p>
+            <a:r>
+              <a:rPr sz="385" b="0" i="0">
+                <a:solidFill>
+                  <a:srgbClr val="111111"/>
+                </a:solidFill>
+                <a:latin typeface="Arial"/>
+                <a:ea typeface="Arial"/>
+                <a:cs typeface="Arial"/>
+              </a:rPr>
+              <a:t>    2015.</a:t>
+            </a:r>
+            <a:endParaRPr/>
+          </a:p>
+          <a:p>
+            <a:r>
+              <a:rPr sz="385" b="0" i="0">
+                <a:solidFill>
+                  <a:srgbClr val="111111"/>
+                </a:solidFill>
+                <a:latin typeface="Arial"/>
+                <a:ea typeface="Arial"/>
+                <a:cs typeface="Arial"/>
+              </a:rPr>
+              <a:t>[3] DUBE, I.; SILVA, M. E. L.</a:t>
+            </a:r>
+            <a:endParaRPr/>
+          </a:p>
+          <a:p>
+            <a:r>
+              <a:rPr sz="385" b="0" i="0">
+                <a:solidFill>
+                  <a:srgbClr val="111111"/>
+                </a:solidFill>
+                <a:latin typeface="Arial"/>
+                <a:ea typeface="Arial"/>
+                <a:cs typeface="Arial"/>
+              </a:rPr>
+              <a:t>    PNS_2013_2019. GitHub, 2026. Disponível</a:t>
+            </a:r>
+            <a:endParaRPr/>
+          </a:p>
+          <a:p>
+            <a:r>
+              <a:rPr sz="385" b="0" i="0">
+                <a:solidFill>
+                  <a:srgbClr val="111111"/>
+                </a:solidFill>
+                <a:latin typeface="Arial"/>
+                <a:ea typeface="Arial"/>
+                <a:cs typeface="Arial"/>
+              </a:rPr>
+              <a:t>    em:</a:t>
+            </a:r>
+            <a:endParaRPr/>
+          </a:p>
+          <a:p>
+            <a:r>
+              <a:rPr sz="385" b="0" i="0">
+                <a:solidFill>
+                  <a:srgbClr val="111111"/>
+                </a:solidFill>
+                <a:latin typeface="Arial"/>
+                <a:ea typeface="Arial"/>
+                <a:cs typeface="Arial"/>
+              </a:rPr>
+              <a:t>    https://github.com/ingodube/PNS_2013_2019.</a:t>
+            </a:r>
+            <a:endParaRPr/>
+          </a:p>
+          <a:p>
+            <a:r>
+              <a:rPr sz="385" b="0" i="0">
+                <a:solidFill>
+                  <a:srgbClr val="111111"/>
+                </a:solidFill>
+                <a:latin typeface="Arial"/>
+                <a:ea typeface="Arial"/>
+                <a:cs typeface="Arial"/>
+              </a:rPr>
+              <a:t>    Acesso em: 28 mai. 2026.</a:t>
+            </a:r>
+            <a:endParaRPr/>
+          </a:p>
+          <a:p>
+            <a:r>
+              <a:rPr sz="385" b="0" i="0">
+                <a:solidFill>
+                  <a:srgbClr val="111111"/>
+                </a:solidFill>
+                <a:latin typeface="Arial"/>
+                <a:ea typeface="Arial"/>
+                <a:cs typeface="Arial"/>
+              </a:rPr>
+              <a:t>[4] MENEZES, A. M. B. et al. Prevalência de</a:t>
+            </a:r>
+            <a:endParaRPr/>
+          </a:p>
+          <a:p>
+            <a:r>
+              <a:rPr sz="385" b="0" i="0">
+                <a:solidFill>
+                  <a:srgbClr val="111111"/>
+                </a:solidFill>
+                <a:latin typeface="Arial"/>
+                <a:ea typeface="Arial"/>
+                <a:cs typeface="Arial"/>
+              </a:rPr>
+              <a:t>    diagnóstico médico de asma em adultos</a:t>
+            </a:r>
+            <a:endParaRPr/>
+          </a:p>
+          <a:p>
+            <a:r>
+              <a:rPr sz="385" b="0" i="0">
+                <a:solidFill>
+                  <a:srgbClr val="111111"/>
+                </a:solidFill>
+                <a:latin typeface="Arial"/>
+                <a:ea typeface="Arial"/>
+                <a:cs typeface="Arial"/>
+              </a:rPr>
+              <a:t>    brasileiros: Pesquisa Nacional de</a:t>
+            </a:r>
+            <a:endParaRPr/>
+          </a:p>
+          <a:p>
+            <a:r>
+              <a:rPr sz="385" b="0" i="0">
+                <a:solidFill>
+                  <a:srgbClr val="111111"/>
+                </a:solidFill>
+                <a:latin typeface="Arial"/>
+                <a:ea typeface="Arial"/>
+                <a:cs typeface="Arial"/>
+              </a:rPr>
+              <a:t>    Saúde, 2013. Revista Brasileira de</a:t>
+            </a:r>
+            <a:endParaRPr/>
+          </a:p>
+          <a:p>
+            <a:r>
+              <a:rPr sz="385" b="0" i="0">
+                <a:solidFill>
+                  <a:srgbClr val="111111"/>
+                </a:solidFill>
+                <a:latin typeface="Arial"/>
+                <a:ea typeface="Arial"/>
+                <a:cs typeface="Arial"/>
+              </a:rPr>
+              <a:t>    Epidemiologia, São Paulo, v. 18, supl.</a:t>
+            </a:r>
+            <a:endParaRPr/>
+          </a:p>
+          <a:p>
+            <a:r>
+              <a:rPr sz="385" b="0" i="0">
+                <a:solidFill>
+                  <a:srgbClr val="111111"/>
+                </a:solidFill>
+                <a:latin typeface="Arial"/>
+                <a:ea typeface="Arial"/>
+                <a:cs typeface="Arial"/>
+              </a:rPr>
+              <a:t>    2, p. 204-213, 2015.</a:t>
+            </a:r>
+            <a:endParaRPr/>
+          </a:p>
+          <a:p>
+            <a:r>
+              <a:rPr sz="385" b="0" i="0">
+                <a:solidFill>
+                  <a:srgbClr val="111111"/>
+                </a:solidFill>
+                <a:latin typeface="Arial"/>
+                <a:ea typeface="Arial"/>
+                <a:cs typeface="Arial"/>
+              </a:rPr>
+              <a:t>[5] SEVERE ASTHMA. Non-Pharmacological</a:t>
+            </a:r>
+            <a:endParaRPr/>
+          </a:p>
+          <a:p>
+            <a:r>
+              <a:rPr sz="385" b="0" i="0">
+                <a:solidFill>
+                  <a:srgbClr val="111111"/>
+                </a:solidFill>
+                <a:latin typeface="Arial"/>
+                <a:ea typeface="Arial"/>
+                <a:cs typeface="Arial"/>
+              </a:rPr>
+              <a:t>    Interventions for Asthma. Disponível</a:t>
+            </a:r>
+            <a:endParaRPr/>
+          </a:p>
+          <a:p>
+            <a:r>
+              <a:rPr sz="385" b="0" i="0">
+                <a:solidFill>
+                  <a:srgbClr val="111111"/>
+                </a:solidFill>
+                <a:latin typeface="Arial"/>
+                <a:ea typeface="Arial"/>
+                <a:cs typeface="Arial"/>
+              </a:rPr>
+              <a:t>    em:</a:t>
+            </a:r>
+            <a:endParaRPr/>
+          </a:p>
+          <a:p>
+            <a:r>
+              <a:rPr sz="385" b="0" i="0">
+                <a:solidFill>
+                  <a:srgbClr val="111111"/>
+                </a:solidFill>
+                <a:latin typeface="Arial"/>
+                <a:ea typeface="Arial"/>
+                <a:cs typeface="Arial"/>
+              </a:rPr>
+              <a:t>    https://www.severeasthma.org.au/non-pharmacological-interventions-asthma/.</a:t>
+            </a:r>
+            <a:endParaRPr/>
+          </a:p>
+          <a:p>
+            <a:r>
+              <a:rPr sz="385" b="0" i="0">
+                <a:solidFill>
+                  <a:srgbClr val="111111"/>
+                </a:solidFill>
+                <a:latin typeface="Arial"/>
+                <a:ea typeface="Arial"/>
+                <a:cs typeface="Arial"/>
+              </a:rPr>
+              <a:t>    Acesso em: 19 set. 2025.</a:t>
+            </a:r>
+            <a:endParaRPr/>
+          </a:p>
+          <a:p>
+            <a:r>
+              <a:rPr sz="385" b="0" i="0">
+                <a:solidFill>
+                  <a:srgbClr val="111111"/>
+                </a:solidFill>
+                <a:latin typeface="Arial"/>
+                <a:ea typeface="Arial"/>
+                <a:cs typeface="Arial"/>
+              </a:rPr>
+              <a:t>[6] SANTOS, Felipe Moraes dos et al.</a:t>
+            </a:r>
+            <a:endParaRPr/>
+          </a:p>
+          <a:p>
+            <a:r>
+              <a:rPr sz="385" b="0" i="0">
+                <a:solidFill>
+                  <a:srgbClr val="111111"/>
+                </a:solidFill>
+                <a:latin typeface="Arial"/>
+                <a:ea typeface="Arial"/>
+                <a:cs typeface="Arial"/>
+              </a:rPr>
+              <a:t>    Tendência da prevalência de asma</a:t>
+            </a:r>
+            <a:endParaRPr/>
+          </a:p>
+          <a:p>
+            <a:r>
+              <a:rPr sz="385" b="0" i="0">
+                <a:solidFill>
+                  <a:srgbClr val="111111"/>
+                </a:solidFill>
+                <a:latin typeface="Arial"/>
+                <a:ea typeface="Arial"/>
+                <a:cs typeface="Arial"/>
+              </a:rPr>
+              <a:t>    autorreferida no Brasil de 2003 a 2013</a:t>
+            </a:r>
+            <a:endParaRPr/>
+          </a:p>
+          <a:p>
+            <a:r>
+              <a:rPr sz="385" b="0" i="0">
+                <a:solidFill>
+                  <a:srgbClr val="111111"/>
+                </a:solidFill>
+                <a:latin typeface="Arial"/>
+                <a:ea typeface="Arial"/>
+                <a:cs typeface="Arial"/>
+              </a:rPr>
+              <a:t>    em adultos e fatores associados à</a:t>
+            </a:r>
+            <a:endParaRPr/>
+          </a:p>
+          <a:p>
+            <a:r>
+              <a:rPr sz="385" b="0" i="0">
+                <a:solidFill>
+                  <a:srgbClr val="111111"/>
+                </a:solidFill>
+                <a:latin typeface="Arial"/>
+                <a:ea typeface="Arial"/>
+                <a:cs typeface="Arial"/>
+              </a:rPr>
+              <a:t>    prevalência. Jornal Brasileiro de</a:t>
+            </a:r>
+            <a:endParaRPr/>
+          </a:p>
+          <a:p>
+            <a:r>
+              <a:rPr sz="385" b="0" i="0">
+                <a:solidFill>
+                  <a:srgbClr val="111111"/>
+                </a:solidFill>
+                <a:latin typeface="Arial"/>
+                <a:ea typeface="Arial"/>
+                <a:cs typeface="Arial"/>
+              </a:rPr>
+              <a:t>    Pneumologia, v. 44, n. 6, p. 491-497,</a:t>
+            </a:r>
+            <a:endParaRPr/>
+          </a:p>
+          <a:p>
+            <a:r>
+              <a:rPr sz="385" b="0" i="0">
+                <a:solidFill>
+                  <a:srgbClr val="111111"/>
+                </a:solidFill>
+                <a:latin typeface="Arial"/>
+                <a:ea typeface="Arial"/>
+                <a:cs typeface="Arial"/>
+              </a:rPr>
+              <a:t>    2018.</a:t>
+            </a:r>
+            <a:endParaRPr/>
+          </a:p>
+          <a:p>
+            <a:r>
+              <a:rPr sz="385" b="0" i="0">
+                <a:solidFill>
+                  <a:srgbClr val="111111"/>
+                </a:solidFill>
+                <a:latin typeface="Arial"/>
+                <a:ea typeface="Arial"/>
+                <a:cs typeface="Arial"/>
+              </a:rPr>
+              <a:t>    doi:10.1590/S1806-37562017000000328.</a:t>
+            </a:r>
+            <a:endParaRPr/>
+          </a:p>
+          <a:p>
+            <a:r>
+              <a:rPr sz="385" b="0" i="0">
+                <a:solidFill>
+                  <a:srgbClr val="111111"/>
+                </a:solidFill>
+                <a:latin typeface="Arial"/>
+                <a:ea typeface="Arial"/>
+                <a:cs typeface="Arial"/>
+              </a:rPr>
+              <a:t>[7] TO, T. et al. Global asthma prevalence</a:t>
+            </a:r>
+            <a:endParaRPr/>
+          </a:p>
+          <a:p>
+            <a:r>
+              <a:rPr sz="385" b="0" i="0">
+                <a:solidFill>
+                  <a:srgbClr val="111111"/>
+                </a:solidFill>
+                <a:latin typeface="Arial"/>
+                <a:ea typeface="Arial"/>
+                <a:cs typeface="Arial"/>
+              </a:rPr>
+              <a:t>    in adults: findings from the</a:t>
+            </a:r>
+            <a:endParaRPr/>
+          </a:p>
+          <a:p>
+            <a:r>
+              <a:rPr sz="385" b="0" i="0">
+                <a:solidFill>
+                  <a:srgbClr val="111111"/>
+                </a:solidFill>
+                <a:latin typeface="Arial"/>
+                <a:ea typeface="Arial"/>
+                <a:cs typeface="Arial"/>
+              </a:rPr>
+              <a:t>    cross-sectional world health survey.</a:t>
+            </a:r>
+            <a:endParaRPr/>
+          </a:p>
+          <a:p>
+            <a:r>
+              <a:rPr sz="385" b="0" i="0">
+                <a:solidFill>
+                  <a:srgbClr val="111111"/>
+                </a:solidFill>
+                <a:latin typeface="Arial"/>
+                <a:ea typeface="Arial"/>
+                <a:cs typeface="Arial"/>
+              </a:rPr>
+              <a:t>    BMC Public Health, v. 12, art. 204,</a:t>
+            </a:r>
+            <a:endParaRPr/>
+          </a:p>
+          <a:p>
+            <a:r>
+              <a:rPr sz="385" b="0" i="0">
+                <a:solidFill>
+                  <a:srgbClr val="111111"/>
+                </a:solidFill>
+                <a:latin typeface="Arial"/>
+                <a:ea typeface="Arial"/>
+                <a:cs typeface="Arial"/>
+              </a:rPr>
+              <a:t>    2012. doi:10.1186/1471-2458-12-204.</a:t>
+            </a:r>
+            <a:endParaRPr/>
+          </a:p>
+          <a:p>
+            <a:r>
+              <a:rPr sz="385" b="0" i="0">
+                <a:solidFill>
+                  <a:srgbClr val="111111"/>
+                </a:solidFill>
+                <a:latin typeface="Arial"/>
+                <a:ea typeface="Arial"/>
+                <a:cs typeface="Arial"/>
+              </a:rPr>
+              <a:t>[8] OHDSI. Standardized Data: The OMOP</a:t>
+            </a:r>
+            <a:endParaRPr/>
+          </a:p>
+          <a:p>
+            <a:r>
+              <a:rPr sz="385" b="0" i="0">
+                <a:solidFill>
+                  <a:srgbClr val="111111"/>
+                </a:solidFill>
+                <a:latin typeface="Arial"/>
+                <a:ea typeface="Arial"/>
+                <a:cs typeface="Arial"/>
+              </a:rPr>
+              <a:t>    Common Data Model. Disponível em:</a:t>
+            </a:r>
+            <a:endParaRPr/>
+          </a:p>
+          <a:p>
+            <a:r>
+              <a:rPr sz="385" b="0" i="0">
+                <a:solidFill>
+                  <a:srgbClr val="111111"/>
+                </a:solidFill>
+                <a:latin typeface="Arial"/>
+                <a:ea typeface="Arial"/>
+                <a:cs typeface="Arial"/>
+              </a:rPr>
+              <a:t>    https://www.ohdsi.org/data-standardization/.</a:t>
+            </a:r>
+            <a:endParaRPr/>
+          </a:p>
+          <a:p>
+            <a:r>
+              <a:rPr sz="385" b="0" i="0">
+                <a:solidFill>
+                  <a:srgbClr val="111111"/>
+                </a:solidFill>
+                <a:latin typeface="Arial"/>
+                <a:ea typeface="Arial"/>
+                <a:cs typeface="Arial"/>
+              </a:rPr>
+              <a:t>[9] OHDSI. OMOP Common Data Model.</a:t>
+            </a:r>
+            <a:endParaRPr/>
+          </a:p>
+          <a:p>
+            <a:r>
+              <a:rPr sz="385" b="0" i="0">
+                <a:solidFill>
+                  <a:srgbClr val="111111"/>
+                </a:solidFill>
+                <a:latin typeface="Arial"/>
+                <a:ea typeface="Arial"/>
+                <a:cs typeface="Arial"/>
+              </a:rPr>
+              <a:t>    Disponível em:</a:t>
+            </a:r>
+            <a:endParaRPr/>
+          </a:p>
+          <a:p>
+            <a:r>
+              <a:rPr sz="385" b="0" i="0">
+                <a:solidFill>
+                  <a:srgbClr val="111111"/>
+                </a:solidFill>
+                <a:latin typeface="Arial"/>
+                <a:ea typeface="Arial"/>
+                <a:cs typeface="Arial"/>
+              </a:rPr>
+              <a:t>    https://ohdsi.github.io/CommonDataModel/.</a:t>
+            </a:r>
+            <a:endParaRPr/>
+          </a:p>
+          <a:p>
+            <a:r>
+              <a:rPr sz="385" b="0" i="0">
+                <a:solidFill>
+                  <a:srgbClr val="111111"/>
+                </a:solidFill>
+                <a:latin typeface="Arial"/>
+                <a:ea typeface="Arial"/>
+                <a:cs typeface="Arial"/>
+              </a:rPr>
+              <a:t>[10] OHDSI. ETL Creation Best Practices.</a:t>
+            </a:r>
+            <a:endParaRPr/>
+          </a:p>
+          <a:p>
+            <a:r>
+              <a:rPr sz="385" b="0" i="0">
+                <a:solidFill>
+                  <a:srgbClr val="111111"/>
+                </a:solidFill>
+                <a:latin typeface="Arial"/>
+                <a:ea typeface="Arial"/>
+                <a:cs typeface="Arial"/>
+              </a:rPr>
+              <a:t>    Disponível em:</a:t>
+            </a:r>
+            <a:endParaRPr/>
+          </a:p>
+          <a:p>
+            <a:r>
+              <a:rPr sz="385" b="0" i="0">
+                <a:solidFill>
+                  <a:srgbClr val="111111"/>
+                </a:solidFill>
+                <a:latin typeface="Arial"/>
+                <a:ea typeface="Arial"/>
+                <a:cs typeface="Arial"/>
+              </a:rPr>
+              <a:t>    https://www.ohdsi.org/web/wiki/doku.php?id=documentation:etl_best_practices.</a:t>
+            </a:r>
+            <a:endParaRPr/>
+          </a:p>
+          <a:p>
+            <a:r>
+              <a:rPr sz="385" b="0" i="0">
+                <a:solidFill>
+                  <a:srgbClr val="111111"/>
+                </a:solidFill>
+                <a:latin typeface="Arial"/>
+                <a:ea typeface="Arial"/>
+                <a:cs typeface="Arial"/>
+              </a:rPr>
+              <a:t>[11] LUMLEY, Thomas. Complex Surveys: A</a:t>
+            </a:r>
+            <a:endParaRPr/>
+          </a:p>
+          <a:p>
+            <a:r>
+              <a:rPr sz="385" b="0" i="0">
+                <a:solidFill>
+                  <a:srgbClr val="111111"/>
+                </a:solidFill>
+                <a:latin typeface="Arial"/>
+                <a:ea typeface="Arial"/>
+                <a:cs typeface="Arial"/>
+              </a:rPr>
+              <a:t>    Guide to Analysis Using R. Hoboken:</a:t>
+            </a:r>
+            <a:endParaRPr/>
+          </a:p>
+          <a:p>
+            <a:r>
+              <a:rPr sz="385" b="0" i="0">
+                <a:solidFill>
+                  <a:srgbClr val="111111"/>
+                </a:solidFill>
+                <a:latin typeface="Arial"/>
+                <a:ea typeface="Arial"/>
+                <a:cs typeface="Arial"/>
+              </a:rPr>
+              <a:t>    Wiley, 2010.</a:t>
+            </a:r>
+            <a:endParaRPr/>
+          </a:p>
+          <a:p>
+            <a:r>
+              <a:rPr sz="385" b="0" i="0">
+                <a:solidFill>
+                  <a:srgbClr val="111111"/>
+                </a:solidFill>
+                <a:latin typeface="Arial"/>
+                <a:ea typeface="Arial"/>
+                <a:cs typeface="Arial"/>
+              </a:rPr>
+              <a:t>[12] BROWN, Lawrence D.; CAI, T. Tony;</a:t>
+            </a:r>
+            <a:endParaRPr/>
+          </a:p>
+          <a:p>
+            <a:r>
+              <a:rPr sz="385" b="0" i="0">
+                <a:solidFill>
+                  <a:srgbClr val="111111"/>
+                </a:solidFill>
+                <a:latin typeface="Arial"/>
+                <a:ea typeface="Arial"/>
+                <a:cs typeface="Arial"/>
+              </a:rPr>
+              <a:t>    DASGUPTA, Anirban. Interval estimation</a:t>
+            </a:r>
+            <a:endParaRPr/>
+          </a:p>
+          <a:p>
+            <a:r>
+              <a:rPr sz="385" b="0" i="0">
+                <a:solidFill>
+                  <a:srgbClr val="111111"/>
+                </a:solidFill>
+                <a:latin typeface="Arial"/>
+                <a:ea typeface="Arial"/>
+                <a:cs typeface="Arial"/>
+              </a:rPr>
+              <a:t>    for a binomial proportion. Statistical</a:t>
+            </a:r>
+            <a:endParaRPr/>
+          </a:p>
+          <a:p>
+            <a:r>
+              <a:rPr sz="385" b="0" i="0">
+                <a:solidFill>
+                  <a:srgbClr val="111111"/>
+                </a:solidFill>
+                <a:latin typeface="Arial"/>
+                <a:ea typeface="Arial"/>
+                <a:cs typeface="Arial"/>
+              </a:rPr>
+              <a:t>    Science, v. 16, n. 2, p. 101-133, 2001.</a:t>
+            </a:r>
+            <a:endParaRPr/>
+          </a:p>
+          <a:p>
+            <a:r>
+              <a:rPr sz="385" b="0" i="0">
+                <a:solidFill>
+                  <a:srgbClr val="111111"/>
+                </a:solidFill>
+                <a:latin typeface="Arial"/>
+                <a:ea typeface="Arial"/>
+                <a:cs typeface="Arial"/>
+              </a:rPr>
+              <a:t>    doi:10.1214/ss/1009213286.</a:t>
+            </a:r>
+            <a:endParaRPr/>
+          </a:p>
+          <a:p>
+            <a:r>
+              <a:rPr sz="385" b="0" i="0">
+                <a:solidFill>
+                  <a:srgbClr val="111111"/>
+                </a:solidFill>
+                <a:latin typeface="Arial"/>
+                <a:ea typeface="Arial"/>
+                <a:cs typeface="Arial"/>
+              </a:rPr>
+              <a:t>[13] KORN, Edward L.; GRAUBARD, Barry I.</a:t>
+            </a:r>
+            <a:endParaRPr/>
+          </a:p>
+          <a:p>
+            <a:r>
+              <a:rPr sz="385" b="0" i="0">
+                <a:solidFill>
+                  <a:srgbClr val="111111"/>
+                </a:solidFill>
+                <a:latin typeface="Arial"/>
+                <a:ea typeface="Arial"/>
+                <a:cs typeface="Arial"/>
+              </a:rPr>
+              <a:t>    Confidence intervals for proportions</a:t>
+            </a:r>
+            <a:endParaRPr/>
+          </a:p>
+          <a:p>
+            <a:r>
+              <a:rPr sz="385" b="0" i="0">
+                <a:solidFill>
+                  <a:srgbClr val="111111"/>
+                </a:solidFill>
+                <a:latin typeface="Arial"/>
+                <a:ea typeface="Arial"/>
+                <a:cs typeface="Arial"/>
+              </a:rPr>
+              <a:t>    with small expected number of positive</a:t>
+            </a:r>
+            <a:endParaRPr/>
+          </a:p>
+          <a:p>
+            <a:r>
+              <a:rPr sz="385" b="0" i="0">
+                <a:solidFill>
+                  <a:srgbClr val="111111"/>
+                </a:solidFill>
+                <a:latin typeface="Arial"/>
+                <a:ea typeface="Arial"/>
+                <a:cs typeface="Arial"/>
+              </a:rPr>
+              <a:t>    counts estimated from survey data.</a:t>
+            </a:r>
+            <a:endParaRPr/>
+          </a:p>
+          <a:p>
+            <a:r>
+              <a:rPr sz="385" b="0" i="0">
+                <a:solidFill>
+                  <a:srgbClr val="111111"/>
+                </a:solidFill>
+                <a:latin typeface="Arial"/>
+                <a:ea typeface="Arial"/>
+                <a:cs typeface="Arial"/>
+              </a:rPr>
+              <a:t>    Survey Methodology, v. 24, n. 2, p.</a:t>
+            </a:r>
+            <a:endParaRPr/>
+          </a:p>
+          <a:p>
+            <a:r>
+              <a:rPr sz="385" b="0" i="0">
+                <a:solidFill>
+                  <a:srgbClr val="111111"/>
+                </a:solidFill>
+                <a:latin typeface="Arial"/>
+                <a:ea typeface="Arial"/>
+                <a:cs typeface="Arial"/>
+              </a:rPr>
+              <a:t>    193-201, 1998.</a:t>
             </a:r>
             <a:endParaRPr/>
           </a:p>
@@ -5099,7 +6295,7 @@
           <p:nvPr/>
         </p:nvPicPr>
         <p:blipFill>
-          <a:blip r:embed="Rc0dc40d83a404b6d"/>
+          <a:blip ns3:embed="Rc0dc40d83a404b6d"/>
           <a:stretch/>
         </p:blipFill>
         <p:spPr>
@@ -5121,7 +6317,7 @@
           <p:nvPr/>
         </p:nvPicPr>
         <p:blipFill>
-          <a:blip r:embed="R3c339897eee5483f"/>
+          <a:blip ns3:embed="R3c339897eee5483f"/>
           <a:stretch/>
         </p:blipFill>
         <p:spPr>
@@ -5150,8 +6346,8 @@
         </p:nvSpPr>
         <p:spPr>
           <a:xfrm>
-            <a:off x="9334500" y="22145625"/>
-            <a:ext cx="24765000" cy="1238250"/>
+            <a:off x="9334500" y="21970000"/>
+            <a:ext cx="24765000" cy="1350000"/>
           </a:xfrm>
           <a:prstGeom prst="rect">
             <a:avLst/>
@@ -5163,19 +6359,33 @@
           </a:ln>
         </p:spPr>
         <p:txBody>
-          <a:bodyPr/>
+          <a:bodyPr wrap="square"/>
           <a:lstStyle/>
           <a:p>
             <a:r>
-              <a:rPr sz="2325" b="0" i="0">
-                <a:solidFill>
-                  <a:srgbClr val="B9D9EB"/>
-                </a:solidFill>
-                <a:latin typeface="Arial"/>
-                <a:ea typeface="Arial"/>
-                <a:cs typeface="Arial"/>
-              </a:rPr>
-              <a:t>Gráficos exportados dos códigos R: barras horizontais por UF, comparação 2013/2019, IC95% e paleta original.</a:t>
+              <a:rPr sz="610" b="1" i="0">
+                <a:latin typeface="Arial"/>
+                <a:ea typeface="Arial"/>
+                <a:cs typeface="Arial"/>
+                <a:solidFill>
+                  <a:srgbClr val="FFFFFF"/>
+                </a:solidFill>
+              </a:rPr>
+              <a:t>Figuras exportadas dos códigos R: barras horizontais por UF, comparação 2013/2019, IC95% beta e paleta original. Barras =</a:t>
+            </a:r>
+            <a:endParaRPr/>
+          </a:p>
+          <a:p>
+            <a:r>
+              <a:rPr sz="610" b="0" i="0">
+                <a:latin typeface="Arial"/>
+                <a:ea typeface="Arial"/>
+                <a:cs typeface="Arial"/>
+                <a:solidFill>
+                  <a:srgbClr val="FFFFFF"/>
+                </a:solidFill>
+              </a:rPr>
+              <a:t>estimativas ponderadas; traços = incerteza amostral.</a:t>
             </a:r>
             <a:endParaRPr/>
           </a:p>
@@ -5189,8 +6399,8 @@
         </p:nvSpPr>
         <p:spPr>
           <a:xfrm>
-            <a:off x="495300" y="14550000"/>
-            <a:ext cx="7239000" cy="1600000"/>
+            <a:off x="495300" y="15150000"/>
+            <a:ext cx="7239000" cy="2850000"/>
             <a:off x="495300" y="14950000"/>
             <a:ext cx="7239000" cy="2450000"/>
           </a:xfrm>
@@ -5212,29 +6422,39 @@
           <a:p>
             <a:pPr algn="ctr"/>
             <a:r>
-              <a:rPr lang="pt-BR" sz="960" b="1">
+              <a:rPr lang="pt-BR" sz="770" b="1">
                 <a:latin typeface="Cambria Math"/>
               </a:rPr>
-              <a:t>FÓRMULAS</a:t>
+              <a:t>FÓRMULAS DO ESTUDO</a:t>
             </a:r>
             <a:endParaRPr/>
           </a:p>
           <a:p>
             <a:pPr algn="ctr"/>
             <a:r>
-              <a:rPr lang="pt-BR" sz="960" b="0">
+              <a:rPr lang="pt-BR" sz="770" b="0">
                 <a:latin typeface="Cambria Math"/>
               </a:rPr>
-              <a:t>p̂ = Σ wᵢyᵢ / Σ wᵢ</a:t>
+              <a:t>p̂ = Σᵢ wᵢyᵢ / Σᵢ wᵢ</a:t>
             </a:r>
             <a:endParaRPr/>
           </a:p>
           <a:p>
             <a:pPr algn="ctr"/>
             <a:r>
-              <a:rPr lang="pt-BR" sz="960" b="0">
+              <a:rPr lang="pt-BR" sz="770" b="0">
                 <a:latin typeface="Cambria Math"/>
               </a:rPr>
+              <a:t>wᵢ = peso; yᵢ = evento binário</a:t>
+            </a:r>
+            <a:endParaRPr/>
+          </a:p>
+          <a:p>
+            <a:pPr algn="ctr"/>
+            <a:r>
+              <a:rPr lang="pt-BR" sz="770" b="0">
+                <a:latin typeface="Cambria Math"/>
+              </a:rPr>
               <a:t>% = 100 × p̂</a:t>
             </a:r>
             <a:endParaRPr/>
@@ -5242,10 +6462,20 @@
           <a:p>
             <a:pPr algn="ctr"/>
             <a:r>
-              <a:rPr lang="pt-BR" sz="960" b="0">
+              <a:rPr lang="pt-BR" sz="770" b="0">
                 <a:latin typeface="Cambria Math"/>
               </a:rPr>
               <a:t>taxa₁₀₀k = 100000 × p̂</a:t>
+            </a:r>
+            <a:endParaRPr/>
+          </a:p>
+          <a:p>
+            <a:pPr algn="ctr"/>
+            <a:r>
+              <a:rPr lang="pt-BR" sz="770" b="0">
+                <a:latin typeface="Cambria Math"/>
+              </a:rPr>
+              <a:t>IC₉₅%(p̂): beta</a:t>
             </a:r>
             <a:endParaRPr/>
           </a:p>
@@ -5259,8 +6489,8 @@
         </p:nvSpPr>
         <p:spPr>
           <a:xfrm>
-            <a:off x="495300" y="16450000"/>
-            <a:ext cx="7239000" cy="4700000"/>
+            <a:off x="495300" y="18300000"/>
+            <a:ext cx="7239000" cy="6500000"/>
             <a:off x="495300" y="17650000"/>
             <a:ext cx="7239000" cy="3600000"/>
           </a:xfrm>
@@ -5281,36 +6511,424 @@
           <a:lstStyle/>
           <a:p>
             <a:r>
-              <a:rPr lang="pt-BR" sz="740" b="1"/>
-              <a:t>RESULTADOS</a:t>
-            </a:r>
-            <a:endParaRPr/>
-          </a:p>
-          <a:p>
-            <a:r>
-              <a:rPr lang="pt-BR" sz="740" b="0"/>
-              <a:t>• Asma: 4,41% -&gt; 5,40%.</a:t>
-            </a:r>
-            <a:endParaRPr/>
-          </a:p>
-          <a:p>
-            <a:r>
-              <a:rPr lang="pt-BR" sz="740" b="0"/>
-              <a:t>• Crises: 38,3% -&gt; 37,7%.</a:t>
-            </a:r>
-            <a:endParaRPr/>
-          </a:p>
-          <a:p>
-            <a:r>
-              <a:rPr lang="pt-BR" sz="740" b="0"/>
-              <a:t>• Medicamentos: 81,5% -&gt; 64,4%.</a:t>
-            </a:r>
-            <a:endParaRPr/>
-          </a:p>
-          <a:p>
-            <a:r>
-              <a:rPr lang="pt-BR" sz="740" b="0"/>
-              <a:t>• IC95% orienta comparações entre anos e UFs.</a:t>
+              <a:rPr lang="pt-BR" sz="600" b="1"/>
+              <a:t>ACHADOS PRINCIPAIS</a:t>
+            </a:r>
+            <a:endParaRPr/>
+          </a:p>
+          <a:p>
+            <a:r>
+              <a:rPr lang="pt-BR" sz="600" b="0"/>
+              <a:t>• Diagnóstico médico de asma: 4,41% -&gt;</a:t>
+            </a:r>
+            <a:endParaRPr/>
+          </a:p>
+          <a:p>
+            <a:r>
+              <a:rPr lang="pt-BR" sz="600" b="0"/>
+              <a:t>  5,40%.</a:t>
+            </a:r>
+            <a:endParaRPr/>
+          </a:p>
+          <a:p>
+            <a:r>
+              <a:rPr lang="pt-BR" sz="600" b="0"/>
+              <a:t>• Crises em 12 meses: 38,3% -&gt; 37,7%;</a:t>
+            </a:r>
+            <a:endParaRPr/>
+          </a:p>
+          <a:p>
+            <a:r>
+              <a:rPr lang="pt-BR" sz="600" b="0"/>
+              <a:t>  estabilidade aproximada.</a:t>
+            </a:r>
+            <a:endParaRPr/>
+          </a:p>
+          <a:p>
+            <a:r>
+              <a:rPr lang="pt-BR" sz="600" b="0"/>
+              <a:t>• Medicamento entre asmáticos: 81,5% -&gt;</a:t>
+            </a:r>
+            <a:endParaRPr/>
+          </a:p>
+          <a:p>
+            <a:r>
+              <a:rPr lang="pt-BR" sz="600" b="0"/>
+              <a:t>  64,4%; cautela inferencial.</a:t>
+            </a:r>
+            <a:endParaRPr/>
+          </a:p>
+          <a:p>
+            <a:r>
+              <a:rPr lang="pt-BR" sz="600" b="0"/>
+              <a:t>• Taxa populacional de medicamento</a:t>
+            </a:r>
+            <a:endParaRPr/>
+          </a:p>
+          <a:p>
+            <a:r>
+              <a:rPr lang="pt-BR" sz="600" b="0"/>
+              <a:t>  distingue carga total de proporção</a:t>
+            </a:r>
+            <a:endParaRPr/>
+          </a:p>
+          <a:p>
+            <a:r>
+              <a:rPr lang="pt-BR" sz="600" b="0"/>
+              <a:t>  entre diagnosticados.</a:t>
+            </a:r>
+            <a:endParaRPr/>
+          </a:p>
+          <a:p>
+            <a:r>
+              <a:rPr lang="pt-BR" sz="600" b="0"/>
+              <a:t>• Tabagismo caiu em várias UFs; não</a:t>
+            </a:r>
+            <a:endParaRPr/>
+          </a:p>
+          <a:p>
+            <a:r>
+              <a:rPr lang="pt-BR" sz="600" b="0"/>
+              <a:t>  explica sozinho o aumento do</a:t>
+            </a:r>
+            <a:endParaRPr/>
+          </a:p>
+          <a:p>
+            <a:r>
+              <a:rPr lang="pt-BR" sz="600" b="0"/>
+              <a:t>  diagnóstico.</a:t>
+            </a:r>
+            <a:endParaRPr/>
+          </a:p>
+          <a:p>
+            <a:r>
+              <a:rPr lang="pt-BR" sz="600" b="0"/>
+              <a:t>• Manejo exige acesso farmacológico,</a:t>
+            </a:r>
+            <a:endParaRPr/>
+          </a:p>
+          <a:p>
+            <a:r>
+              <a:rPr lang="pt-BR" sz="600" b="0"/>
+              <a:t>  seguimento clínico e intervenções não</a:t>
+            </a:r>
+            <a:endParaRPr/>
+          </a:p>
+          <a:p>
+            <a:r>
+              <a:rPr lang="pt-BR" sz="600" b="0"/>
+              <a:t>  farmacológicas.</a:t>
+            </a:r>
+            <a:endParaRPr/>
+          </a:p>
+        </p:txBody>
+      </p:sp>
+      <p:sp>
+        <p:nvSpPr>
+          <p:cNvPr id="156" name="center-finding-pt-1"/>
+          <p:cNvSpPr txBox="1"/>
+          <p:nvPr/>
+        </p:nvSpPr>
+        <p:spPr>
+          <a:xfrm>
+            <a:off x="9630000" y="9650000"/>
+            <a:ext cx="7600000" cy="2300000"/>
+          </a:xfrm>
+          <a:prstGeom prst="rect">
+            <a:avLst/>
+          </a:prstGeom>
+          <a:solidFill>
+            <a:srgbClr val="EFF6FC"/>
+          </a:solidFill>
+          <a:ln w="12700">
+            <a:solidFill>
+              <a:srgbClr val="B9D8EF"/>
+            </a:solidFill>
+          </a:ln>
+        </p:spPr>
+        <p:txBody>
+          <a:bodyPr wrap="square" lIns="76200" rIns="76200" tIns="76200" bIns="76200" anchor="t"/>
+          <a:lstStyle/>
+          <a:p>
+            <a:r>
+              <a:rPr lang="pt-BR" sz="1070" b="1"/>
+              <a:t>PREVALÊNCIA</a:t>
+            </a:r>
+            <a:endParaRPr/>
+          </a:p>
+          <a:p>
+            <a:r>
+              <a:rPr lang="pt-BR" sz="1070" b="0"/>
+              <a:t>Brasil: 4,41% -&gt; 5,40%</a:t>
+            </a:r>
+            <a:endParaRPr/>
+          </a:p>
+          <a:p>
+            <a:r>
+              <a:rPr lang="pt-BR" sz="1070" b="0"/>
+              <a:t>IC95% sem sobreposição; aumento</a:t>
+            </a:r>
+            <a:endParaRPr/>
+          </a:p>
+          <a:p>
+            <a:r>
+              <a:rPr lang="pt-BR" sz="1070" b="0"/>
+              <a:t>consistente do diagnóstico</a:t>
+            </a:r>
+            <a:endParaRPr/>
+          </a:p>
+          <a:p>
+            <a:r>
+              <a:rPr lang="pt-BR" sz="1070" b="0"/>
+              <a:t>médico.</a:t>
+            </a:r>
+            <a:endParaRPr/>
+          </a:p>
+        </p:txBody>
+      </p:sp>
+      <p:sp>
+        <p:nvSpPr>
+          <p:cNvPr id="157" name="center-finding-pt-2"/>
+          <p:cNvSpPr txBox="1"/>
+          <p:nvPr/>
+        </p:nvSpPr>
+        <p:spPr>
+          <a:xfrm>
+            <a:off x="18120000" y="9650000"/>
+            <a:ext cx="7600000" cy="2300000"/>
+          </a:xfrm>
+          <a:prstGeom prst="rect">
+            <a:avLst/>
+          </a:prstGeom>
+          <a:solidFill>
+            <a:srgbClr val="EFF6FC"/>
+          </a:solidFill>
+          <a:ln w="12700">
+            <a:solidFill>
+              <a:srgbClr val="B9D8EF"/>
+            </a:solidFill>
+          </a:ln>
+        </p:spPr>
+        <p:txBody>
+          <a:bodyPr wrap="square" lIns="76200" rIns="76200" tIns="76200" bIns="76200" anchor="t"/>
+          <a:lstStyle/>
+          <a:p>
+            <a:r>
+              <a:rPr lang="pt-BR" sz="1070" b="1"/>
+              <a:t>CRISES</a:t>
+            </a:r>
+            <a:endParaRPr/>
+          </a:p>
+          <a:p>
+            <a:r>
+              <a:rPr lang="pt-BR" sz="1070" b="0"/>
+              <a:t>38,3% -&gt; 37,7%</a:t>
+            </a:r>
+            <a:endParaRPr/>
+          </a:p>
+          <a:p>
+            <a:r>
+              <a:rPr lang="pt-BR" sz="1070" b="0"/>
+              <a:t>Estabilidade sugere controle</a:t>
+            </a:r>
+            <a:endParaRPr/>
+          </a:p>
+          <a:p>
+            <a:r>
+              <a:rPr lang="pt-BR" sz="1070" b="0"/>
+              <a:t>clínico ainda insuficiente.</a:t>
+            </a:r>
+            <a:endParaRPr/>
+          </a:p>
+        </p:txBody>
+      </p:sp>
+      <p:sp>
+        <p:nvSpPr>
+          <p:cNvPr id="158" name="center-finding-pt-3"/>
+          <p:cNvSpPr txBox="1"/>
+          <p:nvPr/>
+        </p:nvSpPr>
+        <p:spPr>
+          <a:xfrm>
+            <a:off x="26610000" y="9650000"/>
+            <a:ext cx="7600000" cy="2300000"/>
+          </a:xfrm>
+          <a:prstGeom prst="rect">
+            <a:avLst/>
+          </a:prstGeom>
+          <a:solidFill>
+            <a:srgbClr val="EFF6FC"/>
+          </a:solidFill>
+          <a:ln w="12700">
+            <a:solidFill>
+              <a:srgbClr val="B9D8EF"/>
+            </a:solidFill>
+          </a:ln>
+        </p:spPr>
+        <p:txBody>
+          <a:bodyPr wrap="square" lIns="76200" rIns="76200" tIns="76200" bIns="76200" anchor="t"/>
+          <a:lstStyle/>
+          <a:p>
+            <a:r>
+              <a:rPr lang="pt-BR" sz="1070" b="1"/>
+              <a:t>MEDICAMENTOS</a:t>
+            </a:r>
+            <a:endParaRPr/>
+          </a:p>
+          <a:p>
+            <a:r>
+              <a:rPr lang="pt-BR" sz="1070" b="0"/>
+              <a:t>81,5% -&gt; 64,4%</a:t>
+            </a:r>
+            <a:endParaRPr/>
+          </a:p>
+          <a:p>
+            <a:r>
+              <a:rPr lang="pt-BR" sz="1070" b="0"/>
+              <a:t>Separar proporção entre</a:t>
+            </a:r>
+            <a:endParaRPr/>
+          </a:p>
+          <a:p>
+            <a:r>
+              <a:rPr lang="pt-BR" sz="1070" b="0"/>
+              <a:t>asmáticos da taxa populacional</a:t>
+            </a:r>
+            <a:endParaRPr/>
+          </a:p>
+          <a:p>
+            <a:r>
+              <a:rPr lang="pt-BR" sz="1070" b="0"/>
+              <a:t>por 100 mil.</a:t>
+            </a:r>
+            <a:endParaRPr/>
+          </a:p>
+        </p:txBody>
+      </p:sp>
+      <p:sp>
+        <p:nvSpPr>
+          <p:cNvPr id="159" name="center-interpretation-pt"/>
+          <p:cNvSpPr txBox="1"/>
+          <p:nvPr/>
+        </p:nvSpPr>
+        <p:spPr>
+          <a:xfrm>
+            <a:off x="11000000" y="22350000"/>
+            <a:ext cx="20500000" cy="2050000"/>
+          </a:xfrm>
+          <a:prstGeom prst="rect">
+            <a:avLst/>
+          </a:prstGeom>
+          <a:solidFill>
+            <a:srgbClr val="F6FAFD"/>
+          </a:solidFill>
+          <a:ln w="12700">
+            <a:solidFill>
+              <a:srgbClr val="B9D8EF"/>
+            </a:solidFill>
+          </a:ln>
+        </p:spPr>
+        <p:txBody>
+          <a:bodyPr wrap="square" lIns="76200" rIns="76200" tIns="76200" bIns="76200" anchor="t"/>
+          <a:lstStyle/>
+          <a:p>
+            <a:r>
+              <a:rPr lang="pt-BR" sz="850" b="1"/>
+              <a:t>LEITURA APLICADA</a:t>
+            </a:r>
+            <a:endParaRPr/>
+          </a:p>
+          <a:p>
+            <a:r>
+              <a:rPr lang="pt-BR" sz="850" b="0"/>
+              <a:t>Aumento do diagnóstico pode refletir maior ocorrência, melhor acesso diagnóstico ou ambos. UFs</a:t>
+            </a:r>
+            <a:endParaRPr/>
+          </a:p>
+          <a:p>
+            <a:r>
+              <a:rPr lang="pt-BR" sz="850" b="0"/>
+              <a:t>com IC95% sobreposto devem ser tratadas como comparação exploratória.</a:t>
+            </a:r>
+            <a:endParaRPr/>
+          </a:p>
+        </p:txBody>
+      </p:sp>
+      <p:sp>
+        <p:nvSpPr>
+          <p:cNvPr id="160" name="chart-caption-above-morrison-pt-1"/>
+          <p:cNvSpPr txBox="1"/>
+          <p:nvPr/>
+        </p:nvSpPr>
+        <p:spPr>
+          <a:xfrm>
+            <a:off x="9906000" y="13230000"/>
+            <a:ext cx="10477500" cy="420000"/>
+          </a:xfrm>
+          <a:prstGeom prst="rect">
+            <a:avLst/>
+          </a:prstGeom>
+          <a:solidFill>
+            <a:srgbClr val="1F4E79"/>
+          </a:solidFill>
+          <a:ln w="12700">
+            <a:solidFill>
+              <a:srgbClr val="1F4E79"/>
+            </a:solidFill>
+          </a:ln>
+        </p:spPr>
+        <p:txBody>
+          <a:bodyPr wrap="square" lIns="76200" rIns="76200" tIns="76200" bIns="76200" anchor="t"/>
+          <a:lstStyle/>
+          <a:p>
+            <a:pPr algn="ctr"/>
+            <a:r>
+              <a:rPr lang="pt-BR" sz="620" b="1">
+                <a:solidFill>
+                  <a:srgbClr val="FFFFFF"/>
+                </a:solidFill>
+              </a:rPr>
+              <a:t>Figura 1: Prevalência de diagnóstico médico de asma por UF.</a:t>
+            </a:r>
+            <a:endParaRPr/>
+          </a:p>
+        </p:txBody>
+      </p:sp>
+      <p:sp>
+        <p:nvSpPr>
+          <p:cNvPr id="161" name="chart-caption-above-morrison-pt-2"/>
+          <p:cNvSpPr txBox="1"/>
+          <p:nvPr/>
+        </p:nvSpPr>
+        <p:spPr>
+          <a:xfrm>
+            <a:off x="23050500" y="13230000"/>
+            <a:ext cx="10477500" cy="420000"/>
+          </a:xfrm>
+          <a:prstGeom prst="rect">
+            <a:avLst/>
+          </a:prstGeom>
+          <a:solidFill>
+            <a:srgbClr val="1F4E79"/>
+          </a:solidFill>
+          <a:ln w="12700">
+            <a:solidFill>
+              <a:srgbClr val="1F4E79"/>
+            </a:solidFill>
+          </a:ln>
+        </p:spPr>
+        <p:txBody>
+          <a:bodyPr wrap="square" lIns="76200" rIns="76200" tIns="76200" bIns="76200" anchor="t"/>
+          <a:lstStyle/>
+          <a:p>
+            <a:pPr algn="ctr"/>
+            <a:r>
+              <a:rPr lang="pt-BR" sz="620" b="1">
+                <a:solidFill>
+                  <a:srgbClr val="FFFFFF"/>
+                </a:solidFill>
+              </a:rPr>
+              <a:t>Figura 2: Uso de medicamento oral ou bombinha por UF.</a:t>
             </a:r>
             <a:endParaRPr/>
           </a:p>

--- a/outputs/posters/poster_pns_asma_morrison_pt.pptx
+++ b/outputs/posters/poster_pns_asma_morrison_pt.pptx
@@ -2,13 +2,13 @@
 <file path=ppt/presentation.xml><?xml version="1.0" encoding="utf-8"?>
 <p:presentation xmlns:p="http://schemas.openxmlformats.org/presentationml/2006/main">
   <p:sldMasterIdLst>
-    <p:sldMasterId xmlns:r="http://schemas.openxmlformats.org/officeDocument/2006/relationships" id="2147483648" r:id="R8e26e86e909748f5"/>
+    <p:sldMasterId xmlns:r="http://schemas.openxmlformats.org/officeDocument/2006/relationships" id="2147483648" r:id="Rc229cbe0211847c2"/>
   </p:sldMasterIdLst>
   <p:notesMasterIdLst>
-    <p:notesMasterId xmlns:r="http://schemas.openxmlformats.org/officeDocument/2006/relationships" r:id="R4c3a566e6ff64318"/>
+    <p:notesMasterId xmlns:r="http://schemas.openxmlformats.org/officeDocument/2006/relationships" r:id="R7760c29369884543"/>
   </p:notesMasterIdLst>
   <p:sldIdLst>
-    <p:sldId xmlns:r="http://schemas.openxmlformats.org/officeDocument/2006/relationships" id="256" r:id="R98ab52e38c7a4eeb"/>
+    <p:sldId xmlns:r="http://schemas.openxmlformats.org/officeDocument/2006/relationships" id="256" r:id="R90140ea82f9d4a98"/>
   </p:sldIdLst>
   <p:sldSz cx="9525000" cy="13468350"/>
   <p:notesSz cx="6858000" cy="9144000"/>
@@ -601,7 +601,7 @@
   </p:cSld>
   <p:clrMap bg1="lt1" tx1="dk1" bg2="lt2" tx2="dk2" accent1="accent1" accent2="accent2" accent3="accent3" accent4="accent4" accent5="accent5" accent6="accent6" hlink="hlink" folHlink="folHlink"/>
   <p:sldLayoutIdLst>
-    <p:sldLayoutId xmlns:r="http://schemas.openxmlformats.org/officeDocument/2006/relationships" id="2147483649" r:id="Rc718a7631f9342d9"/>
+    <p:sldLayoutId xmlns:r="http://schemas.openxmlformats.org/officeDocument/2006/relationships" id="2147483649" r:id="R61afa3a768274172"/>
   </p:sldLayoutIdLst>
   <p:txStyles>
     <p:titleStyle>
@@ -1156,7 +1156,7 @@
           <p:nvPr/>
         </p:nvPicPr>
         <p:blipFill>
-          <a:blip xmlns:r="http://schemas.openxmlformats.org/officeDocument/2006/relationships" xmlns:a="http://schemas.openxmlformats.org/drawingml/2006/main" r:embed="R804da1e0f8c54f06"/>
+          <a:blip xmlns:r="http://schemas.openxmlformats.org/officeDocument/2006/relationships" xmlns:a="http://schemas.openxmlformats.org/drawingml/2006/main" r:embed="Rf3b0b13a99b64af0"/>
           <a:srcRect xmlns:a="http://schemas.openxmlformats.org/drawingml/2006/main" l="0" t="38622" r="0" b="38622"/>
           <a:stretch xmlns:a="http://schemas.openxmlformats.org/drawingml/2006/main">
             <a:fillRect l="0" t="0" r="0" b="0"/>
@@ -1181,7 +1181,7 @@
           <p:nvPr/>
         </p:nvPicPr>
         <p:blipFill>
-          <a:blip xmlns:r="http://schemas.openxmlformats.org/officeDocument/2006/relationships" xmlns:a="http://schemas.openxmlformats.org/drawingml/2006/main" r:embed="Rc2d09cf539d74b21"/>
+          <a:blip xmlns:r="http://schemas.openxmlformats.org/officeDocument/2006/relationships" xmlns:a="http://schemas.openxmlformats.org/drawingml/2006/main" r:embed="R7521a4b7fc024cc1"/>
           <a:stretch xmlns:a="http://schemas.openxmlformats.org/drawingml/2006/main"/>
         </p:blipFill>
         <p:spPr>
@@ -1203,7 +1203,7 @@
           <p:nvPr/>
         </p:nvPicPr>
         <p:blipFill>
-          <a:blip xmlns:r="http://schemas.openxmlformats.org/officeDocument/2006/relationships" xmlns:a="http://schemas.openxmlformats.org/drawingml/2006/main" r:embed="Rc03a3b0feb5243d9"/>
+          <a:blip xmlns:r="http://schemas.openxmlformats.org/officeDocument/2006/relationships" xmlns:a="http://schemas.openxmlformats.org/drawingml/2006/main" r:embed="Rf6ca54a529f34951"/>
           <a:stretch xmlns:a="http://schemas.openxmlformats.org/drawingml/2006/main"/>
         </p:blipFill>
         <p:spPr>
@@ -1221,7 +1221,7 @@
           <p:cNvPr id="4" name="morrison-title">
             <a:extLst xmlns:a="http://schemas.openxmlformats.org/drawingml/2006/main">
               <a:ext uri="{FF2B5EF4-FFF2-40B4-BE49-F238E27FC236}">
-                <a16:creationId xmlns:a16="http://schemas.microsoft.com/office/drawing/2014/main" id="{FD6CBFC7-298D-4D4F-9E2E-5C75C9FD5CB5}"/>
+                <a16:creationId xmlns:a16="http://schemas.microsoft.com/office/drawing/2014/main" id="{CDC78026-7EBF-4E94-97E2-9C6A901B5D10}"/>
               </a:ext>
             </a:extLst>
           </p:cNvPr>
@@ -1271,7 +1271,7 @@
           <p:cNvPr id="5" name="morrison-authors">
             <a:extLst xmlns:a="http://schemas.openxmlformats.org/drawingml/2006/main">
               <a:ext uri="{FF2B5EF4-FFF2-40B4-BE49-F238E27FC236}">
-                <a16:creationId xmlns:a16="http://schemas.microsoft.com/office/drawing/2014/main" id="{978CF487-5F99-4125-8F9F-33D7F6986956}"/>
+                <a16:creationId xmlns:a16="http://schemas.microsoft.com/office/drawing/2014/main" id="{F2E23AB8-546F-405A-9A50-60116CBA19C0}"/>
               </a:ext>
             </a:extLst>
           </p:cNvPr>
@@ -1321,7 +1321,7 @@
           <p:cNvPr id="6" name="central-message">
             <a:extLst xmlns:a="http://schemas.openxmlformats.org/drawingml/2006/main">
               <a:ext uri="{FF2B5EF4-FFF2-40B4-BE49-F238E27FC236}">
-                <a16:creationId xmlns:a16="http://schemas.microsoft.com/office/drawing/2014/main" id="{C6FC31EF-FEF0-42BE-853F-16372860CA4A}"/>
+                <a16:creationId xmlns:a16="http://schemas.microsoft.com/office/drawing/2014/main" id="{721984F2-5C1A-447A-9CBB-13902A942020}"/>
               </a:ext>
             </a:extLst>
           </p:cNvPr>
@@ -1375,7 +1375,7 @@
           <p:cNvPr id="7" name="1-Método em uma linha-box">
             <a:extLst xmlns:a="http://schemas.openxmlformats.org/drawingml/2006/main">
               <a:ext uri="{FF2B5EF4-FFF2-40B4-BE49-F238E27FC236}">
-                <a16:creationId xmlns:a16="http://schemas.microsoft.com/office/drawing/2014/main" id="{34CF10AC-6E94-46A9-B20F-18B79813BF46}"/>
+                <a16:creationId xmlns:a16="http://schemas.microsoft.com/office/drawing/2014/main" id="{D25256DB-03CB-4BFF-9C45-3EE132E4BDAD}"/>
               </a:ext>
             </a:extLst>
           </p:cNvPr>
@@ -1408,7 +1408,7 @@
           <p:cNvPr id="8" name="1-Método em uma linha-head">
             <a:extLst xmlns:a="http://schemas.openxmlformats.org/drawingml/2006/main">
               <a:ext uri="{FF2B5EF4-FFF2-40B4-BE49-F238E27FC236}">
-                <a16:creationId xmlns:a16="http://schemas.microsoft.com/office/drawing/2014/main" id="{CE2FB94C-2EFC-4480-8ABF-6AD93ABF4145}"/>
+                <a16:creationId xmlns:a16="http://schemas.microsoft.com/office/drawing/2014/main" id="{705E452E-9F76-45FD-A4DF-38807F854AD3}"/>
               </a:ext>
             </a:extLst>
           </p:cNvPr>
@@ -1441,7 +1441,7 @@
           <p:cNvPr id="9" name="1-Método em uma linha-title">
             <a:extLst xmlns:a="http://schemas.openxmlformats.org/drawingml/2006/main">
               <a:ext uri="{FF2B5EF4-FFF2-40B4-BE49-F238E27FC236}">
-                <a16:creationId xmlns:a16="http://schemas.microsoft.com/office/drawing/2014/main" id="{2AACDA5F-D629-4615-B837-6E96B3D4FF6D}"/>
+                <a16:creationId xmlns:a16="http://schemas.microsoft.com/office/drawing/2014/main" id="{7439B484-F639-4E20-808C-116BBB51FC9B}"/>
               </a:ext>
             </a:extLst>
           </p:cNvPr>
@@ -1491,7 +1491,7 @@
           <p:cNvPr id="10" name="1-Método em uma linha-body">
             <a:extLst xmlns:a="http://schemas.openxmlformats.org/drawingml/2006/main">
               <a:ext uri="{FF2B5EF4-FFF2-40B4-BE49-F238E27FC236}">
-                <a16:creationId xmlns:a16="http://schemas.microsoft.com/office/drawing/2014/main" id="{F0E09A3B-A148-4E0D-95A4-949F7072EEC6}"/>
+                <a16:creationId xmlns:a16="http://schemas.microsoft.com/office/drawing/2014/main" id="{C110E8B0-31E1-4342-9BFA-474D25DE9702}"/>
               </a:ext>
             </a:extLst>
           </p:cNvPr>
@@ -1592,7 +1592,7 @@
           <p:cNvPr id="11" name="morrison-formula-box">
             <a:extLst xmlns:a="http://schemas.openxmlformats.org/drawingml/2006/main">
               <a:ext uri="{FF2B5EF4-FFF2-40B4-BE49-F238E27FC236}">
-                <a16:creationId xmlns:a16="http://schemas.microsoft.com/office/drawing/2014/main" id="{D815F590-51C3-45EB-8FA8-1056CF3EB8AF}"/>
+                <a16:creationId xmlns:a16="http://schemas.microsoft.com/office/drawing/2014/main" id="{ACAC9EFA-9362-47E2-B2DC-3DDABC73EE8A}"/>
               </a:ext>
             </a:extLst>
           </p:cNvPr>
@@ -1625,7 +1625,7 @@
           <p:cNvPr id="12" name="morrison-formula-title">
             <a:extLst xmlns:a="http://schemas.openxmlformats.org/drawingml/2006/main">
               <a:ext uri="{FF2B5EF4-FFF2-40B4-BE49-F238E27FC236}">
-                <a16:creationId xmlns:a16="http://schemas.microsoft.com/office/drawing/2014/main" id="{3ADD3848-D76B-427F-B683-DBC9C9699421}"/>
+                <a16:creationId xmlns:a16="http://schemas.microsoft.com/office/drawing/2014/main" id="{C9807E6D-0253-41BF-A0E5-23B3BDC44ABC}"/>
               </a:ext>
             </a:extLst>
           </p:cNvPr>
@@ -1675,7 +1675,7 @@
           <p:cNvPr id="13" name="morrison-formula">
             <a:extLst xmlns:a="http://schemas.openxmlformats.org/drawingml/2006/main">
               <a:ext uri="{FF2B5EF4-FFF2-40B4-BE49-F238E27FC236}">
-                <a16:creationId xmlns:a16="http://schemas.microsoft.com/office/drawing/2014/main" id="{065C6C8A-74F9-4E03-9417-4105943CFD2D}"/>
+                <a16:creationId xmlns:a16="http://schemas.microsoft.com/office/drawing/2014/main" id="{D1E9BD37-45CE-41B3-B673-64A3D030B946}"/>
               </a:ext>
             </a:extLst>
           </p:cNvPr>
@@ -1793,7 +1793,7 @@
           <p:cNvPr id="14" name="2-Dados e denominadores-box">
             <a:extLst xmlns:a="http://schemas.openxmlformats.org/drawingml/2006/main">
               <a:ext uri="{FF2B5EF4-FFF2-40B4-BE49-F238E27FC236}">
-                <a16:creationId xmlns:a16="http://schemas.microsoft.com/office/drawing/2014/main" id="{9AC97C48-EC0A-40C4-AEC3-F36F3DF78DB3}"/>
+                <a16:creationId xmlns:a16="http://schemas.microsoft.com/office/drawing/2014/main" id="{36CC5312-5571-4EC6-96D5-E2B9E8BC7753}"/>
               </a:ext>
             </a:extLst>
           </p:cNvPr>
@@ -1826,7 +1826,7 @@
           <p:cNvPr id="15" name="2-Dados e denominadores-head">
             <a:extLst xmlns:a="http://schemas.openxmlformats.org/drawingml/2006/main">
               <a:ext uri="{FF2B5EF4-FFF2-40B4-BE49-F238E27FC236}">
-                <a16:creationId xmlns:a16="http://schemas.microsoft.com/office/drawing/2014/main" id="{9DFCF7F7-83BD-4596-962C-7DBE38D9B949}"/>
+                <a16:creationId xmlns:a16="http://schemas.microsoft.com/office/drawing/2014/main" id="{445F6E0C-9EC7-492A-B900-B24E1BFBD34E}"/>
               </a:ext>
             </a:extLst>
           </p:cNvPr>
@@ -1859,7 +1859,7 @@
           <p:cNvPr id="16" name="2-Dados e denominadores-title">
             <a:extLst xmlns:a="http://schemas.openxmlformats.org/drawingml/2006/main">
               <a:ext uri="{FF2B5EF4-FFF2-40B4-BE49-F238E27FC236}">
-                <a16:creationId xmlns:a16="http://schemas.microsoft.com/office/drawing/2014/main" id="{2C1F9F61-EFB1-428A-90DD-2938C04ECD95}"/>
+                <a16:creationId xmlns:a16="http://schemas.microsoft.com/office/drawing/2014/main" id="{78C5D026-6256-439A-B949-F77F3BC75949}"/>
               </a:ext>
             </a:extLst>
           </p:cNvPr>
@@ -1909,7 +1909,7 @@
           <p:cNvPr id="17" name="2-Dados e denominadores-body">
             <a:extLst xmlns:a="http://schemas.openxmlformats.org/drawingml/2006/main">
               <a:ext uri="{FF2B5EF4-FFF2-40B4-BE49-F238E27FC236}">
-                <a16:creationId xmlns:a16="http://schemas.microsoft.com/office/drawing/2014/main" id="{CDF1327E-241A-4A43-B2D3-F98B2B46046B}"/>
+                <a16:creationId xmlns:a16="http://schemas.microsoft.com/office/drawing/2014/main" id="{27D78EA8-BB3E-44A2-B62D-8095E58D0A89}"/>
               </a:ext>
             </a:extLst>
           </p:cNvPr>
@@ -1993,7 +1993,7 @@
           <p:cNvPr id="18" name="3-Por que IC beta?-box">
             <a:extLst xmlns:a="http://schemas.openxmlformats.org/drawingml/2006/main">
               <a:ext uri="{FF2B5EF4-FFF2-40B4-BE49-F238E27FC236}">
-                <a16:creationId xmlns:a16="http://schemas.microsoft.com/office/drawing/2014/main" id="{884FF527-FA3D-46D8-A5C9-B3F0C8F253A8}"/>
+                <a16:creationId xmlns:a16="http://schemas.microsoft.com/office/drawing/2014/main" id="{56827A92-3A71-4B79-BA4C-C6197E9392A1}"/>
               </a:ext>
             </a:extLst>
           </p:cNvPr>
@@ -2026,7 +2026,7 @@
           <p:cNvPr id="19" name="3-Por que IC beta?-head">
             <a:extLst xmlns:a="http://schemas.openxmlformats.org/drawingml/2006/main">
               <a:ext uri="{FF2B5EF4-FFF2-40B4-BE49-F238E27FC236}">
-                <a16:creationId xmlns:a16="http://schemas.microsoft.com/office/drawing/2014/main" id="{59C830D3-27C4-4C17-B249-DB70347E89E3}"/>
+                <a16:creationId xmlns:a16="http://schemas.microsoft.com/office/drawing/2014/main" id="{91A06BA8-D441-47CA-92CC-B98F221741BF}"/>
               </a:ext>
             </a:extLst>
           </p:cNvPr>
@@ -2059,7 +2059,7 @@
           <p:cNvPr id="20" name="3-Por que IC beta?-title">
             <a:extLst xmlns:a="http://schemas.openxmlformats.org/drawingml/2006/main">
               <a:ext uri="{FF2B5EF4-FFF2-40B4-BE49-F238E27FC236}">
-                <a16:creationId xmlns:a16="http://schemas.microsoft.com/office/drawing/2014/main" id="{EA319A14-732E-4689-AA43-3E17D357B7D4}"/>
+                <a16:creationId xmlns:a16="http://schemas.microsoft.com/office/drawing/2014/main" id="{F18C0336-F7AF-4A4D-B2DD-8D894030A745}"/>
               </a:ext>
             </a:extLst>
           </p:cNvPr>
@@ -2109,7 +2109,7 @@
           <p:cNvPr id="21" name="3-Por que IC beta?-body">
             <a:extLst xmlns:a="http://schemas.openxmlformats.org/drawingml/2006/main">
               <a:ext uri="{FF2B5EF4-FFF2-40B4-BE49-F238E27FC236}">
-                <a16:creationId xmlns:a16="http://schemas.microsoft.com/office/drawing/2014/main" id="{4910B5D6-A0D8-4A26-8639-A32DC7FC376B}"/>
+                <a16:creationId xmlns:a16="http://schemas.microsoft.com/office/drawing/2014/main" id="{1CDCA99B-3985-405E-9BC1-A8046860CD6F}"/>
               </a:ext>
             </a:extLst>
           </p:cNvPr>
@@ -2193,7 +2193,7 @@
           <p:cNvPr id="22" name="4-ETL e interoperabilidade-box">
             <a:extLst xmlns:a="http://schemas.openxmlformats.org/drawingml/2006/main">
               <a:ext uri="{FF2B5EF4-FFF2-40B4-BE49-F238E27FC236}">
-                <a16:creationId xmlns:a16="http://schemas.microsoft.com/office/drawing/2014/main" id="{ABD53E3F-B5EA-46B7-A644-52DF3C6505B6}"/>
+                <a16:creationId xmlns:a16="http://schemas.microsoft.com/office/drawing/2014/main" id="{9DE70B74-8626-4120-8C28-DD0DB6A25293}"/>
               </a:ext>
             </a:extLst>
           </p:cNvPr>
@@ -2226,7 +2226,7 @@
           <p:cNvPr id="23" name="4-ETL e interoperabilidade-head">
             <a:extLst xmlns:a="http://schemas.openxmlformats.org/drawingml/2006/main">
               <a:ext uri="{FF2B5EF4-FFF2-40B4-BE49-F238E27FC236}">
-                <a16:creationId xmlns:a16="http://schemas.microsoft.com/office/drawing/2014/main" id="{9D95D76F-96CE-4B15-97B4-5E7B9502F274}"/>
+                <a16:creationId xmlns:a16="http://schemas.microsoft.com/office/drawing/2014/main" id="{641670A1-FB6B-4785-98C1-B2B55048CE24}"/>
               </a:ext>
             </a:extLst>
           </p:cNvPr>
@@ -2259,7 +2259,7 @@
           <p:cNvPr id="24" name="4-ETL e interoperabilidade-title">
             <a:extLst xmlns:a="http://schemas.openxmlformats.org/drawingml/2006/main">
               <a:ext uri="{FF2B5EF4-FFF2-40B4-BE49-F238E27FC236}">
-                <a16:creationId xmlns:a16="http://schemas.microsoft.com/office/drawing/2014/main" id="{534CD50B-5F27-474A-9AE9-7EC1DBD3B2B6}"/>
+                <a16:creationId xmlns:a16="http://schemas.microsoft.com/office/drawing/2014/main" id="{83DB0548-512D-4F9B-BA00-934703987553}"/>
               </a:ext>
             </a:extLst>
           </p:cNvPr>
@@ -2309,7 +2309,7 @@
           <p:cNvPr id="25" name="4-ETL e interoperabilidade-body">
             <a:extLst xmlns:a="http://schemas.openxmlformats.org/drawingml/2006/main">
               <a:ext uri="{FF2B5EF4-FFF2-40B4-BE49-F238E27FC236}">
-                <a16:creationId xmlns:a16="http://schemas.microsoft.com/office/drawing/2014/main" id="{CAA84EA6-5620-406B-A813-C906CD3196BB}"/>
+                <a16:creationId xmlns:a16="http://schemas.microsoft.com/office/drawing/2014/main" id="{3C309690-F490-463A-A277-363926CB545C}"/>
               </a:ext>
             </a:extLst>
           </p:cNvPr>
@@ -2393,7 +2393,7 @@
           <p:cNvPr id="26" name="m-prev-metric">
             <a:extLst xmlns:a="http://schemas.openxmlformats.org/drawingml/2006/main">
               <a:ext uri="{FF2B5EF4-FFF2-40B4-BE49-F238E27FC236}">
-                <a16:creationId xmlns:a16="http://schemas.microsoft.com/office/drawing/2014/main" id="{451A8BFF-7881-49BA-A014-DD910FE0FADD}"/>
+                <a16:creationId xmlns:a16="http://schemas.microsoft.com/office/drawing/2014/main" id="{316B6707-E6EA-4E34-8011-6971B74A85B9}"/>
               </a:ext>
             </a:extLst>
           </p:cNvPr>
@@ -2426,7 +2426,7 @@
           <p:cNvPr id="27" name="m-prev-metric-title">
             <a:extLst xmlns:a="http://schemas.openxmlformats.org/drawingml/2006/main">
               <a:ext uri="{FF2B5EF4-FFF2-40B4-BE49-F238E27FC236}">
-                <a16:creationId xmlns:a16="http://schemas.microsoft.com/office/drawing/2014/main" id="{0572038C-09F7-457E-9335-D98E3D8B36F4}"/>
+                <a16:creationId xmlns:a16="http://schemas.microsoft.com/office/drawing/2014/main" id="{13F0A14E-458B-4C7E-A292-852A8A1E9898}"/>
               </a:ext>
             </a:extLst>
           </p:cNvPr>
@@ -2476,7 +2476,7 @@
           <p:cNvPr id="28" name="m-prev-metric-value">
             <a:extLst xmlns:a="http://schemas.openxmlformats.org/drawingml/2006/main">
               <a:ext uri="{FF2B5EF4-FFF2-40B4-BE49-F238E27FC236}">
-                <a16:creationId xmlns:a16="http://schemas.microsoft.com/office/drawing/2014/main" id="{1452CA8E-644B-49AF-8B72-E217A03A3F0F}"/>
+                <a16:creationId xmlns:a16="http://schemas.microsoft.com/office/drawing/2014/main" id="{608BB46A-3F18-44B8-922F-FAFF168DA803}"/>
               </a:ext>
             </a:extLst>
           </p:cNvPr>
@@ -2526,7 +2526,7 @@
           <p:cNvPr id="29" name="m-prev-metric-note">
             <a:extLst xmlns:a="http://schemas.openxmlformats.org/drawingml/2006/main">
               <a:ext uri="{FF2B5EF4-FFF2-40B4-BE49-F238E27FC236}">
-                <a16:creationId xmlns:a16="http://schemas.microsoft.com/office/drawing/2014/main" id="{87BFC95B-3BFC-4B2B-ADBF-C20A9CD6C382}"/>
+                <a16:creationId xmlns:a16="http://schemas.microsoft.com/office/drawing/2014/main" id="{C4A21E27-95E5-4ED7-81B6-9437F832C83D}"/>
               </a:ext>
             </a:extLst>
           </p:cNvPr>
@@ -2576,7 +2576,7 @@
           <p:cNvPr id="30" name="m-crisis-metric">
             <a:extLst xmlns:a="http://schemas.openxmlformats.org/drawingml/2006/main">
               <a:ext uri="{FF2B5EF4-FFF2-40B4-BE49-F238E27FC236}">
-                <a16:creationId xmlns:a16="http://schemas.microsoft.com/office/drawing/2014/main" id="{4CB2DDCA-B043-47E5-B9B3-CBD474E85ADC}"/>
+                <a16:creationId xmlns:a16="http://schemas.microsoft.com/office/drawing/2014/main" id="{581BC252-403A-4816-ABF3-726F98286E39}"/>
               </a:ext>
             </a:extLst>
           </p:cNvPr>
@@ -2609,7 +2609,7 @@
           <p:cNvPr id="31" name="m-crisis-metric-title">
             <a:extLst xmlns:a="http://schemas.openxmlformats.org/drawingml/2006/main">
               <a:ext uri="{FF2B5EF4-FFF2-40B4-BE49-F238E27FC236}">
-                <a16:creationId xmlns:a16="http://schemas.microsoft.com/office/drawing/2014/main" id="{E0E34893-8784-46EB-9265-D23C68D565B3}"/>
+                <a16:creationId xmlns:a16="http://schemas.microsoft.com/office/drawing/2014/main" id="{58EE0526-9800-4C08-B48C-40C8F7284030}"/>
               </a:ext>
             </a:extLst>
           </p:cNvPr>
@@ -2659,7 +2659,7 @@
           <p:cNvPr id="32" name="m-crisis-metric-value">
             <a:extLst xmlns:a="http://schemas.openxmlformats.org/drawingml/2006/main">
               <a:ext uri="{FF2B5EF4-FFF2-40B4-BE49-F238E27FC236}">
-                <a16:creationId xmlns:a16="http://schemas.microsoft.com/office/drawing/2014/main" id="{D1004D25-8B4D-4B09-9782-084267577128}"/>
+                <a16:creationId xmlns:a16="http://schemas.microsoft.com/office/drawing/2014/main" id="{98077A75-D065-4962-829A-2510CC6A2BB7}"/>
               </a:ext>
             </a:extLst>
           </p:cNvPr>
@@ -2709,7 +2709,7 @@
           <p:cNvPr id="33" name="m-crisis-metric-note">
             <a:extLst xmlns:a="http://schemas.openxmlformats.org/drawingml/2006/main">
               <a:ext uri="{FF2B5EF4-FFF2-40B4-BE49-F238E27FC236}">
-                <a16:creationId xmlns:a16="http://schemas.microsoft.com/office/drawing/2014/main" id="{74075461-50F3-4A20-8E1C-655943013270}"/>
+                <a16:creationId xmlns:a16="http://schemas.microsoft.com/office/drawing/2014/main" id="{C76529BE-7BE9-4833-83A7-20F69A458129}"/>
               </a:ext>
             </a:extLst>
           </p:cNvPr>
@@ -2759,7 +2759,7 @@
           <p:cNvPr id="34" name="m-meds-metric">
             <a:extLst xmlns:a="http://schemas.openxmlformats.org/drawingml/2006/main">
               <a:ext uri="{FF2B5EF4-FFF2-40B4-BE49-F238E27FC236}">
-                <a16:creationId xmlns:a16="http://schemas.microsoft.com/office/drawing/2014/main" id="{1011BFCC-7D91-4B8B-B8B2-1D38CF218F5A}"/>
+                <a16:creationId xmlns:a16="http://schemas.microsoft.com/office/drawing/2014/main" id="{454F5A88-5134-409F-8782-1F1EEE52CE15}"/>
               </a:ext>
             </a:extLst>
           </p:cNvPr>
@@ -2792,7 +2792,7 @@
           <p:cNvPr id="35" name="m-meds-metric-title">
             <a:extLst xmlns:a="http://schemas.openxmlformats.org/drawingml/2006/main">
               <a:ext uri="{FF2B5EF4-FFF2-40B4-BE49-F238E27FC236}">
-                <a16:creationId xmlns:a16="http://schemas.microsoft.com/office/drawing/2014/main" id="{2C1D1D96-0FB8-475F-8520-9923594285F3}"/>
+                <a16:creationId xmlns:a16="http://schemas.microsoft.com/office/drawing/2014/main" id="{FE98CC23-4AC5-4A2B-9B61-E8087DCB5A18}"/>
               </a:ext>
             </a:extLst>
           </p:cNvPr>
@@ -2842,7 +2842,7 @@
           <p:cNvPr id="36" name="m-meds-metric-value">
             <a:extLst xmlns:a="http://schemas.openxmlformats.org/drawingml/2006/main">
               <a:ext uri="{FF2B5EF4-FFF2-40B4-BE49-F238E27FC236}">
-                <a16:creationId xmlns:a16="http://schemas.microsoft.com/office/drawing/2014/main" id="{8BBE1F44-E4AA-4274-8A2A-C247BC3C83D4}"/>
+                <a16:creationId xmlns:a16="http://schemas.microsoft.com/office/drawing/2014/main" id="{920F66BB-63EA-4049-BE27-EF6EBF534F94}"/>
               </a:ext>
             </a:extLst>
           </p:cNvPr>
@@ -2892,7 +2892,7 @@
           <p:cNvPr id="37" name="m-meds-metric-note">
             <a:extLst xmlns:a="http://schemas.openxmlformats.org/drawingml/2006/main">
               <a:ext uri="{FF2B5EF4-FFF2-40B4-BE49-F238E27FC236}">
-                <a16:creationId xmlns:a16="http://schemas.microsoft.com/office/drawing/2014/main" id="{F5C7AFDB-537E-4F66-8C9F-5556227F8FB0}"/>
+                <a16:creationId xmlns:a16="http://schemas.microsoft.com/office/drawing/2014/main" id="{6A44B4BA-DE1C-416F-A9CA-5ABA653B86B3}"/>
               </a:ext>
             </a:extLst>
           </p:cNvPr>
@@ -2942,7 +2942,7 @@
           <p:cNvPr id="38" name="m-chart-prev-caption">
             <a:extLst xmlns:a="http://schemas.openxmlformats.org/drawingml/2006/main">
               <a:ext uri="{FF2B5EF4-FFF2-40B4-BE49-F238E27FC236}">
-                <a16:creationId xmlns:a16="http://schemas.microsoft.com/office/drawing/2014/main" id="{CB17EF48-F14F-4ED1-BEEF-F552292A41F6}"/>
+                <a16:creationId xmlns:a16="http://schemas.microsoft.com/office/drawing/2014/main" id="{409E3753-3059-4E0C-8BBB-E56C1A07A5E7}"/>
               </a:ext>
             </a:extLst>
           </p:cNvPr>
@@ -2992,7 +2992,7 @@
           <p:cNvPr id="39" name="m-chart-prev-frame">
             <a:extLst xmlns:a="http://schemas.openxmlformats.org/drawingml/2006/main">
               <a:ext uri="{FF2B5EF4-FFF2-40B4-BE49-F238E27FC236}">
-                <a16:creationId xmlns:a16="http://schemas.microsoft.com/office/drawing/2014/main" id="{22A54F7B-7669-4620-8C80-D0D69F2A876F}"/>
+                <a16:creationId xmlns:a16="http://schemas.microsoft.com/office/drawing/2014/main" id="{7315D717-2892-4993-A0FE-F8797DD38FFB}"/>
               </a:ext>
             </a:extLst>
           </p:cNvPr>
@@ -3029,13 +3029,13 @@
           <p:nvPr/>
         </p:nvPicPr>
         <p:blipFill>
-          <a:blip xmlns:r="http://schemas.openxmlformats.org/officeDocument/2006/relationships" xmlns:a="http://schemas.openxmlformats.org/drawingml/2006/main" r:embed="R500fbfc193004f3d"/>
+          <a:blip xmlns:r="http://schemas.openxmlformats.org/officeDocument/2006/relationships" xmlns:a="http://schemas.openxmlformats.org/drawingml/2006/main" r:embed="Rd60fc84301804af9"/>
           <a:stretch xmlns:a="http://schemas.openxmlformats.org/drawingml/2006/main"/>
         </p:blipFill>
         <p:spPr>
           <a:xfrm xmlns:a="http://schemas.openxmlformats.org/drawingml/2006/main">
-            <a:off x="3219450" y="5052616"/>
-            <a:ext cx="3562350" cy="1039019"/>
+            <a:off x="3480513" y="4476750"/>
+            <a:ext cx="3040224" cy="2190750"/>
           </a:xfrm>
           <a:prstGeom xmlns:a="http://schemas.openxmlformats.org/drawingml/2006/main" prst="rect">
             <a:avLst/>
@@ -3047,7 +3047,7 @@
           <p:cNvPr id="41" name="m-chart-meds-caption">
             <a:extLst xmlns:a="http://schemas.openxmlformats.org/drawingml/2006/main">
               <a:ext uri="{FF2B5EF4-FFF2-40B4-BE49-F238E27FC236}">
-                <a16:creationId xmlns:a16="http://schemas.microsoft.com/office/drawing/2014/main" id="{FB235164-E891-40AA-81A9-67993677CA85}"/>
+                <a16:creationId xmlns:a16="http://schemas.microsoft.com/office/drawing/2014/main" id="{3385B534-C72F-4CC1-BF23-C93043B8AB50}"/>
               </a:ext>
             </a:extLst>
           </p:cNvPr>
@@ -3097,7 +3097,7 @@
           <p:cNvPr id="42" name="m-chart-meds-frame">
             <a:extLst xmlns:a="http://schemas.openxmlformats.org/drawingml/2006/main">
               <a:ext uri="{FF2B5EF4-FFF2-40B4-BE49-F238E27FC236}">
-                <a16:creationId xmlns:a16="http://schemas.microsoft.com/office/drawing/2014/main" id="{A4D96CA4-A13A-4279-981C-EF6143C3D27A}"/>
+                <a16:creationId xmlns:a16="http://schemas.microsoft.com/office/drawing/2014/main" id="{E2725ACD-8399-414D-BF20-C79357459FC5}"/>
               </a:ext>
             </a:extLst>
           </p:cNvPr>
@@ -3134,13 +3134,13 @@
           <p:nvPr/>
         </p:nvPicPr>
         <p:blipFill>
-          <a:blip xmlns:r="http://schemas.openxmlformats.org/officeDocument/2006/relationships" xmlns:a="http://schemas.openxmlformats.org/drawingml/2006/main" r:embed="R8518ec643a714a36"/>
+          <a:blip xmlns:r="http://schemas.openxmlformats.org/officeDocument/2006/relationships" xmlns:a="http://schemas.openxmlformats.org/drawingml/2006/main" r:embed="R3f27720275534a9d"/>
           <a:stretch xmlns:a="http://schemas.openxmlformats.org/drawingml/2006/main"/>
         </p:blipFill>
         <p:spPr>
           <a:xfrm xmlns:a="http://schemas.openxmlformats.org/drawingml/2006/main">
-            <a:off x="3219450" y="7719616"/>
-            <a:ext cx="3562350" cy="1039019"/>
+            <a:off x="3480513" y="7143750"/>
+            <a:ext cx="3040224" cy="2190750"/>
           </a:xfrm>
           <a:prstGeom xmlns:a="http://schemas.openxmlformats.org/drawingml/2006/main" prst="rect">
             <a:avLst/>
@@ -3152,7 +3152,7 @@
           <p:cNvPr id="44" name="m-chart-smoke-caption">
             <a:extLst xmlns:a="http://schemas.openxmlformats.org/drawingml/2006/main">
               <a:ext uri="{FF2B5EF4-FFF2-40B4-BE49-F238E27FC236}">
-                <a16:creationId xmlns:a16="http://schemas.microsoft.com/office/drawing/2014/main" id="{1B9ACC21-703B-4A1A-A487-D31073113A5C}"/>
+                <a16:creationId xmlns:a16="http://schemas.microsoft.com/office/drawing/2014/main" id="{A8891358-44FA-4398-B314-2BC1011E04B8}"/>
               </a:ext>
             </a:extLst>
           </p:cNvPr>
@@ -3202,7 +3202,7 @@
           <p:cNvPr id="45" name="m-chart-smoke-frame">
             <a:extLst xmlns:a="http://schemas.openxmlformats.org/drawingml/2006/main">
               <a:ext uri="{FF2B5EF4-FFF2-40B4-BE49-F238E27FC236}">
-                <a16:creationId xmlns:a16="http://schemas.microsoft.com/office/drawing/2014/main" id="{9044F082-166C-43E7-9D11-A89C296274C4}"/>
+                <a16:creationId xmlns:a16="http://schemas.microsoft.com/office/drawing/2014/main" id="{62D3C550-004E-4CC9-B6E6-0C22A4BB3898}"/>
               </a:ext>
             </a:extLst>
           </p:cNvPr>
@@ -3239,13 +3239,13 @@
           <p:nvPr/>
         </p:nvPicPr>
         <p:blipFill>
-          <a:blip xmlns:r="http://schemas.openxmlformats.org/officeDocument/2006/relationships" xmlns:a="http://schemas.openxmlformats.org/drawingml/2006/main" r:embed="Rceacb6d959c541c0"/>
+          <a:blip xmlns:r="http://schemas.openxmlformats.org/officeDocument/2006/relationships" xmlns:a="http://schemas.openxmlformats.org/drawingml/2006/main" r:embed="Rcb3367ee2792482e"/>
           <a:stretch xmlns:a="http://schemas.openxmlformats.org/drawingml/2006/main"/>
         </p:blipFill>
         <p:spPr>
           <a:xfrm xmlns:a="http://schemas.openxmlformats.org/drawingml/2006/main">
-            <a:off x="3219450" y="10291366"/>
-            <a:ext cx="3562350" cy="1039019"/>
+            <a:off x="3612696" y="9810750"/>
+            <a:ext cx="2775857" cy="2000250"/>
           </a:xfrm>
           <a:prstGeom xmlns:a="http://schemas.openxmlformats.org/drawingml/2006/main" prst="rect">
             <a:avLst/>
@@ -3257,7 +3257,7 @@
           <p:cNvPr id="47" name="5-Achados principais-box">
             <a:extLst xmlns:a="http://schemas.openxmlformats.org/drawingml/2006/main">
               <a:ext uri="{FF2B5EF4-FFF2-40B4-BE49-F238E27FC236}">
-                <a16:creationId xmlns:a16="http://schemas.microsoft.com/office/drawing/2014/main" id="{22B74718-9BCE-4144-A18E-282BC2BF9FEA}"/>
+                <a16:creationId xmlns:a16="http://schemas.microsoft.com/office/drawing/2014/main" id="{3B53B0CC-F556-4B07-89CC-95CED24FA5F2}"/>
               </a:ext>
             </a:extLst>
           </p:cNvPr>
@@ -3290,7 +3290,7 @@
           <p:cNvPr id="48" name="5-Achados principais-head">
             <a:extLst xmlns:a="http://schemas.openxmlformats.org/drawingml/2006/main">
               <a:ext uri="{FF2B5EF4-FFF2-40B4-BE49-F238E27FC236}">
-                <a16:creationId xmlns:a16="http://schemas.microsoft.com/office/drawing/2014/main" id="{7A785CF9-55BA-43A7-8BAB-C6C93B55EAE8}"/>
+                <a16:creationId xmlns:a16="http://schemas.microsoft.com/office/drawing/2014/main" id="{08F0B65C-5F28-4CCD-9D28-EFE4FD1D3DEF}"/>
               </a:ext>
             </a:extLst>
           </p:cNvPr>
@@ -3323,7 +3323,7 @@
           <p:cNvPr id="49" name="5-Achados principais-title">
             <a:extLst xmlns:a="http://schemas.openxmlformats.org/drawingml/2006/main">
               <a:ext uri="{FF2B5EF4-FFF2-40B4-BE49-F238E27FC236}">
-                <a16:creationId xmlns:a16="http://schemas.microsoft.com/office/drawing/2014/main" id="{FE8943B6-76F2-4BB1-9D43-F3CB3B7D0780}"/>
+                <a16:creationId xmlns:a16="http://schemas.microsoft.com/office/drawing/2014/main" id="{8EA6C322-137B-48D2-8651-BFE67F7AC13C}"/>
               </a:ext>
             </a:extLst>
           </p:cNvPr>
@@ -3373,7 +3373,7 @@
           <p:cNvPr id="50" name="5-Achados principais-body">
             <a:extLst xmlns:a="http://schemas.openxmlformats.org/drawingml/2006/main">
               <a:ext uri="{FF2B5EF4-FFF2-40B4-BE49-F238E27FC236}">
-                <a16:creationId xmlns:a16="http://schemas.microsoft.com/office/drawing/2014/main" id="{44E5D511-DE4B-4F71-96D6-BAD380CA6DD1}"/>
+                <a16:creationId xmlns:a16="http://schemas.microsoft.com/office/drawing/2014/main" id="{5B9593E5-C329-4420-8D43-59C7DAACEE38}"/>
               </a:ext>
             </a:extLst>
           </p:cNvPr>
@@ -3474,7 +3474,7 @@
           <p:cNvPr id="51" name="6-Discussão aplicada-box">
             <a:extLst xmlns:a="http://schemas.openxmlformats.org/drawingml/2006/main">
               <a:ext uri="{FF2B5EF4-FFF2-40B4-BE49-F238E27FC236}">
-                <a16:creationId xmlns:a16="http://schemas.microsoft.com/office/drawing/2014/main" id="{F538C73A-AF08-4526-9B9F-31E391B8040A}"/>
+                <a16:creationId xmlns:a16="http://schemas.microsoft.com/office/drawing/2014/main" id="{4AA7A28B-722F-4DB1-AF71-667B5BFC99A4}"/>
               </a:ext>
             </a:extLst>
           </p:cNvPr>
@@ -3507,7 +3507,7 @@
           <p:cNvPr id="52" name="6-Discussão aplicada-head">
             <a:extLst xmlns:a="http://schemas.openxmlformats.org/drawingml/2006/main">
               <a:ext uri="{FF2B5EF4-FFF2-40B4-BE49-F238E27FC236}">
-                <a16:creationId xmlns:a16="http://schemas.microsoft.com/office/drawing/2014/main" id="{70973DD5-A7F2-41B4-AF9A-2030F7D4DC34}"/>
+                <a16:creationId xmlns:a16="http://schemas.microsoft.com/office/drawing/2014/main" id="{611E4F33-EC68-4900-B644-E0E4209BCA03}"/>
               </a:ext>
             </a:extLst>
           </p:cNvPr>
@@ -3540,7 +3540,7 @@
           <p:cNvPr id="53" name="6-Discussão aplicada-title">
             <a:extLst xmlns:a="http://schemas.openxmlformats.org/drawingml/2006/main">
               <a:ext uri="{FF2B5EF4-FFF2-40B4-BE49-F238E27FC236}">
-                <a16:creationId xmlns:a16="http://schemas.microsoft.com/office/drawing/2014/main" id="{355E61F6-BD01-4E03-B2F4-87B04180076F}"/>
+                <a16:creationId xmlns:a16="http://schemas.microsoft.com/office/drawing/2014/main" id="{D510D03F-9114-48D4-95DB-6A5959628ACD}"/>
               </a:ext>
             </a:extLst>
           </p:cNvPr>
@@ -3590,7 +3590,7 @@
           <p:cNvPr id="54" name="6-Discussão aplicada-body">
             <a:extLst xmlns:a="http://schemas.openxmlformats.org/drawingml/2006/main">
               <a:ext uri="{FF2B5EF4-FFF2-40B4-BE49-F238E27FC236}">
-                <a16:creationId xmlns:a16="http://schemas.microsoft.com/office/drawing/2014/main" id="{6548D00C-A4AD-4920-A521-FE4A189284AC}"/>
+                <a16:creationId xmlns:a16="http://schemas.microsoft.com/office/drawing/2014/main" id="{6A123CC0-992B-4AF0-820A-07240F5B8B70}"/>
               </a:ext>
             </a:extLst>
           </p:cNvPr>
@@ -3674,7 +3674,7 @@
           <p:cNvPr id="55" name="7-Conclusão central-box">
             <a:extLst xmlns:a="http://schemas.openxmlformats.org/drawingml/2006/main">
               <a:ext uri="{FF2B5EF4-FFF2-40B4-BE49-F238E27FC236}">
-                <a16:creationId xmlns:a16="http://schemas.microsoft.com/office/drawing/2014/main" id="{5C35EA91-C768-4BF4-8E08-C6CA1B4CD257}"/>
+                <a16:creationId xmlns:a16="http://schemas.microsoft.com/office/drawing/2014/main" id="{4B663093-0152-442B-BFEB-52C5E62F1BD1}"/>
               </a:ext>
             </a:extLst>
           </p:cNvPr>
@@ -3707,7 +3707,7 @@
           <p:cNvPr id="56" name="7-Conclusão central-head">
             <a:extLst xmlns:a="http://schemas.openxmlformats.org/drawingml/2006/main">
               <a:ext uri="{FF2B5EF4-FFF2-40B4-BE49-F238E27FC236}">
-                <a16:creationId xmlns:a16="http://schemas.microsoft.com/office/drawing/2014/main" id="{15746539-B06C-4093-BA79-B434B855798F}"/>
+                <a16:creationId xmlns:a16="http://schemas.microsoft.com/office/drawing/2014/main" id="{CB402F80-DD27-4C13-B620-CD81AEC5AADD}"/>
               </a:ext>
             </a:extLst>
           </p:cNvPr>
@@ -3740,7 +3740,7 @@
           <p:cNvPr id="57" name="7-Conclusão central-title">
             <a:extLst xmlns:a="http://schemas.openxmlformats.org/drawingml/2006/main">
               <a:ext uri="{FF2B5EF4-FFF2-40B4-BE49-F238E27FC236}">
-                <a16:creationId xmlns:a16="http://schemas.microsoft.com/office/drawing/2014/main" id="{300DF54D-8108-48A0-A216-3FBCFAEE1546}"/>
+                <a16:creationId xmlns:a16="http://schemas.microsoft.com/office/drawing/2014/main" id="{C795B29F-6AF3-44A5-A145-99B93F3C9FD2}"/>
               </a:ext>
             </a:extLst>
           </p:cNvPr>
@@ -3790,7 +3790,7 @@
           <p:cNvPr id="58" name="7-Conclusão central-body">
             <a:extLst xmlns:a="http://schemas.openxmlformats.org/drawingml/2006/main">
               <a:ext uri="{FF2B5EF4-FFF2-40B4-BE49-F238E27FC236}">
-                <a16:creationId xmlns:a16="http://schemas.microsoft.com/office/drawing/2014/main" id="{A41A022B-4BED-48CC-BF8E-003E569616C6}"/>
+                <a16:creationId xmlns:a16="http://schemas.microsoft.com/office/drawing/2014/main" id="{73669CEC-4DC1-4319-8F94-8856727A0583}"/>
               </a:ext>
             </a:extLst>
           </p:cNvPr>
@@ -3874,7 +3874,7 @@
           <p:cNvPr id="59" name="m-chart-crisis-caption">
             <a:extLst xmlns:a="http://schemas.openxmlformats.org/drawingml/2006/main">
               <a:ext uri="{FF2B5EF4-FFF2-40B4-BE49-F238E27FC236}">
-                <a16:creationId xmlns:a16="http://schemas.microsoft.com/office/drawing/2014/main" id="{A31DF33E-7B65-4DD9-AF99-DE707C28E7A1}"/>
+                <a16:creationId xmlns:a16="http://schemas.microsoft.com/office/drawing/2014/main" id="{66A1119F-1B7F-4325-B194-E420CE5FAFFE}"/>
               </a:ext>
             </a:extLst>
           </p:cNvPr>
@@ -3924,7 +3924,7 @@
           <p:cNvPr id="60" name="m-chart-crisis-frame">
             <a:extLst xmlns:a="http://schemas.openxmlformats.org/drawingml/2006/main">
               <a:ext uri="{FF2B5EF4-FFF2-40B4-BE49-F238E27FC236}">
-                <a16:creationId xmlns:a16="http://schemas.microsoft.com/office/drawing/2014/main" id="{FBA9B421-9FCF-4781-B32F-68C47EED8E8E}"/>
+                <a16:creationId xmlns:a16="http://schemas.microsoft.com/office/drawing/2014/main" id="{84AD392C-5E9C-4A98-8DA6-1DC28EE760A3}"/>
               </a:ext>
             </a:extLst>
           </p:cNvPr>
@@ -3961,13 +3961,13 @@
           <p:nvPr/>
         </p:nvPicPr>
         <p:blipFill>
-          <a:blip xmlns:r="http://schemas.openxmlformats.org/officeDocument/2006/relationships" xmlns:a="http://schemas.openxmlformats.org/drawingml/2006/main" r:embed="Rb24a78f8f44a49db"/>
+          <a:blip xmlns:r="http://schemas.openxmlformats.org/officeDocument/2006/relationships" xmlns:a="http://schemas.openxmlformats.org/drawingml/2006/main" r:embed="R6b8688a2b7f24574"/>
           <a:stretch xmlns:a="http://schemas.openxmlformats.org/drawingml/2006/main"/>
         </p:blipFill>
         <p:spPr>
           <a:xfrm xmlns:a="http://schemas.openxmlformats.org/drawingml/2006/main">
-            <a:off x="7048500" y="9130506"/>
-            <a:ext cx="2247900" cy="655638"/>
+            <a:off x="7075326" y="8667750"/>
+            <a:ext cx="2194249" cy="1581150"/>
           </a:xfrm>
           <a:prstGeom xmlns:a="http://schemas.openxmlformats.org/drawingml/2006/main" prst="rect">
             <a:avLst/>
@@ -3979,7 +3979,7 @@
           <p:cNvPr id="62" name="qr-box">
             <a:extLst xmlns:a="http://schemas.openxmlformats.org/drawingml/2006/main">
               <a:ext uri="{FF2B5EF4-FFF2-40B4-BE49-F238E27FC236}">
-                <a16:creationId xmlns:a16="http://schemas.microsoft.com/office/drawing/2014/main" id="{16D68B07-D765-4201-A88E-E1BE68AB72AB}"/>
+                <a16:creationId xmlns:a16="http://schemas.microsoft.com/office/drawing/2014/main" id="{1553CCDD-408B-4272-9585-68CDC4B73257}"/>
               </a:ext>
             </a:extLst>
           </p:cNvPr>
@@ -4016,7 +4016,7 @@
           <p:nvPr/>
         </p:nvPicPr>
         <p:blipFill>
-          <a:blip xmlns:r="http://schemas.openxmlformats.org/officeDocument/2006/relationships" xmlns:a="http://schemas.openxmlformats.org/drawingml/2006/main" r:embed="Rbe7bb5e0a05847c7"/>
+          <a:blip xmlns:r="http://schemas.openxmlformats.org/officeDocument/2006/relationships" xmlns:a="http://schemas.openxmlformats.org/drawingml/2006/main" r:embed="R2deb6d6218ad44a7"/>
           <a:stretch xmlns:a="http://schemas.openxmlformats.org/drawingml/2006/main"/>
         </p:blipFill>
         <p:spPr>
@@ -4034,7 +4034,7 @@
           <p:cNvPr id="64" name="qr-label">
             <a:extLst xmlns:a="http://schemas.openxmlformats.org/drawingml/2006/main">
               <a:ext uri="{FF2B5EF4-FFF2-40B4-BE49-F238E27FC236}">
-                <a16:creationId xmlns:a16="http://schemas.microsoft.com/office/drawing/2014/main" id="{2FB86C6B-C0A2-47C0-87F6-8BDC6D5D3AEF}"/>
+                <a16:creationId xmlns:a16="http://schemas.microsoft.com/office/drawing/2014/main" id="{530C85A4-C357-47CF-8DDD-F2CA2F0B5C2C}"/>
               </a:ext>
             </a:extLst>
           </p:cNvPr>
@@ -4101,7 +4101,7 @@
           <p:cNvPr id="65" name="references-box">
             <a:extLst xmlns:a="http://schemas.openxmlformats.org/drawingml/2006/main">
               <a:ext uri="{FF2B5EF4-FFF2-40B4-BE49-F238E27FC236}">
-                <a16:creationId xmlns:a16="http://schemas.microsoft.com/office/drawing/2014/main" id="{2C22741A-0A98-497B-93B7-454B1104693C}"/>
+                <a16:creationId xmlns:a16="http://schemas.microsoft.com/office/drawing/2014/main" id="{EF125D51-E50D-46D3-A1BB-43CEE0BE7FFF}"/>
               </a:ext>
             </a:extLst>
           </p:cNvPr>
@@ -4134,7 +4134,7 @@
           <p:cNvPr id="66" name="references-title">
             <a:extLst xmlns:a="http://schemas.openxmlformats.org/drawingml/2006/main">
               <a:ext uri="{FF2B5EF4-FFF2-40B4-BE49-F238E27FC236}">
-                <a16:creationId xmlns:a16="http://schemas.microsoft.com/office/drawing/2014/main" id="{37B0B62D-278C-479D-B306-780EE277AF8C}"/>
+                <a16:creationId xmlns:a16="http://schemas.microsoft.com/office/drawing/2014/main" id="{F667B099-916C-4E28-A426-F02BB0FCF467}"/>
               </a:ext>
             </a:extLst>
           </p:cNvPr>
@@ -4184,7 +4184,7 @@
           <p:cNvPr id="67" name="references-body">
             <a:extLst xmlns:a="http://schemas.openxmlformats.org/drawingml/2006/main">
               <a:ext uri="{FF2B5EF4-FFF2-40B4-BE49-F238E27FC236}">
-                <a16:creationId xmlns:a16="http://schemas.microsoft.com/office/drawing/2014/main" id="{8A317760-4BA4-4E67-BE52-3485AF316F18}"/>
+                <a16:creationId xmlns:a16="http://schemas.microsoft.com/office/drawing/2014/main" id="{192C0DA4-2392-4770-A78C-25F6808EDB16}"/>
               </a:ext>
             </a:extLst>
           </p:cNvPr>
@@ -4436,7 +4436,7 @@
     </p:spTree>
     <p:extLst>
       <p:ext uri="{BB962C8B-B14F-4D97-AF65-F5344CB8AC3E}">
-        <p14:creationId xmlns:p14="http://schemas.microsoft.com/office/powerpoint/2010/main" val="905037357"/>
+        <p14:creationId xmlns:p14="http://schemas.microsoft.com/office/powerpoint/2010/main" val="182759676"/>
       </p:ext>
     </p:extLst>
   </p:cSld>

--- a/outputs/posters/poster_pns_asma_morrison_pt.pptx
+++ b/outputs/posters/poster_pns_asma_morrison_pt.pptx
@@ -2,13 +2,13 @@
 <file path=ppt/presentation.xml><?xml version="1.0" encoding="utf-8"?>
 <p:presentation xmlns:p="http://schemas.openxmlformats.org/presentationml/2006/main">
   <p:sldMasterIdLst>
-    <p:sldMasterId xmlns:r="http://schemas.openxmlformats.org/officeDocument/2006/relationships" id="2147483648" r:id="Rc229cbe0211847c2"/>
+    <p:sldMasterId xmlns:r="http://schemas.openxmlformats.org/officeDocument/2006/relationships" id="2147483648" r:id="R99f25461995d4198"/>
   </p:sldMasterIdLst>
   <p:notesMasterIdLst>
-    <p:notesMasterId xmlns:r="http://schemas.openxmlformats.org/officeDocument/2006/relationships" r:id="R7760c29369884543"/>
+    <p:notesMasterId xmlns:r="http://schemas.openxmlformats.org/officeDocument/2006/relationships" r:id="Rb75df8c89eb4499d"/>
   </p:notesMasterIdLst>
   <p:sldIdLst>
-    <p:sldId xmlns:r="http://schemas.openxmlformats.org/officeDocument/2006/relationships" id="256" r:id="R90140ea82f9d4a98"/>
+    <p:sldId xmlns:r="http://schemas.openxmlformats.org/officeDocument/2006/relationships" id="256" r:id="R9c13de1aaf62403d"/>
   </p:sldIdLst>
   <p:sldSz cx="9525000" cy="13468350"/>
   <p:notesSz cx="6858000" cy="9144000"/>
@@ -601,7 +601,7 @@
   </p:cSld>
   <p:clrMap bg1="lt1" tx1="dk1" bg2="lt2" tx2="dk2" accent1="accent1" accent2="accent2" accent3="accent3" accent4="accent4" accent5="accent5" accent6="accent6" hlink="hlink" folHlink="folHlink"/>
   <p:sldLayoutIdLst>
-    <p:sldLayoutId xmlns:r="http://schemas.openxmlformats.org/officeDocument/2006/relationships" id="2147483649" r:id="R61afa3a768274172"/>
+    <p:sldLayoutId xmlns:r="http://schemas.openxmlformats.org/officeDocument/2006/relationships" id="2147483649" r:id="R1d8fb080eca54192"/>
   </p:sldLayoutIdLst>
   <p:txStyles>
     <p:titleStyle>
@@ -1156,7 +1156,7 @@
           <p:nvPr/>
         </p:nvPicPr>
         <p:blipFill>
-          <a:blip xmlns:r="http://schemas.openxmlformats.org/officeDocument/2006/relationships" xmlns:a="http://schemas.openxmlformats.org/drawingml/2006/main" r:embed="Rf3b0b13a99b64af0"/>
+          <a:blip xmlns:r="http://schemas.openxmlformats.org/officeDocument/2006/relationships" xmlns:a="http://schemas.openxmlformats.org/drawingml/2006/main" r:embed="R12591d59717140b2"/>
           <a:srcRect xmlns:a="http://schemas.openxmlformats.org/drawingml/2006/main" l="0" t="38622" r="0" b="38622"/>
           <a:stretch xmlns:a="http://schemas.openxmlformats.org/drawingml/2006/main">
             <a:fillRect l="0" t="0" r="0" b="0"/>
@@ -1181,7 +1181,7 @@
           <p:nvPr/>
         </p:nvPicPr>
         <p:blipFill>
-          <a:blip xmlns:r="http://schemas.openxmlformats.org/officeDocument/2006/relationships" xmlns:a="http://schemas.openxmlformats.org/drawingml/2006/main" r:embed="R7521a4b7fc024cc1"/>
+          <a:blip xmlns:r="http://schemas.openxmlformats.org/officeDocument/2006/relationships" xmlns:a="http://schemas.openxmlformats.org/drawingml/2006/main" r:embed="R73234604581c4b31"/>
           <a:stretch xmlns:a="http://schemas.openxmlformats.org/drawingml/2006/main"/>
         </p:blipFill>
         <p:spPr>
@@ -1203,7 +1203,7 @@
           <p:nvPr/>
         </p:nvPicPr>
         <p:blipFill>
-          <a:blip xmlns:r="http://schemas.openxmlformats.org/officeDocument/2006/relationships" xmlns:a="http://schemas.openxmlformats.org/drawingml/2006/main" r:embed="Rf6ca54a529f34951"/>
+          <a:blip xmlns:r="http://schemas.openxmlformats.org/officeDocument/2006/relationships" xmlns:a="http://schemas.openxmlformats.org/drawingml/2006/main" r:embed="Rd44d9f4741a94fb1"/>
           <a:stretch xmlns:a="http://schemas.openxmlformats.org/drawingml/2006/main"/>
         </p:blipFill>
         <p:spPr>
@@ -1221,7 +1221,7 @@
           <p:cNvPr id="4" name="morrison-title">
             <a:extLst xmlns:a="http://schemas.openxmlformats.org/drawingml/2006/main">
               <a:ext uri="{FF2B5EF4-FFF2-40B4-BE49-F238E27FC236}">
-                <a16:creationId xmlns:a16="http://schemas.microsoft.com/office/drawing/2014/main" id="{CDC78026-7EBF-4E94-97E2-9C6A901B5D10}"/>
+                <a16:creationId xmlns:a16="http://schemas.microsoft.com/office/drawing/2014/main" id="{AEDF4276-431A-4827-BFDB-2A3916040B14}"/>
               </a:ext>
             </a:extLst>
           </p:cNvPr>
@@ -1271,7 +1271,7 @@
           <p:cNvPr id="5" name="morrison-authors">
             <a:extLst xmlns:a="http://schemas.openxmlformats.org/drawingml/2006/main">
               <a:ext uri="{FF2B5EF4-FFF2-40B4-BE49-F238E27FC236}">
-                <a16:creationId xmlns:a16="http://schemas.microsoft.com/office/drawing/2014/main" id="{F2E23AB8-546F-405A-9A50-60116CBA19C0}"/>
+                <a16:creationId xmlns:a16="http://schemas.microsoft.com/office/drawing/2014/main" id="{6652BD72-81F7-4FE6-B3B5-11D6D274EE3F}"/>
               </a:ext>
             </a:extLst>
           </p:cNvPr>
@@ -1321,7 +1321,7 @@
           <p:cNvPr id="6" name="central-message">
             <a:extLst xmlns:a="http://schemas.openxmlformats.org/drawingml/2006/main">
               <a:ext uri="{FF2B5EF4-FFF2-40B4-BE49-F238E27FC236}">
-                <a16:creationId xmlns:a16="http://schemas.microsoft.com/office/drawing/2014/main" id="{721984F2-5C1A-447A-9CBB-13902A942020}"/>
+                <a16:creationId xmlns:a16="http://schemas.microsoft.com/office/drawing/2014/main" id="{446E88EE-021E-4C63-BE81-D2CAB54E5A25}"/>
               </a:ext>
             </a:extLst>
           </p:cNvPr>
@@ -1375,7 +1375,7 @@
           <p:cNvPr id="7" name="1-Método em uma linha-box">
             <a:extLst xmlns:a="http://schemas.openxmlformats.org/drawingml/2006/main">
               <a:ext uri="{FF2B5EF4-FFF2-40B4-BE49-F238E27FC236}">
-                <a16:creationId xmlns:a16="http://schemas.microsoft.com/office/drawing/2014/main" id="{D25256DB-03CB-4BFF-9C45-3EE132E4BDAD}"/>
+                <a16:creationId xmlns:a16="http://schemas.microsoft.com/office/drawing/2014/main" id="{1EF45DB5-58FC-4C9E-8D32-2E3F90949D20}"/>
               </a:ext>
             </a:extLst>
           </p:cNvPr>
@@ -1408,7 +1408,7 @@
           <p:cNvPr id="8" name="1-Método em uma linha-head">
             <a:extLst xmlns:a="http://schemas.openxmlformats.org/drawingml/2006/main">
               <a:ext uri="{FF2B5EF4-FFF2-40B4-BE49-F238E27FC236}">
-                <a16:creationId xmlns:a16="http://schemas.microsoft.com/office/drawing/2014/main" id="{705E452E-9F76-45FD-A4DF-38807F854AD3}"/>
+                <a16:creationId xmlns:a16="http://schemas.microsoft.com/office/drawing/2014/main" id="{32531A19-9C34-46DB-AA8F-317DCC4A2390}"/>
               </a:ext>
             </a:extLst>
           </p:cNvPr>
@@ -1441,7 +1441,7 @@
           <p:cNvPr id="9" name="1-Método em uma linha-title">
             <a:extLst xmlns:a="http://schemas.openxmlformats.org/drawingml/2006/main">
               <a:ext uri="{FF2B5EF4-FFF2-40B4-BE49-F238E27FC236}">
-                <a16:creationId xmlns:a16="http://schemas.microsoft.com/office/drawing/2014/main" id="{7439B484-F639-4E20-808C-116BBB51FC9B}"/>
+                <a16:creationId xmlns:a16="http://schemas.microsoft.com/office/drawing/2014/main" id="{37659DFB-B9C3-4D22-B775-DCDB74A63E16}"/>
               </a:ext>
             </a:extLst>
           </p:cNvPr>
@@ -1491,7 +1491,7 @@
           <p:cNvPr id="10" name="1-Método em uma linha-body">
             <a:extLst xmlns:a="http://schemas.openxmlformats.org/drawingml/2006/main">
               <a:ext uri="{FF2B5EF4-FFF2-40B4-BE49-F238E27FC236}">
-                <a16:creationId xmlns:a16="http://schemas.microsoft.com/office/drawing/2014/main" id="{C110E8B0-31E1-4342-9BFA-474D25DE9702}"/>
+                <a16:creationId xmlns:a16="http://schemas.microsoft.com/office/drawing/2014/main" id="{26504A8D-7309-4822-9C6C-F7AD0C6B9E29}"/>
               </a:ext>
             </a:extLst>
           </p:cNvPr>
@@ -1592,7 +1592,7 @@
           <p:cNvPr id="11" name="morrison-formula-box">
             <a:extLst xmlns:a="http://schemas.openxmlformats.org/drawingml/2006/main">
               <a:ext uri="{FF2B5EF4-FFF2-40B4-BE49-F238E27FC236}">
-                <a16:creationId xmlns:a16="http://schemas.microsoft.com/office/drawing/2014/main" id="{ACAC9EFA-9362-47E2-B2DC-3DDABC73EE8A}"/>
+                <a16:creationId xmlns:a16="http://schemas.microsoft.com/office/drawing/2014/main" id="{3D46F6C0-E341-4F33-A8B6-00E127020439}"/>
               </a:ext>
             </a:extLst>
           </p:cNvPr>
@@ -1625,7 +1625,7 @@
           <p:cNvPr id="12" name="morrison-formula-title">
             <a:extLst xmlns:a="http://schemas.openxmlformats.org/drawingml/2006/main">
               <a:ext uri="{FF2B5EF4-FFF2-40B4-BE49-F238E27FC236}">
-                <a16:creationId xmlns:a16="http://schemas.microsoft.com/office/drawing/2014/main" id="{C9807E6D-0253-41BF-A0E5-23B3BDC44ABC}"/>
+                <a16:creationId xmlns:a16="http://schemas.microsoft.com/office/drawing/2014/main" id="{44FA876E-6A2A-4C0D-83EE-530582C8E01D}"/>
               </a:ext>
             </a:extLst>
           </p:cNvPr>
@@ -1675,7 +1675,7 @@
           <p:cNvPr id="13" name="morrison-formula">
             <a:extLst xmlns:a="http://schemas.openxmlformats.org/drawingml/2006/main">
               <a:ext uri="{FF2B5EF4-FFF2-40B4-BE49-F238E27FC236}">
-                <a16:creationId xmlns:a16="http://schemas.microsoft.com/office/drawing/2014/main" id="{D1E9BD37-45CE-41B3-B673-64A3D030B946}"/>
+                <a16:creationId xmlns:a16="http://schemas.microsoft.com/office/drawing/2014/main" id="{03733974-F0C4-4DAC-ABFA-C0FDA6C7357E}"/>
               </a:ext>
             </a:extLst>
           </p:cNvPr>
@@ -1793,7 +1793,7 @@
           <p:cNvPr id="14" name="2-Dados e denominadores-box">
             <a:extLst xmlns:a="http://schemas.openxmlformats.org/drawingml/2006/main">
               <a:ext uri="{FF2B5EF4-FFF2-40B4-BE49-F238E27FC236}">
-                <a16:creationId xmlns:a16="http://schemas.microsoft.com/office/drawing/2014/main" id="{36CC5312-5571-4EC6-96D5-E2B9E8BC7753}"/>
+                <a16:creationId xmlns:a16="http://schemas.microsoft.com/office/drawing/2014/main" id="{586D3F19-98A6-4BA4-806B-3ADEA20D02AE}"/>
               </a:ext>
             </a:extLst>
           </p:cNvPr>
@@ -1826,7 +1826,7 @@
           <p:cNvPr id="15" name="2-Dados e denominadores-head">
             <a:extLst xmlns:a="http://schemas.openxmlformats.org/drawingml/2006/main">
               <a:ext uri="{FF2B5EF4-FFF2-40B4-BE49-F238E27FC236}">
-                <a16:creationId xmlns:a16="http://schemas.microsoft.com/office/drawing/2014/main" id="{445F6E0C-9EC7-492A-B900-B24E1BFBD34E}"/>
+                <a16:creationId xmlns:a16="http://schemas.microsoft.com/office/drawing/2014/main" id="{8989C50A-70B7-4C3C-B299-6D724CFE6FEF}"/>
               </a:ext>
             </a:extLst>
           </p:cNvPr>
@@ -1859,7 +1859,7 @@
           <p:cNvPr id="16" name="2-Dados e denominadores-title">
             <a:extLst xmlns:a="http://schemas.openxmlformats.org/drawingml/2006/main">
               <a:ext uri="{FF2B5EF4-FFF2-40B4-BE49-F238E27FC236}">
-                <a16:creationId xmlns:a16="http://schemas.microsoft.com/office/drawing/2014/main" id="{78C5D026-6256-439A-B949-F77F3BC75949}"/>
+                <a16:creationId xmlns:a16="http://schemas.microsoft.com/office/drawing/2014/main" id="{E86C7CB5-825C-49F5-8FB9-7BB03A45DAE3}"/>
               </a:ext>
             </a:extLst>
           </p:cNvPr>
@@ -1909,7 +1909,7 @@
           <p:cNvPr id="17" name="2-Dados e denominadores-body">
             <a:extLst xmlns:a="http://schemas.openxmlformats.org/drawingml/2006/main">
               <a:ext uri="{FF2B5EF4-FFF2-40B4-BE49-F238E27FC236}">
-                <a16:creationId xmlns:a16="http://schemas.microsoft.com/office/drawing/2014/main" id="{27D78EA8-BB3E-44A2-B62D-8095E58D0A89}"/>
+                <a16:creationId xmlns:a16="http://schemas.microsoft.com/office/drawing/2014/main" id="{58D424B8-065A-45A2-A434-4E260D22A5EF}"/>
               </a:ext>
             </a:extLst>
           </p:cNvPr>
@@ -1993,7 +1993,7 @@
           <p:cNvPr id="18" name="3-Por que IC beta?-box">
             <a:extLst xmlns:a="http://schemas.openxmlformats.org/drawingml/2006/main">
               <a:ext uri="{FF2B5EF4-FFF2-40B4-BE49-F238E27FC236}">
-                <a16:creationId xmlns:a16="http://schemas.microsoft.com/office/drawing/2014/main" id="{56827A92-3A71-4B79-BA4C-C6197E9392A1}"/>
+                <a16:creationId xmlns:a16="http://schemas.microsoft.com/office/drawing/2014/main" id="{6222072A-C605-48FC-A8C3-4AFAD5792D69}"/>
               </a:ext>
             </a:extLst>
           </p:cNvPr>
@@ -2026,7 +2026,7 @@
           <p:cNvPr id="19" name="3-Por que IC beta?-head">
             <a:extLst xmlns:a="http://schemas.openxmlformats.org/drawingml/2006/main">
               <a:ext uri="{FF2B5EF4-FFF2-40B4-BE49-F238E27FC236}">
-                <a16:creationId xmlns:a16="http://schemas.microsoft.com/office/drawing/2014/main" id="{91A06BA8-D441-47CA-92CC-B98F221741BF}"/>
+                <a16:creationId xmlns:a16="http://schemas.microsoft.com/office/drawing/2014/main" id="{8F522BDF-94BF-496E-B482-CE14E9F9240B}"/>
               </a:ext>
             </a:extLst>
           </p:cNvPr>
@@ -2059,7 +2059,7 @@
           <p:cNvPr id="20" name="3-Por que IC beta?-title">
             <a:extLst xmlns:a="http://schemas.openxmlformats.org/drawingml/2006/main">
               <a:ext uri="{FF2B5EF4-FFF2-40B4-BE49-F238E27FC236}">
-                <a16:creationId xmlns:a16="http://schemas.microsoft.com/office/drawing/2014/main" id="{F18C0336-F7AF-4A4D-B2DD-8D894030A745}"/>
+                <a16:creationId xmlns:a16="http://schemas.microsoft.com/office/drawing/2014/main" id="{528244F5-C8DD-454A-AB93-C57C7F583D1E}"/>
               </a:ext>
             </a:extLst>
           </p:cNvPr>
@@ -2109,7 +2109,7 @@
           <p:cNvPr id="21" name="3-Por que IC beta?-body">
             <a:extLst xmlns:a="http://schemas.openxmlformats.org/drawingml/2006/main">
               <a:ext uri="{FF2B5EF4-FFF2-40B4-BE49-F238E27FC236}">
-                <a16:creationId xmlns:a16="http://schemas.microsoft.com/office/drawing/2014/main" id="{1CDCA99B-3985-405E-9BC1-A8046860CD6F}"/>
+                <a16:creationId xmlns:a16="http://schemas.microsoft.com/office/drawing/2014/main" id="{52C782DF-AAE2-472D-8EF6-F339D9B3C468}"/>
               </a:ext>
             </a:extLst>
           </p:cNvPr>
@@ -2193,7 +2193,7 @@
           <p:cNvPr id="22" name="4-ETL e interoperabilidade-box">
             <a:extLst xmlns:a="http://schemas.openxmlformats.org/drawingml/2006/main">
               <a:ext uri="{FF2B5EF4-FFF2-40B4-BE49-F238E27FC236}">
-                <a16:creationId xmlns:a16="http://schemas.microsoft.com/office/drawing/2014/main" id="{9DE70B74-8626-4120-8C28-DD0DB6A25293}"/>
+                <a16:creationId xmlns:a16="http://schemas.microsoft.com/office/drawing/2014/main" id="{14729F0E-7B97-4D17-A01D-BD5D970004E7}"/>
               </a:ext>
             </a:extLst>
           </p:cNvPr>
@@ -2226,7 +2226,7 @@
           <p:cNvPr id="23" name="4-ETL e interoperabilidade-head">
             <a:extLst xmlns:a="http://schemas.openxmlformats.org/drawingml/2006/main">
               <a:ext uri="{FF2B5EF4-FFF2-40B4-BE49-F238E27FC236}">
-                <a16:creationId xmlns:a16="http://schemas.microsoft.com/office/drawing/2014/main" id="{641670A1-FB6B-4785-98C1-B2B55048CE24}"/>
+                <a16:creationId xmlns:a16="http://schemas.microsoft.com/office/drawing/2014/main" id="{4380F86C-CDBF-4896-AE79-1C0BB6E0D116}"/>
               </a:ext>
             </a:extLst>
           </p:cNvPr>
@@ -2259,7 +2259,7 @@
           <p:cNvPr id="24" name="4-ETL e interoperabilidade-title">
             <a:extLst xmlns:a="http://schemas.openxmlformats.org/drawingml/2006/main">
               <a:ext uri="{FF2B5EF4-FFF2-40B4-BE49-F238E27FC236}">
-                <a16:creationId xmlns:a16="http://schemas.microsoft.com/office/drawing/2014/main" id="{83DB0548-512D-4F9B-BA00-934703987553}"/>
+                <a16:creationId xmlns:a16="http://schemas.microsoft.com/office/drawing/2014/main" id="{42AEAC04-DADE-4334-88CC-2BFBFBA1B9EF}"/>
               </a:ext>
             </a:extLst>
           </p:cNvPr>
@@ -2309,7 +2309,7 @@
           <p:cNvPr id="25" name="4-ETL e interoperabilidade-body">
             <a:extLst xmlns:a="http://schemas.openxmlformats.org/drawingml/2006/main">
               <a:ext uri="{FF2B5EF4-FFF2-40B4-BE49-F238E27FC236}">
-                <a16:creationId xmlns:a16="http://schemas.microsoft.com/office/drawing/2014/main" id="{3C309690-F490-463A-A277-363926CB545C}"/>
+                <a16:creationId xmlns:a16="http://schemas.microsoft.com/office/drawing/2014/main" id="{D58036BA-722F-460D-9D71-915C998484B7}"/>
               </a:ext>
             </a:extLst>
           </p:cNvPr>
@@ -2393,7 +2393,7 @@
           <p:cNvPr id="26" name="m-prev-metric">
             <a:extLst xmlns:a="http://schemas.openxmlformats.org/drawingml/2006/main">
               <a:ext uri="{FF2B5EF4-FFF2-40B4-BE49-F238E27FC236}">
-                <a16:creationId xmlns:a16="http://schemas.microsoft.com/office/drawing/2014/main" id="{316B6707-E6EA-4E34-8011-6971B74A85B9}"/>
+                <a16:creationId xmlns:a16="http://schemas.microsoft.com/office/drawing/2014/main" id="{FCAEF3D7-6CD7-48CC-A710-94218FEF8250}"/>
               </a:ext>
             </a:extLst>
           </p:cNvPr>
@@ -2426,7 +2426,7 @@
           <p:cNvPr id="27" name="m-prev-metric-title">
             <a:extLst xmlns:a="http://schemas.openxmlformats.org/drawingml/2006/main">
               <a:ext uri="{FF2B5EF4-FFF2-40B4-BE49-F238E27FC236}">
-                <a16:creationId xmlns:a16="http://schemas.microsoft.com/office/drawing/2014/main" id="{13F0A14E-458B-4C7E-A292-852A8A1E9898}"/>
+                <a16:creationId xmlns:a16="http://schemas.microsoft.com/office/drawing/2014/main" id="{F445E551-EA47-4923-B177-EEED1F44D2B7}"/>
               </a:ext>
             </a:extLst>
           </p:cNvPr>
@@ -2466,7 +2466,7 @@
                   <a:srgbClr val="153F59"/>
                 </a:solidFill>
               </a:rPr>
-              <a:t>Diagnóstico</a:t>
+              <a:t>Brasil: diagnóstico</a:t>
             </a:r>
           </a:p>
         </p:txBody>
@@ -2476,7 +2476,7 @@
           <p:cNvPr id="28" name="m-prev-metric-value">
             <a:extLst xmlns:a="http://schemas.openxmlformats.org/drawingml/2006/main">
               <a:ext uri="{FF2B5EF4-FFF2-40B4-BE49-F238E27FC236}">
-                <a16:creationId xmlns:a16="http://schemas.microsoft.com/office/drawing/2014/main" id="{608BB46A-3F18-44B8-922F-FAFF168DA803}"/>
+                <a16:creationId xmlns:a16="http://schemas.microsoft.com/office/drawing/2014/main" id="{5BA486BD-916B-4961-B9B7-A246B1B0D85B}"/>
               </a:ext>
             </a:extLst>
           </p:cNvPr>
@@ -2526,7 +2526,7 @@
           <p:cNvPr id="29" name="m-prev-metric-note">
             <a:extLst xmlns:a="http://schemas.openxmlformats.org/drawingml/2006/main">
               <a:ext uri="{FF2B5EF4-FFF2-40B4-BE49-F238E27FC236}">
-                <a16:creationId xmlns:a16="http://schemas.microsoft.com/office/drawing/2014/main" id="{C4A21E27-95E5-4ED7-81B6-9437F832C83D}"/>
+                <a16:creationId xmlns:a16="http://schemas.microsoft.com/office/drawing/2014/main" id="{49483A75-14D3-41A2-A5A3-970493A5CF89}"/>
               </a:ext>
             </a:extLst>
           </p:cNvPr>
@@ -2566,7 +2566,7 @@
                   <a:srgbClr val="102536"/>
                 </a:solidFill>
               </a:rPr>
-              <a:t>Aumento nacional com IC95% sem sobreposição.</a:t>
+              <a:t>Aumento com IC95% sem sobreposição.</a:t>
             </a:r>
           </a:p>
         </p:txBody>
@@ -2576,7 +2576,7 @@
           <p:cNvPr id="30" name="m-crisis-metric">
             <a:extLst xmlns:a="http://schemas.openxmlformats.org/drawingml/2006/main">
               <a:ext uri="{FF2B5EF4-FFF2-40B4-BE49-F238E27FC236}">
-                <a16:creationId xmlns:a16="http://schemas.microsoft.com/office/drawing/2014/main" id="{581BC252-403A-4816-ABF3-726F98286E39}"/>
+                <a16:creationId xmlns:a16="http://schemas.microsoft.com/office/drawing/2014/main" id="{A88A3FF9-822D-4B6C-8993-02AB61CCC3C3}"/>
               </a:ext>
             </a:extLst>
           </p:cNvPr>
@@ -2609,7 +2609,7 @@
           <p:cNvPr id="31" name="m-crisis-metric-title">
             <a:extLst xmlns:a="http://schemas.openxmlformats.org/drawingml/2006/main">
               <a:ext uri="{FF2B5EF4-FFF2-40B4-BE49-F238E27FC236}">
-                <a16:creationId xmlns:a16="http://schemas.microsoft.com/office/drawing/2014/main" id="{58EE0526-9800-4C08-B48C-40C8F7284030}"/>
+                <a16:creationId xmlns:a16="http://schemas.microsoft.com/office/drawing/2014/main" id="{6CA35550-A38D-47E3-82BF-062A0F47CB92}"/>
               </a:ext>
             </a:extLst>
           </p:cNvPr>
@@ -2649,7 +2649,7 @@
                   <a:srgbClr val="153F59"/>
                 </a:solidFill>
               </a:rPr>
-              <a:t>Crises</a:t>
+              <a:t>Brasil: crises</a:t>
             </a:r>
           </a:p>
         </p:txBody>
@@ -2659,7 +2659,7 @@
           <p:cNvPr id="32" name="m-crisis-metric-value">
             <a:extLst xmlns:a="http://schemas.openxmlformats.org/drawingml/2006/main">
               <a:ext uri="{FF2B5EF4-FFF2-40B4-BE49-F238E27FC236}">
-                <a16:creationId xmlns:a16="http://schemas.microsoft.com/office/drawing/2014/main" id="{98077A75-D065-4962-829A-2510CC6A2BB7}"/>
+                <a16:creationId xmlns:a16="http://schemas.microsoft.com/office/drawing/2014/main" id="{95FC9CDC-CEED-41F8-BD81-39CA07977241}"/>
               </a:ext>
             </a:extLst>
           </p:cNvPr>
@@ -2709,7 +2709,7 @@
           <p:cNvPr id="33" name="m-crisis-metric-note">
             <a:extLst xmlns:a="http://schemas.openxmlformats.org/drawingml/2006/main">
               <a:ext uri="{FF2B5EF4-FFF2-40B4-BE49-F238E27FC236}">
-                <a16:creationId xmlns:a16="http://schemas.microsoft.com/office/drawing/2014/main" id="{C76529BE-7BE9-4833-83A7-20F69A458129}"/>
+                <a16:creationId xmlns:a16="http://schemas.microsoft.com/office/drawing/2014/main" id="{AE83A72E-72EC-4CA2-9E17-DD59444D6070}"/>
               </a:ext>
             </a:extLst>
           </p:cNvPr>
@@ -2749,7 +2749,7 @@
                   <a:srgbClr val="102536"/>
                 </a:solidFill>
               </a:rPr>
-              <a:t>Sem melhora proporcional no controle.</a:t>
+              <a:t>Estabilidade sugere controle insuficiente.</a:t>
             </a:r>
           </a:p>
         </p:txBody>
@@ -2759,7 +2759,7 @@
           <p:cNvPr id="34" name="m-meds-metric">
             <a:extLst xmlns:a="http://schemas.openxmlformats.org/drawingml/2006/main">
               <a:ext uri="{FF2B5EF4-FFF2-40B4-BE49-F238E27FC236}">
-                <a16:creationId xmlns:a16="http://schemas.microsoft.com/office/drawing/2014/main" id="{454F5A88-5134-409F-8782-1F1EEE52CE15}"/>
+                <a16:creationId xmlns:a16="http://schemas.microsoft.com/office/drawing/2014/main" id="{D1DFB3BD-497D-4CD1-9A41-6D56B86BB118}"/>
               </a:ext>
             </a:extLst>
           </p:cNvPr>
@@ -2792,7 +2792,7 @@
           <p:cNvPr id="35" name="m-meds-metric-title">
             <a:extLst xmlns:a="http://schemas.openxmlformats.org/drawingml/2006/main">
               <a:ext uri="{FF2B5EF4-FFF2-40B4-BE49-F238E27FC236}">
-                <a16:creationId xmlns:a16="http://schemas.microsoft.com/office/drawing/2014/main" id="{FE98CC23-4AC5-4A2B-9B61-E8087DCB5A18}"/>
+                <a16:creationId xmlns:a16="http://schemas.microsoft.com/office/drawing/2014/main" id="{EB8FDB4C-036D-4F94-8606-AE10C1902A3C}"/>
               </a:ext>
             </a:extLst>
           </p:cNvPr>
@@ -2832,7 +2832,7 @@
                   <a:srgbClr val="153F59"/>
                 </a:solidFill>
               </a:rPr>
-              <a:t>Medicamentos</a:t>
+              <a:t>Brasil: medicamentos</a:t>
             </a:r>
           </a:p>
         </p:txBody>
@@ -2842,7 +2842,7 @@
           <p:cNvPr id="36" name="m-meds-metric-value">
             <a:extLst xmlns:a="http://schemas.openxmlformats.org/drawingml/2006/main">
               <a:ext uri="{FF2B5EF4-FFF2-40B4-BE49-F238E27FC236}">
-                <a16:creationId xmlns:a16="http://schemas.microsoft.com/office/drawing/2014/main" id="{920F66BB-63EA-4049-BE27-EF6EBF534F94}"/>
+                <a16:creationId xmlns:a16="http://schemas.microsoft.com/office/drawing/2014/main" id="{6AF46888-A69E-444B-A4D9-DC88A3F8F242}"/>
               </a:ext>
             </a:extLst>
           </p:cNvPr>
@@ -2892,7 +2892,7 @@
           <p:cNvPr id="37" name="m-meds-metric-note">
             <a:extLst xmlns:a="http://schemas.openxmlformats.org/drawingml/2006/main">
               <a:ext uri="{FF2B5EF4-FFF2-40B4-BE49-F238E27FC236}">
-                <a16:creationId xmlns:a16="http://schemas.microsoft.com/office/drawing/2014/main" id="{6A44B4BA-DE1C-416F-A9CA-5ABA653B86B3}"/>
+                <a16:creationId xmlns:a16="http://schemas.microsoft.com/office/drawing/2014/main" id="{7DF8C7AE-347E-41C3-ADA0-C244E3768374}"/>
               </a:ext>
             </a:extLst>
           </p:cNvPr>
@@ -2932,7 +2932,7 @@
                   <a:srgbClr val="102536"/>
                 </a:solidFill>
               </a:rPr>
-              <a:t>Interpretar por denominador e IC.</a:t>
+              <a:t>Menor uso entre asmáticos; IC95% orienta cautela.</a:t>
             </a:r>
           </a:p>
         </p:txBody>
@@ -2942,7 +2942,7 @@
           <p:cNvPr id="38" name="m-chart-prev-caption">
             <a:extLst xmlns:a="http://schemas.openxmlformats.org/drawingml/2006/main">
               <a:ext uri="{FF2B5EF4-FFF2-40B4-BE49-F238E27FC236}">
-                <a16:creationId xmlns:a16="http://schemas.microsoft.com/office/drawing/2014/main" id="{409E3753-3059-4E0C-8BBB-E56C1A07A5E7}"/>
+                <a16:creationId xmlns:a16="http://schemas.microsoft.com/office/drawing/2014/main" id="{CB1CA011-6916-4341-94AF-42F0C2021564}"/>
               </a:ext>
             </a:extLst>
           </p:cNvPr>
@@ -2992,7 +2992,7 @@
           <p:cNvPr id="39" name="m-chart-prev-frame">
             <a:extLst xmlns:a="http://schemas.openxmlformats.org/drawingml/2006/main">
               <a:ext uri="{FF2B5EF4-FFF2-40B4-BE49-F238E27FC236}">
-                <a16:creationId xmlns:a16="http://schemas.microsoft.com/office/drawing/2014/main" id="{7315D717-2892-4993-A0FE-F8797DD38FFB}"/>
+                <a16:creationId xmlns:a16="http://schemas.microsoft.com/office/drawing/2014/main" id="{A5CA54F7-56A5-4BD4-A3A3-56CEB476241E}"/>
               </a:ext>
             </a:extLst>
           </p:cNvPr>
@@ -3029,7 +3029,7 @@
           <p:nvPr/>
         </p:nvPicPr>
         <p:blipFill>
-          <a:blip xmlns:r="http://schemas.openxmlformats.org/officeDocument/2006/relationships" xmlns:a="http://schemas.openxmlformats.org/drawingml/2006/main" r:embed="Rd60fc84301804af9"/>
+          <a:blip xmlns:r="http://schemas.openxmlformats.org/officeDocument/2006/relationships" xmlns:a="http://schemas.openxmlformats.org/drawingml/2006/main" r:embed="R2baa2a3f71b943ea"/>
           <a:stretch xmlns:a="http://schemas.openxmlformats.org/drawingml/2006/main"/>
         </p:blipFill>
         <p:spPr>
@@ -3047,7 +3047,7 @@
           <p:cNvPr id="41" name="m-chart-meds-caption">
             <a:extLst xmlns:a="http://schemas.openxmlformats.org/drawingml/2006/main">
               <a:ext uri="{FF2B5EF4-FFF2-40B4-BE49-F238E27FC236}">
-                <a16:creationId xmlns:a16="http://schemas.microsoft.com/office/drawing/2014/main" id="{3385B534-C72F-4CC1-BF23-C93043B8AB50}"/>
+                <a16:creationId xmlns:a16="http://schemas.microsoft.com/office/drawing/2014/main" id="{9F8654A1-5BC1-4F66-B9C2-E747FECFDD54}"/>
               </a:ext>
             </a:extLst>
           </p:cNvPr>
@@ -3097,7 +3097,7 @@
           <p:cNvPr id="42" name="m-chart-meds-frame">
             <a:extLst xmlns:a="http://schemas.openxmlformats.org/drawingml/2006/main">
               <a:ext uri="{FF2B5EF4-FFF2-40B4-BE49-F238E27FC236}">
-                <a16:creationId xmlns:a16="http://schemas.microsoft.com/office/drawing/2014/main" id="{E2725ACD-8399-414D-BF20-C79357459FC5}"/>
+                <a16:creationId xmlns:a16="http://schemas.microsoft.com/office/drawing/2014/main" id="{ACBA8B12-D4D1-4287-AF32-A5C389DACC79}"/>
               </a:ext>
             </a:extLst>
           </p:cNvPr>
@@ -3134,7 +3134,7 @@
           <p:nvPr/>
         </p:nvPicPr>
         <p:blipFill>
-          <a:blip xmlns:r="http://schemas.openxmlformats.org/officeDocument/2006/relationships" xmlns:a="http://schemas.openxmlformats.org/drawingml/2006/main" r:embed="R3f27720275534a9d"/>
+          <a:blip xmlns:r="http://schemas.openxmlformats.org/officeDocument/2006/relationships" xmlns:a="http://schemas.openxmlformats.org/drawingml/2006/main" r:embed="R5f64831090624e02"/>
           <a:stretch xmlns:a="http://schemas.openxmlformats.org/drawingml/2006/main"/>
         </p:blipFill>
         <p:spPr>
@@ -3152,7 +3152,7 @@
           <p:cNvPr id="44" name="m-chart-smoke-caption">
             <a:extLst xmlns:a="http://schemas.openxmlformats.org/drawingml/2006/main">
               <a:ext uri="{FF2B5EF4-FFF2-40B4-BE49-F238E27FC236}">
-                <a16:creationId xmlns:a16="http://schemas.microsoft.com/office/drawing/2014/main" id="{A8891358-44FA-4398-B314-2BC1011E04B8}"/>
+                <a16:creationId xmlns:a16="http://schemas.microsoft.com/office/drawing/2014/main" id="{5050716F-00CA-414E-AEDE-4023ADCBB2C7}"/>
               </a:ext>
             </a:extLst>
           </p:cNvPr>
@@ -3202,7 +3202,7 @@
           <p:cNvPr id="45" name="m-chart-smoke-frame">
             <a:extLst xmlns:a="http://schemas.openxmlformats.org/drawingml/2006/main">
               <a:ext uri="{FF2B5EF4-FFF2-40B4-BE49-F238E27FC236}">
-                <a16:creationId xmlns:a16="http://schemas.microsoft.com/office/drawing/2014/main" id="{62D3C550-004E-4CC9-B6E6-0C22A4BB3898}"/>
+                <a16:creationId xmlns:a16="http://schemas.microsoft.com/office/drawing/2014/main" id="{28C81DE3-14A9-476F-BF1D-4C5AD2E8EBE5}"/>
               </a:ext>
             </a:extLst>
           </p:cNvPr>
@@ -3239,7 +3239,7 @@
           <p:nvPr/>
         </p:nvPicPr>
         <p:blipFill>
-          <a:blip xmlns:r="http://schemas.openxmlformats.org/officeDocument/2006/relationships" xmlns:a="http://schemas.openxmlformats.org/drawingml/2006/main" r:embed="Rcb3367ee2792482e"/>
+          <a:blip xmlns:r="http://schemas.openxmlformats.org/officeDocument/2006/relationships" xmlns:a="http://schemas.openxmlformats.org/drawingml/2006/main" r:embed="R71e68793bd2a4606"/>
           <a:stretch xmlns:a="http://schemas.openxmlformats.org/drawingml/2006/main"/>
         </p:blipFill>
         <p:spPr>
@@ -3257,7 +3257,7 @@
           <p:cNvPr id="47" name="5-Achados principais-box">
             <a:extLst xmlns:a="http://schemas.openxmlformats.org/drawingml/2006/main">
               <a:ext uri="{FF2B5EF4-FFF2-40B4-BE49-F238E27FC236}">
-                <a16:creationId xmlns:a16="http://schemas.microsoft.com/office/drawing/2014/main" id="{3B53B0CC-F556-4B07-89CC-95CED24FA5F2}"/>
+                <a16:creationId xmlns:a16="http://schemas.microsoft.com/office/drawing/2014/main" id="{05A1D977-F48E-41E7-9830-92D8A8A3BA04}"/>
               </a:ext>
             </a:extLst>
           </p:cNvPr>
@@ -3290,7 +3290,7 @@
           <p:cNvPr id="48" name="5-Achados principais-head">
             <a:extLst xmlns:a="http://schemas.openxmlformats.org/drawingml/2006/main">
               <a:ext uri="{FF2B5EF4-FFF2-40B4-BE49-F238E27FC236}">
-                <a16:creationId xmlns:a16="http://schemas.microsoft.com/office/drawing/2014/main" id="{08F0B65C-5F28-4CCD-9D28-EFE4FD1D3DEF}"/>
+                <a16:creationId xmlns:a16="http://schemas.microsoft.com/office/drawing/2014/main" id="{A6D9DC0D-B647-4117-A3F3-F77202A66FE1}"/>
               </a:ext>
             </a:extLst>
           </p:cNvPr>
@@ -3323,7 +3323,7 @@
           <p:cNvPr id="49" name="5-Achados principais-title">
             <a:extLst xmlns:a="http://schemas.openxmlformats.org/drawingml/2006/main">
               <a:ext uri="{FF2B5EF4-FFF2-40B4-BE49-F238E27FC236}">
-                <a16:creationId xmlns:a16="http://schemas.microsoft.com/office/drawing/2014/main" id="{8EA6C322-137B-48D2-8651-BFE67F7AC13C}"/>
+                <a16:creationId xmlns:a16="http://schemas.microsoft.com/office/drawing/2014/main" id="{0008CA9C-5F91-455E-B3C9-DDA4E33BBE91}"/>
               </a:ext>
             </a:extLst>
           </p:cNvPr>
@@ -3373,7 +3373,7 @@
           <p:cNvPr id="50" name="5-Achados principais-body">
             <a:extLst xmlns:a="http://schemas.openxmlformats.org/drawingml/2006/main">
               <a:ext uri="{FF2B5EF4-FFF2-40B4-BE49-F238E27FC236}">
-                <a16:creationId xmlns:a16="http://schemas.microsoft.com/office/drawing/2014/main" id="{5B9593E5-C329-4420-8D43-59C7DAACEE38}"/>
+                <a16:creationId xmlns:a16="http://schemas.microsoft.com/office/drawing/2014/main" id="{F79AD850-0A85-4EEB-B915-252236C4464E}"/>
               </a:ext>
             </a:extLst>
           </p:cNvPr>
@@ -3413,7 +3413,7 @@
                   <a:srgbClr val="102536"/>
                 </a:solidFill>
               </a:rPr>
-              <a:t>• Diagnóstico médico de asma: 4,41% em 2013 para 5,40% em 2019, com ICs sem sobreposição.</a:t>
+              <a:t>• Brasil: diagnóstico médico de asma aumentou de 4,41% em 2013 para 5,40% em 2019, com IC95% sem sobreposição.</a:t>
             </a:r>
           </a:p>
           <a:p xmlns:a="http://schemas.openxmlformats.org/drawingml/2006/main">
@@ -3430,7 +3430,7 @@
                   <a:srgbClr val="102536"/>
                 </a:solidFill>
               </a:rPr>
-              <a:t>• Crises nos últimos 12 meses: 38,3% para 37,7%, indicando estabilidade aproximada.</a:t>
+              <a:t>• Brasil: crises nos últimos 12 meses ficaram estáveis, de 38,3% para 37,7%.</a:t>
             </a:r>
           </a:p>
           <a:p xmlns:a="http://schemas.openxmlformats.org/drawingml/2006/main">
@@ -3447,7 +3447,7 @@
                   <a:srgbClr val="102536"/>
                 </a:solidFill>
               </a:rPr>
-              <a:t>• Uso de medicamento oral/bombinha entre asmáticos: 81,5% para 64,4%; leitura exige cautela por denominador e IC95%.</a:t>
+              <a:t>• Brasil: uso de medicamento oral/bombinha entre pessoas com asma passou de 81,5% para 64,4%; a leitura deve considerar IC95%, perfil dos diagnosticados e taxa populacional.</a:t>
             </a:r>
           </a:p>
           <a:p xmlns:a="http://schemas.openxmlformats.org/drawingml/2006/main">
@@ -3474,7 +3474,7 @@
           <p:cNvPr id="51" name="6-Discussão aplicada-box">
             <a:extLst xmlns:a="http://schemas.openxmlformats.org/drawingml/2006/main">
               <a:ext uri="{FF2B5EF4-FFF2-40B4-BE49-F238E27FC236}">
-                <a16:creationId xmlns:a16="http://schemas.microsoft.com/office/drawing/2014/main" id="{4AA7A28B-722F-4DB1-AF71-667B5BFC99A4}"/>
+                <a16:creationId xmlns:a16="http://schemas.microsoft.com/office/drawing/2014/main" id="{4D048718-C211-4B8E-812D-E7E6F20C2576}"/>
               </a:ext>
             </a:extLst>
           </p:cNvPr>
@@ -3507,7 +3507,7 @@
           <p:cNvPr id="52" name="6-Discussão aplicada-head">
             <a:extLst xmlns:a="http://schemas.openxmlformats.org/drawingml/2006/main">
               <a:ext uri="{FF2B5EF4-FFF2-40B4-BE49-F238E27FC236}">
-                <a16:creationId xmlns:a16="http://schemas.microsoft.com/office/drawing/2014/main" id="{611E4F33-EC68-4900-B644-E0E4209BCA03}"/>
+                <a16:creationId xmlns:a16="http://schemas.microsoft.com/office/drawing/2014/main" id="{B2121539-C61E-44B7-BAC1-CB2B7AFBC998}"/>
               </a:ext>
             </a:extLst>
           </p:cNvPr>
@@ -3540,7 +3540,7 @@
           <p:cNvPr id="53" name="6-Discussão aplicada-title">
             <a:extLst xmlns:a="http://schemas.openxmlformats.org/drawingml/2006/main">
               <a:ext uri="{FF2B5EF4-FFF2-40B4-BE49-F238E27FC236}">
-                <a16:creationId xmlns:a16="http://schemas.microsoft.com/office/drawing/2014/main" id="{D510D03F-9114-48D4-95DB-6A5959628ACD}"/>
+                <a16:creationId xmlns:a16="http://schemas.microsoft.com/office/drawing/2014/main" id="{F362AA82-9E11-4DBC-8D33-F3E39C256C3C}"/>
               </a:ext>
             </a:extLst>
           </p:cNvPr>
@@ -3590,7 +3590,7 @@
           <p:cNvPr id="54" name="6-Discussão aplicada-body">
             <a:extLst xmlns:a="http://schemas.openxmlformats.org/drawingml/2006/main">
               <a:ext uri="{FF2B5EF4-FFF2-40B4-BE49-F238E27FC236}">
-                <a16:creationId xmlns:a16="http://schemas.microsoft.com/office/drawing/2014/main" id="{6A123CC0-992B-4AF0-820A-07240F5B8B70}"/>
+                <a16:creationId xmlns:a16="http://schemas.microsoft.com/office/drawing/2014/main" id="{58F51328-77AA-4FAC-9DDC-21F06C904FE1}"/>
               </a:ext>
             </a:extLst>
           </p:cNvPr>
@@ -3630,6 +3630,23 @@
                   <a:srgbClr val="102536"/>
                 </a:solidFill>
               </a:rPr>
+              <a:t>• A combinação diagnóstico↑, crises≈ e uso de medicamentos↓ sugere expansão do reconhecimento da asma sem melhora proporcional no controle.</a:t>
+            </a:r>
+          </a:p>
+          <a:p xmlns:a="http://schemas.openxmlformats.org/drawingml/2006/main">
+            <a:pPr algn="l">
+              <a:defRPr sz="555" b="0">
+                <a:solidFill>
+                  <a:srgbClr val="102536"/>
+                </a:solidFill>
+              </a:defRPr>
+            </a:pPr>
+            <a:r>
+              <a:rPr sz="555" b="0">
+                <a:solidFill>
+                  <a:srgbClr val="102536"/>
+                </a:solidFill>
+              </a:rPr>
               <a:t>• O aumento do diagnóstico pode refletir maior ocorrência, melhor acesso ao diagnóstico ou ambos.</a:t>
             </a:r>
           </a:p>
@@ -3647,23 +3664,6 @@
                   <a:srgbClr val="102536"/>
                 </a:solidFill>
               </a:rPr>
-              <a:t>• A estabilidade das crises sugere que o manejo clínico não melhorou na mesma proporção.</a:t>
-            </a:r>
-          </a:p>
-          <a:p xmlns:a="http://schemas.openxmlformats.org/drawingml/2006/main">
-            <a:pPr algn="l">
-              <a:defRPr sz="555" b="0">
-                <a:solidFill>
-                  <a:srgbClr val="102536"/>
-                </a:solidFill>
-              </a:defRPr>
-            </a:pPr>
-            <a:r>
-              <a:rPr sz="555" b="0">
-                <a:solidFill>
-                  <a:srgbClr val="102536"/>
-                </a:solidFill>
-              </a:rPr>
               <a:t>• O controle da asma depende de acesso farmacológico, seguimento clínico, educação, controle de exposições e intervenções não farmacológicas.</a:t>
             </a:r>
           </a:p>
@@ -3674,7 +3674,7 @@
           <p:cNvPr id="55" name="7-Conclusão central-box">
             <a:extLst xmlns:a="http://schemas.openxmlformats.org/drawingml/2006/main">
               <a:ext uri="{FF2B5EF4-FFF2-40B4-BE49-F238E27FC236}">
-                <a16:creationId xmlns:a16="http://schemas.microsoft.com/office/drawing/2014/main" id="{4B663093-0152-442B-BFEB-52C5E62F1BD1}"/>
+                <a16:creationId xmlns:a16="http://schemas.microsoft.com/office/drawing/2014/main" id="{95119E09-55CB-4BAA-99A6-566C00F1996D}"/>
               </a:ext>
             </a:extLst>
           </p:cNvPr>
@@ -3707,7 +3707,7 @@
           <p:cNvPr id="56" name="7-Conclusão central-head">
             <a:extLst xmlns:a="http://schemas.openxmlformats.org/drawingml/2006/main">
               <a:ext uri="{FF2B5EF4-FFF2-40B4-BE49-F238E27FC236}">
-                <a16:creationId xmlns:a16="http://schemas.microsoft.com/office/drawing/2014/main" id="{CB402F80-DD27-4C13-B620-CD81AEC5AADD}"/>
+                <a16:creationId xmlns:a16="http://schemas.microsoft.com/office/drawing/2014/main" id="{8C3DCA21-7999-4728-9F33-F50644307B25}"/>
               </a:ext>
             </a:extLst>
           </p:cNvPr>
@@ -3740,7 +3740,7 @@
           <p:cNvPr id="57" name="7-Conclusão central-title">
             <a:extLst xmlns:a="http://schemas.openxmlformats.org/drawingml/2006/main">
               <a:ext uri="{FF2B5EF4-FFF2-40B4-BE49-F238E27FC236}">
-                <a16:creationId xmlns:a16="http://schemas.microsoft.com/office/drawing/2014/main" id="{C795B29F-6AF3-44A5-A145-99B93F3C9FD2}"/>
+                <a16:creationId xmlns:a16="http://schemas.microsoft.com/office/drawing/2014/main" id="{54F29757-9122-410F-B951-76674CAA1D88}"/>
               </a:ext>
             </a:extLst>
           </p:cNvPr>
@@ -3790,7 +3790,7 @@
           <p:cNvPr id="58" name="7-Conclusão central-body">
             <a:extLst xmlns:a="http://schemas.openxmlformats.org/drawingml/2006/main">
               <a:ext uri="{FF2B5EF4-FFF2-40B4-BE49-F238E27FC236}">
-                <a16:creationId xmlns:a16="http://schemas.microsoft.com/office/drawing/2014/main" id="{73669CEC-4DC1-4319-8F94-8856727A0583}"/>
+                <a16:creationId xmlns:a16="http://schemas.microsoft.com/office/drawing/2014/main" id="{4692B837-C526-4AC3-8F0D-215999F5BD8B}"/>
               </a:ext>
             </a:extLst>
           </p:cNvPr>
@@ -3874,7 +3874,7 @@
           <p:cNvPr id="59" name="m-chart-crisis-caption">
             <a:extLst xmlns:a="http://schemas.openxmlformats.org/drawingml/2006/main">
               <a:ext uri="{FF2B5EF4-FFF2-40B4-BE49-F238E27FC236}">
-                <a16:creationId xmlns:a16="http://schemas.microsoft.com/office/drawing/2014/main" id="{66A1119F-1B7F-4325-B194-E420CE5FAFFE}"/>
+                <a16:creationId xmlns:a16="http://schemas.microsoft.com/office/drawing/2014/main" id="{15AB4E66-9ED8-458F-BDA9-CE74C423EF0B}"/>
               </a:ext>
             </a:extLst>
           </p:cNvPr>
@@ -3924,7 +3924,7 @@
           <p:cNvPr id="60" name="m-chart-crisis-frame">
             <a:extLst xmlns:a="http://schemas.openxmlformats.org/drawingml/2006/main">
               <a:ext uri="{FF2B5EF4-FFF2-40B4-BE49-F238E27FC236}">
-                <a16:creationId xmlns:a16="http://schemas.microsoft.com/office/drawing/2014/main" id="{84AD392C-5E9C-4A98-8DA6-1DC28EE760A3}"/>
+                <a16:creationId xmlns:a16="http://schemas.microsoft.com/office/drawing/2014/main" id="{DF2D5D34-7CAC-4B78-B38C-B48F920D0E78}"/>
               </a:ext>
             </a:extLst>
           </p:cNvPr>
@@ -3961,7 +3961,7 @@
           <p:nvPr/>
         </p:nvPicPr>
         <p:blipFill>
-          <a:blip xmlns:r="http://schemas.openxmlformats.org/officeDocument/2006/relationships" xmlns:a="http://schemas.openxmlformats.org/drawingml/2006/main" r:embed="R6b8688a2b7f24574"/>
+          <a:blip xmlns:r="http://schemas.openxmlformats.org/officeDocument/2006/relationships" xmlns:a="http://schemas.openxmlformats.org/drawingml/2006/main" r:embed="Rcada5a43124e498a"/>
           <a:stretch xmlns:a="http://schemas.openxmlformats.org/drawingml/2006/main"/>
         </p:blipFill>
         <p:spPr>
@@ -3979,7 +3979,7 @@
           <p:cNvPr id="62" name="qr-box">
             <a:extLst xmlns:a="http://schemas.openxmlformats.org/drawingml/2006/main">
               <a:ext uri="{FF2B5EF4-FFF2-40B4-BE49-F238E27FC236}">
-                <a16:creationId xmlns:a16="http://schemas.microsoft.com/office/drawing/2014/main" id="{1553CCDD-408B-4272-9585-68CDC4B73257}"/>
+                <a16:creationId xmlns:a16="http://schemas.microsoft.com/office/drawing/2014/main" id="{BE1500F4-AC40-4221-87ED-13C3BB8BC0CC}"/>
               </a:ext>
             </a:extLst>
           </p:cNvPr>
@@ -4016,7 +4016,7 @@
           <p:nvPr/>
         </p:nvPicPr>
         <p:blipFill>
-          <a:blip xmlns:r="http://schemas.openxmlformats.org/officeDocument/2006/relationships" xmlns:a="http://schemas.openxmlformats.org/drawingml/2006/main" r:embed="R2deb6d6218ad44a7"/>
+          <a:blip xmlns:r="http://schemas.openxmlformats.org/officeDocument/2006/relationships" xmlns:a="http://schemas.openxmlformats.org/drawingml/2006/main" r:embed="R7c3dca966e854fff"/>
           <a:stretch xmlns:a="http://schemas.openxmlformats.org/drawingml/2006/main"/>
         </p:blipFill>
         <p:spPr>
@@ -4034,7 +4034,7 @@
           <p:cNvPr id="64" name="qr-label">
             <a:extLst xmlns:a="http://schemas.openxmlformats.org/drawingml/2006/main">
               <a:ext uri="{FF2B5EF4-FFF2-40B4-BE49-F238E27FC236}">
-                <a16:creationId xmlns:a16="http://schemas.microsoft.com/office/drawing/2014/main" id="{530C85A4-C357-47CF-8DDD-F2CA2F0B5C2C}"/>
+                <a16:creationId xmlns:a16="http://schemas.microsoft.com/office/drawing/2014/main" id="{2EC6D7FE-BF19-4642-80C0-99C74112D55C}"/>
               </a:ext>
             </a:extLst>
           </p:cNvPr>
@@ -4101,7 +4101,7 @@
           <p:cNvPr id="65" name="references-box">
             <a:extLst xmlns:a="http://schemas.openxmlformats.org/drawingml/2006/main">
               <a:ext uri="{FF2B5EF4-FFF2-40B4-BE49-F238E27FC236}">
-                <a16:creationId xmlns:a16="http://schemas.microsoft.com/office/drawing/2014/main" id="{EF125D51-E50D-46D3-A1BB-43CEE0BE7FFF}"/>
+                <a16:creationId xmlns:a16="http://schemas.microsoft.com/office/drawing/2014/main" id="{AE4FEA97-1C77-4697-A09D-A42F9475A17D}"/>
               </a:ext>
             </a:extLst>
           </p:cNvPr>
@@ -4134,7 +4134,7 @@
           <p:cNvPr id="66" name="references-title">
             <a:extLst xmlns:a="http://schemas.openxmlformats.org/drawingml/2006/main">
               <a:ext uri="{FF2B5EF4-FFF2-40B4-BE49-F238E27FC236}">
-                <a16:creationId xmlns:a16="http://schemas.microsoft.com/office/drawing/2014/main" id="{F667B099-916C-4E28-A426-F02BB0FCF467}"/>
+                <a16:creationId xmlns:a16="http://schemas.microsoft.com/office/drawing/2014/main" id="{02C8DBCB-5424-43B0-A633-AF77F6E2D70B}"/>
               </a:ext>
             </a:extLst>
           </p:cNvPr>
@@ -4184,7 +4184,7 @@
           <p:cNvPr id="67" name="references-body">
             <a:extLst xmlns:a="http://schemas.openxmlformats.org/drawingml/2006/main">
               <a:ext uri="{FF2B5EF4-FFF2-40B4-BE49-F238E27FC236}">
-                <a16:creationId xmlns:a16="http://schemas.microsoft.com/office/drawing/2014/main" id="{192C0DA4-2392-4770-A78C-25F6808EDB16}"/>
+                <a16:creationId xmlns:a16="http://schemas.microsoft.com/office/drawing/2014/main" id="{E308CD4F-2D55-4FF9-89C3-2F0BEC1CC16B}"/>
               </a:ext>
             </a:extLst>
           </p:cNvPr>
@@ -4436,7 +4436,7 @@
     </p:spTree>
     <p:extLst>
       <p:ext uri="{BB962C8B-B14F-4D97-AF65-F5344CB8AC3E}">
-        <p14:creationId xmlns:p14="http://schemas.microsoft.com/office/powerpoint/2010/main" val="182759676"/>
+        <p14:creationId xmlns:p14="http://schemas.microsoft.com/office/powerpoint/2010/main" val="2077675205"/>
       </p:ext>
     </p:extLst>
   </p:cSld>

--- a/outputs/posters/poster_pns_asma_morrison_pt.pptx
+++ b/outputs/posters/poster_pns_asma_morrison_pt.pptx
@@ -2,13 +2,13 @@
 <file path=ppt/presentation.xml><?xml version="1.0" encoding="utf-8"?>
 <p:presentation xmlns:p="http://schemas.openxmlformats.org/presentationml/2006/main">
   <p:sldMasterIdLst>
-    <p:sldMasterId xmlns:r="http://schemas.openxmlformats.org/officeDocument/2006/relationships" id="2147483648" r:id="R99f25461995d4198"/>
+    <p:sldMasterId xmlns:r="http://schemas.openxmlformats.org/officeDocument/2006/relationships" id="2147483648" r:id="Rbf3fb685d1cd4454"/>
   </p:sldMasterIdLst>
   <p:notesMasterIdLst>
-    <p:notesMasterId xmlns:r="http://schemas.openxmlformats.org/officeDocument/2006/relationships" r:id="Rb75df8c89eb4499d"/>
+    <p:notesMasterId xmlns:r="http://schemas.openxmlformats.org/officeDocument/2006/relationships" r:id="Rb525a6b6ceb347f4"/>
   </p:notesMasterIdLst>
   <p:sldIdLst>
-    <p:sldId xmlns:r="http://schemas.openxmlformats.org/officeDocument/2006/relationships" id="256" r:id="R9c13de1aaf62403d"/>
+    <p:sldId xmlns:r="http://schemas.openxmlformats.org/officeDocument/2006/relationships" id="256" r:id="R3d2183504d684302"/>
   </p:sldIdLst>
   <p:sldSz cx="9525000" cy="13468350"/>
   <p:notesSz cx="6858000" cy="9144000"/>
@@ -601,7 +601,7 @@
   </p:cSld>
   <p:clrMap bg1="lt1" tx1="dk1" bg2="lt2" tx2="dk2" accent1="accent1" accent2="accent2" accent3="accent3" accent4="accent4" accent5="accent5" accent6="accent6" hlink="hlink" folHlink="folHlink"/>
   <p:sldLayoutIdLst>
-    <p:sldLayoutId xmlns:r="http://schemas.openxmlformats.org/officeDocument/2006/relationships" id="2147483649" r:id="R1d8fb080eca54192"/>
+    <p:sldLayoutId xmlns:r="http://schemas.openxmlformats.org/officeDocument/2006/relationships" id="2147483649" r:id="Rbaac6fc3688f4240"/>
   </p:sldLayoutIdLst>
   <p:txStyles>
     <p:titleStyle>
@@ -1149,14 +1149,14 @@
       </p:grpSpPr>
       <p:pic>
         <p:nvPicPr>
-          <p:cNvPr id="68" name=""/>
+          <p:cNvPr id="64" name=""/>
           <p:cNvPicPr>
             <a:picLocks xmlns:a="http://schemas.openxmlformats.org/drawingml/2006/main" noChangeAspect="1"/>
           </p:cNvPicPr>
           <p:nvPr/>
         </p:nvPicPr>
         <p:blipFill>
-          <a:blip xmlns:r="http://schemas.openxmlformats.org/officeDocument/2006/relationships" xmlns:a="http://schemas.openxmlformats.org/drawingml/2006/main" r:embed="R12591d59717140b2"/>
+          <a:blip xmlns:r="http://schemas.openxmlformats.org/officeDocument/2006/relationships" xmlns:a="http://schemas.openxmlformats.org/drawingml/2006/main" r:embed="R26dd5c8ffd804f7e"/>
           <a:srcRect xmlns:a="http://schemas.openxmlformats.org/drawingml/2006/main" l="0" t="38622" r="0" b="38622"/>
           <a:stretch xmlns:a="http://schemas.openxmlformats.org/drawingml/2006/main">
             <a:fillRect l="0" t="0" r="0" b="0"/>
@@ -1174,14 +1174,14 @@
       </p:pic>
       <p:pic>
         <p:nvPicPr>
-          <p:cNvPr id="69" name=""/>
+          <p:cNvPr id="65" name=""/>
           <p:cNvPicPr>
             <a:picLocks xmlns:a="http://schemas.openxmlformats.org/drawingml/2006/main" noChangeAspect="1"/>
           </p:cNvPicPr>
           <p:nvPr/>
         </p:nvPicPr>
         <p:blipFill>
-          <a:blip xmlns:r="http://schemas.openxmlformats.org/officeDocument/2006/relationships" xmlns:a="http://schemas.openxmlformats.org/drawingml/2006/main" r:embed="R73234604581c4b31"/>
+          <a:blip xmlns:r="http://schemas.openxmlformats.org/officeDocument/2006/relationships" xmlns:a="http://schemas.openxmlformats.org/drawingml/2006/main" r:embed="R0abb765df5874ceb"/>
           <a:stretch xmlns:a="http://schemas.openxmlformats.org/drawingml/2006/main"/>
         </p:blipFill>
         <p:spPr>
@@ -1196,14 +1196,14 @@
       </p:pic>
       <p:pic>
         <p:nvPicPr>
-          <p:cNvPr id="70" name=""/>
+          <p:cNvPr id="66" name=""/>
           <p:cNvPicPr>
             <a:picLocks xmlns:a="http://schemas.openxmlformats.org/drawingml/2006/main" noChangeAspect="1"/>
           </p:cNvPicPr>
           <p:nvPr/>
         </p:nvPicPr>
         <p:blipFill>
-          <a:blip xmlns:r="http://schemas.openxmlformats.org/officeDocument/2006/relationships" xmlns:a="http://schemas.openxmlformats.org/drawingml/2006/main" r:embed="Rd44d9f4741a94fb1"/>
+          <a:blip xmlns:r="http://schemas.openxmlformats.org/officeDocument/2006/relationships" xmlns:a="http://schemas.openxmlformats.org/drawingml/2006/main" r:embed="Re70818fef75d420d"/>
           <a:stretch xmlns:a="http://schemas.openxmlformats.org/drawingml/2006/main"/>
         </p:blipFill>
         <p:spPr>
@@ -1221,7 +1221,7 @@
           <p:cNvPr id="4" name="morrison-title">
             <a:extLst xmlns:a="http://schemas.openxmlformats.org/drawingml/2006/main">
               <a:ext uri="{FF2B5EF4-FFF2-40B4-BE49-F238E27FC236}">
-                <a16:creationId xmlns:a16="http://schemas.microsoft.com/office/drawing/2014/main" id="{AEDF4276-431A-4827-BFDB-2A3916040B14}"/>
+                <a16:creationId xmlns:a16="http://schemas.microsoft.com/office/drawing/2014/main" id="{9441DF90-A097-4620-BC2D-3B6D5D292B57}"/>
               </a:ext>
             </a:extLst>
           </p:cNvPr>
@@ -1271,7 +1271,7 @@
           <p:cNvPr id="5" name="morrison-authors">
             <a:extLst xmlns:a="http://schemas.openxmlformats.org/drawingml/2006/main">
               <a:ext uri="{FF2B5EF4-FFF2-40B4-BE49-F238E27FC236}">
-                <a16:creationId xmlns:a16="http://schemas.microsoft.com/office/drawing/2014/main" id="{6652BD72-81F7-4FE6-B3B5-11D6D274EE3F}"/>
+                <a16:creationId xmlns:a16="http://schemas.microsoft.com/office/drawing/2014/main" id="{1555362C-47D7-4504-9272-CF8E395C22AD}"/>
               </a:ext>
             </a:extLst>
           </p:cNvPr>
@@ -1321,7 +1321,7 @@
           <p:cNvPr id="6" name="central-message">
             <a:extLst xmlns:a="http://schemas.openxmlformats.org/drawingml/2006/main">
               <a:ext uri="{FF2B5EF4-FFF2-40B4-BE49-F238E27FC236}">
-                <a16:creationId xmlns:a16="http://schemas.microsoft.com/office/drawing/2014/main" id="{446E88EE-021E-4C63-BE81-D2CAB54E5A25}"/>
+                <a16:creationId xmlns:a16="http://schemas.microsoft.com/office/drawing/2014/main" id="{540673ED-B7F8-4A84-8861-A97EBAB15DA9}"/>
               </a:ext>
             </a:extLst>
           </p:cNvPr>
@@ -1365,7 +1365,7 @@
                   <a:srgbClr val="FFFFFF"/>
                 </a:solidFill>
               </a:rPr>
-              <a:t>Diagnóstico médico de asma aumentou no Brasil; crises e uso de medicamentos não indicam melhora proporcional no controle da doença.</a:t>
+              <a:t>Diagnóstico de asma aumentou no Brasil; a carga respiratória de absenteísmo mostra potencial de perda de produtividade e impacto econômico.</a:t>
             </a:r>
           </a:p>
         </p:txBody>
@@ -1375,7 +1375,7 @@
           <p:cNvPr id="7" name="1-Método em uma linha-box">
             <a:extLst xmlns:a="http://schemas.openxmlformats.org/drawingml/2006/main">
               <a:ext uri="{FF2B5EF4-FFF2-40B4-BE49-F238E27FC236}">
-                <a16:creationId xmlns:a16="http://schemas.microsoft.com/office/drawing/2014/main" id="{1EF45DB5-58FC-4C9E-8D32-2E3F90949D20}"/>
+                <a16:creationId xmlns:a16="http://schemas.microsoft.com/office/drawing/2014/main" id="{52A3D09C-C98B-4D8E-9752-BCAF30D33A78}"/>
               </a:ext>
             </a:extLst>
           </p:cNvPr>
@@ -1408,7 +1408,7 @@
           <p:cNvPr id="8" name="1-Método em uma linha-head">
             <a:extLst xmlns:a="http://schemas.openxmlformats.org/drawingml/2006/main">
               <a:ext uri="{FF2B5EF4-FFF2-40B4-BE49-F238E27FC236}">
-                <a16:creationId xmlns:a16="http://schemas.microsoft.com/office/drawing/2014/main" id="{32531A19-9C34-46DB-AA8F-317DCC4A2390}"/>
+                <a16:creationId xmlns:a16="http://schemas.microsoft.com/office/drawing/2014/main" id="{11489C3A-9ED9-4860-B064-783267CBEBBC}"/>
               </a:ext>
             </a:extLst>
           </p:cNvPr>
@@ -1441,7 +1441,7 @@
           <p:cNvPr id="9" name="1-Método em uma linha-title">
             <a:extLst xmlns:a="http://schemas.openxmlformats.org/drawingml/2006/main">
               <a:ext uri="{FF2B5EF4-FFF2-40B4-BE49-F238E27FC236}">
-                <a16:creationId xmlns:a16="http://schemas.microsoft.com/office/drawing/2014/main" id="{37659DFB-B9C3-4D22-B775-DCDB74A63E16}"/>
+                <a16:creationId xmlns:a16="http://schemas.microsoft.com/office/drawing/2014/main" id="{F2864B81-8A1A-46C0-91CE-5EF7C3C9B99D}"/>
               </a:ext>
             </a:extLst>
           </p:cNvPr>
@@ -1491,7 +1491,7 @@
           <p:cNvPr id="10" name="1-Método em uma linha-body">
             <a:extLst xmlns:a="http://schemas.openxmlformats.org/drawingml/2006/main">
               <a:ext uri="{FF2B5EF4-FFF2-40B4-BE49-F238E27FC236}">
-                <a16:creationId xmlns:a16="http://schemas.microsoft.com/office/drawing/2014/main" id="{26504A8D-7309-4822-9C6C-F7AD0C6B9E29}"/>
+                <a16:creationId xmlns:a16="http://schemas.microsoft.com/office/drawing/2014/main" id="{A5AA4407-5F42-4749-8346-1FB1FA919584}"/>
               </a:ext>
             </a:extLst>
           </p:cNvPr>
@@ -1592,7 +1592,7 @@
           <p:cNvPr id="11" name="morrison-formula-box">
             <a:extLst xmlns:a="http://schemas.openxmlformats.org/drawingml/2006/main">
               <a:ext uri="{FF2B5EF4-FFF2-40B4-BE49-F238E27FC236}">
-                <a16:creationId xmlns:a16="http://schemas.microsoft.com/office/drawing/2014/main" id="{3D46F6C0-E341-4F33-A8B6-00E127020439}"/>
+                <a16:creationId xmlns:a16="http://schemas.microsoft.com/office/drawing/2014/main" id="{A49F36EF-46A7-4D24-9773-C758729E4AA1}"/>
               </a:ext>
             </a:extLst>
           </p:cNvPr>
@@ -1625,7 +1625,7 @@
           <p:cNvPr id="12" name="morrison-formula-title">
             <a:extLst xmlns:a="http://schemas.openxmlformats.org/drawingml/2006/main">
               <a:ext uri="{FF2B5EF4-FFF2-40B4-BE49-F238E27FC236}">
-                <a16:creationId xmlns:a16="http://schemas.microsoft.com/office/drawing/2014/main" id="{44FA876E-6A2A-4C0D-83EE-530582C8E01D}"/>
+                <a16:creationId xmlns:a16="http://schemas.microsoft.com/office/drawing/2014/main" id="{0460A8FF-3C68-424B-95C4-9460EBA56E22}"/>
               </a:ext>
             </a:extLst>
           </p:cNvPr>
@@ -1675,7 +1675,7 @@
           <p:cNvPr id="13" name="morrison-formula">
             <a:extLst xmlns:a="http://schemas.openxmlformats.org/drawingml/2006/main">
               <a:ext uri="{FF2B5EF4-FFF2-40B4-BE49-F238E27FC236}">
-                <a16:creationId xmlns:a16="http://schemas.microsoft.com/office/drawing/2014/main" id="{03733974-F0C4-4DAC-ABFA-C0FDA6C7357E}"/>
+                <a16:creationId xmlns:a16="http://schemas.microsoft.com/office/drawing/2014/main" id="{98087197-2B3B-4A8C-87BD-A7A4144B110C}"/>
               </a:ext>
             </a:extLst>
           </p:cNvPr>
@@ -1793,7 +1793,7 @@
           <p:cNvPr id="14" name="2-Dados e denominadores-box">
             <a:extLst xmlns:a="http://schemas.openxmlformats.org/drawingml/2006/main">
               <a:ext uri="{FF2B5EF4-FFF2-40B4-BE49-F238E27FC236}">
-                <a16:creationId xmlns:a16="http://schemas.microsoft.com/office/drawing/2014/main" id="{586D3F19-98A6-4BA4-806B-3ADEA20D02AE}"/>
+                <a16:creationId xmlns:a16="http://schemas.microsoft.com/office/drawing/2014/main" id="{80D467F1-5033-4017-BD8A-0C01CFF2C357}"/>
               </a:ext>
             </a:extLst>
           </p:cNvPr>
@@ -1826,7 +1826,7 @@
           <p:cNvPr id="15" name="2-Dados e denominadores-head">
             <a:extLst xmlns:a="http://schemas.openxmlformats.org/drawingml/2006/main">
               <a:ext uri="{FF2B5EF4-FFF2-40B4-BE49-F238E27FC236}">
-                <a16:creationId xmlns:a16="http://schemas.microsoft.com/office/drawing/2014/main" id="{8989C50A-70B7-4C3C-B299-6D724CFE6FEF}"/>
+                <a16:creationId xmlns:a16="http://schemas.microsoft.com/office/drawing/2014/main" id="{6CB70825-F533-4491-BC85-695621D7F281}"/>
               </a:ext>
             </a:extLst>
           </p:cNvPr>
@@ -1859,7 +1859,7 @@
           <p:cNvPr id="16" name="2-Dados e denominadores-title">
             <a:extLst xmlns:a="http://schemas.openxmlformats.org/drawingml/2006/main">
               <a:ext uri="{FF2B5EF4-FFF2-40B4-BE49-F238E27FC236}">
-                <a16:creationId xmlns:a16="http://schemas.microsoft.com/office/drawing/2014/main" id="{E86C7CB5-825C-49F5-8FB9-7BB03A45DAE3}"/>
+                <a16:creationId xmlns:a16="http://schemas.microsoft.com/office/drawing/2014/main" id="{9CF570CD-D96F-46EA-B891-57FA257AF290}"/>
               </a:ext>
             </a:extLst>
           </p:cNvPr>
@@ -1909,7 +1909,7 @@
           <p:cNvPr id="17" name="2-Dados e denominadores-body">
             <a:extLst xmlns:a="http://schemas.openxmlformats.org/drawingml/2006/main">
               <a:ext uri="{FF2B5EF4-FFF2-40B4-BE49-F238E27FC236}">
-                <a16:creationId xmlns:a16="http://schemas.microsoft.com/office/drawing/2014/main" id="{58D424B8-065A-45A2-A434-4E260D22A5EF}"/>
+                <a16:creationId xmlns:a16="http://schemas.microsoft.com/office/drawing/2014/main" id="{E3A7225A-8504-40AD-A3F1-DDD118836B04}"/>
               </a:ext>
             </a:extLst>
           </p:cNvPr>
@@ -1993,7 +1993,7 @@
           <p:cNvPr id="18" name="3-Por que IC beta?-box">
             <a:extLst xmlns:a="http://schemas.openxmlformats.org/drawingml/2006/main">
               <a:ext uri="{FF2B5EF4-FFF2-40B4-BE49-F238E27FC236}">
-                <a16:creationId xmlns:a16="http://schemas.microsoft.com/office/drawing/2014/main" id="{6222072A-C605-48FC-A8C3-4AFAD5792D69}"/>
+                <a16:creationId xmlns:a16="http://schemas.microsoft.com/office/drawing/2014/main" id="{B8BECAC0-6895-4EFF-BB9B-A01E24B0602B}"/>
               </a:ext>
             </a:extLst>
           </p:cNvPr>
@@ -2026,7 +2026,7 @@
           <p:cNvPr id="19" name="3-Por que IC beta?-head">
             <a:extLst xmlns:a="http://schemas.openxmlformats.org/drawingml/2006/main">
               <a:ext uri="{FF2B5EF4-FFF2-40B4-BE49-F238E27FC236}">
-                <a16:creationId xmlns:a16="http://schemas.microsoft.com/office/drawing/2014/main" id="{8F522BDF-94BF-496E-B482-CE14E9F9240B}"/>
+                <a16:creationId xmlns:a16="http://schemas.microsoft.com/office/drawing/2014/main" id="{580D8C64-3439-4F98-AB79-8FC0BA554173}"/>
               </a:ext>
             </a:extLst>
           </p:cNvPr>
@@ -2059,7 +2059,7 @@
           <p:cNvPr id="20" name="3-Por que IC beta?-title">
             <a:extLst xmlns:a="http://schemas.openxmlformats.org/drawingml/2006/main">
               <a:ext uri="{FF2B5EF4-FFF2-40B4-BE49-F238E27FC236}">
-                <a16:creationId xmlns:a16="http://schemas.microsoft.com/office/drawing/2014/main" id="{528244F5-C8DD-454A-AB93-C57C7F583D1E}"/>
+                <a16:creationId xmlns:a16="http://schemas.microsoft.com/office/drawing/2014/main" id="{4BACF1D6-9AA7-48E9-8F46-AEB1CD6190F7}"/>
               </a:ext>
             </a:extLst>
           </p:cNvPr>
@@ -2109,7 +2109,7 @@
           <p:cNvPr id="21" name="3-Por que IC beta?-body">
             <a:extLst xmlns:a="http://schemas.openxmlformats.org/drawingml/2006/main">
               <a:ext uri="{FF2B5EF4-FFF2-40B4-BE49-F238E27FC236}">
-                <a16:creationId xmlns:a16="http://schemas.microsoft.com/office/drawing/2014/main" id="{52C782DF-AAE2-472D-8EF6-F339D9B3C468}"/>
+                <a16:creationId xmlns:a16="http://schemas.microsoft.com/office/drawing/2014/main" id="{2499C282-C286-45F7-883A-B3B94EF0787F}"/>
               </a:ext>
             </a:extLst>
           </p:cNvPr>
@@ -2193,7 +2193,7 @@
           <p:cNvPr id="22" name="4-ETL e interoperabilidade-box">
             <a:extLst xmlns:a="http://schemas.openxmlformats.org/drawingml/2006/main">
               <a:ext uri="{FF2B5EF4-FFF2-40B4-BE49-F238E27FC236}">
-                <a16:creationId xmlns:a16="http://schemas.microsoft.com/office/drawing/2014/main" id="{14729F0E-7B97-4D17-A01D-BD5D970004E7}"/>
+                <a16:creationId xmlns:a16="http://schemas.microsoft.com/office/drawing/2014/main" id="{50736B1D-7672-47F5-A30A-88728B84D658}"/>
               </a:ext>
             </a:extLst>
           </p:cNvPr>
@@ -2226,7 +2226,7 @@
           <p:cNvPr id="23" name="4-ETL e interoperabilidade-head">
             <a:extLst xmlns:a="http://schemas.openxmlformats.org/drawingml/2006/main">
               <a:ext uri="{FF2B5EF4-FFF2-40B4-BE49-F238E27FC236}">
-                <a16:creationId xmlns:a16="http://schemas.microsoft.com/office/drawing/2014/main" id="{4380F86C-CDBF-4896-AE79-1C0BB6E0D116}"/>
+                <a16:creationId xmlns:a16="http://schemas.microsoft.com/office/drawing/2014/main" id="{BC6014E6-49AC-48FB-9A59-A4990A349D57}"/>
               </a:ext>
             </a:extLst>
           </p:cNvPr>
@@ -2259,7 +2259,7 @@
           <p:cNvPr id="24" name="4-ETL e interoperabilidade-title">
             <a:extLst xmlns:a="http://schemas.openxmlformats.org/drawingml/2006/main">
               <a:ext uri="{FF2B5EF4-FFF2-40B4-BE49-F238E27FC236}">
-                <a16:creationId xmlns:a16="http://schemas.microsoft.com/office/drawing/2014/main" id="{42AEAC04-DADE-4334-88CC-2BFBFBA1B9EF}"/>
+                <a16:creationId xmlns:a16="http://schemas.microsoft.com/office/drawing/2014/main" id="{66F955CB-43BE-4F85-8B3E-35A288823E58}"/>
               </a:ext>
             </a:extLst>
           </p:cNvPr>
@@ -2309,7 +2309,7 @@
           <p:cNvPr id="25" name="4-ETL e interoperabilidade-body">
             <a:extLst xmlns:a="http://schemas.openxmlformats.org/drawingml/2006/main">
               <a:ext uri="{FF2B5EF4-FFF2-40B4-BE49-F238E27FC236}">
-                <a16:creationId xmlns:a16="http://schemas.microsoft.com/office/drawing/2014/main" id="{D58036BA-722F-460D-9D71-915C998484B7}"/>
+                <a16:creationId xmlns:a16="http://schemas.microsoft.com/office/drawing/2014/main" id="{81838117-A2AF-4F4F-B58B-6011C6D34A1C}"/>
               </a:ext>
             </a:extLst>
           </p:cNvPr>
@@ -2393,7 +2393,7 @@
           <p:cNvPr id="26" name="m-prev-metric">
             <a:extLst xmlns:a="http://schemas.openxmlformats.org/drawingml/2006/main">
               <a:ext uri="{FF2B5EF4-FFF2-40B4-BE49-F238E27FC236}">
-                <a16:creationId xmlns:a16="http://schemas.microsoft.com/office/drawing/2014/main" id="{FCAEF3D7-6CD7-48CC-A710-94218FEF8250}"/>
+                <a16:creationId xmlns:a16="http://schemas.microsoft.com/office/drawing/2014/main" id="{C9EE11AB-06E6-456C-8B89-98F779242E46}"/>
               </a:ext>
             </a:extLst>
           </p:cNvPr>
@@ -2426,7 +2426,7 @@
           <p:cNvPr id="27" name="m-prev-metric-title">
             <a:extLst xmlns:a="http://schemas.openxmlformats.org/drawingml/2006/main">
               <a:ext uri="{FF2B5EF4-FFF2-40B4-BE49-F238E27FC236}">
-                <a16:creationId xmlns:a16="http://schemas.microsoft.com/office/drawing/2014/main" id="{F445E551-EA47-4923-B177-EEED1F44D2B7}"/>
+                <a16:creationId xmlns:a16="http://schemas.microsoft.com/office/drawing/2014/main" id="{AB69CB72-34B8-428E-9B52-9E5D9D25D741}"/>
               </a:ext>
             </a:extLst>
           </p:cNvPr>
@@ -2476,7 +2476,7 @@
           <p:cNvPr id="28" name="m-prev-metric-value">
             <a:extLst xmlns:a="http://schemas.openxmlformats.org/drawingml/2006/main">
               <a:ext uri="{FF2B5EF4-FFF2-40B4-BE49-F238E27FC236}">
-                <a16:creationId xmlns:a16="http://schemas.microsoft.com/office/drawing/2014/main" id="{5BA486BD-916B-4961-B9B7-A246B1B0D85B}"/>
+                <a16:creationId xmlns:a16="http://schemas.microsoft.com/office/drawing/2014/main" id="{48D052A4-D34C-4349-A88A-BD5172067D60}"/>
               </a:ext>
             </a:extLst>
           </p:cNvPr>
@@ -2526,7 +2526,7 @@
           <p:cNvPr id="29" name="m-prev-metric-note">
             <a:extLst xmlns:a="http://schemas.openxmlformats.org/drawingml/2006/main">
               <a:ext uri="{FF2B5EF4-FFF2-40B4-BE49-F238E27FC236}">
-                <a16:creationId xmlns:a16="http://schemas.microsoft.com/office/drawing/2014/main" id="{49483A75-14D3-41A2-A5A3-970493A5CF89}"/>
+                <a16:creationId xmlns:a16="http://schemas.microsoft.com/office/drawing/2014/main" id="{63840509-B0D4-40FA-9958-251AE3DF094D}"/>
               </a:ext>
             </a:extLst>
           </p:cNvPr>
@@ -2576,7 +2576,7 @@
           <p:cNvPr id="30" name="m-crisis-metric">
             <a:extLst xmlns:a="http://schemas.openxmlformats.org/drawingml/2006/main">
               <a:ext uri="{FF2B5EF4-FFF2-40B4-BE49-F238E27FC236}">
-                <a16:creationId xmlns:a16="http://schemas.microsoft.com/office/drawing/2014/main" id="{A88A3FF9-822D-4B6C-8993-02AB61CCC3C3}"/>
+                <a16:creationId xmlns:a16="http://schemas.microsoft.com/office/drawing/2014/main" id="{8EE599AE-49CD-4C39-A3CD-6A4383EFFEA5}"/>
               </a:ext>
             </a:extLst>
           </p:cNvPr>
@@ -2609,7 +2609,7 @@
           <p:cNvPr id="31" name="m-crisis-metric-title">
             <a:extLst xmlns:a="http://schemas.openxmlformats.org/drawingml/2006/main">
               <a:ext uri="{FF2B5EF4-FFF2-40B4-BE49-F238E27FC236}">
-                <a16:creationId xmlns:a16="http://schemas.microsoft.com/office/drawing/2014/main" id="{6CA35550-A38D-47E3-82BF-062A0F47CB92}"/>
+                <a16:creationId xmlns:a16="http://schemas.microsoft.com/office/drawing/2014/main" id="{9A31C5AC-DE5E-4D79-8BA5-7010A95362B1}"/>
               </a:ext>
             </a:extLst>
           </p:cNvPr>
@@ -2649,7 +2649,7 @@
                   <a:srgbClr val="153F59"/>
                 </a:solidFill>
               </a:rPr>
-              <a:t>Brasil: crises</a:t>
+              <a:t>Brasil: trabalho</a:t>
             </a:r>
           </a:p>
         </p:txBody>
@@ -2659,7 +2659,7 @@
           <p:cNvPr id="32" name="m-crisis-metric-value">
             <a:extLst xmlns:a="http://schemas.openxmlformats.org/drawingml/2006/main">
               <a:ext uri="{FF2B5EF4-FFF2-40B4-BE49-F238E27FC236}">
-                <a16:creationId xmlns:a16="http://schemas.microsoft.com/office/drawing/2014/main" id="{95FC9CDC-CEED-41F8-BD81-39CA07977241}"/>
+                <a16:creationId xmlns:a16="http://schemas.microsoft.com/office/drawing/2014/main" id="{EF913C78-B6D2-4749-93C5-FF65899DF0A7}"/>
               </a:ext>
             </a:extLst>
           </p:cNvPr>
@@ -2699,7 +2699,7 @@
                   <a:srgbClr val="153F59"/>
                 </a:solidFill>
               </a:rPr>
-              <a:t>38,3%→37,7%</a:t>
+              <a:t>15,2%; 4,8 d</a:t>
             </a:r>
           </a:p>
         </p:txBody>
@@ -2709,7 +2709,7 @@
           <p:cNvPr id="33" name="m-crisis-metric-note">
             <a:extLst xmlns:a="http://schemas.openxmlformats.org/drawingml/2006/main">
               <a:ext uri="{FF2B5EF4-FFF2-40B4-BE49-F238E27FC236}">
-                <a16:creationId xmlns:a16="http://schemas.microsoft.com/office/drawing/2014/main" id="{AE83A72E-72EC-4CA2-9E17-DD59444D6070}"/>
+                <a16:creationId xmlns:a16="http://schemas.microsoft.com/office/drawing/2014/main" id="{8BB92359-26F8-4884-9C4C-A6A9E60AE9A0}"/>
               </a:ext>
             </a:extLst>
           </p:cNvPr>
@@ -2749,7 +2749,7 @@
                   <a:srgbClr val="102536"/>
                 </a:solidFill>
               </a:rPr>
-              <a:t>Estabilidade sugere controle insuficiente.</a:t>
+              <a:t>Carga respiratória afeta dias úteis.</a:t>
             </a:r>
           </a:p>
         </p:txBody>
@@ -2759,7 +2759,7 @@
           <p:cNvPr id="34" name="m-meds-metric">
             <a:extLst xmlns:a="http://schemas.openxmlformats.org/drawingml/2006/main">
               <a:ext uri="{FF2B5EF4-FFF2-40B4-BE49-F238E27FC236}">
-                <a16:creationId xmlns:a16="http://schemas.microsoft.com/office/drawing/2014/main" id="{D1DFB3BD-497D-4CD1-9A41-6D56B86BB118}"/>
+                <a16:creationId xmlns:a16="http://schemas.microsoft.com/office/drawing/2014/main" id="{DE559EFC-5B15-4D15-8D56-A380FC6C8697}"/>
               </a:ext>
             </a:extLst>
           </p:cNvPr>
@@ -2792,7 +2792,7 @@
           <p:cNvPr id="35" name="m-meds-metric-title">
             <a:extLst xmlns:a="http://schemas.openxmlformats.org/drawingml/2006/main">
               <a:ext uri="{FF2B5EF4-FFF2-40B4-BE49-F238E27FC236}">
-                <a16:creationId xmlns:a16="http://schemas.microsoft.com/office/drawing/2014/main" id="{EB8FDB4C-036D-4F94-8606-AE10C1902A3C}"/>
+                <a16:creationId xmlns:a16="http://schemas.microsoft.com/office/drawing/2014/main" id="{20CC1C73-B0C4-4713-8697-2F11DB940B63}"/>
               </a:ext>
             </a:extLst>
           </p:cNvPr>
@@ -2842,7 +2842,7 @@
           <p:cNvPr id="36" name="m-meds-metric-value">
             <a:extLst xmlns:a="http://schemas.openxmlformats.org/drawingml/2006/main">
               <a:ext uri="{FF2B5EF4-FFF2-40B4-BE49-F238E27FC236}">
-                <a16:creationId xmlns:a16="http://schemas.microsoft.com/office/drawing/2014/main" id="{6AF46888-A69E-444B-A4D9-DC88A3F8F242}"/>
+                <a16:creationId xmlns:a16="http://schemas.microsoft.com/office/drawing/2014/main" id="{78A5C9F8-C8A0-433B-A319-5167ED8AFD3E}"/>
               </a:ext>
             </a:extLst>
           </p:cNvPr>
@@ -2892,7 +2892,7 @@
           <p:cNvPr id="37" name="m-meds-metric-note">
             <a:extLst xmlns:a="http://schemas.openxmlformats.org/drawingml/2006/main">
               <a:ext uri="{FF2B5EF4-FFF2-40B4-BE49-F238E27FC236}">
-                <a16:creationId xmlns:a16="http://schemas.microsoft.com/office/drawing/2014/main" id="{7DF8C7AE-347E-41C3-ADA0-C244E3768374}"/>
+                <a16:creationId xmlns:a16="http://schemas.microsoft.com/office/drawing/2014/main" id="{D6EB5AC7-F265-4AEB-A6F7-730A346A501C}"/>
               </a:ext>
             </a:extLst>
           </p:cNvPr>
@@ -2942,7 +2942,7 @@
           <p:cNvPr id="38" name="m-chart-prev-caption">
             <a:extLst xmlns:a="http://schemas.openxmlformats.org/drawingml/2006/main">
               <a:ext uri="{FF2B5EF4-FFF2-40B4-BE49-F238E27FC236}">
-                <a16:creationId xmlns:a16="http://schemas.microsoft.com/office/drawing/2014/main" id="{CB1CA011-6916-4341-94AF-42F0C2021564}"/>
+                <a16:creationId xmlns:a16="http://schemas.microsoft.com/office/drawing/2014/main" id="{3E1D3B75-0C82-4188-8B3A-BB867C2657A1}"/>
               </a:ext>
             </a:extLst>
           </p:cNvPr>
@@ -2992,7 +2992,7 @@
           <p:cNvPr id="39" name="m-chart-prev-frame">
             <a:extLst xmlns:a="http://schemas.openxmlformats.org/drawingml/2006/main">
               <a:ext uri="{FF2B5EF4-FFF2-40B4-BE49-F238E27FC236}">
-                <a16:creationId xmlns:a16="http://schemas.microsoft.com/office/drawing/2014/main" id="{A5CA54F7-56A5-4BD4-A3A3-56CEB476241E}"/>
+                <a16:creationId xmlns:a16="http://schemas.microsoft.com/office/drawing/2014/main" id="{8D4A67F3-92C1-4503-860E-7B02DF6AB102}"/>
               </a:ext>
             </a:extLst>
           </p:cNvPr>
@@ -3022,14 +3022,14 @@
       </p:sp>
       <p:pic>
         <p:nvPicPr>
-          <p:cNvPr id="107" name=""/>
+          <p:cNvPr id="103" name=""/>
           <p:cNvPicPr>
             <a:picLocks xmlns:a="http://schemas.openxmlformats.org/drawingml/2006/main" noChangeAspect="1"/>
           </p:cNvPicPr>
           <p:nvPr/>
         </p:nvPicPr>
         <p:blipFill>
-          <a:blip xmlns:r="http://schemas.openxmlformats.org/officeDocument/2006/relationships" xmlns:a="http://schemas.openxmlformats.org/drawingml/2006/main" r:embed="R2baa2a3f71b943ea"/>
+          <a:blip xmlns:r="http://schemas.openxmlformats.org/officeDocument/2006/relationships" xmlns:a="http://schemas.openxmlformats.org/drawingml/2006/main" r:embed="R2215cd21dbfb4cc4"/>
           <a:stretch xmlns:a="http://schemas.openxmlformats.org/drawingml/2006/main"/>
         </p:blipFill>
         <p:spPr>
@@ -3047,7 +3047,7 @@
           <p:cNvPr id="41" name="m-chart-meds-caption">
             <a:extLst xmlns:a="http://schemas.openxmlformats.org/drawingml/2006/main">
               <a:ext uri="{FF2B5EF4-FFF2-40B4-BE49-F238E27FC236}">
-                <a16:creationId xmlns:a16="http://schemas.microsoft.com/office/drawing/2014/main" id="{9F8654A1-5BC1-4F66-B9C2-E747FECFDD54}"/>
+                <a16:creationId xmlns:a16="http://schemas.microsoft.com/office/drawing/2014/main" id="{06401415-694D-4DA2-A5F4-6657CE5AB8FE}"/>
               </a:ext>
             </a:extLst>
           </p:cNvPr>
@@ -3097,7 +3097,7 @@
           <p:cNvPr id="42" name="m-chart-meds-frame">
             <a:extLst xmlns:a="http://schemas.openxmlformats.org/drawingml/2006/main">
               <a:ext uri="{FF2B5EF4-FFF2-40B4-BE49-F238E27FC236}">
-                <a16:creationId xmlns:a16="http://schemas.microsoft.com/office/drawing/2014/main" id="{ACBA8B12-D4D1-4287-AF32-A5C389DACC79}"/>
+                <a16:creationId xmlns:a16="http://schemas.microsoft.com/office/drawing/2014/main" id="{A6190C4B-D398-458A-AC22-B02C56380CCD}"/>
               </a:ext>
             </a:extLst>
           </p:cNvPr>
@@ -3127,14 +3127,14 @@
       </p:sp>
       <p:pic>
         <p:nvPicPr>
-          <p:cNvPr id="110" name=""/>
+          <p:cNvPr id="106" name=""/>
           <p:cNvPicPr>
             <a:picLocks xmlns:a="http://schemas.openxmlformats.org/drawingml/2006/main" noChangeAspect="1"/>
           </p:cNvPicPr>
           <p:nvPr/>
         </p:nvPicPr>
         <p:blipFill>
-          <a:blip xmlns:r="http://schemas.openxmlformats.org/officeDocument/2006/relationships" xmlns:a="http://schemas.openxmlformats.org/drawingml/2006/main" r:embed="R5f64831090624e02"/>
+          <a:blip xmlns:r="http://schemas.openxmlformats.org/officeDocument/2006/relationships" xmlns:a="http://schemas.openxmlformats.org/drawingml/2006/main" r:embed="R417141b4268540bb"/>
           <a:stretch xmlns:a="http://schemas.openxmlformats.org/drawingml/2006/main"/>
         </p:blipFill>
         <p:spPr>
@@ -3152,7 +3152,7 @@
           <p:cNvPr id="44" name="m-chart-smoke-caption">
             <a:extLst xmlns:a="http://schemas.openxmlformats.org/drawingml/2006/main">
               <a:ext uri="{FF2B5EF4-FFF2-40B4-BE49-F238E27FC236}">
-                <a16:creationId xmlns:a16="http://schemas.microsoft.com/office/drawing/2014/main" id="{5050716F-00CA-414E-AEDE-4023ADCBB2C7}"/>
+                <a16:creationId xmlns:a16="http://schemas.microsoft.com/office/drawing/2014/main" id="{FD997C7D-C70D-4EFA-BD58-A39C1F2150BB}"/>
               </a:ext>
             </a:extLst>
           </p:cNvPr>
@@ -3192,7 +3192,7 @@
                   <a:srgbClr val="153F59"/>
                 </a:solidFill>
               </a:rPr>
-              <a:t>Figura 4: Taxa de fumantes ativos por 100 mil habitantes por UF, PNS 2013 e 2019.</a:t>
+              <a:t>Figura 4: Média de dias perdidos por motivo de saúde no Brasil, com destaque para causas respiratórias, PNS 2019.</a:t>
             </a:r>
           </a:p>
         </p:txBody>
@@ -3202,7 +3202,7 @@
           <p:cNvPr id="45" name="m-chart-smoke-frame">
             <a:extLst xmlns:a="http://schemas.openxmlformats.org/drawingml/2006/main">
               <a:ext uri="{FF2B5EF4-FFF2-40B4-BE49-F238E27FC236}">
-                <a16:creationId xmlns:a16="http://schemas.microsoft.com/office/drawing/2014/main" id="{28C81DE3-14A9-476F-BF1D-4C5AD2E8EBE5}"/>
+                <a16:creationId xmlns:a16="http://schemas.microsoft.com/office/drawing/2014/main" id="{273E4482-FD54-4C1F-9819-9F449736CF54}"/>
               </a:ext>
             </a:extLst>
           </p:cNvPr>
@@ -3232,14 +3232,14 @@
       </p:sp>
       <p:pic>
         <p:nvPicPr>
-          <p:cNvPr id="113" name=""/>
+          <p:cNvPr id="109" name=""/>
           <p:cNvPicPr>
             <a:picLocks xmlns:a="http://schemas.openxmlformats.org/drawingml/2006/main" noChangeAspect="1"/>
           </p:cNvPicPr>
           <p:nvPr/>
         </p:nvPicPr>
         <p:blipFill>
-          <a:blip xmlns:r="http://schemas.openxmlformats.org/officeDocument/2006/relationships" xmlns:a="http://schemas.openxmlformats.org/drawingml/2006/main" r:embed="R71e68793bd2a4606"/>
+          <a:blip xmlns:r="http://schemas.openxmlformats.org/officeDocument/2006/relationships" xmlns:a="http://schemas.openxmlformats.org/drawingml/2006/main" r:embed="R171cb2a9fb2c45ee"/>
           <a:stretch xmlns:a="http://schemas.openxmlformats.org/drawingml/2006/main"/>
         </p:blipFill>
         <p:spPr>
@@ -3254,10 +3254,10 @@
       </p:pic>
       <p:sp>
         <p:nvSpPr>
-          <p:cNvPr id="47" name="5-Achados principais-box">
-            <a:extLst xmlns:a="http://schemas.openxmlformats.org/drawingml/2006/main">
-              <a:ext uri="{FF2B5EF4-FFF2-40B4-BE49-F238E27FC236}">
-                <a16:creationId xmlns:a16="http://schemas.microsoft.com/office/drawing/2014/main" id="{05A1D977-F48E-41E7-9830-92D8A8A3BA04}"/>
+          <p:cNvPr id="47" name="5-Discussão-box">
+            <a:extLst xmlns:a="http://schemas.openxmlformats.org/drawingml/2006/main">
+              <a:ext uri="{FF2B5EF4-FFF2-40B4-BE49-F238E27FC236}">
+                <a16:creationId xmlns:a16="http://schemas.microsoft.com/office/drawing/2014/main" id="{205B3214-37E1-4FA1-84F8-D04485233D90}"/>
               </a:ext>
             </a:extLst>
           </p:cNvPr>
@@ -3269,7 +3269,7 @@
         <p:spPr>
           <a:xfrm xmlns:a="http://schemas.openxmlformats.org/drawingml/2006/main">
             <a:off x="6991350" y="3105150"/>
-            <a:ext cx="2362200" cy="2171700"/>
+            <a:ext cx="2362200" cy="3752850"/>
           </a:xfrm>
           <a:prstGeom xmlns:a="http://schemas.openxmlformats.org/drawingml/2006/main" prst="rect">
             <a:avLst/>
@@ -3287,10 +3287,10 @@
       </p:sp>
       <p:sp>
         <p:nvSpPr>
-          <p:cNvPr id="48" name="5-Achados principais-head">
-            <a:extLst xmlns:a="http://schemas.openxmlformats.org/drawingml/2006/main">
-              <a:ext uri="{FF2B5EF4-FFF2-40B4-BE49-F238E27FC236}">
-                <a16:creationId xmlns:a16="http://schemas.microsoft.com/office/drawing/2014/main" id="{A6D9DC0D-B647-4117-A3F3-F77202A66FE1}"/>
+          <p:cNvPr id="48" name="5-Discussão-head">
+            <a:extLst xmlns:a="http://schemas.openxmlformats.org/drawingml/2006/main">
+              <a:ext uri="{FF2B5EF4-FFF2-40B4-BE49-F238E27FC236}">
+                <a16:creationId xmlns:a16="http://schemas.microsoft.com/office/drawing/2014/main" id="{86BC2312-98EF-4A26-B43A-6797A30D7AD5}"/>
               </a:ext>
             </a:extLst>
           </p:cNvPr>
@@ -3320,10 +3320,10 @@
       </p:sp>
       <p:sp>
         <p:nvSpPr>
-          <p:cNvPr id="49" name="5-Achados principais-title">
-            <a:extLst xmlns:a="http://schemas.openxmlformats.org/drawingml/2006/main">
-              <a:ext uri="{FF2B5EF4-FFF2-40B4-BE49-F238E27FC236}">
-                <a16:creationId xmlns:a16="http://schemas.microsoft.com/office/drawing/2014/main" id="{0008CA9C-5F91-455E-B3C9-DDA4E33BBE91}"/>
+          <p:cNvPr id="49" name="5-Discussão-title">
+            <a:extLst xmlns:a="http://schemas.openxmlformats.org/drawingml/2006/main">
+              <a:ext uri="{FF2B5EF4-FFF2-40B4-BE49-F238E27FC236}">
+                <a16:creationId xmlns:a16="http://schemas.microsoft.com/office/drawing/2014/main" id="{BC850715-C348-414E-A301-0152078ACBB3}"/>
               </a:ext>
             </a:extLst>
           </p:cNvPr>
@@ -3363,17 +3363,17 @@
                   <a:srgbClr val="FFFFFF"/>
                 </a:solidFill>
               </a:rPr>
-              <a:t>5. Achados principais</a:t>
+              <a:t>5. Discussão</a:t>
             </a:r>
           </a:p>
         </p:txBody>
       </p:sp>
       <p:sp>
         <p:nvSpPr>
-          <p:cNvPr id="50" name="5-Achados principais-body">
-            <a:extLst xmlns:a="http://schemas.openxmlformats.org/drawingml/2006/main">
-              <a:ext uri="{FF2B5EF4-FFF2-40B4-BE49-F238E27FC236}">
-                <a16:creationId xmlns:a16="http://schemas.microsoft.com/office/drawing/2014/main" id="{F79AD850-0A85-4EEB-B915-252236C4464E}"/>
+          <p:cNvPr id="50" name="5-Discussão-body">
+            <a:extLst xmlns:a="http://schemas.openxmlformats.org/drawingml/2006/main">
+              <a:ext uri="{FF2B5EF4-FFF2-40B4-BE49-F238E27FC236}">
+                <a16:creationId xmlns:a16="http://schemas.microsoft.com/office/drawing/2014/main" id="{531ECE8E-7701-4BDC-A549-B73863A498B6}"/>
               </a:ext>
             </a:extLst>
           </p:cNvPr>
@@ -3385,7 +3385,7 @@
         <p:spPr>
           <a:xfrm xmlns:a="http://schemas.openxmlformats.org/drawingml/2006/main">
             <a:off x="7086600" y="3448050"/>
-            <a:ext cx="2171700" cy="1771650"/>
+            <a:ext cx="2171700" cy="3352800"/>
           </a:xfrm>
           <a:prstGeom xmlns:a="http://schemas.openxmlformats.org/drawingml/2006/main" prst="rect">
             <a:avLst/>
@@ -3401,14 +3401,14 @@
           <a:lstStyle xmlns:a="http://schemas.openxmlformats.org/drawingml/2006/main"/>
           <a:p xmlns:a="http://schemas.openxmlformats.org/drawingml/2006/main">
             <a:pPr algn="l">
-              <a:defRPr sz="518" b="0">
-                <a:solidFill>
-                  <a:srgbClr val="102536"/>
-                </a:solidFill>
-              </a:defRPr>
-            </a:pPr>
-            <a:r>
-              <a:rPr sz="518" b="0">
+              <a:defRPr sz="424" b="0">
+                <a:solidFill>
+                  <a:srgbClr val="102536"/>
+                </a:solidFill>
+              </a:defRPr>
+            </a:pPr>
+            <a:r>
+              <a:rPr sz="424" b="0">
                 <a:solidFill>
                   <a:srgbClr val="102536"/>
                 </a:solidFill>
@@ -3418,75 +3418,126 @@
           </a:p>
           <a:p xmlns:a="http://schemas.openxmlformats.org/drawingml/2006/main">
             <a:pPr algn="l">
-              <a:defRPr sz="518" b="0">
-                <a:solidFill>
-                  <a:srgbClr val="102536"/>
-                </a:solidFill>
-              </a:defRPr>
-            </a:pPr>
-            <a:r>
-              <a:rPr sz="518" b="0">
-                <a:solidFill>
-                  <a:srgbClr val="102536"/>
-                </a:solidFill>
-              </a:rPr>
-              <a:t>• Brasil: crises nos últimos 12 meses ficaram estáveis, de 38,3% para 37,7%.</a:t>
-            </a:r>
-          </a:p>
-          <a:p xmlns:a="http://schemas.openxmlformats.org/drawingml/2006/main">
-            <a:pPr algn="l">
-              <a:defRPr sz="518" b="0">
-                <a:solidFill>
-                  <a:srgbClr val="102536"/>
-                </a:solidFill>
-              </a:defRPr>
-            </a:pPr>
-            <a:r>
-              <a:rPr sz="518" b="0">
-                <a:solidFill>
-                  <a:srgbClr val="102536"/>
-                </a:solidFill>
-              </a:rPr>
-              <a:t>• Brasil: uso de medicamento oral/bombinha entre pessoas com asma passou de 81,5% para 64,4%; a leitura deve considerar IC95%, perfil dos diagnosticados e taxa populacional.</a:t>
-            </a:r>
-          </a:p>
-          <a:p xmlns:a="http://schemas.openxmlformats.org/drawingml/2006/main">
-            <a:pPr algn="l">
-              <a:defRPr sz="518" b="0">
-                <a:solidFill>
-                  <a:srgbClr val="102536"/>
-                </a:solidFill>
-              </a:defRPr>
-            </a:pPr>
-            <a:r>
-              <a:rPr sz="518" b="0">
-                <a:solidFill>
-                  <a:srgbClr val="102536"/>
-                </a:solidFill>
-              </a:rPr>
-              <a:t>• Tabagismo caiu em várias UFs; a taxa nacional citada foi de 14.650 para 12.151 por 100 mil.</a:t>
+              <a:defRPr sz="424" b="0">
+                <a:solidFill>
+                  <a:srgbClr val="102536"/>
+                </a:solidFill>
+              </a:defRPr>
+            </a:pPr>
+            <a:r>
+              <a:rPr sz="424" b="0">
+                <a:solidFill>
+                  <a:srgbClr val="102536"/>
+                </a:solidFill>
+              </a:rPr>
+              <a:t>• Motivos respiratórios, categoria que inclui asma, bronquite e pneumonia, responderam por 15,2% do absenteísmo por motivo de saúde.</a:t>
+            </a:r>
+          </a:p>
+          <a:p xmlns:a="http://schemas.openxmlformats.org/drawingml/2006/main">
+            <a:pPr algn="l">
+              <a:defRPr sz="424" b="0">
+                <a:solidFill>
+                  <a:srgbClr val="102536"/>
+                </a:solidFill>
+              </a:defRPr>
+            </a:pPr>
+            <a:r>
+              <a:rPr sz="424" b="0">
+                <a:solidFill>
+                  <a:srgbClr val="102536"/>
+                </a:solidFill>
+              </a:rPr>
+              <a:t>• A média de dias perdidos por motivos respiratórios foi 4,8 dias, indicando custo potencial em produtividade.</a:t>
+            </a:r>
+          </a:p>
+          <a:p xmlns:a="http://schemas.openxmlformats.org/drawingml/2006/main">
+            <a:pPr algn="l">
+              <a:defRPr sz="424" b="0">
+                <a:solidFill>
+                  <a:srgbClr val="102536"/>
+                </a:solidFill>
+              </a:defRPr>
+            </a:pPr>
+            <a:r>
+              <a:rPr sz="424" b="0">
+                <a:solidFill>
+                  <a:srgbClr val="102536"/>
+                </a:solidFill>
+              </a:rPr>
+              <a:t>• Uso de medicamento oral/bombinha entre pessoas com asma passou de 81,5% para 64,4%; interpretar com IC95% e perfil dos diagnosticados.</a:t>
+            </a:r>
+          </a:p>
+          <a:p xmlns:a="http://schemas.openxmlformats.org/drawingml/2006/main">
+            <a:pPr algn="l">
+              <a:defRPr sz="424" b="0">
+                <a:solidFill>
+                  <a:srgbClr val="102536"/>
+                </a:solidFill>
+              </a:defRPr>
+            </a:pPr>
+            <a:r>
+              <a:rPr sz="424" b="0">
+                <a:solidFill>
+                  <a:srgbClr val="102536"/>
+                </a:solidFill>
+              </a:rPr>
+              <a:t>• O aumento do diagnóstico amplia a população em risco de crises, faltas ao trabalho e redução de produtividade.</a:t>
+            </a:r>
+          </a:p>
+          <a:p xmlns:a="http://schemas.openxmlformats.org/drawingml/2006/main">
+            <a:pPr algn="l">
+              <a:defRPr sz="424" b="0">
+                <a:solidFill>
+                  <a:srgbClr val="102536"/>
+                </a:solidFill>
+              </a:defRPr>
+            </a:pPr>
+            <a:r>
+              <a:rPr sz="424" b="0">
+                <a:solidFill>
+                  <a:srgbClr val="102536"/>
+                </a:solidFill>
+              </a:rPr>
+              <a:t>• A categoria respiratória sugere que a asma pode contribuir para perda de dias úteis, pressão sobre renda familiar e menor oferta efetiva de trabalho.</a:t>
+            </a:r>
+          </a:p>
+          <a:p xmlns:a="http://schemas.openxmlformats.org/drawingml/2006/main">
+            <a:pPr algn="l">
+              <a:defRPr sz="424" b="0">
+                <a:solidFill>
+                  <a:srgbClr val="102536"/>
+                </a:solidFill>
+              </a:defRPr>
+            </a:pPr>
+            <a:r>
+              <a:rPr sz="424" b="0">
+                <a:solidFill>
+                  <a:srgbClr val="102536"/>
+                </a:solidFill>
+              </a:rPr>
+              <a:t>• Melhor controle da asma pode ter retorno econômico: menos absenteísmo, menos dias perdidos e menor demanda por cuidado agudo.</a:t>
             </a:r>
           </a:p>
         </p:txBody>
       </p:sp>
       <p:sp>
         <p:nvSpPr>
-          <p:cNvPr id="51" name="6-Discussão aplicada-box">
-            <a:extLst xmlns:a="http://schemas.openxmlformats.org/drawingml/2006/main">
-              <a:ext uri="{FF2B5EF4-FFF2-40B4-BE49-F238E27FC236}">
-                <a16:creationId xmlns:a16="http://schemas.microsoft.com/office/drawing/2014/main" id="{4D048718-C211-4B8E-812D-E7E6F20C2576}"/>
-              </a:ext>
-            </a:extLst>
-          </p:cNvPr>
-          <p:cNvSpPr>
-            <a:spLocks xmlns:a="http://schemas.openxmlformats.org/drawingml/2006/main" noGrp="1"/>
-          </p:cNvSpPr>
-          <p:nvPr/>
-        </p:nvSpPr>
-        <p:spPr>
-          <a:xfrm xmlns:a="http://schemas.openxmlformats.org/drawingml/2006/main">
-            <a:off x="6991350" y="5410200"/>
-            <a:ext cx="2362200" cy="1447800"/>
+          <p:cNvPr id="51" name="6-Conclusão central-box">
+            <a:extLst xmlns:a="http://schemas.openxmlformats.org/drawingml/2006/main">
+              <a:ext uri="{FF2B5EF4-FFF2-40B4-BE49-F238E27FC236}">
+                <a16:creationId xmlns:a16="http://schemas.microsoft.com/office/drawing/2014/main" id="{43527454-2652-4AE4-946D-B313D0204E3D}"/>
+              </a:ext>
+            </a:extLst>
+          </p:cNvPr>
+          <p:cNvSpPr>
+            <a:spLocks xmlns:a="http://schemas.openxmlformats.org/drawingml/2006/main" noGrp="1"/>
+          </p:cNvSpPr>
+          <p:nvPr/>
+        </p:nvSpPr>
+        <p:spPr>
+          <a:xfrm xmlns:a="http://schemas.openxmlformats.org/drawingml/2006/main">
+            <a:off x="6991350" y="6991350"/>
+            <a:ext cx="2362200" cy="1238250"/>
           </a:xfrm>
           <a:prstGeom xmlns:a="http://schemas.openxmlformats.org/drawingml/2006/main" prst="rect">
             <a:avLst/>
@@ -3504,21 +3555,21 @@
       </p:sp>
       <p:sp>
         <p:nvSpPr>
-          <p:cNvPr id="52" name="6-Discussão aplicada-head">
-            <a:extLst xmlns:a="http://schemas.openxmlformats.org/drawingml/2006/main">
-              <a:ext uri="{FF2B5EF4-FFF2-40B4-BE49-F238E27FC236}">
-                <a16:creationId xmlns:a16="http://schemas.microsoft.com/office/drawing/2014/main" id="{B2121539-C61E-44B7-BAC1-CB2B7AFBC998}"/>
-              </a:ext>
-            </a:extLst>
-          </p:cNvPr>
-          <p:cNvSpPr>
-            <a:spLocks xmlns:a="http://schemas.openxmlformats.org/drawingml/2006/main" noGrp="1"/>
-          </p:cNvSpPr>
-          <p:nvPr/>
-        </p:nvSpPr>
-        <p:spPr>
-          <a:xfrm xmlns:a="http://schemas.openxmlformats.org/drawingml/2006/main">
-            <a:off x="6991350" y="5410200"/>
+          <p:cNvPr id="52" name="6-Conclusão central-head">
+            <a:extLst xmlns:a="http://schemas.openxmlformats.org/drawingml/2006/main">
+              <a:ext uri="{FF2B5EF4-FFF2-40B4-BE49-F238E27FC236}">
+                <a16:creationId xmlns:a16="http://schemas.microsoft.com/office/drawing/2014/main" id="{4B7B740E-B941-4313-AC1B-8BBFE4A3E080}"/>
+              </a:ext>
+            </a:extLst>
+          </p:cNvPr>
+          <p:cNvSpPr>
+            <a:spLocks xmlns:a="http://schemas.openxmlformats.org/drawingml/2006/main" noGrp="1"/>
+          </p:cNvSpPr>
+          <p:nvPr/>
+        </p:nvSpPr>
+        <p:spPr>
+          <a:xfrm xmlns:a="http://schemas.openxmlformats.org/drawingml/2006/main">
+            <a:off x="6991350" y="6991350"/>
             <a:ext cx="2362200" cy="266700"/>
           </a:xfrm>
           <a:prstGeom xmlns:a="http://schemas.openxmlformats.org/drawingml/2006/main" prst="rect">
@@ -3537,21 +3588,21 @@
       </p:sp>
       <p:sp>
         <p:nvSpPr>
-          <p:cNvPr id="53" name="6-Discussão aplicada-title">
-            <a:extLst xmlns:a="http://schemas.openxmlformats.org/drawingml/2006/main">
-              <a:ext uri="{FF2B5EF4-FFF2-40B4-BE49-F238E27FC236}">
-                <a16:creationId xmlns:a16="http://schemas.microsoft.com/office/drawing/2014/main" id="{F362AA82-9E11-4DBC-8D33-F3E39C256C3C}"/>
-              </a:ext>
-            </a:extLst>
-          </p:cNvPr>
-          <p:cNvSpPr>
-            <a:spLocks xmlns:a="http://schemas.openxmlformats.org/drawingml/2006/main" noGrp="1"/>
-          </p:cNvSpPr>
-          <p:nvPr/>
-        </p:nvSpPr>
-        <p:spPr>
-          <a:xfrm xmlns:a="http://schemas.openxmlformats.org/drawingml/2006/main">
-            <a:off x="7067550" y="5457825"/>
+          <p:cNvPr id="53" name="6-Conclusão central-title">
+            <a:extLst xmlns:a="http://schemas.openxmlformats.org/drawingml/2006/main">
+              <a:ext uri="{FF2B5EF4-FFF2-40B4-BE49-F238E27FC236}">
+                <a16:creationId xmlns:a16="http://schemas.microsoft.com/office/drawing/2014/main" id="{104C4681-4BDE-4437-A780-4BE3A264B0CE}"/>
+              </a:ext>
+            </a:extLst>
+          </p:cNvPr>
+          <p:cNvSpPr>
+            <a:spLocks xmlns:a="http://schemas.openxmlformats.org/drawingml/2006/main" noGrp="1"/>
+          </p:cNvSpPr>
+          <p:nvPr/>
+        </p:nvSpPr>
+        <p:spPr>
+          <a:xfrm xmlns:a="http://schemas.openxmlformats.org/drawingml/2006/main">
+            <a:off x="7067550" y="7038975"/>
             <a:ext cx="2209800" cy="190500"/>
           </a:xfrm>
           <a:prstGeom xmlns:a="http://schemas.openxmlformats.org/drawingml/2006/main" prst="rect">
@@ -3580,29 +3631,29 @@
                   <a:srgbClr val="FFFFFF"/>
                 </a:solidFill>
               </a:rPr>
-              <a:t>6. Discussão aplicada</a:t>
+              <a:t>6. Conclusão central</a:t>
             </a:r>
           </a:p>
         </p:txBody>
       </p:sp>
       <p:sp>
         <p:nvSpPr>
-          <p:cNvPr id="54" name="6-Discussão aplicada-body">
-            <a:extLst xmlns:a="http://schemas.openxmlformats.org/drawingml/2006/main">
-              <a:ext uri="{FF2B5EF4-FFF2-40B4-BE49-F238E27FC236}">
-                <a16:creationId xmlns:a16="http://schemas.microsoft.com/office/drawing/2014/main" id="{58F51328-77AA-4FAC-9DDC-21F06C904FE1}"/>
-              </a:ext>
-            </a:extLst>
-          </p:cNvPr>
-          <p:cNvSpPr>
-            <a:spLocks xmlns:a="http://schemas.openxmlformats.org/drawingml/2006/main" noGrp="1"/>
-          </p:cNvSpPr>
-          <p:nvPr/>
-        </p:nvSpPr>
-        <p:spPr>
-          <a:xfrm xmlns:a="http://schemas.openxmlformats.org/drawingml/2006/main">
-            <a:off x="7086600" y="5753100"/>
-            <a:ext cx="2171700" cy="1047750"/>
+          <p:cNvPr id="54" name="6-Conclusão central-body">
+            <a:extLst xmlns:a="http://schemas.openxmlformats.org/drawingml/2006/main">
+              <a:ext uri="{FF2B5EF4-FFF2-40B4-BE49-F238E27FC236}">
+                <a16:creationId xmlns:a16="http://schemas.microsoft.com/office/drawing/2014/main" id="{892553D8-ED18-49E4-8371-CF2DD77D7A79}"/>
+              </a:ext>
+            </a:extLst>
+          </p:cNvPr>
+          <p:cNvSpPr>
+            <a:spLocks xmlns:a="http://schemas.openxmlformats.org/drawingml/2006/main" noGrp="1"/>
+          </p:cNvSpPr>
+          <p:nvPr/>
+        </p:nvSpPr>
+        <p:spPr>
+          <a:xfrm xmlns:a="http://schemas.openxmlformats.org/drawingml/2006/main">
+            <a:off x="7086600" y="7334250"/>
+            <a:ext cx="2171700" cy="838200"/>
           </a:xfrm>
           <a:prstGeom xmlns:a="http://schemas.openxmlformats.org/drawingml/2006/main" prst="rect">
             <a:avLst/>
@@ -3618,75 +3669,125 @@
           <a:lstStyle xmlns:a="http://schemas.openxmlformats.org/drawingml/2006/main"/>
           <a:p xmlns:a="http://schemas.openxmlformats.org/drawingml/2006/main">
             <a:pPr algn="l">
-              <a:defRPr sz="555" b="0">
-                <a:solidFill>
-                  <a:srgbClr val="102536"/>
-                </a:solidFill>
-              </a:defRPr>
-            </a:pPr>
-            <a:r>
-              <a:rPr sz="555" b="0">
-                <a:solidFill>
-                  <a:srgbClr val="102536"/>
-                </a:solidFill>
-              </a:rPr>
-              <a:t>• A combinação diagnóstico↑, crises≈ e uso de medicamentos↓ sugere expansão do reconhecimento da asma sem melhora proporcional no controle.</a:t>
-            </a:r>
-          </a:p>
-          <a:p xmlns:a="http://schemas.openxmlformats.org/drawingml/2006/main">
-            <a:pPr algn="l">
-              <a:defRPr sz="555" b="0">
-                <a:solidFill>
-                  <a:srgbClr val="102536"/>
-                </a:solidFill>
-              </a:defRPr>
-            </a:pPr>
-            <a:r>
-              <a:rPr sz="555" b="0">
-                <a:solidFill>
-                  <a:srgbClr val="102536"/>
-                </a:solidFill>
-              </a:rPr>
-              <a:t>• O aumento do diagnóstico pode refletir maior ocorrência, melhor acesso ao diagnóstico ou ambos.</a:t>
-            </a:r>
-          </a:p>
-          <a:p xmlns:a="http://schemas.openxmlformats.org/drawingml/2006/main">
-            <a:pPr algn="l">
-              <a:defRPr sz="555" b="0">
-                <a:solidFill>
-                  <a:srgbClr val="102536"/>
-                </a:solidFill>
-              </a:defRPr>
-            </a:pPr>
-            <a:r>
-              <a:rPr sz="555" b="0">
-                <a:solidFill>
-                  <a:srgbClr val="102536"/>
-                </a:solidFill>
-              </a:rPr>
-              <a:t>• O controle da asma depende de acesso farmacológico, seguimento clínico, educação, controle de exposições e intervenções não farmacológicas.</a:t>
+              <a:defRPr sz="525" b="0">
+                <a:solidFill>
+                  <a:srgbClr val="102536"/>
+                </a:solidFill>
+              </a:defRPr>
+            </a:pPr>
+            <a:r>
+              <a:rPr sz="525" b="0">
+                <a:solidFill>
+                  <a:srgbClr val="102536"/>
+                </a:solidFill>
+              </a:rPr>
+              <a:t>• A implementação correta do plano amostral é condição para estimativas válidas.</a:t>
+            </a:r>
+          </a:p>
+          <a:p xmlns:a="http://schemas.openxmlformats.org/drawingml/2006/main">
+            <a:pPr algn="l">
+              <a:defRPr sz="525" b="0">
+                <a:solidFill>
+                  <a:srgbClr val="102536"/>
+                </a:solidFill>
+              </a:defRPr>
+            </a:pPr>
+            <a:r>
+              <a:rPr sz="525" b="0">
+                <a:solidFill>
+                  <a:srgbClr val="102536"/>
+                </a:solidFill>
+              </a:rPr>
+              <a:t>• A asma deve ser tratada como problema clínico e econômico, pois pode afetar produtividade, renda e força de trabalho.</a:t>
+            </a:r>
+          </a:p>
+          <a:p xmlns:a="http://schemas.openxmlformats.org/drawingml/2006/main">
+            <a:pPr algn="l">
+              <a:defRPr sz="525" b="0">
+                <a:solidFill>
+                  <a:srgbClr val="102536"/>
+                </a:solidFill>
+              </a:defRPr>
+            </a:pPr>
+            <a:r>
+              <a:rPr sz="525" b="0">
+                <a:solidFill>
+                  <a:srgbClr val="102536"/>
+                </a:solidFill>
+              </a:rPr>
+              <a:t>• Os resultados de absenteísmo são respiratórios agregados; não devem ser lidos como estimativa isolada de asma.</a:t>
             </a:r>
           </a:p>
         </p:txBody>
       </p:sp>
       <p:sp>
         <p:nvSpPr>
-          <p:cNvPr id="55" name="7-Conclusão central-box">
-            <a:extLst xmlns:a="http://schemas.openxmlformats.org/drawingml/2006/main">
-              <a:ext uri="{FF2B5EF4-FFF2-40B4-BE49-F238E27FC236}">
-                <a16:creationId xmlns:a16="http://schemas.microsoft.com/office/drawing/2014/main" id="{95119E09-55CB-4BAA-99A6-566C00F1996D}"/>
-              </a:ext>
-            </a:extLst>
-          </p:cNvPr>
-          <p:cNvSpPr>
-            <a:spLocks xmlns:a="http://schemas.openxmlformats.org/drawingml/2006/main" noGrp="1"/>
-          </p:cNvSpPr>
-          <p:nvPr/>
-        </p:nvSpPr>
-        <p:spPr>
-          <a:xfrm xmlns:a="http://schemas.openxmlformats.org/drawingml/2006/main">
-            <a:off x="6991350" y="6991350"/>
-            <a:ext cx="2362200" cy="1238250"/>
+          <p:cNvPr id="55" name="m-chart-crisis-caption">
+            <a:extLst xmlns:a="http://schemas.openxmlformats.org/drawingml/2006/main">
+              <a:ext uri="{FF2B5EF4-FFF2-40B4-BE49-F238E27FC236}">
+                <a16:creationId xmlns:a16="http://schemas.microsoft.com/office/drawing/2014/main" id="{1D3D4231-1CE6-4BD9-88BB-229BCEAEF09F}"/>
+              </a:ext>
+            </a:extLst>
+          </p:cNvPr>
+          <p:cNvSpPr>
+            <a:spLocks xmlns:a="http://schemas.openxmlformats.org/drawingml/2006/main" noGrp="1"/>
+          </p:cNvSpPr>
+          <p:nvPr/>
+        </p:nvSpPr>
+        <p:spPr>
+          <a:xfrm xmlns:a="http://schemas.openxmlformats.org/drawingml/2006/main">
+            <a:off x="6991350" y="8362950"/>
+            <a:ext cx="2362200" cy="228600"/>
+          </a:xfrm>
+          <a:prstGeom xmlns:a="http://schemas.openxmlformats.org/drawingml/2006/main" prst="rect">
+            <a:avLst/>
+          </a:prstGeom>
+          <a:noFill xmlns:a="http://schemas.openxmlformats.org/drawingml/2006/main"/>
+          <a:ln xmlns:a="http://schemas.openxmlformats.org/drawingml/2006/main" w="0">
+            <a:noFill/>
+            <a:prstDash val="solid"/>
+          </a:ln>
+        </p:spPr>
+        <p:txBody>
+          <a:bodyPr xmlns:a="http://schemas.openxmlformats.org/drawingml/2006/main"/>
+          <a:lstStyle xmlns:a="http://schemas.openxmlformats.org/drawingml/2006/main"/>
+          <a:p xmlns:a="http://schemas.openxmlformats.org/drawingml/2006/main">
+            <a:pPr algn="ctr">
+              <a:defRPr sz="660" b="1">
+                <a:solidFill>
+                  <a:srgbClr val="153F59"/>
+                </a:solidFill>
+              </a:defRPr>
+            </a:pPr>
+            <a:r>
+              <a:rPr sz="660" b="1">
+                <a:solidFill>
+                  <a:srgbClr val="153F59"/>
+                </a:solidFill>
+              </a:rPr>
+              <a:t>Figura 2: Absenteísmo por motivo de saúde no Brasil, com destaque para causas respiratórias, PNS 2019.</a:t>
+            </a:r>
+          </a:p>
+        </p:txBody>
+      </p:sp>
+      <p:sp>
+        <p:nvSpPr>
+          <p:cNvPr id="56" name="m-chart-crisis-frame">
+            <a:extLst xmlns:a="http://schemas.openxmlformats.org/drawingml/2006/main">
+              <a:ext uri="{FF2B5EF4-FFF2-40B4-BE49-F238E27FC236}">
+                <a16:creationId xmlns:a16="http://schemas.microsoft.com/office/drawing/2014/main" id="{52BD71E9-3651-473E-994D-69C26452D412}"/>
+              </a:ext>
+            </a:extLst>
+          </p:cNvPr>
+          <p:cNvSpPr>
+            <a:spLocks xmlns:a="http://schemas.openxmlformats.org/drawingml/2006/main" noGrp="1"/>
+          </p:cNvSpPr>
+          <p:nvPr/>
+        </p:nvSpPr>
+        <p:spPr>
+          <a:xfrm xmlns:a="http://schemas.openxmlformats.org/drawingml/2006/main">
+            <a:off x="6991350" y="8610600"/>
+            <a:ext cx="2362200" cy="1695450"/>
           </a:xfrm>
           <a:prstGeom xmlns:a="http://schemas.openxmlformats.org/drawingml/2006/main" prst="rect">
             <a:avLst/>
@@ -3702,30 +3803,52 @@
           </a:ln>
         </p:spPr>
       </p:sp>
-      <p:sp>
-        <p:nvSpPr>
-          <p:cNvPr id="56" name="7-Conclusão central-head">
-            <a:extLst xmlns:a="http://schemas.openxmlformats.org/drawingml/2006/main">
-              <a:ext uri="{FF2B5EF4-FFF2-40B4-BE49-F238E27FC236}">
-                <a16:creationId xmlns:a16="http://schemas.microsoft.com/office/drawing/2014/main" id="{8C3DCA21-7999-4728-9F33-F50644307B25}"/>
-              </a:ext>
-            </a:extLst>
-          </p:cNvPr>
-          <p:cNvSpPr>
-            <a:spLocks xmlns:a="http://schemas.openxmlformats.org/drawingml/2006/main" noGrp="1"/>
-          </p:cNvSpPr>
-          <p:nvPr/>
-        </p:nvSpPr>
-        <p:spPr>
-          <a:xfrm xmlns:a="http://schemas.openxmlformats.org/drawingml/2006/main">
-            <a:off x="6991350" y="6991350"/>
-            <a:ext cx="2362200" cy="266700"/>
+      <p:pic>
+        <p:nvPicPr>
+          <p:cNvPr id="120" name=""/>
+          <p:cNvPicPr>
+            <a:picLocks xmlns:a="http://schemas.openxmlformats.org/drawingml/2006/main" noChangeAspect="1"/>
+          </p:cNvPicPr>
+          <p:nvPr/>
+        </p:nvPicPr>
+        <p:blipFill>
+          <a:blip xmlns:r="http://schemas.openxmlformats.org/officeDocument/2006/relationships" xmlns:a="http://schemas.openxmlformats.org/drawingml/2006/main" r:embed="R3bdf8dbd37354b6c"/>
+          <a:stretch xmlns:a="http://schemas.openxmlformats.org/drawingml/2006/main"/>
+        </p:blipFill>
+        <p:spPr>
+          <a:xfrm xmlns:a="http://schemas.openxmlformats.org/drawingml/2006/main">
+            <a:off x="7075326" y="8667750"/>
+            <a:ext cx="2194249" cy="1581150"/>
+          </a:xfrm>
+          <a:prstGeom xmlns:a="http://schemas.openxmlformats.org/drawingml/2006/main" prst="rect">
+            <a:avLst/>
+          </a:prstGeom>
+        </p:spPr>
+      </p:pic>
+      <p:sp>
+        <p:nvSpPr>
+          <p:cNvPr id="58" name="qr-box">
+            <a:extLst xmlns:a="http://schemas.openxmlformats.org/drawingml/2006/main">
+              <a:ext uri="{FF2B5EF4-FFF2-40B4-BE49-F238E27FC236}">
+                <a16:creationId xmlns:a16="http://schemas.microsoft.com/office/drawing/2014/main" id="{5EB864EB-DF8D-49FB-BA67-00590A3C73AC}"/>
+              </a:ext>
+            </a:extLst>
+          </p:cNvPr>
+          <p:cNvSpPr>
+            <a:spLocks xmlns:a="http://schemas.openxmlformats.org/drawingml/2006/main" noGrp="1"/>
+          </p:cNvSpPr>
+          <p:nvPr/>
+        </p:nvSpPr>
+        <p:spPr>
+          <a:xfrm xmlns:a="http://schemas.openxmlformats.org/drawingml/2006/main">
+            <a:off x="7581900" y="10591800"/>
+            <a:ext cx="1181100" cy="1676400"/>
           </a:xfrm>
           <a:prstGeom xmlns:a="http://schemas.openxmlformats.org/drawingml/2006/main" prst="rect">
             <a:avLst/>
           </a:prstGeom>
           <a:solidFill xmlns:a="http://schemas.openxmlformats.org/drawingml/2006/main">
-            <a:srgbClr val="1F5673"/>
+            <a:srgbClr val="FFFFFF"/>
           </a:solidFill>
           <a:ln xmlns:a="http://schemas.openxmlformats.org/drawingml/2006/main" w="9525">
             <a:solidFill>
@@ -3735,24 +3858,46 @@
           </a:ln>
         </p:spPr>
       </p:sp>
-      <p:sp>
-        <p:nvSpPr>
-          <p:cNvPr id="57" name="7-Conclusão central-title">
-            <a:extLst xmlns:a="http://schemas.openxmlformats.org/drawingml/2006/main">
-              <a:ext uri="{FF2B5EF4-FFF2-40B4-BE49-F238E27FC236}">
-                <a16:creationId xmlns:a16="http://schemas.microsoft.com/office/drawing/2014/main" id="{54F29757-9122-410F-B951-76674CAA1D88}"/>
-              </a:ext>
-            </a:extLst>
-          </p:cNvPr>
-          <p:cNvSpPr>
-            <a:spLocks xmlns:a="http://schemas.openxmlformats.org/drawingml/2006/main" noGrp="1"/>
-          </p:cNvSpPr>
-          <p:nvPr/>
-        </p:nvSpPr>
-        <p:spPr>
-          <a:xfrm xmlns:a="http://schemas.openxmlformats.org/drawingml/2006/main">
-            <a:off x="7067550" y="7038975"/>
-            <a:ext cx="2209800" cy="190500"/>
+      <p:pic>
+        <p:nvPicPr>
+          <p:cNvPr id="122" name=""/>
+          <p:cNvPicPr>
+            <a:picLocks xmlns:a="http://schemas.openxmlformats.org/drawingml/2006/main" noChangeAspect="1"/>
+          </p:cNvPicPr>
+          <p:nvPr/>
+        </p:nvPicPr>
+        <p:blipFill>
+          <a:blip xmlns:r="http://schemas.openxmlformats.org/officeDocument/2006/relationships" xmlns:a="http://schemas.openxmlformats.org/drawingml/2006/main" r:embed="R62be285061c342b7"/>
+          <a:stretch xmlns:a="http://schemas.openxmlformats.org/drawingml/2006/main"/>
+        </p:blipFill>
+        <p:spPr>
+          <a:xfrm xmlns:a="http://schemas.openxmlformats.org/drawingml/2006/main">
+            <a:off x="7715250" y="10706100"/>
+            <a:ext cx="914400" cy="914400"/>
+          </a:xfrm>
+          <a:prstGeom xmlns:a="http://schemas.openxmlformats.org/drawingml/2006/main" prst="rect">
+            <a:avLst/>
+          </a:prstGeom>
+        </p:spPr>
+      </p:pic>
+      <p:sp>
+        <p:nvSpPr>
+          <p:cNvPr id="60" name="qr-label">
+            <a:extLst xmlns:a="http://schemas.openxmlformats.org/drawingml/2006/main">
+              <a:ext uri="{FF2B5EF4-FFF2-40B4-BE49-F238E27FC236}">
+                <a16:creationId xmlns:a16="http://schemas.microsoft.com/office/drawing/2014/main" id="{23553DD2-76B7-4FC4-AD42-F01374886B78}"/>
+              </a:ext>
+            </a:extLst>
+          </p:cNvPr>
+          <p:cNvSpPr>
+            <a:spLocks xmlns:a="http://schemas.openxmlformats.org/drawingml/2006/main" noGrp="1"/>
+          </p:cNvSpPr>
+          <p:nvPr/>
+        </p:nvSpPr>
+        <p:spPr>
+          <a:xfrm xmlns:a="http://schemas.openxmlformats.org/drawingml/2006/main">
+            <a:off x="7658100" y="11696700"/>
+            <a:ext cx="1028700" cy="523875"/>
           </a:xfrm>
           <a:prstGeom xmlns:a="http://schemas.openxmlformats.org/drawingml/2006/main" prst="rect">
             <a:avLst/>
@@ -3767,176 +3912,59 @@
           <a:bodyPr xmlns:a="http://schemas.openxmlformats.org/drawingml/2006/main"/>
           <a:lstStyle xmlns:a="http://schemas.openxmlformats.org/drawingml/2006/main"/>
           <a:p xmlns:a="http://schemas.openxmlformats.org/drawingml/2006/main">
-            <a:pPr algn="l">
-              <a:defRPr sz="900" b="1">
-                <a:solidFill>
-                  <a:srgbClr val="FFFFFF"/>
-                </a:solidFill>
-              </a:defRPr>
-            </a:pPr>
-            <a:r>
-              <a:rPr sz="900" b="1">
-                <a:solidFill>
-                  <a:srgbClr val="FFFFFF"/>
-                </a:solidFill>
-              </a:rPr>
-              <a:t>7. Conclusão central</a:t>
+            <a:pPr algn="ctr">
+              <a:defRPr sz="488" b="1">
+                <a:solidFill>
+                  <a:srgbClr val="153F59"/>
+                </a:solidFill>
+              </a:defRPr>
+            </a:pPr>
+            <a:r>
+              <a:rPr sz="488" b="1">
+                <a:solidFill>
+                  <a:srgbClr val="153F59"/>
+                </a:solidFill>
+              </a:rPr>
+              <a:t>Relatório metodológico, códigos e gráficos reprodutíveis</a:t>
+            </a:r>
+          </a:p>
+          <a:p xmlns:a="http://schemas.openxmlformats.org/drawingml/2006/main">
+            <a:pPr algn="ctr">
+              <a:defRPr sz="488" b="1">
+                <a:solidFill>
+                  <a:srgbClr val="153F59"/>
+                </a:solidFill>
+              </a:defRPr>
+            </a:pPr>
+            <a:r>
+              <a:rPr sz="488" b="1">
+                <a:solidFill>
+                  <a:srgbClr val="153F59"/>
+                </a:solidFill>
+              </a:rPr>
+              <a:t>https://ingodube.github.io/PNS_2013_2019/metodologia.html</a:t>
             </a:r>
           </a:p>
         </p:txBody>
       </p:sp>
       <p:sp>
         <p:nvSpPr>
-          <p:cNvPr id="58" name="7-Conclusão central-body">
-            <a:extLst xmlns:a="http://schemas.openxmlformats.org/drawingml/2006/main">
-              <a:ext uri="{FF2B5EF4-FFF2-40B4-BE49-F238E27FC236}">
-                <a16:creationId xmlns:a16="http://schemas.microsoft.com/office/drawing/2014/main" id="{4692B837-C526-4AC3-8F0D-215999F5BD8B}"/>
-              </a:ext>
-            </a:extLst>
-          </p:cNvPr>
-          <p:cNvSpPr>
-            <a:spLocks xmlns:a="http://schemas.openxmlformats.org/drawingml/2006/main" noGrp="1"/>
-          </p:cNvSpPr>
-          <p:nvPr/>
-        </p:nvSpPr>
-        <p:spPr>
-          <a:xfrm xmlns:a="http://schemas.openxmlformats.org/drawingml/2006/main">
-            <a:off x="7086600" y="7334250"/>
-            <a:ext cx="2171700" cy="838200"/>
-          </a:xfrm>
-          <a:prstGeom xmlns:a="http://schemas.openxmlformats.org/drawingml/2006/main" prst="rect">
-            <a:avLst/>
-          </a:prstGeom>
-          <a:noFill xmlns:a="http://schemas.openxmlformats.org/drawingml/2006/main"/>
-          <a:ln xmlns:a="http://schemas.openxmlformats.org/drawingml/2006/main" w="0">
-            <a:noFill/>
-            <a:prstDash val="solid"/>
-          </a:ln>
-        </p:spPr>
-        <p:txBody>
-          <a:bodyPr xmlns:a="http://schemas.openxmlformats.org/drawingml/2006/main"/>
-          <a:lstStyle xmlns:a="http://schemas.openxmlformats.org/drawingml/2006/main"/>
-          <a:p xmlns:a="http://schemas.openxmlformats.org/drawingml/2006/main">
-            <a:pPr algn="l">
-              <a:defRPr sz="540" b="0">
-                <a:solidFill>
-                  <a:srgbClr val="102536"/>
-                </a:solidFill>
-              </a:defRPr>
-            </a:pPr>
-            <a:r>
-              <a:rPr sz="540" b="0">
-                <a:solidFill>
-                  <a:srgbClr val="102536"/>
-                </a:solidFill>
-              </a:rPr>
-              <a:t>• A implementação correta do plano amostral é condição para estimativas válidas.</a:t>
-            </a:r>
-          </a:p>
-          <a:p xmlns:a="http://schemas.openxmlformats.org/drawingml/2006/main">
-            <a:pPr algn="l">
-              <a:defRPr sz="540" b="0">
-                <a:solidFill>
-                  <a:srgbClr val="102536"/>
-                </a:solidFill>
-              </a:defRPr>
-            </a:pPr>
-            <a:r>
-              <a:rPr sz="540" b="0">
-                <a:solidFill>
-                  <a:srgbClr val="102536"/>
-                </a:solidFill>
-              </a:rPr>
-              <a:t>• O Brasil apresentou aumento de diagnóstico, mas não evidência equivalente de melhora no controle.</a:t>
-            </a:r>
-          </a:p>
-          <a:p xmlns:a="http://schemas.openxmlformats.org/drawingml/2006/main">
-            <a:pPr algn="l">
-              <a:defRPr sz="540" b="0">
-                <a:solidFill>
-                  <a:srgbClr val="102536"/>
-                </a:solidFill>
-              </a:defRPr>
-            </a:pPr>
-            <a:r>
-              <a:rPr sz="540" b="0">
-                <a:solidFill>
-                  <a:srgbClr val="102536"/>
-                </a:solidFill>
-              </a:rPr>
-              <a:t>• Os gráficos por UF devem ser lidos com IC95%, pois várias comparações têm intervalos sobrepostos.</a:t>
-            </a:r>
-          </a:p>
-        </p:txBody>
-      </p:sp>
-      <p:sp>
-        <p:nvSpPr>
-          <p:cNvPr id="59" name="m-chart-crisis-caption">
-            <a:extLst xmlns:a="http://schemas.openxmlformats.org/drawingml/2006/main">
-              <a:ext uri="{FF2B5EF4-FFF2-40B4-BE49-F238E27FC236}">
-                <a16:creationId xmlns:a16="http://schemas.microsoft.com/office/drawing/2014/main" id="{15AB4E66-9ED8-458F-BDA9-CE74C423EF0B}"/>
-              </a:ext>
-            </a:extLst>
-          </p:cNvPr>
-          <p:cNvSpPr>
-            <a:spLocks xmlns:a="http://schemas.openxmlformats.org/drawingml/2006/main" noGrp="1"/>
-          </p:cNvSpPr>
-          <p:nvPr/>
-        </p:nvSpPr>
-        <p:spPr>
-          <a:xfrm xmlns:a="http://schemas.openxmlformats.org/drawingml/2006/main">
-            <a:off x="6991350" y="8362950"/>
-            <a:ext cx="2362200" cy="228600"/>
-          </a:xfrm>
-          <a:prstGeom xmlns:a="http://schemas.openxmlformats.org/drawingml/2006/main" prst="rect">
-            <a:avLst/>
-          </a:prstGeom>
-          <a:noFill xmlns:a="http://schemas.openxmlformats.org/drawingml/2006/main"/>
-          <a:ln xmlns:a="http://schemas.openxmlformats.org/drawingml/2006/main" w="0">
-            <a:noFill/>
-            <a:prstDash val="solid"/>
-          </a:ln>
-        </p:spPr>
-        <p:txBody>
-          <a:bodyPr xmlns:a="http://schemas.openxmlformats.org/drawingml/2006/main"/>
-          <a:lstStyle xmlns:a="http://schemas.openxmlformats.org/drawingml/2006/main"/>
-          <a:p xmlns:a="http://schemas.openxmlformats.org/drawingml/2006/main">
-            <a:pPr algn="ctr">
-              <a:defRPr sz="660" b="1">
-                <a:solidFill>
-                  <a:srgbClr val="153F59"/>
-                </a:solidFill>
-              </a:defRPr>
-            </a:pPr>
-            <a:r>
-              <a:rPr sz="660" b="1">
-                <a:solidFill>
-                  <a:srgbClr val="153F59"/>
-                </a:solidFill>
-              </a:rPr>
-              <a:t>Figura 2: Prevalência (%) de crise de asma nos últimos 12 meses por UF e Brasil, PNS 2013 e 2019.</a:t>
-            </a:r>
-          </a:p>
-        </p:txBody>
-      </p:sp>
-      <p:sp>
-        <p:nvSpPr>
-          <p:cNvPr id="60" name="m-chart-crisis-frame">
-            <a:extLst xmlns:a="http://schemas.openxmlformats.org/drawingml/2006/main">
-              <a:ext uri="{FF2B5EF4-FFF2-40B4-BE49-F238E27FC236}">
-                <a16:creationId xmlns:a16="http://schemas.microsoft.com/office/drawing/2014/main" id="{DF2D5D34-7CAC-4B78-B38C-B48F920D0E78}"/>
-              </a:ext>
-            </a:extLst>
-          </p:cNvPr>
-          <p:cNvSpPr>
-            <a:spLocks xmlns:a="http://schemas.openxmlformats.org/drawingml/2006/main" noGrp="1"/>
-          </p:cNvSpPr>
-          <p:nvPr/>
-        </p:nvSpPr>
-        <p:spPr>
-          <a:xfrm xmlns:a="http://schemas.openxmlformats.org/drawingml/2006/main">
-            <a:off x="6991350" y="8610600"/>
-            <a:ext cx="2362200" cy="1695450"/>
+          <p:cNvPr id="61" name="references-box">
+            <a:extLst xmlns:a="http://schemas.openxmlformats.org/drawingml/2006/main">
+              <a:ext uri="{FF2B5EF4-FFF2-40B4-BE49-F238E27FC236}">
+                <a16:creationId xmlns:a16="http://schemas.microsoft.com/office/drawing/2014/main" id="{3567E95C-912D-4CE8-8624-3C0A995D5723}"/>
+              </a:ext>
+            </a:extLst>
+          </p:cNvPr>
+          <p:cNvSpPr>
+            <a:spLocks xmlns:a="http://schemas.openxmlformats.org/drawingml/2006/main" noGrp="1"/>
+          </p:cNvSpPr>
+          <p:nvPr/>
+        </p:nvSpPr>
+        <p:spPr>
+          <a:xfrm xmlns:a="http://schemas.openxmlformats.org/drawingml/2006/main">
+            <a:off x="323850" y="12382500"/>
+            <a:ext cx="8877300" cy="857250"/>
           </a:xfrm>
           <a:prstGeom xmlns:a="http://schemas.openxmlformats.org/drawingml/2006/main" prst="rect">
             <a:avLst/>
@@ -3952,101 +3980,24 @@
           </a:ln>
         </p:spPr>
       </p:sp>
-      <p:pic>
-        <p:nvPicPr>
-          <p:cNvPr id="128" name=""/>
-          <p:cNvPicPr>
-            <a:picLocks xmlns:a="http://schemas.openxmlformats.org/drawingml/2006/main" noChangeAspect="1"/>
-          </p:cNvPicPr>
-          <p:nvPr/>
-        </p:nvPicPr>
-        <p:blipFill>
-          <a:blip xmlns:r="http://schemas.openxmlformats.org/officeDocument/2006/relationships" xmlns:a="http://schemas.openxmlformats.org/drawingml/2006/main" r:embed="Rcada5a43124e498a"/>
-          <a:stretch xmlns:a="http://schemas.openxmlformats.org/drawingml/2006/main"/>
-        </p:blipFill>
-        <p:spPr>
-          <a:xfrm xmlns:a="http://schemas.openxmlformats.org/drawingml/2006/main">
-            <a:off x="7075326" y="8667750"/>
-            <a:ext cx="2194249" cy="1581150"/>
-          </a:xfrm>
-          <a:prstGeom xmlns:a="http://schemas.openxmlformats.org/drawingml/2006/main" prst="rect">
-            <a:avLst/>
-          </a:prstGeom>
-        </p:spPr>
-      </p:pic>
-      <p:sp>
-        <p:nvSpPr>
-          <p:cNvPr id="62" name="qr-box">
-            <a:extLst xmlns:a="http://schemas.openxmlformats.org/drawingml/2006/main">
-              <a:ext uri="{FF2B5EF4-FFF2-40B4-BE49-F238E27FC236}">
-                <a16:creationId xmlns:a16="http://schemas.microsoft.com/office/drawing/2014/main" id="{BE1500F4-AC40-4221-87ED-13C3BB8BC0CC}"/>
-              </a:ext>
-            </a:extLst>
-          </p:cNvPr>
-          <p:cNvSpPr>
-            <a:spLocks xmlns:a="http://schemas.openxmlformats.org/drawingml/2006/main" noGrp="1"/>
-          </p:cNvSpPr>
-          <p:nvPr/>
-        </p:nvSpPr>
-        <p:spPr>
-          <a:xfrm xmlns:a="http://schemas.openxmlformats.org/drawingml/2006/main">
-            <a:off x="7581900" y="10591800"/>
-            <a:ext cx="1181100" cy="1676400"/>
-          </a:xfrm>
-          <a:prstGeom xmlns:a="http://schemas.openxmlformats.org/drawingml/2006/main" prst="rect">
-            <a:avLst/>
-          </a:prstGeom>
-          <a:solidFill xmlns:a="http://schemas.openxmlformats.org/drawingml/2006/main">
-            <a:srgbClr val="FFFFFF"/>
-          </a:solidFill>
-          <a:ln xmlns:a="http://schemas.openxmlformats.org/drawingml/2006/main" w="9525">
-            <a:solidFill>
-              <a:srgbClr val="1F5673"/>
-            </a:solidFill>
-            <a:prstDash val="solid"/>
-          </a:ln>
-        </p:spPr>
-      </p:sp>
-      <p:pic>
-        <p:nvPicPr>
-          <p:cNvPr id="130" name=""/>
-          <p:cNvPicPr>
-            <a:picLocks xmlns:a="http://schemas.openxmlformats.org/drawingml/2006/main" noChangeAspect="1"/>
-          </p:cNvPicPr>
-          <p:nvPr/>
-        </p:nvPicPr>
-        <p:blipFill>
-          <a:blip xmlns:r="http://schemas.openxmlformats.org/officeDocument/2006/relationships" xmlns:a="http://schemas.openxmlformats.org/drawingml/2006/main" r:embed="R7c3dca966e854fff"/>
-          <a:stretch xmlns:a="http://schemas.openxmlformats.org/drawingml/2006/main"/>
-        </p:blipFill>
-        <p:spPr>
-          <a:xfrm xmlns:a="http://schemas.openxmlformats.org/drawingml/2006/main">
-            <a:off x="7715250" y="10706100"/>
-            <a:ext cx="914400" cy="914400"/>
-          </a:xfrm>
-          <a:prstGeom xmlns:a="http://schemas.openxmlformats.org/drawingml/2006/main" prst="rect">
-            <a:avLst/>
-          </a:prstGeom>
-        </p:spPr>
-      </p:pic>
-      <p:sp>
-        <p:nvSpPr>
-          <p:cNvPr id="64" name="qr-label">
-            <a:extLst xmlns:a="http://schemas.openxmlformats.org/drawingml/2006/main">
-              <a:ext uri="{FF2B5EF4-FFF2-40B4-BE49-F238E27FC236}">
-                <a16:creationId xmlns:a16="http://schemas.microsoft.com/office/drawing/2014/main" id="{2EC6D7FE-BF19-4642-80C0-99C74112D55C}"/>
-              </a:ext>
-            </a:extLst>
-          </p:cNvPr>
-          <p:cNvSpPr>
-            <a:spLocks xmlns:a="http://schemas.openxmlformats.org/drawingml/2006/main" noGrp="1"/>
-          </p:cNvSpPr>
-          <p:nvPr/>
-        </p:nvSpPr>
-        <p:spPr>
-          <a:xfrm xmlns:a="http://schemas.openxmlformats.org/drawingml/2006/main">
-            <a:off x="7658100" y="11696700"/>
-            <a:ext cx="1028700" cy="523875"/>
+      <p:sp>
+        <p:nvSpPr>
+          <p:cNvPr id="62" name="references-title">
+            <a:extLst xmlns:a="http://schemas.openxmlformats.org/drawingml/2006/main">
+              <a:ext uri="{FF2B5EF4-FFF2-40B4-BE49-F238E27FC236}">
+                <a16:creationId xmlns:a16="http://schemas.microsoft.com/office/drawing/2014/main" id="{F83E7C34-4D47-42ED-BA37-3673770A84F6}"/>
+              </a:ext>
+            </a:extLst>
+          </p:cNvPr>
+          <p:cNvSpPr>
+            <a:spLocks xmlns:a="http://schemas.openxmlformats.org/drawingml/2006/main" noGrp="1"/>
+          </p:cNvSpPr>
+          <p:nvPr/>
+        </p:nvSpPr>
+        <p:spPr>
+          <a:xfrm xmlns:a="http://schemas.openxmlformats.org/drawingml/2006/main">
+            <a:off x="400050" y="12449175"/>
+            <a:ext cx="8724900" cy="171450"/>
           </a:xfrm>
           <a:prstGeom xmlns:a="http://schemas.openxmlformats.org/drawingml/2006/main" prst="rect">
             <a:avLst/>
@@ -4061,92 +4012,42 @@
           <a:bodyPr xmlns:a="http://schemas.openxmlformats.org/drawingml/2006/main"/>
           <a:lstStyle xmlns:a="http://schemas.openxmlformats.org/drawingml/2006/main"/>
           <a:p xmlns:a="http://schemas.openxmlformats.org/drawingml/2006/main">
-            <a:pPr algn="ctr">
-              <a:defRPr sz="488" b="1">
+            <a:pPr algn="l">
+              <a:defRPr sz="825" b="1">
                 <a:solidFill>
                   <a:srgbClr val="153F59"/>
                 </a:solidFill>
               </a:defRPr>
             </a:pPr>
             <a:r>
-              <a:rPr sz="488" b="1">
+              <a:rPr sz="825" b="1">
                 <a:solidFill>
                   <a:srgbClr val="153F59"/>
                 </a:solidFill>
               </a:rPr>
-              <a:t>Relatório metodológico, códigos e gráficos reprodutíveis</a:t>
-            </a:r>
-          </a:p>
-          <a:p xmlns:a="http://schemas.openxmlformats.org/drawingml/2006/main">
-            <a:pPr algn="ctr">
-              <a:defRPr sz="488" b="1">
-                <a:solidFill>
-                  <a:srgbClr val="153F59"/>
-                </a:solidFill>
-              </a:defRPr>
-            </a:pPr>
-            <a:r>
-              <a:rPr sz="488" b="1">
-                <a:solidFill>
-                  <a:srgbClr val="153F59"/>
-                </a:solidFill>
-              </a:rPr>
-              <a:t>https://ingodube.github.io/PNS_2013_2019/metodologia.html</a:t>
+              <a:t>Referências</a:t>
             </a:r>
           </a:p>
         </p:txBody>
       </p:sp>
       <p:sp>
         <p:nvSpPr>
-          <p:cNvPr id="65" name="references-box">
-            <a:extLst xmlns:a="http://schemas.openxmlformats.org/drawingml/2006/main">
-              <a:ext uri="{FF2B5EF4-FFF2-40B4-BE49-F238E27FC236}">
-                <a16:creationId xmlns:a16="http://schemas.microsoft.com/office/drawing/2014/main" id="{AE4FEA97-1C77-4697-A09D-A42F9475A17D}"/>
-              </a:ext>
-            </a:extLst>
-          </p:cNvPr>
-          <p:cNvSpPr>
-            <a:spLocks xmlns:a="http://schemas.openxmlformats.org/drawingml/2006/main" noGrp="1"/>
-          </p:cNvSpPr>
-          <p:nvPr/>
-        </p:nvSpPr>
-        <p:spPr>
-          <a:xfrm xmlns:a="http://schemas.openxmlformats.org/drawingml/2006/main">
-            <a:off x="323850" y="12382500"/>
-            <a:ext cx="8877300" cy="857250"/>
-          </a:xfrm>
-          <a:prstGeom xmlns:a="http://schemas.openxmlformats.org/drawingml/2006/main" prst="rect">
-            <a:avLst/>
-          </a:prstGeom>
-          <a:solidFill xmlns:a="http://schemas.openxmlformats.org/drawingml/2006/main">
-            <a:srgbClr val="FFFFFF"/>
-          </a:solidFill>
-          <a:ln xmlns:a="http://schemas.openxmlformats.org/drawingml/2006/main" w="9525">
-            <a:solidFill>
-              <a:srgbClr val="B7D0DF"/>
-            </a:solidFill>
-            <a:prstDash val="solid"/>
-          </a:ln>
-        </p:spPr>
-      </p:sp>
-      <p:sp>
-        <p:nvSpPr>
-          <p:cNvPr id="66" name="references-title">
-            <a:extLst xmlns:a="http://schemas.openxmlformats.org/drawingml/2006/main">
-              <a:ext uri="{FF2B5EF4-FFF2-40B4-BE49-F238E27FC236}">
-                <a16:creationId xmlns:a16="http://schemas.microsoft.com/office/drawing/2014/main" id="{02C8DBCB-5424-43B0-A633-AF77F6E2D70B}"/>
-              </a:ext>
-            </a:extLst>
-          </p:cNvPr>
-          <p:cNvSpPr>
-            <a:spLocks xmlns:a="http://schemas.openxmlformats.org/drawingml/2006/main" noGrp="1"/>
-          </p:cNvSpPr>
-          <p:nvPr/>
-        </p:nvSpPr>
-        <p:spPr>
-          <a:xfrm xmlns:a="http://schemas.openxmlformats.org/drawingml/2006/main">
-            <a:off x="400050" y="12449175"/>
-            <a:ext cx="8724900" cy="171450"/>
+          <p:cNvPr id="63" name="references-body">
+            <a:extLst xmlns:a="http://schemas.openxmlformats.org/drawingml/2006/main">
+              <a:ext uri="{FF2B5EF4-FFF2-40B4-BE49-F238E27FC236}">
+                <a16:creationId xmlns:a16="http://schemas.microsoft.com/office/drawing/2014/main" id="{958C0F67-8A77-4994-A6BB-00AF7CFC3B42}"/>
+              </a:ext>
+            </a:extLst>
+          </p:cNvPr>
+          <p:cNvSpPr>
+            <a:spLocks xmlns:a="http://schemas.openxmlformats.org/drawingml/2006/main" noGrp="1"/>
+          </p:cNvSpPr>
+          <p:nvPr/>
+        </p:nvSpPr>
+        <p:spPr>
+          <a:xfrm xmlns:a="http://schemas.openxmlformats.org/drawingml/2006/main">
+            <a:off x="400050" y="12649200"/>
+            <a:ext cx="8724900" cy="533400"/>
           </a:xfrm>
           <a:prstGeom xmlns:a="http://schemas.openxmlformats.org/drawingml/2006/main" prst="rect">
             <a:avLst/>
@@ -4162,56 +4063,6 @@
           <a:lstStyle xmlns:a="http://schemas.openxmlformats.org/drawingml/2006/main"/>
           <a:p xmlns:a="http://schemas.openxmlformats.org/drawingml/2006/main">
             <a:pPr algn="l">
-              <a:defRPr sz="825" b="1">
-                <a:solidFill>
-                  <a:srgbClr val="153F59"/>
-                </a:solidFill>
-              </a:defRPr>
-            </a:pPr>
-            <a:r>
-              <a:rPr sz="825" b="1">
-                <a:solidFill>
-                  <a:srgbClr val="153F59"/>
-                </a:solidFill>
-              </a:rPr>
-              <a:t>Referências</a:t>
-            </a:r>
-          </a:p>
-        </p:txBody>
-      </p:sp>
-      <p:sp>
-        <p:nvSpPr>
-          <p:cNvPr id="67" name="references-body">
-            <a:extLst xmlns:a="http://schemas.openxmlformats.org/drawingml/2006/main">
-              <a:ext uri="{FF2B5EF4-FFF2-40B4-BE49-F238E27FC236}">
-                <a16:creationId xmlns:a16="http://schemas.microsoft.com/office/drawing/2014/main" id="{E308CD4F-2D55-4FF9-89C3-2F0BEC1CC16B}"/>
-              </a:ext>
-            </a:extLst>
-          </p:cNvPr>
-          <p:cNvSpPr>
-            <a:spLocks xmlns:a="http://schemas.openxmlformats.org/drawingml/2006/main" noGrp="1"/>
-          </p:cNvSpPr>
-          <p:nvPr/>
-        </p:nvSpPr>
-        <p:spPr>
-          <a:xfrm xmlns:a="http://schemas.openxmlformats.org/drawingml/2006/main">
-            <a:off x="400050" y="12649200"/>
-            <a:ext cx="8724900" cy="533400"/>
-          </a:xfrm>
-          <a:prstGeom xmlns:a="http://schemas.openxmlformats.org/drawingml/2006/main" prst="rect">
-            <a:avLst/>
-          </a:prstGeom>
-          <a:noFill xmlns:a="http://schemas.openxmlformats.org/drawingml/2006/main"/>
-          <a:ln xmlns:a="http://schemas.openxmlformats.org/drawingml/2006/main" w="0">
-            <a:noFill/>
-            <a:prstDash val="solid"/>
-          </a:ln>
-        </p:spPr>
-        <p:txBody>
-          <a:bodyPr xmlns:a="http://schemas.openxmlformats.org/drawingml/2006/main"/>
-          <a:lstStyle xmlns:a="http://schemas.openxmlformats.org/drawingml/2006/main"/>
-          <a:p xmlns:a="http://schemas.openxmlformats.org/drawingml/2006/main">
-            <a:pPr algn="l">
               <a:defRPr sz="338" b="0">
                 <a:solidFill>
                   <a:srgbClr val="102536"/>
@@ -4436,7 +4287,7 @@
     </p:spTree>
     <p:extLst>
       <p:ext uri="{BB962C8B-B14F-4D97-AF65-F5344CB8AC3E}">
-        <p14:creationId xmlns:p14="http://schemas.microsoft.com/office/powerpoint/2010/main" val="2077675205"/>
+        <p14:creationId xmlns:p14="http://schemas.microsoft.com/office/powerpoint/2010/main" val="554309389"/>
       </p:ext>
     </p:extLst>
   </p:cSld>

--- a/outputs/posters/poster_pns_asma_morrison_pt.pptx
+++ b/outputs/posters/poster_pns_asma_morrison_pt.pptx
@@ -2,13 +2,13 @@
 <file path=ppt/presentation.xml><?xml version="1.0" encoding="utf-8"?>
 <p:presentation xmlns:p="http://schemas.openxmlformats.org/presentationml/2006/main">
   <p:sldMasterIdLst>
-    <p:sldMasterId xmlns:r="http://schemas.openxmlformats.org/officeDocument/2006/relationships" id="2147483648" r:id="Rbf3fb685d1cd4454"/>
+    <p:sldMasterId xmlns:r="http://schemas.openxmlformats.org/officeDocument/2006/relationships" id="2147483648" r:id="Rd67c15fadf18469c"/>
   </p:sldMasterIdLst>
   <p:notesMasterIdLst>
-    <p:notesMasterId xmlns:r="http://schemas.openxmlformats.org/officeDocument/2006/relationships" r:id="Rb525a6b6ceb347f4"/>
+    <p:notesMasterId xmlns:r="http://schemas.openxmlformats.org/officeDocument/2006/relationships" r:id="R19495faa1f644e02"/>
   </p:notesMasterIdLst>
   <p:sldIdLst>
-    <p:sldId xmlns:r="http://schemas.openxmlformats.org/officeDocument/2006/relationships" id="256" r:id="R3d2183504d684302"/>
+    <p:sldId xmlns:r="http://schemas.openxmlformats.org/officeDocument/2006/relationships" id="256" r:id="R04993fe3952e415d"/>
   </p:sldIdLst>
   <p:sldSz cx="9525000" cy="13468350"/>
   <p:notesSz cx="6858000" cy="9144000"/>
@@ -601,7 +601,7 @@
   </p:cSld>
   <p:clrMap bg1="lt1" tx1="dk1" bg2="lt2" tx2="dk2" accent1="accent1" accent2="accent2" accent3="accent3" accent4="accent4" accent5="accent5" accent6="accent6" hlink="hlink" folHlink="folHlink"/>
   <p:sldLayoutIdLst>
-    <p:sldLayoutId xmlns:r="http://schemas.openxmlformats.org/officeDocument/2006/relationships" id="2147483649" r:id="Rbaac6fc3688f4240"/>
+    <p:sldLayoutId xmlns:r="http://schemas.openxmlformats.org/officeDocument/2006/relationships" id="2147483649" r:id="Ra96016a9971f4d15"/>
   </p:sldLayoutIdLst>
   <p:txStyles>
     <p:titleStyle>
@@ -1149,14 +1149,14 @@
       </p:grpSpPr>
       <p:pic>
         <p:nvPicPr>
-          <p:cNvPr id="64" name=""/>
+          <p:cNvPr id="65" name=""/>
           <p:cNvPicPr>
             <a:picLocks xmlns:a="http://schemas.openxmlformats.org/drawingml/2006/main" noChangeAspect="1"/>
           </p:cNvPicPr>
           <p:nvPr/>
         </p:nvPicPr>
         <p:blipFill>
-          <a:blip xmlns:r="http://schemas.openxmlformats.org/officeDocument/2006/relationships" xmlns:a="http://schemas.openxmlformats.org/drawingml/2006/main" r:embed="R26dd5c8ffd804f7e"/>
+          <a:blip xmlns:r="http://schemas.openxmlformats.org/officeDocument/2006/relationships" xmlns:a="http://schemas.openxmlformats.org/drawingml/2006/main" r:embed="Rf008441a35ef40d0"/>
           <a:srcRect xmlns:a="http://schemas.openxmlformats.org/drawingml/2006/main" l="0" t="38622" r="0" b="38622"/>
           <a:stretch xmlns:a="http://schemas.openxmlformats.org/drawingml/2006/main">
             <a:fillRect l="0" t="0" r="0" b="0"/>
@@ -1166,28 +1166,6 @@
           <a:xfrm xmlns:a="http://schemas.openxmlformats.org/drawingml/2006/main">
             <a:off x="0" y="0"/>
             <a:ext cx="9525000" cy="1219200"/>
-          </a:xfrm>
-          <a:prstGeom xmlns:a="http://schemas.openxmlformats.org/drawingml/2006/main" prst="rect">
-            <a:avLst/>
-          </a:prstGeom>
-        </p:spPr>
-      </p:pic>
-      <p:pic>
-        <p:nvPicPr>
-          <p:cNvPr id="65" name=""/>
-          <p:cNvPicPr>
-            <a:picLocks xmlns:a="http://schemas.openxmlformats.org/drawingml/2006/main" noChangeAspect="1"/>
-          </p:cNvPicPr>
-          <p:nvPr/>
-        </p:nvPicPr>
-        <p:blipFill>
-          <a:blip xmlns:r="http://schemas.openxmlformats.org/officeDocument/2006/relationships" xmlns:a="http://schemas.openxmlformats.org/drawingml/2006/main" r:embed="R0abb765df5874ceb"/>
-          <a:stretch xmlns:a="http://schemas.openxmlformats.org/drawingml/2006/main"/>
-        </p:blipFill>
-        <p:spPr>
-          <a:xfrm xmlns:a="http://schemas.openxmlformats.org/drawingml/2006/main">
-            <a:off x="323850" y="265374"/>
-            <a:ext cx="2952750" cy="612252"/>
           </a:xfrm>
           <a:prstGeom xmlns:a="http://schemas.openxmlformats.org/drawingml/2006/main" prst="rect">
             <a:avLst/>
@@ -1203,11 +1181,33 @@
           <p:nvPr/>
         </p:nvPicPr>
         <p:blipFill>
-          <a:blip xmlns:r="http://schemas.openxmlformats.org/officeDocument/2006/relationships" xmlns:a="http://schemas.openxmlformats.org/drawingml/2006/main" r:embed="Re70818fef75d420d"/>
+          <a:blip xmlns:r="http://schemas.openxmlformats.org/officeDocument/2006/relationships" xmlns:a="http://schemas.openxmlformats.org/drawingml/2006/main" r:embed="R4da4a906672f4edb"/>
           <a:stretch xmlns:a="http://schemas.openxmlformats.org/drawingml/2006/main"/>
         </p:blipFill>
         <p:spPr>
           <a:xfrm xmlns:a="http://schemas.openxmlformats.org/drawingml/2006/main">
+            <a:off x="323850" y="265374"/>
+            <a:ext cx="2952750" cy="612252"/>
+          </a:xfrm>
+          <a:prstGeom xmlns:a="http://schemas.openxmlformats.org/drawingml/2006/main" prst="rect">
+            <a:avLst/>
+          </a:prstGeom>
+        </p:spPr>
+      </p:pic>
+      <p:pic>
+        <p:nvPicPr>
+          <p:cNvPr id="67" name=""/>
+          <p:cNvPicPr>
+            <a:picLocks xmlns:a="http://schemas.openxmlformats.org/drawingml/2006/main" noChangeAspect="1"/>
+          </p:cNvPicPr>
+          <p:nvPr/>
+        </p:nvPicPr>
+        <p:blipFill>
+          <a:blip xmlns:r="http://schemas.openxmlformats.org/officeDocument/2006/relationships" xmlns:a="http://schemas.openxmlformats.org/drawingml/2006/main" r:embed="Rce79449f1c164d0c"/>
+          <a:stretch xmlns:a="http://schemas.openxmlformats.org/drawingml/2006/main"/>
+        </p:blipFill>
+        <p:spPr>
+          <a:xfrm xmlns:a="http://schemas.openxmlformats.org/drawingml/2006/main">
             <a:off x="3905250" y="425056"/>
             <a:ext cx="4953000" cy="311937"/>
           </a:xfrm>
@@ -1221,7 +1221,7 @@
           <p:cNvPr id="4" name="morrison-title">
             <a:extLst xmlns:a="http://schemas.openxmlformats.org/drawingml/2006/main">
               <a:ext uri="{FF2B5EF4-FFF2-40B4-BE49-F238E27FC236}">
-                <a16:creationId xmlns:a16="http://schemas.microsoft.com/office/drawing/2014/main" id="{9441DF90-A097-4620-BC2D-3B6D5D292B57}"/>
+                <a16:creationId xmlns:a16="http://schemas.microsoft.com/office/drawing/2014/main" id="{32412488-2560-4C08-800D-6F1AAB2E0629}"/>
               </a:ext>
             </a:extLst>
           </p:cNvPr>
@@ -1271,7 +1271,7 @@
           <p:cNvPr id="5" name="morrison-authors">
             <a:extLst xmlns:a="http://schemas.openxmlformats.org/drawingml/2006/main">
               <a:ext uri="{FF2B5EF4-FFF2-40B4-BE49-F238E27FC236}">
-                <a16:creationId xmlns:a16="http://schemas.microsoft.com/office/drawing/2014/main" id="{1555362C-47D7-4504-9272-CF8E395C22AD}"/>
+                <a16:creationId xmlns:a16="http://schemas.microsoft.com/office/drawing/2014/main" id="{75E24BAD-03F8-4BAA-98E0-0405D224B966}"/>
               </a:ext>
             </a:extLst>
           </p:cNvPr>
@@ -1321,7 +1321,7 @@
           <p:cNvPr id="6" name="central-message">
             <a:extLst xmlns:a="http://schemas.openxmlformats.org/drawingml/2006/main">
               <a:ext uri="{FF2B5EF4-FFF2-40B4-BE49-F238E27FC236}">
-                <a16:creationId xmlns:a16="http://schemas.microsoft.com/office/drawing/2014/main" id="{540673ED-B7F8-4A84-8861-A97EBAB15DA9}"/>
+                <a16:creationId xmlns:a16="http://schemas.microsoft.com/office/drawing/2014/main" id="{AD2EBF14-013F-453D-971D-3746009FCA92}"/>
               </a:ext>
             </a:extLst>
           </p:cNvPr>
@@ -1375,7 +1375,7 @@
           <p:cNvPr id="7" name="1-Método em uma linha-box">
             <a:extLst xmlns:a="http://schemas.openxmlformats.org/drawingml/2006/main">
               <a:ext uri="{FF2B5EF4-FFF2-40B4-BE49-F238E27FC236}">
-                <a16:creationId xmlns:a16="http://schemas.microsoft.com/office/drawing/2014/main" id="{52A3D09C-C98B-4D8E-9752-BCAF30D33A78}"/>
+                <a16:creationId xmlns:a16="http://schemas.microsoft.com/office/drawing/2014/main" id="{42DDD954-B687-41E9-A0B5-56F12A2CD63C}"/>
               </a:ext>
             </a:extLst>
           </p:cNvPr>
@@ -1408,7 +1408,7 @@
           <p:cNvPr id="8" name="1-Método em uma linha-head">
             <a:extLst xmlns:a="http://schemas.openxmlformats.org/drawingml/2006/main">
               <a:ext uri="{FF2B5EF4-FFF2-40B4-BE49-F238E27FC236}">
-                <a16:creationId xmlns:a16="http://schemas.microsoft.com/office/drawing/2014/main" id="{11489C3A-9ED9-4860-B064-783267CBEBBC}"/>
+                <a16:creationId xmlns:a16="http://schemas.microsoft.com/office/drawing/2014/main" id="{22EAB5CA-3E41-4E0C-9597-24D47151F2B8}"/>
               </a:ext>
             </a:extLst>
           </p:cNvPr>
@@ -1441,7 +1441,7 @@
           <p:cNvPr id="9" name="1-Método em uma linha-title">
             <a:extLst xmlns:a="http://schemas.openxmlformats.org/drawingml/2006/main">
               <a:ext uri="{FF2B5EF4-FFF2-40B4-BE49-F238E27FC236}">
-                <a16:creationId xmlns:a16="http://schemas.microsoft.com/office/drawing/2014/main" id="{F2864B81-8A1A-46C0-91CE-5EF7C3C9B99D}"/>
+                <a16:creationId xmlns:a16="http://schemas.microsoft.com/office/drawing/2014/main" id="{5B65396C-09E9-4FE4-A6A7-6F5CA2452B50}"/>
               </a:ext>
             </a:extLst>
           </p:cNvPr>
@@ -1491,7 +1491,7 @@
           <p:cNvPr id="10" name="1-Método em uma linha-body">
             <a:extLst xmlns:a="http://schemas.openxmlformats.org/drawingml/2006/main">
               <a:ext uri="{FF2B5EF4-FFF2-40B4-BE49-F238E27FC236}">
-                <a16:creationId xmlns:a16="http://schemas.microsoft.com/office/drawing/2014/main" id="{A5AA4407-5F42-4749-8346-1FB1FA919584}"/>
+                <a16:creationId xmlns:a16="http://schemas.microsoft.com/office/drawing/2014/main" id="{E8EC5A5B-BD44-4A4B-A691-1F9316B1FC73}"/>
               </a:ext>
             </a:extLst>
           </p:cNvPr>
@@ -1592,7 +1592,7 @@
           <p:cNvPr id="11" name="morrison-formula-box">
             <a:extLst xmlns:a="http://schemas.openxmlformats.org/drawingml/2006/main">
               <a:ext uri="{FF2B5EF4-FFF2-40B4-BE49-F238E27FC236}">
-                <a16:creationId xmlns:a16="http://schemas.microsoft.com/office/drawing/2014/main" id="{A49F36EF-46A7-4D24-9773-C758729E4AA1}"/>
+                <a16:creationId xmlns:a16="http://schemas.microsoft.com/office/drawing/2014/main" id="{0C66F9B3-7CFA-43B2-A123-D225082CA08B}"/>
               </a:ext>
             </a:extLst>
           </p:cNvPr>
@@ -1625,7 +1625,7 @@
           <p:cNvPr id="12" name="morrison-formula-title">
             <a:extLst xmlns:a="http://schemas.openxmlformats.org/drawingml/2006/main">
               <a:ext uri="{FF2B5EF4-FFF2-40B4-BE49-F238E27FC236}">
-                <a16:creationId xmlns:a16="http://schemas.microsoft.com/office/drawing/2014/main" id="{0460A8FF-3C68-424B-95C4-9460EBA56E22}"/>
+                <a16:creationId xmlns:a16="http://schemas.microsoft.com/office/drawing/2014/main" id="{47409A4D-B24F-42CF-AB15-FF74120642F1}"/>
               </a:ext>
             </a:extLst>
           </p:cNvPr>
@@ -1675,7 +1675,7 @@
           <p:cNvPr id="13" name="morrison-formula">
             <a:extLst xmlns:a="http://schemas.openxmlformats.org/drawingml/2006/main">
               <a:ext uri="{FF2B5EF4-FFF2-40B4-BE49-F238E27FC236}">
-                <a16:creationId xmlns:a16="http://schemas.microsoft.com/office/drawing/2014/main" id="{98087197-2B3B-4A8C-87BD-A7A4144B110C}"/>
+                <a16:creationId xmlns:a16="http://schemas.microsoft.com/office/drawing/2014/main" id="{36AA45D8-4B6A-4CAF-B23A-A1B81C9706CB}"/>
               </a:ext>
             </a:extLst>
           </p:cNvPr>
@@ -1793,7 +1793,7 @@
           <p:cNvPr id="14" name="2-Dados e denominadores-box">
             <a:extLst xmlns:a="http://schemas.openxmlformats.org/drawingml/2006/main">
               <a:ext uri="{FF2B5EF4-FFF2-40B4-BE49-F238E27FC236}">
-                <a16:creationId xmlns:a16="http://schemas.microsoft.com/office/drawing/2014/main" id="{80D467F1-5033-4017-BD8A-0C01CFF2C357}"/>
+                <a16:creationId xmlns:a16="http://schemas.microsoft.com/office/drawing/2014/main" id="{09AEEEB0-C737-4587-A5D0-126AF586631F}"/>
               </a:ext>
             </a:extLst>
           </p:cNvPr>
@@ -1826,7 +1826,7 @@
           <p:cNvPr id="15" name="2-Dados e denominadores-head">
             <a:extLst xmlns:a="http://schemas.openxmlformats.org/drawingml/2006/main">
               <a:ext uri="{FF2B5EF4-FFF2-40B4-BE49-F238E27FC236}">
-                <a16:creationId xmlns:a16="http://schemas.microsoft.com/office/drawing/2014/main" id="{6CB70825-F533-4491-BC85-695621D7F281}"/>
+                <a16:creationId xmlns:a16="http://schemas.microsoft.com/office/drawing/2014/main" id="{DE458DE7-1A7A-4CEC-8A90-769264EB96C8}"/>
               </a:ext>
             </a:extLst>
           </p:cNvPr>
@@ -1859,7 +1859,7 @@
           <p:cNvPr id="16" name="2-Dados e denominadores-title">
             <a:extLst xmlns:a="http://schemas.openxmlformats.org/drawingml/2006/main">
               <a:ext uri="{FF2B5EF4-FFF2-40B4-BE49-F238E27FC236}">
-                <a16:creationId xmlns:a16="http://schemas.microsoft.com/office/drawing/2014/main" id="{9CF570CD-D96F-46EA-B891-57FA257AF290}"/>
+                <a16:creationId xmlns:a16="http://schemas.microsoft.com/office/drawing/2014/main" id="{475A8BA2-1C30-492B-8286-E2F763685EFB}"/>
               </a:ext>
             </a:extLst>
           </p:cNvPr>
@@ -1909,7 +1909,7 @@
           <p:cNvPr id="17" name="2-Dados e denominadores-body">
             <a:extLst xmlns:a="http://schemas.openxmlformats.org/drawingml/2006/main">
               <a:ext uri="{FF2B5EF4-FFF2-40B4-BE49-F238E27FC236}">
-                <a16:creationId xmlns:a16="http://schemas.microsoft.com/office/drawing/2014/main" id="{E3A7225A-8504-40AD-A3F1-DDD118836B04}"/>
+                <a16:creationId xmlns:a16="http://schemas.microsoft.com/office/drawing/2014/main" id="{B5C08750-52B8-48BD-B475-B45FC7A9D151}"/>
               </a:ext>
             </a:extLst>
           </p:cNvPr>
@@ -1993,7 +1993,7 @@
           <p:cNvPr id="18" name="3-Por que IC beta?-box">
             <a:extLst xmlns:a="http://schemas.openxmlformats.org/drawingml/2006/main">
               <a:ext uri="{FF2B5EF4-FFF2-40B4-BE49-F238E27FC236}">
-                <a16:creationId xmlns:a16="http://schemas.microsoft.com/office/drawing/2014/main" id="{B8BECAC0-6895-4EFF-BB9B-A01E24B0602B}"/>
+                <a16:creationId xmlns:a16="http://schemas.microsoft.com/office/drawing/2014/main" id="{68630D47-C726-444C-A568-F8233E07E682}"/>
               </a:ext>
             </a:extLst>
           </p:cNvPr>
@@ -2026,7 +2026,7 @@
           <p:cNvPr id="19" name="3-Por que IC beta?-head">
             <a:extLst xmlns:a="http://schemas.openxmlformats.org/drawingml/2006/main">
               <a:ext uri="{FF2B5EF4-FFF2-40B4-BE49-F238E27FC236}">
-                <a16:creationId xmlns:a16="http://schemas.microsoft.com/office/drawing/2014/main" id="{580D8C64-3439-4F98-AB79-8FC0BA554173}"/>
+                <a16:creationId xmlns:a16="http://schemas.microsoft.com/office/drawing/2014/main" id="{F397397C-BCFF-4423-8CFE-8A260968245F}"/>
               </a:ext>
             </a:extLst>
           </p:cNvPr>
@@ -2059,7 +2059,7 @@
           <p:cNvPr id="20" name="3-Por que IC beta?-title">
             <a:extLst xmlns:a="http://schemas.openxmlformats.org/drawingml/2006/main">
               <a:ext uri="{FF2B5EF4-FFF2-40B4-BE49-F238E27FC236}">
-                <a16:creationId xmlns:a16="http://schemas.microsoft.com/office/drawing/2014/main" id="{4BACF1D6-9AA7-48E9-8F46-AEB1CD6190F7}"/>
+                <a16:creationId xmlns:a16="http://schemas.microsoft.com/office/drawing/2014/main" id="{2BDADD10-4F96-4A10-A089-CA662C093F50}"/>
               </a:ext>
             </a:extLst>
           </p:cNvPr>
@@ -2109,7 +2109,7 @@
           <p:cNvPr id="21" name="3-Por que IC beta?-body">
             <a:extLst xmlns:a="http://schemas.openxmlformats.org/drawingml/2006/main">
               <a:ext uri="{FF2B5EF4-FFF2-40B4-BE49-F238E27FC236}">
-                <a16:creationId xmlns:a16="http://schemas.microsoft.com/office/drawing/2014/main" id="{2499C282-C286-45F7-883A-B3B94EF0787F}"/>
+                <a16:creationId xmlns:a16="http://schemas.microsoft.com/office/drawing/2014/main" id="{8C58BC9A-2AEE-4B6D-B892-410B026943F6}"/>
               </a:ext>
             </a:extLst>
           </p:cNvPr>
@@ -2193,7 +2193,7 @@
           <p:cNvPr id="22" name="4-ETL e interoperabilidade-box">
             <a:extLst xmlns:a="http://schemas.openxmlformats.org/drawingml/2006/main">
               <a:ext uri="{FF2B5EF4-FFF2-40B4-BE49-F238E27FC236}">
-                <a16:creationId xmlns:a16="http://schemas.microsoft.com/office/drawing/2014/main" id="{50736B1D-7672-47F5-A30A-88728B84D658}"/>
+                <a16:creationId xmlns:a16="http://schemas.microsoft.com/office/drawing/2014/main" id="{33B14D77-6B97-4340-882E-2F244F847101}"/>
               </a:ext>
             </a:extLst>
           </p:cNvPr>
@@ -2226,7 +2226,7 @@
           <p:cNvPr id="23" name="4-ETL e interoperabilidade-head">
             <a:extLst xmlns:a="http://schemas.openxmlformats.org/drawingml/2006/main">
               <a:ext uri="{FF2B5EF4-FFF2-40B4-BE49-F238E27FC236}">
-                <a16:creationId xmlns:a16="http://schemas.microsoft.com/office/drawing/2014/main" id="{BC6014E6-49AC-48FB-9A59-A4990A349D57}"/>
+                <a16:creationId xmlns:a16="http://schemas.microsoft.com/office/drawing/2014/main" id="{41724AC4-6FEE-4188-8314-F558C06FAA59}"/>
               </a:ext>
             </a:extLst>
           </p:cNvPr>
@@ -2259,7 +2259,7 @@
           <p:cNvPr id="24" name="4-ETL e interoperabilidade-title">
             <a:extLst xmlns:a="http://schemas.openxmlformats.org/drawingml/2006/main">
               <a:ext uri="{FF2B5EF4-FFF2-40B4-BE49-F238E27FC236}">
-                <a16:creationId xmlns:a16="http://schemas.microsoft.com/office/drawing/2014/main" id="{66F955CB-43BE-4F85-8B3E-35A288823E58}"/>
+                <a16:creationId xmlns:a16="http://schemas.microsoft.com/office/drawing/2014/main" id="{CD3BAA3C-2761-4754-A1A7-CA1B848180B7}"/>
               </a:ext>
             </a:extLst>
           </p:cNvPr>
@@ -2309,7 +2309,7 @@
           <p:cNvPr id="25" name="4-ETL e interoperabilidade-body">
             <a:extLst xmlns:a="http://schemas.openxmlformats.org/drawingml/2006/main">
               <a:ext uri="{FF2B5EF4-FFF2-40B4-BE49-F238E27FC236}">
-                <a16:creationId xmlns:a16="http://schemas.microsoft.com/office/drawing/2014/main" id="{81838117-A2AF-4F4F-B58B-6011C6D34A1C}"/>
+                <a16:creationId xmlns:a16="http://schemas.microsoft.com/office/drawing/2014/main" id="{558A119D-7A43-4074-AAC5-E9F383EB105E}"/>
               </a:ext>
             </a:extLst>
           </p:cNvPr>
@@ -2393,7 +2393,7 @@
           <p:cNvPr id="26" name="m-prev-metric">
             <a:extLst xmlns:a="http://schemas.openxmlformats.org/drawingml/2006/main">
               <a:ext uri="{FF2B5EF4-FFF2-40B4-BE49-F238E27FC236}">
-                <a16:creationId xmlns:a16="http://schemas.microsoft.com/office/drawing/2014/main" id="{C9EE11AB-06E6-456C-8B89-98F779242E46}"/>
+                <a16:creationId xmlns:a16="http://schemas.microsoft.com/office/drawing/2014/main" id="{6F651451-85D7-403C-A219-F541DC9764C7}"/>
               </a:ext>
             </a:extLst>
           </p:cNvPr>
@@ -2426,7 +2426,7 @@
           <p:cNvPr id="27" name="m-prev-metric-title">
             <a:extLst xmlns:a="http://schemas.openxmlformats.org/drawingml/2006/main">
               <a:ext uri="{FF2B5EF4-FFF2-40B4-BE49-F238E27FC236}">
-                <a16:creationId xmlns:a16="http://schemas.microsoft.com/office/drawing/2014/main" id="{AB69CB72-34B8-428E-9B52-9E5D9D25D741}"/>
+                <a16:creationId xmlns:a16="http://schemas.microsoft.com/office/drawing/2014/main" id="{5BF18A97-A241-44D9-BA31-9B922A05D88B}"/>
               </a:ext>
             </a:extLst>
           </p:cNvPr>
@@ -2476,7 +2476,7 @@
           <p:cNvPr id="28" name="m-prev-metric-value">
             <a:extLst xmlns:a="http://schemas.openxmlformats.org/drawingml/2006/main">
               <a:ext uri="{FF2B5EF4-FFF2-40B4-BE49-F238E27FC236}">
-                <a16:creationId xmlns:a16="http://schemas.microsoft.com/office/drawing/2014/main" id="{48D052A4-D34C-4349-A88A-BD5172067D60}"/>
+                <a16:creationId xmlns:a16="http://schemas.microsoft.com/office/drawing/2014/main" id="{95113B0D-8003-40F7-AD00-E7CBDA9A22F0}"/>
               </a:ext>
             </a:extLst>
           </p:cNvPr>
@@ -2526,7 +2526,7 @@
           <p:cNvPr id="29" name="m-prev-metric-note">
             <a:extLst xmlns:a="http://schemas.openxmlformats.org/drawingml/2006/main">
               <a:ext uri="{FF2B5EF4-FFF2-40B4-BE49-F238E27FC236}">
-                <a16:creationId xmlns:a16="http://schemas.microsoft.com/office/drawing/2014/main" id="{63840509-B0D4-40FA-9958-251AE3DF094D}"/>
+                <a16:creationId xmlns:a16="http://schemas.microsoft.com/office/drawing/2014/main" id="{502821AF-76B9-4B52-AAF8-BEB580C56B47}"/>
               </a:ext>
             </a:extLst>
           </p:cNvPr>
@@ -2576,7 +2576,7 @@
           <p:cNvPr id="30" name="m-crisis-metric">
             <a:extLst xmlns:a="http://schemas.openxmlformats.org/drawingml/2006/main">
               <a:ext uri="{FF2B5EF4-FFF2-40B4-BE49-F238E27FC236}">
-                <a16:creationId xmlns:a16="http://schemas.microsoft.com/office/drawing/2014/main" id="{8EE599AE-49CD-4C39-A3CD-6A4383EFFEA5}"/>
+                <a16:creationId xmlns:a16="http://schemas.microsoft.com/office/drawing/2014/main" id="{0E6B6631-D983-471C-844F-52E02B6F88E5}"/>
               </a:ext>
             </a:extLst>
           </p:cNvPr>
@@ -2609,7 +2609,7 @@
           <p:cNvPr id="31" name="m-crisis-metric-title">
             <a:extLst xmlns:a="http://schemas.openxmlformats.org/drawingml/2006/main">
               <a:ext uri="{FF2B5EF4-FFF2-40B4-BE49-F238E27FC236}">
-                <a16:creationId xmlns:a16="http://schemas.microsoft.com/office/drawing/2014/main" id="{9A31C5AC-DE5E-4D79-8BA5-7010A95362B1}"/>
+                <a16:creationId xmlns:a16="http://schemas.microsoft.com/office/drawing/2014/main" id="{79DFD60D-680D-4AC8-AD28-79E21879EE6D}"/>
               </a:ext>
             </a:extLst>
           </p:cNvPr>
@@ -2659,7 +2659,7 @@
           <p:cNvPr id="32" name="m-crisis-metric-value">
             <a:extLst xmlns:a="http://schemas.openxmlformats.org/drawingml/2006/main">
               <a:ext uri="{FF2B5EF4-FFF2-40B4-BE49-F238E27FC236}">
-                <a16:creationId xmlns:a16="http://schemas.microsoft.com/office/drawing/2014/main" id="{EF913C78-B6D2-4749-93C5-FF65899DF0A7}"/>
+                <a16:creationId xmlns:a16="http://schemas.microsoft.com/office/drawing/2014/main" id="{7C4DBECA-A847-4042-87E8-24BD7F87A8CE}"/>
               </a:ext>
             </a:extLst>
           </p:cNvPr>
@@ -2709,7 +2709,7 @@
           <p:cNvPr id="33" name="m-crisis-metric-note">
             <a:extLst xmlns:a="http://schemas.openxmlformats.org/drawingml/2006/main">
               <a:ext uri="{FF2B5EF4-FFF2-40B4-BE49-F238E27FC236}">
-                <a16:creationId xmlns:a16="http://schemas.microsoft.com/office/drawing/2014/main" id="{8BB92359-26F8-4884-9C4C-A6A9E60AE9A0}"/>
+                <a16:creationId xmlns:a16="http://schemas.microsoft.com/office/drawing/2014/main" id="{F2ADFB1C-9543-4F8A-8F89-56AB2F3459CA}"/>
               </a:ext>
             </a:extLst>
           </p:cNvPr>
@@ -2759,7 +2759,7 @@
           <p:cNvPr id="34" name="m-meds-metric">
             <a:extLst xmlns:a="http://schemas.openxmlformats.org/drawingml/2006/main">
               <a:ext uri="{FF2B5EF4-FFF2-40B4-BE49-F238E27FC236}">
-                <a16:creationId xmlns:a16="http://schemas.microsoft.com/office/drawing/2014/main" id="{DE559EFC-5B15-4D15-8D56-A380FC6C8697}"/>
+                <a16:creationId xmlns:a16="http://schemas.microsoft.com/office/drawing/2014/main" id="{D1E76BCB-28D5-447F-B78D-8C408AF8B7AD}"/>
               </a:ext>
             </a:extLst>
           </p:cNvPr>
@@ -2792,7 +2792,7 @@
           <p:cNvPr id="35" name="m-meds-metric-title">
             <a:extLst xmlns:a="http://schemas.openxmlformats.org/drawingml/2006/main">
               <a:ext uri="{FF2B5EF4-FFF2-40B4-BE49-F238E27FC236}">
-                <a16:creationId xmlns:a16="http://schemas.microsoft.com/office/drawing/2014/main" id="{20CC1C73-B0C4-4713-8697-2F11DB940B63}"/>
+                <a16:creationId xmlns:a16="http://schemas.microsoft.com/office/drawing/2014/main" id="{C0F5A7F1-F92A-41CE-B533-17C8DBE01F79}"/>
               </a:ext>
             </a:extLst>
           </p:cNvPr>
@@ -2842,7 +2842,7 @@
           <p:cNvPr id="36" name="m-meds-metric-value">
             <a:extLst xmlns:a="http://schemas.openxmlformats.org/drawingml/2006/main">
               <a:ext uri="{FF2B5EF4-FFF2-40B4-BE49-F238E27FC236}">
-                <a16:creationId xmlns:a16="http://schemas.microsoft.com/office/drawing/2014/main" id="{78A5C9F8-C8A0-433B-A319-5167ED8AFD3E}"/>
+                <a16:creationId xmlns:a16="http://schemas.microsoft.com/office/drawing/2014/main" id="{B23F6705-E614-4425-BECB-AD688E698254}"/>
               </a:ext>
             </a:extLst>
           </p:cNvPr>
@@ -2892,7 +2892,7 @@
           <p:cNvPr id="37" name="m-meds-metric-note">
             <a:extLst xmlns:a="http://schemas.openxmlformats.org/drawingml/2006/main">
               <a:ext uri="{FF2B5EF4-FFF2-40B4-BE49-F238E27FC236}">
-                <a16:creationId xmlns:a16="http://schemas.microsoft.com/office/drawing/2014/main" id="{D6EB5AC7-F265-4AEB-A6F7-730A346A501C}"/>
+                <a16:creationId xmlns:a16="http://schemas.microsoft.com/office/drawing/2014/main" id="{4FD3A8A4-3CBB-4971-B178-D45BB019F913}"/>
               </a:ext>
             </a:extLst>
           </p:cNvPr>
@@ -2942,7 +2942,7 @@
           <p:cNvPr id="38" name="m-chart-prev-caption">
             <a:extLst xmlns:a="http://schemas.openxmlformats.org/drawingml/2006/main">
               <a:ext uri="{FF2B5EF4-FFF2-40B4-BE49-F238E27FC236}">
-                <a16:creationId xmlns:a16="http://schemas.microsoft.com/office/drawing/2014/main" id="{3E1D3B75-0C82-4188-8B3A-BB867C2657A1}"/>
+                <a16:creationId xmlns:a16="http://schemas.microsoft.com/office/drawing/2014/main" id="{4C068FBF-E996-4D40-B566-3494E8F4D9BC}"/>
               </a:ext>
             </a:extLst>
           </p:cNvPr>
@@ -2992,7 +2992,7 @@
           <p:cNvPr id="39" name="m-chart-prev-frame">
             <a:extLst xmlns:a="http://schemas.openxmlformats.org/drawingml/2006/main">
               <a:ext uri="{FF2B5EF4-FFF2-40B4-BE49-F238E27FC236}">
-                <a16:creationId xmlns:a16="http://schemas.microsoft.com/office/drawing/2014/main" id="{8D4A67F3-92C1-4503-860E-7B02DF6AB102}"/>
+                <a16:creationId xmlns:a16="http://schemas.microsoft.com/office/drawing/2014/main" id="{B5478C6F-245E-4EC0-B6A1-E7FF87AB7B74}"/>
               </a:ext>
             </a:extLst>
           </p:cNvPr>
@@ -3022,14 +3022,14 @@
       </p:sp>
       <p:pic>
         <p:nvPicPr>
-          <p:cNvPr id="103" name=""/>
+          <p:cNvPr id="104" name=""/>
           <p:cNvPicPr>
             <a:picLocks xmlns:a="http://schemas.openxmlformats.org/drawingml/2006/main" noChangeAspect="1"/>
           </p:cNvPicPr>
           <p:nvPr/>
         </p:nvPicPr>
         <p:blipFill>
-          <a:blip xmlns:r="http://schemas.openxmlformats.org/officeDocument/2006/relationships" xmlns:a="http://schemas.openxmlformats.org/drawingml/2006/main" r:embed="R2215cd21dbfb4cc4"/>
+          <a:blip xmlns:r="http://schemas.openxmlformats.org/officeDocument/2006/relationships" xmlns:a="http://schemas.openxmlformats.org/drawingml/2006/main" r:embed="R6a4e2bac973b4711"/>
           <a:stretch xmlns:a="http://schemas.openxmlformats.org/drawingml/2006/main"/>
         </p:blipFill>
         <p:spPr>
@@ -3047,7 +3047,7 @@
           <p:cNvPr id="41" name="m-chart-meds-caption">
             <a:extLst xmlns:a="http://schemas.openxmlformats.org/drawingml/2006/main">
               <a:ext uri="{FF2B5EF4-FFF2-40B4-BE49-F238E27FC236}">
-                <a16:creationId xmlns:a16="http://schemas.microsoft.com/office/drawing/2014/main" id="{06401415-694D-4DA2-A5F4-6657CE5AB8FE}"/>
+                <a16:creationId xmlns:a16="http://schemas.microsoft.com/office/drawing/2014/main" id="{3A796118-72EC-4B96-A1B7-EB2657168EA6}"/>
               </a:ext>
             </a:extLst>
           </p:cNvPr>
@@ -3097,7 +3097,7 @@
           <p:cNvPr id="42" name="m-chart-meds-frame">
             <a:extLst xmlns:a="http://schemas.openxmlformats.org/drawingml/2006/main">
               <a:ext uri="{FF2B5EF4-FFF2-40B4-BE49-F238E27FC236}">
-                <a16:creationId xmlns:a16="http://schemas.microsoft.com/office/drawing/2014/main" id="{A6190C4B-D398-458A-AC22-B02C56380CCD}"/>
+                <a16:creationId xmlns:a16="http://schemas.microsoft.com/office/drawing/2014/main" id="{8CD01CFD-71A4-4C10-A012-67593321972B}"/>
               </a:ext>
             </a:extLst>
           </p:cNvPr>
@@ -3127,14 +3127,14 @@
       </p:sp>
       <p:pic>
         <p:nvPicPr>
-          <p:cNvPr id="106" name=""/>
+          <p:cNvPr id="107" name=""/>
           <p:cNvPicPr>
             <a:picLocks xmlns:a="http://schemas.openxmlformats.org/drawingml/2006/main" noChangeAspect="1"/>
           </p:cNvPicPr>
           <p:nvPr/>
         </p:nvPicPr>
         <p:blipFill>
-          <a:blip xmlns:r="http://schemas.openxmlformats.org/officeDocument/2006/relationships" xmlns:a="http://schemas.openxmlformats.org/drawingml/2006/main" r:embed="R417141b4268540bb"/>
+          <a:blip xmlns:r="http://schemas.openxmlformats.org/officeDocument/2006/relationships" xmlns:a="http://schemas.openxmlformats.org/drawingml/2006/main" r:embed="R1e0109a757fd4a98"/>
           <a:stretch xmlns:a="http://schemas.openxmlformats.org/drawingml/2006/main"/>
         </p:blipFill>
         <p:spPr>
@@ -3152,7 +3152,7 @@
           <p:cNvPr id="44" name="m-chart-smoke-caption">
             <a:extLst xmlns:a="http://schemas.openxmlformats.org/drawingml/2006/main">
               <a:ext uri="{FF2B5EF4-FFF2-40B4-BE49-F238E27FC236}">
-                <a16:creationId xmlns:a16="http://schemas.microsoft.com/office/drawing/2014/main" id="{FD997C7D-C70D-4EFA-BD58-A39C1F2150BB}"/>
+                <a16:creationId xmlns:a16="http://schemas.microsoft.com/office/drawing/2014/main" id="{962DC80E-E360-4708-B26C-3FE03E4E599F}"/>
               </a:ext>
             </a:extLst>
           </p:cNvPr>
@@ -3202,7 +3202,7 @@
           <p:cNvPr id="45" name="m-chart-smoke-frame">
             <a:extLst xmlns:a="http://schemas.openxmlformats.org/drawingml/2006/main">
               <a:ext uri="{FF2B5EF4-FFF2-40B4-BE49-F238E27FC236}">
-                <a16:creationId xmlns:a16="http://schemas.microsoft.com/office/drawing/2014/main" id="{273E4482-FD54-4C1F-9819-9F449736CF54}"/>
+                <a16:creationId xmlns:a16="http://schemas.microsoft.com/office/drawing/2014/main" id="{334D733F-4C39-41DA-ACC5-13DCB55A5160}"/>
               </a:ext>
             </a:extLst>
           </p:cNvPr>
@@ -3232,14 +3232,14 @@
       </p:sp>
       <p:pic>
         <p:nvPicPr>
-          <p:cNvPr id="109" name=""/>
+          <p:cNvPr id="110" name=""/>
           <p:cNvPicPr>
             <a:picLocks xmlns:a="http://schemas.openxmlformats.org/drawingml/2006/main" noChangeAspect="1"/>
           </p:cNvPicPr>
           <p:nvPr/>
         </p:nvPicPr>
         <p:blipFill>
-          <a:blip xmlns:r="http://schemas.openxmlformats.org/officeDocument/2006/relationships" xmlns:a="http://schemas.openxmlformats.org/drawingml/2006/main" r:embed="R171cb2a9fb2c45ee"/>
+          <a:blip xmlns:r="http://schemas.openxmlformats.org/officeDocument/2006/relationships" xmlns:a="http://schemas.openxmlformats.org/drawingml/2006/main" r:embed="Ra92a0ae784a94799"/>
           <a:stretch xmlns:a="http://schemas.openxmlformats.org/drawingml/2006/main"/>
         </p:blipFill>
         <p:spPr>
@@ -3257,7 +3257,7 @@
           <p:cNvPr id="47" name="5-Discussão-box">
             <a:extLst xmlns:a="http://schemas.openxmlformats.org/drawingml/2006/main">
               <a:ext uri="{FF2B5EF4-FFF2-40B4-BE49-F238E27FC236}">
-                <a16:creationId xmlns:a16="http://schemas.microsoft.com/office/drawing/2014/main" id="{205B3214-37E1-4FA1-84F8-D04485233D90}"/>
+                <a16:creationId xmlns:a16="http://schemas.microsoft.com/office/drawing/2014/main" id="{3452B6DF-083A-40E7-9181-089DF9497783}"/>
               </a:ext>
             </a:extLst>
           </p:cNvPr>
@@ -3290,7 +3290,7 @@
           <p:cNvPr id="48" name="5-Discussão-head">
             <a:extLst xmlns:a="http://schemas.openxmlformats.org/drawingml/2006/main">
               <a:ext uri="{FF2B5EF4-FFF2-40B4-BE49-F238E27FC236}">
-                <a16:creationId xmlns:a16="http://schemas.microsoft.com/office/drawing/2014/main" id="{86BC2312-98EF-4A26-B43A-6797A30D7AD5}"/>
+                <a16:creationId xmlns:a16="http://schemas.microsoft.com/office/drawing/2014/main" id="{B4632AF0-68B7-4031-AD0A-37026224AF3E}"/>
               </a:ext>
             </a:extLst>
           </p:cNvPr>
@@ -3323,7 +3323,7 @@
           <p:cNvPr id="49" name="5-Discussão-title">
             <a:extLst xmlns:a="http://schemas.openxmlformats.org/drawingml/2006/main">
               <a:ext uri="{FF2B5EF4-FFF2-40B4-BE49-F238E27FC236}">
-                <a16:creationId xmlns:a16="http://schemas.microsoft.com/office/drawing/2014/main" id="{BC850715-C348-414E-A301-0152078ACBB3}"/>
+                <a16:creationId xmlns:a16="http://schemas.microsoft.com/office/drawing/2014/main" id="{BB9723A3-3F8B-439F-A11A-3D9D9D1FF6F8}"/>
               </a:ext>
             </a:extLst>
           </p:cNvPr>
@@ -3373,7 +3373,7 @@
           <p:cNvPr id="50" name="5-Discussão-body">
             <a:extLst xmlns:a="http://schemas.openxmlformats.org/drawingml/2006/main">
               <a:ext uri="{FF2B5EF4-FFF2-40B4-BE49-F238E27FC236}">
-                <a16:creationId xmlns:a16="http://schemas.microsoft.com/office/drawing/2014/main" id="{531ECE8E-7701-4BDC-A549-B73863A498B6}"/>
+                <a16:creationId xmlns:a16="http://schemas.microsoft.com/office/drawing/2014/main" id="{2A2FE5FD-B3AC-4803-BFD7-0DF8997AEFA9}"/>
               </a:ext>
             </a:extLst>
           </p:cNvPr>
@@ -3525,7 +3525,7 @@
           <p:cNvPr id="51" name="6-Conclusão central-box">
             <a:extLst xmlns:a="http://schemas.openxmlformats.org/drawingml/2006/main">
               <a:ext uri="{FF2B5EF4-FFF2-40B4-BE49-F238E27FC236}">
-                <a16:creationId xmlns:a16="http://schemas.microsoft.com/office/drawing/2014/main" id="{43527454-2652-4AE4-946D-B313D0204E3D}"/>
+                <a16:creationId xmlns:a16="http://schemas.microsoft.com/office/drawing/2014/main" id="{AA46B23C-8BA9-45D5-87D5-44036C2FA082}"/>
               </a:ext>
             </a:extLst>
           </p:cNvPr>
@@ -3558,7 +3558,7 @@
           <p:cNvPr id="52" name="6-Conclusão central-head">
             <a:extLst xmlns:a="http://schemas.openxmlformats.org/drawingml/2006/main">
               <a:ext uri="{FF2B5EF4-FFF2-40B4-BE49-F238E27FC236}">
-                <a16:creationId xmlns:a16="http://schemas.microsoft.com/office/drawing/2014/main" id="{4B7B740E-B941-4313-AC1B-8BBFE4A3E080}"/>
+                <a16:creationId xmlns:a16="http://schemas.microsoft.com/office/drawing/2014/main" id="{078D095A-1061-4EDA-91F0-3C42676EF6E4}"/>
               </a:ext>
             </a:extLst>
           </p:cNvPr>
@@ -3591,7 +3591,7 @@
           <p:cNvPr id="53" name="6-Conclusão central-title">
             <a:extLst xmlns:a="http://schemas.openxmlformats.org/drawingml/2006/main">
               <a:ext uri="{FF2B5EF4-FFF2-40B4-BE49-F238E27FC236}">
-                <a16:creationId xmlns:a16="http://schemas.microsoft.com/office/drawing/2014/main" id="{104C4681-4BDE-4437-A780-4BE3A264B0CE}"/>
+                <a16:creationId xmlns:a16="http://schemas.microsoft.com/office/drawing/2014/main" id="{43DEAA37-717D-47F3-9B10-96B0D9B7B8E9}"/>
               </a:ext>
             </a:extLst>
           </p:cNvPr>
@@ -3641,7 +3641,7 @@
           <p:cNvPr id="54" name="6-Conclusão central-body">
             <a:extLst xmlns:a="http://schemas.openxmlformats.org/drawingml/2006/main">
               <a:ext uri="{FF2B5EF4-FFF2-40B4-BE49-F238E27FC236}">
-                <a16:creationId xmlns:a16="http://schemas.microsoft.com/office/drawing/2014/main" id="{892553D8-ED18-49E4-8371-CF2DD77D7A79}"/>
+                <a16:creationId xmlns:a16="http://schemas.microsoft.com/office/drawing/2014/main" id="{74AD34DC-0E7C-4EA0-AEE7-4807AD5E2491}"/>
               </a:ext>
             </a:extLst>
           </p:cNvPr>
@@ -3725,7 +3725,7 @@
           <p:cNvPr id="55" name="m-chart-crisis-caption">
             <a:extLst xmlns:a="http://schemas.openxmlformats.org/drawingml/2006/main">
               <a:ext uri="{FF2B5EF4-FFF2-40B4-BE49-F238E27FC236}">
-                <a16:creationId xmlns:a16="http://schemas.microsoft.com/office/drawing/2014/main" id="{1D3D4231-1CE6-4BD9-88BB-229BCEAEF09F}"/>
+                <a16:creationId xmlns:a16="http://schemas.microsoft.com/office/drawing/2014/main" id="{ACCD8DEC-8928-4EA7-9BEA-8B35D17D2D82}"/>
               </a:ext>
             </a:extLst>
           </p:cNvPr>
@@ -3775,7 +3775,7 @@
           <p:cNvPr id="56" name="m-chart-crisis-frame">
             <a:extLst xmlns:a="http://schemas.openxmlformats.org/drawingml/2006/main">
               <a:ext uri="{FF2B5EF4-FFF2-40B4-BE49-F238E27FC236}">
-                <a16:creationId xmlns:a16="http://schemas.microsoft.com/office/drawing/2014/main" id="{52BD71E9-3651-473E-994D-69C26452D412}"/>
+                <a16:creationId xmlns:a16="http://schemas.microsoft.com/office/drawing/2014/main" id="{0A5A596D-3ACC-4DBB-8DD5-D337F5FA6783}"/>
               </a:ext>
             </a:extLst>
           </p:cNvPr>
@@ -3805,14 +3805,14 @@
       </p:sp>
       <p:pic>
         <p:nvPicPr>
-          <p:cNvPr id="120" name=""/>
+          <p:cNvPr id="121" name=""/>
           <p:cNvPicPr>
             <a:picLocks xmlns:a="http://schemas.openxmlformats.org/drawingml/2006/main" noChangeAspect="1"/>
           </p:cNvPicPr>
           <p:nvPr/>
         </p:nvPicPr>
         <p:blipFill>
-          <a:blip xmlns:r="http://schemas.openxmlformats.org/officeDocument/2006/relationships" xmlns:a="http://schemas.openxmlformats.org/drawingml/2006/main" r:embed="R3bdf8dbd37354b6c"/>
+          <a:blip xmlns:r="http://schemas.openxmlformats.org/officeDocument/2006/relationships" xmlns:a="http://schemas.openxmlformats.org/drawingml/2006/main" r:embed="R8e50c17d8a7e42cb"/>
           <a:stretch xmlns:a="http://schemas.openxmlformats.org/drawingml/2006/main"/>
         </p:blipFill>
         <p:spPr>
@@ -3830,7 +3830,7 @@
           <p:cNvPr id="58" name="qr-box">
             <a:extLst xmlns:a="http://schemas.openxmlformats.org/drawingml/2006/main">
               <a:ext uri="{FF2B5EF4-FFF2-40B4-BE49-F238E27FC236}">
-                <a16:creationId xmlns:a16="http://schemas.microsoft.com/office/drawing/2014/main" id="{5EB864EB-DF8D-49FB-BA67-00590A3C73AC}"/>
+                <a16:creationId xmlns:a16="http://schemas.microsoft.com/office/drawing/2014/main" id="{7FE7DE80-0C0F-41B3-B1D9-66A7D2AA64BF}"/>
               </a:ext>
             </a:extLst>
           </p:cNvPr>
@@ -3860,14 +3860,14 @@
       </p:sp>
       <p:pic>
         <p:nvPicPr>
-          <p:cNvPr id="122" name=""/>
+          <p:cNvPr id="123" name=""/>
           <p:cNvPicPr>
             <a:picLocks xmlns:a="http://schemas.openxmlformats.org/drawingml/2006/main" noChangeAspect="1"/>
           </p:cNvPicPr>
           <p:nvPr/>
         </p:nvPicPr>
         <p:blipFill>
-          <a:blip xmlns:r="http://schemas.openxmlformats.org/officeDocument/2006/relationships" xmlns:a="http://schemas.openxmlformats.org/drawingml/2006/main" r:embed="R62be285061c342b7"/>
+          <a:blip xmlns:r="http://schemas.openxmlformats.org/officeDocument/2006/relationships" xmlns:a="http://schemas.openxmlformats.org/drawingml/2006/main" r:embed="R8b21d71c1ae8482b"/>
           <a:stretch xmlns:a="http://schemas.openxmlformats.org/drawingml/2006/main"/>
         </p:blipFill>
         <p:spPr>
@@ -3885,7 +3885,7 @@
           <p:cNvPr id="60" name="qr-label">
             <a:extLst xmlns:a="http://schemas.openxmlformats.org/drawingml/2006/main">
               <a:ext uri="{FF2B5EF4-FFF2-40B4-BE49-F238E27FC236}">
-                <a16:creationId xmlns:a16="http://schemas.microsoft.com/office/drawing/2014/main" id="{23553DD2-76B7-4FC4-AD42-F01374886B78}"/>
+                <a16:creationId xmlns:a16="http://schemas.microsoft.com/office/drawing/2014/main" id="{F8F0C214-E993-4CEC-B7EB-2B6B37554585}"/>
               </a:ext>
             </a:extLst>
           </p:cNvPr>
@@ -3952,7 +3952,7 @@
           <p:cNvPr id="61" name="references-box">
             <a:extLst xmlns:a="http://schemas.openxmlformats.org/drawingml/2006/main">
               <a:ext uri="{FF2B5EF4-FFF2-40B4-BE49-F238E27FC236}">
-                <a16:creationId xmlns:a16="http://schemas.microsoft.com/office/drawing/2014/main" id="{3567E95C-912D-4CE8-8624-3C0A995D5723}"/>
+                <a16:creationId xmlns:a16="http://schemas.microsoft.com/office/drawing/2014/main" id="{7D194394-656F-48AD-BEBA-FF31FDB47B1E}"/>
               </a:ext>
             </a:extLst>
           </p:cNvPr>
@@ -3985,7 +3985,7 @@
           <p:cNvPr id="62" name="references-title">
             <a:extLst xmlns:a="http://schemas.openxmlformats.org/drawingml/2006/main">
               <a:ext uri="{FF2B5EF4-FFF2-40B4-BE49-F238E27FC236}">
-                <a16:creationId xmlns:a16="http://schemas.microsoft.com/office/drawing/2014/main" id="{F83E7C34-4D47-42ED-BA37-3673770A84F6}"/>
+                <a16:creationId xmlns:a16="http://schemas.microsoft.com/office/drawing/2014/main" id="{05415F6B-D5BA-4F82-815C-5D136100F12E}"/>
               </a:ext>
             </a:extLst>
           </p:cNvPr>
@@ -4032,10 +4032,10 @@
       </p:sp>
       <p:sp>
         <p:nvSpPr>
-          <p:cNvPr id="63" name="references-body">
-            <a:extLst xmlns:a="http://schemas.openxmlformats.org/drawingml/2006/main">
-              <a:ext uri="{FF2B5EF4-FFF2-40B4-BE49-F238E27FC236}">
-                <a16:creationId xmlns:a16="http://schemas.microsoft.com/office/drawing/2014/main" id="{958C0F67-8A77-4994-A6BB-00AF7CFC3B42}"/>
+          <p:cNvPr id="63" name="references-body-left">
+            <a:extLst xmlns:a="http://schemas.openxmlformats.org/drawingml/2006/main">
+              <a:ext uri="{FF2B5EF4-FFF2-40B4-BE49-F238E27FC236}">
+                <a16:creationId xmlns:a16="http://schemas.microsoft.com/office/drawing/2014/main" id="{86E869F6-9AF5-42C5-8AD1-AD17303A6457}"/>
               </a:ext>
             </a:extLst>
           </p:cNvPr>
@@ -4047,7 +4047,7 @@
         <p:spPr>
           <a:xfrm xmlns:a="http://schemas.openxmlformats.org/drawingml/2006/main">
             <a:off x="400050" y="12649200"/>
-            <a:ext cx="8724900" cy="533400"/>
+            <a:ext cx="4276725" cy="533400"/>
           </a:xfrm>
           <a:prstGeom xmlns:a="http://schemas.openxmlformats.org/drawingml/2006/main" prst="rect">
             <a:avLst/>
@@ -4063,14 +4063,14 @@
           <a:lstStyle xmlns:a="http://schemas.openxmlformats.org/drawingml/2006/main"/>
           <a:p xmlns:a="http://schemas.openxmlformats.org/drawingml/2006/main">
             <a:pPr algn="l">
-              <a:defRPr sz="338" b="0">
-                <a:solidFill>
-                  <a:srgbClr val="102536"/>
-                </a:solidFill>
-              </a:defRPr>
-            </a:pPr>
-            <a:r>
-              <a:rPr sz="338" b="0">
+              <a:defRPr sz="368" b="0">
+                <a:solidFill>
+                  <a:srgbClr val="102536"/>
+                </a:solidFill>
+              </a:defRPr>
+            </a:pPr>
+            <a:r>
+              <a:rPr sz="368" b="0">
                 <a:solidFill>
                   <a:srgbClr val="102536"/>
                 </a:solidFill>
@@ -4080,14 +4080,14 @@
           </a:p>
           <a:p xmlns:a="http://schemas.openxmlformats.org/drawingml/2006/main">
             <a:pPr algn="l">
-              <a:defRPr sz="338" b="0">
-                <a:solidFill>
-                  <a:srgbClr val="102536"/>
-                </a:solidFill>
-              </a:defRPr>
-            </a:pPr>
-            <a:r>
-              <a:rPr sz="338" b="0">
+              <a:defRPr sz="368" b="0">
+                <a:solidFill>
+                  <a:srgbClr val="102536"/>
+                </a:solidFill>
+              </a:defRPr>
+            </a:pPr>
+            <a:r>
+              <a:rPr sz="368" b="0">
                 <a:solidFill>
                   <a:srgbClr val="102536"/>
                 </a:solidFill>
@@ -4097,14 +4097,14 @@
           </a:p>
           <a:p xmlns:a="http://schemas.openxmlformats.org/drawingml/2006/main">
             <a:pPr algn="l">
-              <a:defRPr sz="338" b="0">
-                <a:solidFill>
-                  <a:srgbClr val="102536"/>
-                </a:solidFill>
-              </a:defRPr>
-            </a:pPr>
-            <a:r>
-              <a:rPr sz="338" b="0">
+              <a:defRPr sz="368" b="0">
+                <a:solidFill>
+                  <a:srgbClr val="102536"/>
+                </a:solidFill>
+              </a:defRPr>
+            </a:pPr>
+            <a:r>
+              <a:rPr sz="368" b="0">
                 <a:solidFill>
                   <a:srgbClr val="102536"/>
                 </a:solidFill>
@@ -4114,14 +4114,14 @@
           </a:p>
           <a:p xmlns:a="http://schemas.openxmlformats.org/drawingml/2006/main">
             <a:pPr algn="l">
-              <a:defRPr sz="338" b="0">
-                <a:solidFill>
-                  <a:srgbClr val="102536"/>
-                </a:solidFill>
-              </a:defRPr>
-            </a:pPr>
-            <a:r>
-              <a:rPr sz="338" b="0">
+              <a:defRPr sz="368" b="0">
+                <a:solidFill>
+                  <a:srgbClr val="102536"/>
+                </a:solidFill>
+              </a:defRPr>
+            </a:pPr>
+            <a:r>
+              <a:rPr sz="368" b="0">
                 <a:solidFill>
                   <a:srgbClr val="102536"/>
                 </a:solidFill>
@@ -4131,14 +4131,14 @@
           </a:p>
           <a:p xmlns:a="http://schemas.openxmlformats.org/drawingml/2006/main">
             <a:pPr algn="l">
-              <a:defRPr sz="338" b="0">
-                <a:solidFill>
-                  <a:srgbClr val="102536"/>
-                </a:solidFill>
-              </a:defRPr>
-            </a:pPr>
-            <a:r>
-              <a:rPr sz="338" b="0">
+              <a:defRPr sz="368" b="0">
+                <a:solidFill>
+                  <a:srgbClr val="102536"/>
+                </a:solidFill>
+              </a:defRPr>
+            </a:pPr>
+            <a:r>
+              <a:rPr sz="368" b="0">
                 <a:solidFill>
                   <a:srgbClr val="102536"/>
                 </a:solidFill>
@@ -4148,14 +4148,14 @@
           </a:p>
           <a:p xmlns:a="http://schemas.openxmlformats.org/drawingml/2006/main">
             <a:pPr algn="l">
-              <a:defRPr sz="338" b="0">
-                <a:solidFill>
-                  <a:srgbClr val="102536"/>
-                </a:solidFill>
-              </a:defRPr>
-            </a:pPr>
-            <a:r>
-              <a:rPr sz="338" b="0">
+              <a:defRPr sz="368" b="0">
+                <a:solidFill>
+                  <a:srgbClr val="102536"/>
+                </a:solidFill>
+              </a:defRPr>
+            </a:pPr>
+            <a:r>
+              <a:rPr sz="368" b="0">
                 <a:solidFill>
                   <a:srgbClr val="102536"/>
                 </a:solidFill>
@@ -4165,14 +4165,14 @@
           </a:p>
           <a:p xmlns:a="http://schemas.openxmlformats.org/drawingml/2006/main">
             <a:pPr algn="l">
-              <a:defRPr sz="338" b="0">
-                <a:solidFill>
-                  <a:srgbClr val="102536"/>
-                </a:solidFill>
-              </a:defRPr>
-            </a:pPr>
-            <a:r>
-              <a:rPr sz="338" b="0">
+              <a:defRPr sz="368" b="0">
+                <a:solidFill>
+                  <a:srgbClr val="102536"/>
+                </a:solidFill>
+              </a:defRPr>
+            </a:pPr>
+            <a:r>
+              <a:rPr sz="368" b="0">
                 <a:solidFill>
                   <a:srgbClr val="102536"/>
                 </a:solidFill>
@@ -4180,16 +4180,49 @@
               <a:t>[7] TO, T. et al. Global asthma prevalence in adults: findings from the cross-sectional world health survey. BMC Public Health, v. 12, art. 204, 2012. doi:10.1186/1471-2458-12-204.</a:t>
             </a:r>
           </a:p>
-          <a:p xmlns:a="http://schemas.openxmlformats.org/drawingml/2006/main">
-            <a:pPr algn="l">
-              <a:defRPr sz="338" b="0">
-                <a:solidFill>
-                  <a:srgbClr val="102536"/>
-                </a:solidFill>
-              </a:defRPr>
-            </a:pPr>
-            <a:r>
-              <a:rPr sz="338" b="0">
+        </p:txBody>
+      </p:sp>
+      <p:sp>
+        <p:nvSpPr>
+          <p:cNvPr id="64" name="references-body-right">
+            <a:extLst xmlns:a="http://schemas.openxmlformats.org/drawingml/2006/main">
+              <a:ext uri="{FF2B5EF4-FFF2-40B4-BE49-F238E27FC236}">
+                <a16:creationId xmlns:a16="http://schemas.microsoft.com/office/drawing/2014/main" id="{AE870C03-BE44-4A97-BA1D-3C1EE2AB8636}"/>
+              </a:ext>
+            </a:extLst>
+          </p:cNvPr>
+          <p:cNvSpPr>
+            <a:spLocks xmlns:a="http://schemas.openxmlformats.org/drawingml/2006/main" noGrp="1"/>
+          </p:cNvSpPr>
+          <p:nvPr/>
+        </p:nvSpPr>
+        <p:spPr>
+          <a:xfrm xmlns:a="http://schemas.openxmlformats.org/drawingml/2006/main">
+            <a:off x="4848225" y="12649200"/>
+            <a:ext cx="4276725" cy="533400"/>
+          </a:xfrm>
+          <a:prstGeom xmlns:a="http://schemas.openxmlformats.org/drawingml/2006/main" prst="rect">
+            <a:avLst/>
+          </a:prstGeom>
+          <a:noFill xmlns:a="http://schemas.openxmlformats.org/drawingml/2006/main"/>
+          <a:ln xmlns:a="http://schemas.openxmlformats.org/drawingml/2006/main" w="0">
+            <a:noFill/>
+            <a:prstDash val="solid"/>
+          </a:ln>
+        </p:spPr>
+        <p:txBody>
+          <a:bodyPr xmlns:a="http://schemas.openxmlformats.org/drawingml/2006/main"/>
+          <a:lstStyle xmlns:a="http://schemas.openxmlformats.org/drawingml/2006/main"/>
+          <a:p xmlns:a="http://schemas.openxmlformats.org/drawingml/2006/main">
+            <a:pPr algn="l">
+              <a:defRPr sz="368" b="0">
+                <a:solidFill>
+                  <a:srgbClr val="102536"/>
+                </a:solidFill>
+              </a:defRPr>
+            </a:pPr>
+            <a:r>
+              <a:rPr sz="368" b="0">
                 <a:solidFill>
                   <a:srgbClr val="102536"/>
                 </a:solidFill>
@@ -4199,14 +4232,14 @@
           </a:p>
           <a:p xmlns:a="http://schemas.openxmlformats.org/drawingml/2006/main">
             <a:pPr algn="l">
-              <a:defRPr sz="338" b="0">
-                <a:solidFill>
-                  <a:srgbClr val="102536"/>
-                </a:solidFill>
-              </a:defRPr>
-            </a:pPr>
-            <a:r>
-              <a:rPr sz="338" b="0">
+              <a:defRPr sz="368" b="0">
+                <a:solidFill>
+                  <a:srgbClr val="102536"/>
+                </a:solidFill>
+              </a:defRPr>
+            </a:pPr>
+            <a:r>
+              <a:rPr sz="368" b="0">
                 <a:solidFill>
                   <a:srgbClr val="102536"/>
                 </a:solidFill>
@@ -4216,14 +4249,14 @@
           </a:p>
           <a:p xmlns:a="http://schemas.openxmlformats.org/drawingml/2006/main">
             <a:pPr algn="l">
-              <a:defRPr sz="338" b="0">
-                <a:solidFill>
-                  <a:srgbClr val="102536"/>
-                </a:solidFill>
-              </a:defRPr>
-            </a:pPr>
-            <a:r>
-              <a:rPr sz="338" b="0">
+              <a:defRPr sz="368" b="0">
+                <a:solidFill>
+                  <a:srgbClr val="102536"/>
+                </a:solidFill>
+              </a:defRPr>
+            </a:pPr>
+            <a:r>
+              <a:rPr sz="368" b="0">
                 <a:solidFill>
                   <a:srgbClr val="102536"/>
                 </a:solidFill>
@@ -4233,14 +4266,14 @@
           </a:p>
           <a:p xmlns:a="http://schemas.openxmlformats.org/drawingml/2006/main">
             <a:pPr algn="l">
-              <a:defRPr sz="338" b="0">
-                <a:solidFill>
-                  <a:srgbClr val="102536"/>
-                </a:solidFill>
-              </a:defRPr>
-            </a:pPr>
-            <a:r>
-              <a:rPr sz="338" b="0">
+              <a:defRPr sz="368" b="0">
+                <a:solidFill>
+                  <a:srgbClr val="102536"/>
+                </a:solidFill>
+              </a:defRPr>
+            </a:pPr>
+            <a:r>
+              <a:rPr sz="368" b="0">
                 <a:solidFill>
                   <a:srgbClr val="102536"/>
                 </a:solidFill>
@@ -4250,14 +4283,14 @@
           </a:p>
           <a:p xmlns:a="http://schemas.openxmlformats.org/drawingml/2006/main">
             <a:pPr algn="l">
-              <a:defRPr sz="338" b="0">
-                <a:solidFill>
-                  <a:srgbClr val="102536"/>
-                </a:solidFill>
-              </a:defRPr>
-            </a:pPr>
-            <a:r>
-              <a:rPr sz="338" b="0">
+              <a:defRPr sz="368" b="0">
+                <a:solidFill>
+                  <a:srgbClr val="102536"/>
+                </a:solidFill>
+              </a:defRPr>
+            </a:pPr>
+            <a:r>
+              <a:rPr sz="368" b="0">
                 <a:solidFill>
                   <a:srgbClr val="102536"/>
                 </a:solidFill>
@@ -4267,14 +4300,14 @@
           </a:p>
           <a:p xmlns:a="http://schemas.openxmlformats.org/drawingml/2006/main">
             <a:pPr algn="l">
-              <a:defRPr sz="338" b="0">
-                <a:solidFill>
-                  <a:srgbClr val="102536"/>
-                </a:solidFill>
-              </a:defRPr>
-            </a:pPr>
-            <a:r>
-              <a:rPr sz="338" b="0">
+              <a:defRPr sz="368" b="0">
+                <a:solidFill>
+                  <a:srgbClr val="102536"/>
+                </a:solidFill>
+              </a:defRPr>
+            </a:pPr>
+            <a:r>
+              <a:rPr sz="368" b="0">
                 <a:solidFill>
                   <a:srgbClr val="102536"/>
                 </a:solidFill>
@@ -4287,7 +4320,7 @@
     </p:spTree>
     <p:extLst>
       <p:ext uri="{BB962C8B-B14F-4D97-AF65-F5344CB8AC3E}">
-        <p14:creationId xmlns:p14="http://schemas.microsoft.com/office/powerpoint/2010/main" val="554309389"/>
+        <p14:creationId xmlns:p14="http://schemas.microsoft.com/office/powerpoint/2010/main" val="1463940537"/>
       </p:ext>
     </p:extLst>
   </p:cSld>

--- a/outputs/posters/poster_pns_asma_morrison_pt.pptx
+++ b/outputs/posters/poster_pns_asma_morrison_pt.pptx
@@ -2,13 +2,13 @@
 <file path=ppt/presentation.xml><?xml version="1.0" encoding="utf-8"?>
 <p:presentation xmlns:p="http://schemas.openxmlformats.org/presentationml/2006/main">
   <p:sldMasterIdLst>
-    <p:sldMasterId xmlns:r="http://schemas.openxmlformats.org/officeDocument/2006/relationships" id="2147483648" r:id="Rd67c15fadf18469c"/>
+    <p:sldMasterId xmlns:r="http://schemas.openxmlformats.org/officeDocument/2006/relationships" id="2147483648" r:id="Rf6364473e7154697"/>
   </p:sldMasterIdLst>
   <p:notesMasterIdLst>
-    <p:notesMasterId xmlns:r="http://schemas.openxmlformats.org/officeDocument/2006/relationships" r:id="R19495faa1f644e02"/>
+    <p:notesMasterId xmlns:r="http://schemas.openxmlformats.org/officeDocument/2006/relationships" r:id="R526eaabf8b8042ff"/>
   </p:notesMasterIdLst>
   <p:sldIdLst>
-    <p:sldId xmlns:r="http://schemas.openxmlformats.org/officeDocument/2006/relationships" id="256" r:id="R04993fe3952e415d"/>
+    <p:sldId xmlns:r="http://schemas.openxmlformats.org/officeDocument/2006/relationships" id="256" r:id="R2e78368a34434056"/>
   </p:sldIdLst>
   <p:sldSz cx="9525000" cy="13468350"/>
   <p:notesSz cx="6858000" cy="9144000"/>
@@ -601,7 +601,7 @@
   </p:cSld>
   <p:clrMap bg1="lt1" tx1="dk1" bg2="lt2" tx2="dk2" accent1="accent1" accent2="accent2" accent3="accent3" accent4="accent4" accent5="accent5" accent6="accent6" hlink="hlink" folHlink="folHlink"/>
   <p:sldLayoutIdLst>
-    <p:sldLayoutId xmlns:r="http://schemas.openxmlformats.org/officeDocument/2006/relationships" id="2147483649" r:id="Ra96016a9971f4d15"/>
+    <p:sldLayoutId xmlns:r="http://schemas.openxmlformats.org/officeDocument/2006/relationships" id="2147483649" r:id="R52f151f9680a46fc"/>
   </p:sldLayoutIdLst>
   <p:txStyles>
     <p:titleStyle>
@@ -1149,14 +1149,14 @@
       </p:grpSpPr>
       <p:pic>
         <p:nvPicPr>
-          <p:cNvPr id="65" name=""/>
+          <p:cNvPr id="66" name=""/>
           <p:cNvPicPr>
             <a:picLocks xmlns:a="http://schemas.openxmlformats.org/drawingml/2006/main" noChangeAspect="1"/>
           </p:cNvPicPr>
           <p:nvPr/>
         </p:nvPicPr>
         <p:blipFill>
-          <a:blip xmlns:r="http://schemas.openxmlformats.org/officeDocument/2006/relationships" xmlns:a="http://schemas.openxmlformats.org/drawingml/2006/main" r:embed="Rf008441a35ef40d0"/>
+          <a:blip xmlns:r="http://schemas.openxmlformats.org/officeDocument/2006/relationships" xmlns:a="http://schemas.openxmlformats.org/drawingml/2006/main" r:embed="R9775eb5e54e04607"/>
           <a:srcRect xmlns:a="http://schemas.openxmlformats.org/drawingml/2006/main" l="0" t="38622" r="0" b="38622"/>
           <a:stretch xmlns:a="http://schemas.openxmlformats.org/drawingml/2006/main">
             <a:fillRect l="0" t="0" r="0" b="0"/>
@@ -1166,28 +1166,6 @@
           <a:xfrm xmlns:a="http://schemas.openxmlformats.org/drawingml/2006/main">
             <a:off x="0" y="0"/>
             <a:ext cx="9525000" cy="1219200"/>
-          </a:xfrm>
-          <a:prstGeom xmlns:a="http://schemas.openxmlformats.org/drawingml/2006/main" prst="rect">
-            <a:avLst/>
-          </a:prstGeom>
-        </p:spPr>
-      </p:pic>
-      <p:pic>
-        <p:nvPicPr>
-          <p:cNvPr id="66" name=""/>
-          <p:cNvPicPr>
-            <a:picLocks xmlns:a="http://schemas.openxmlformats.org/drawingml/2006/main" noChangeAspect="1"/>
-          </p:cNvPicPr>
-          <p:nvPr/>
-        </p:nvPicPr>
-        <p:blipFill>
-          <a:blip xmlns:r="http://schemas.openxmlformats.org/officeDocument/2006/relationships" xmlns:a="http://schemas.openxmlformats.org/drawingml/2006/main" r:embed="R4da4a906672f4edb"/>
-          <a:stretch xmlns:a="http://schemas.openxmlformats.org/drawingml/2006/main"/>
-        </p:blipFill>
-        <p:spPr>
-          <a:xfrm xmlns:a="http://schemas.openxmlformats.org/drawingml/2006/main">
-            <a:off x="323850" y="265374"/>
-            <a:ext cx="2952750" cy="612252"/>
           </a:xfrm>
           <a:prstGeom xmlns:a="http://schemas.openxmlformats.org/drawingml/2006/main" prst="rect">
             <a:avLst/>
@@ -1203,11 +1181,33 @@
           <p:nvPr/>
         </p:nvPicPr>
         <p:blipFill>
-          <a:blip xmlns:r="http://schemas.openxmlformats.org/officeDocument/2006/relationships" xmlns:a="http://schemas.openxmlformats.org/drawingml/2006/main" r:embed="Rce79449f1c164d0c"/>
+          <a:blip xmlns:r="http://schemas.openxmlformats.org/officeDocument/2006/relationships" xmlns:a="http://schemas.openxmlformats.org/drawingml/2006/main" r:embed="R6eab862564294803"/>
           <a:stretch xmlns:a="http://schemas.openxmlformats.org/drawingml/2006/main"/>
         </p:blipFill>
         <p:spPr>
           <a:xfrm xmlns:a="http://schemas.openxmlformats.org/drawingml/2006/main">
+            <a:off x="323850" y="265374"/>
+            <a:ext cx="2952750" cy="612252"/>
+          </a:xfrm>
+          <a:prstGeom xmlns:a="http://schemas.openxmlformats.org/drawingml/2006/main" prst="rect">
+            <a:avLst/>
+          </a:prstGeom>
+        </p:spPr>
+      </p:pic>
+      <p:pic>
+        <p:nvPicPr>
+          <p:cNvPr id="68" name=""/>
+          <p:cNvPicPr>
+            <a:picLocks xmlns:a="http://schemas.openxmlformats.org/drawingml/2006/main" noChangeAspect="1"/>
+          </p:cNvPicPr>
+          <p:nvPr/>
+        </p:nvPicPr>
+        <p:blipFill>
+          <a:blip xmlns:r="http://schemas.openxmlformats.org/officeDocument/2006/relationships" xmlns:a="http://schemas.openxmlformats.org/drawingml/2006/main" r:embed="Rd25bc0feeda04874"/>
+          <a:stretch xmlns:a="http://schemas.openxmlformats.org/drawingml/2006/main"/>
+        </p:blipFill>
+        <p:spPr>
+          <a:xfrm xmlns:a="http://schemas.openxmlformats.org/drawingml/2006/main">
             <a:off x="3905250" y="425056"/>
             <a:ext cx="4953000" cy="311937"/>
           </a:xfrm>
@@ -1221,7 +1221,7 @@
           <p:cNvPr id="4" name="morrison-title">
             <a:extLst xmlns:a="http://schemas.openxmlformats.org/drawingml/2006/main">
               <a:ext uri="{FF2B5EF4-FFF2-40B4-BE49-F238E27FC236}">
-                <a16:creationId xmlns:a16="http://schemas.microsoft.com/office/drawing/2014/main" id="{32412488-2560-4C08-800D-6F1AAB2E0629}"/>
+                <a16:creationId xmlns:a16="http://schemas.microsoft.com/office/drawing/2014/main" id="{D19320E0-3D44-402B-BBB3-798518CC3366}"/>
               </a:ext>
             </a:extLst>
           </p:cNvPr>
@@ -1271,7 +1271,7 @@
           <p:cNvPr id="5" name="morrison-authors">
             <a:extLst xmlns:a="http://schemas.openxmlformats.org/drawingml/2006/main">
               <a:ext uri="{FF2B5EF4-FFF2-40B4-BE49-F238E27FC236}">
-                <a16:creationId xmlns:a16="http://schemas.microsoft.com/office/drawing/2014/main" id="{75E24BAD-03F8-4BAA-98E0-0405D224B966}"/>
+                <a16:creationId xmlns:a16="http://schemas.microsoft.com/office/drawing/2014/main" id="{1401A722-775C-4EA7-9F78-6A4466BD5AE4}"/>
               </a:ext>
             </a:extLst>
           </p:cNvPr>
@@ -1321,7 +1321,7 @@
           <p:cNvPr id="6" name="central-message">
             <a:extLst xmlns:a="http://schemas.openxmlformats.org/drawingml/2006/main">
               <a:ext uri="{FF2B5EF4-FFF2-40B4-BE49-F238E27FC236}">
-                <a16:creationId xmlns:a16="http://schemas.microsoft.com/office/drawing/2014/main" id="{AD2EBF14-013F-453D-971D-3746009FCA92}"/>
+                <a16:creationId xmlns:a16="http://schemas.microsoft.com/office/drawing/2014/main" id="{A960F45A-939C-4348-AEBC-9738F6255EFC}"/>
               </a:ext>
             </a:extLst>
           </p:cNvPr>
@@ -1375,7 +1375,7 @@
           <p:cNvPr id="7" name="1-Método em uma linha-box">
             <a:extLst xmlns:a="http://schemas.openxmlformats.org/drawingml/2006/main">
               <a:ext uri="{FF2B5EF4-FFF2-40B4-BE49-F238E27FC236}">
-                <a16:creationId xmlns:a16="http://schemas.microsoft.com/office/drawing/2014/main" id="{42DDD954-B687-41E9-A0B5-56F12A2CD63C}"/>
+                <a16:creationId xmlns:a16="http://schemas.microsoft.com/office/drawing/2014/main" id="{DC2A6A4D-D454-4B91-AD8E-C8F6DF1D31B7}"/>
               </a:ext>
             </a:extLst>
           </p:cNvPr>
@@ -1408,7 +1408,7 @@
           <p:cNvPr id="8" name="1-Método em uma linha-head">
             <a:extLst xmlns:a="http://schemas.openxmlformats.org/drawingml/2006/main">
               <a:ext uri="{FF2B5EF4-FFF2-40B4-BE49-F238E27FC236}">
-                <a16:creationId xmlns:a16="http://schemas.microsoft.com/office/drawing/2014/main" id="{22EAB5CA-3E41-4E0C-9597-24D47151F2B8}"/>
+                <a16:creationId xmlns:a16="http://schemas.microsoft.com/office/drawing/2014/main" id="{6738FC26-BF0A-47A0-94D5-99E9F0232857}"/>
               </a:ext>
             </a:extLst>
           </p:cNvPr>
@@ -1441,7 +1441,7 @@
           <p:cNvPr id="9" name="1-Método em uma linha-title">
             <a:extLst xmlns:a="http://schemas.openxmlformats.org/drawingml/2006/main">
               <a:ext uri="{FF2B5EF4-FFF2-40B4-BE49-F238E27FC236}">
-                <a16:creationId xmlns:a16="http://schemas.microsoft.com/office/drawing/2014/main" id="{5B65396C-09E9-4FE4-A6A7-6F5CA2452B50}"/>
+                <a16:creationId xmlns:a16="http://schemas.microsoft.com/office/drawing/2014/main" id="{91E89243-3396-48E0-8988-C4CE6AFB17C7}"/>
               </a:ext>
             </a:extLst>
           </p:cNvPr>
@@ -1491,7 +1491,7 @@
           <p:cNvPr id="10" name="1-Método em uma linha-body">
             <a:extLst xmlns:a="http://schemas.openxmlformats.org/drawingml/2006/main">
               <a:ext uri="{FF2B5EF4-FFF2-40B4-BE49-F238E27FC236}">
-                <a16:creationId xmlns:a16="http://schemas.microsoft.com/office/drawing/2014/main" id="{E8EC5A5B-BD44-4A4B-A691-1F9316B1FC73}"/>
+                <a16:creationId xmlns:a16="http://schemas.microsoft.com/office/drawing/2014/main" id="{EA699530-2CC1-4E57-AC99-5611E3246DC0}"/>
               </a:ext>
             </a:extLst>
           </p:cNvPr>
@@ -1592,7 +1592,7 @@
           <p:cNvPr id="11" name="morrison-formula-box">
             <a:extLst xmlns:a="http://schemas.openxmlformats.org/drawingml/2006/main">
               <a:ext uri="{FF2B5EF4-FFF2-40B4-BE49-F238E27FC236}">
-                <a16:creationId xmlns:a16="http://schemas.microsoft.com/office/drawing/2014/main" id="{0C66F9B3-7CFA-43B2-A123-D225082CA08B}"/>
+                <a16:creationId xmlns:a16="http://schemas.microsoft.com/office/drawing/2014/main" id="{6E82FDB5-AAF7-496A-AEF7-4E05D77BF5D5}"/>
               </a:ext>
             </a:extLst>
           </p:cNvPr>
@@ -1625,7 +1625,7 @@
           <p:cNvPr id="12" name="morrison-formula-title">
             <a:extLst xmlns:a="http://schemas.openxmlformats.org/drawingml/2006/main">
               <a:ext uri="{FF2B5EF4-FFF2-40B4-BE49-F238E27FC236}">
-                <a16:creationId xmlns:a16="http://schemas.microsoft.com/office/drawing/2014/main" id="{47409A4D-B24F-42CF-AB15-FF74120642F1}"/>
+                <a16:creationId xmlns:a16="http://schemas.microsoft.com/office/drawing/2014/main" id="{3CF8834F-954E-4B42-A60A-64F9936FB952}"/>
               </a:ext>
             </a:extLst>
           </p:cNvPr>
@@ -1675,7 +1675,7 @@
           <p:cNvPr id="13" name="morrison-formula">
             <a:extLst xmlns:a="http://schemas.openxmlformats.org/drawingml/2006/main">
               <a:ext uri="{FF2B5EF4-FFF2-40B4-BE49-F238E27FC236}">
-                <a16:creationId xmlns:a16="http://schemas.microsoft.com/office/drawing/2014/main" id="{36AA45D8-4B6A-4CAF-B23A-A1B81C9706CB}"/>
+                <a16:creationId xmlns:a16="http://schemas.microsoft.com/office/drawing/2014/main" id="{CBA92F1C-B837-42AD-9944-65349ADF6C41}"/>
               </a:ext>
             </a:extLst>
           </p:cNvPr>
@@ -1793,7 +1793,7 @@
           <p:cNvPr id="14" name="2-Dados e denominadores-box">
             <a:extLst xmlns:a="http://schemas.openxmlformats.org/drawingml/2006/main">
               <a:ext uri="{FF2B5EF4-FFF2-40B4-BE49-F238E27FC236}">
-                <a16:creationId xmlns:a16="http://schemas.microsoft.com/office/drawing/2014/main" id="{09AEEEB0-C737-4587-A5D0-126AF586631F}"/>
+                <a16:creationId xmlns:a16="http://schemas.microsoft.com/office/drawing/2014/main" id="{271E4875-CC88-4451-AC2E-ED62277892E2}"/>
               </a:ext>
             </a:extLst>
           </p:cNvPr>
@@ -1826,7 +1826,7 @@
           <p:cNvPr id="15" name="2-Dados e denominadores-head">
             <a:extLst xmlns:a="http://schemas.openxmlformats.org/drawingml/2006/main">
               <a:ext uri="{FF2B5EF4-FFF2-40B4-BE49-F238E27FC236}">
-                <a16:creationId xmlns:a16="http://schemas.microsoft.com/office/drawing/2014/main" id="{DE458DE7-1A7A-4CEC-8A90-769264EB96C8}"/>
+                <a16:creationId xmlns:a16="http://schemas.microsoft.com/office/drawing/2014/main" id="{7352C448-B89F-459F-8AC0-18596D23C80B}"/>
               </a:ext>
             </a:extLst>
           </p:cNvPr>
@@ -1859,7 +1859,7 @@
           <p:cNvPr id="16" name="2-Dados e denominadores-title">
             <a:extLst xmlns:a="http://schemas.openxmlformats.org/drawingml/2006/main">
               <a:ext uri="{FF2B5EF4-FFF2-40B4-BE49-F238E27FC236}">
-                <a16:creationId xmlns:a16="http://schemas.microsoft.com/office/drawing/2014/main" id="{475A8BA2-1C30-492B-8286-E2F763685EFB}"/>
+                <a16:creationId xmlns:a16="http://schemas.microsoft.com/office/drawing/2014/main" id="{F5EF8476-1789-4940-A6FA-D2D1AA4530EE}"/>
               </a:ext>
             </a:extLst>
           </p:cNvPr>
@@ -1909,7 +1909,7 @@
           <p:cNvPr id="17" name="2-Dados e denominadores-body">
             <a:extLst xmlns:a="http://schemas.openxmlformats.org/drawingml/2006/main">
               <a:ext uri="{FF2B5EF4-FFF2-40B4-BE49-F238E27FC236}">
-                <a16:creationId xmlns:a16="http://schemas.microsoft.com/office/drawing/2014/main" id="{B5C08750-52B8-48BD-B475-B45FC7A9D151}"/>
+                <a16:creationId xmlns:a16="http://schemas.microsoft.com/office/drawing/2014/main" id="{8CA918A4-AB22-4B25-AF79-30EAFB07A5DC}"/>
               </a:ext>
             </a:extLst>
           </p:cNvPr>
@@ -1993,7 +1993,7 @@
           <p:cNvPr id="18" name="3-Por que IC beta?-box">
             <a:extLst xmlns:a="http://schemas.openxmlformats.org/drawingml/2006/main">
               <a:ext uri="{FF2B5EF4-FFF2-40B4-BE49-F238E27FC236}">
-                <a16:creationId xmlns:a16="http://schemas.microsoft.com/office/drawing/2014/main" id="{68630D47-C726-444C-A568-F8233E07E682}"/>
+                <a16:creationId xmlns:a16="http://schemas.microsoft.com/office/drawing/2014/main" id="{3A233A00-EDAE-4814-BC93-7F2285B76C11}"/>
               </a:ext>
             </a:extLst>
           </p:cNvPr>
@@ -2026,7 +2026,7 @@
           <p:cNvPr id="19" name="3-Por que IC beta?-head">
             <a:extLst xmlns:a="http://schemas.openxmlformats.org/drawingml/2006/main">
               <a:ext uri="{FF2B5EF4-FFF2-40B4-BE49-F238E27FC236}">
-                <a16:creationId xmlns:a16="http://schemas.microsoft.com/office/drawing/2014/main" id="{F397397C-BCFF-4423-8CFE-8A260968245F}"/>
+                <a16:creationId xmlns:a16="http://schemas.microsoft.com/office/drawing/2014/main" id="{BF727755-80B3-437E-B8AF-6E732EDC2EDA}"/>
               </a:ext>
             </a:extLst>
           </p:cNvPr>
@@ -2059,7 +2059,7 @@
           <p:cNvPr id="20" name="3-Por que IC beta?-title">
             <a:extLst xmlns:a="http://schemas.openxmlformats.org/drawingml/2006/main">
               <a:ext uri="{FF2B5EF4-FFF2-40B4-BE49-F238E27FC236}">
-                <a16:creationId xmlns:a16="http://schemas.microsoft.com/office/drawing/2014/main" id="{2BDADD10-4F96-4A10-A089-CA662C093F50}"/>
+                <a16:creationId xmlns:a16="http://schemas.microsoft.com/office/drawing/2014/main" id="{26BF68C1-8A91-40C7-AF90-ED0BDA016DBD}"/>
               </a:ext>
             </a:extLst>
           </p:cNvPr>
@@ -2109,7 +2109,7 @@
           <p:cNvPr id="21" name="3-Por que IC beta?-body">
             <a:extLst xmlns:a="http://schemas.openxmlformats.org/drawingml/2006/main">
               <a:ext uri="{FF2B5EF4-FFF2-40B4-BE49-F238E27FC236}">
-                <a16:creationId xmlns:a16="http://schemas.microsoft.com/office/drawing/2014/main" id="{8C58BC9A-2AEE-4B6D-B892-410B026943F6}"/>
+                <a16:creationId xmlns:a16="http://schemas.microsoft.com/office/drawing/2014/main" id="{9039BA9B-9226-4713-A7AC-492BFF8603B7}"/>
               </a:ext>
             </a:extLst>
           </p:cNvPr>
@@ -2193,7 +2193,7 @@
           <p:cNvPr id="22" name="4-ETL e interoperabilidade-box">
             <a:extLst xmlns:a="http://schemas.openxmlformats.org/drawingml/2006/main">
               <a:ext uri="{FF2B5EF4-FFF2-40B4-BE49-F238E27FC236}">
-                <a16:creationId xmlns:a16="http://schemas.microsoft.com/office/drawing/2014/main" id="{33B14D77-6B97-4340-882E-2F244F847101}"/>
+                <a16:creationId xmlns:a16="http://schemas.microsoft.com/office/drawing/2014/main" id="{79D95445-525C-497B-A4D3-7FD8B76854B8}"/>
               </a:ext>
             </a:extLst>
           </p:cNvPr>
@@ -2226,7 +2226,7 @@
           <p:cNvPr id="23" name="4-ETL e interoperabilidade-head">
             <a:extLst xmlns:a="http://schemas.openxmlformats.org/drawingml/2006/main">
               <a:ext uri="{FF2B5EF4-FFF2-40B4-BE49-F238E27FC236}">
-                <a16:creationId xmlns:a16="http://schemas.microsoft.com/office/drawing/2014/main" id="{41724AC4-6FEE-4188-8314-F558C06FAA59}"/>
+                <a16:creationId xmlns:a16="http://schemas.microsoft.com/office/drawing/2014/main" id="{5B1C2275-D958-43BE-A80B-5F0D5BFFD854}"/>
               </a:ext>
             </a:extLst>
           </p:cNvPr>
@@ -2259,7 +2259,7 @@
           <p:cNvPr id="24" name="4-ETL e interoperabilidade-title">
             <a:extLst xmlns:a="http://schemas.openxmlformats.org/drawingml/2006/main">
               <a:ext uri="{FF2B5EF4-FFF2-40B4-BE49-F238E27FC236}">
-                <a16:creationId xmlns:a16="http://schemas.microsoft.com/office/drawing/2014/main" id="{CD3BAA3C-2761-4754-A1A7-CA1B848180B7}"/>
+                <a16:creationId xmlns:a16="http://schemas.microsoft.com/office/drawing/2014/main" id="{99A1D20F-32E9-4FDE-8344-A43B1343AB94}"/>
               </a:ext>
             </a:extLst>
           </p:cNvPr>
@@ -2309,7 +2309,7 @@
           <p:cNvPr id="25" name="4-ETL e interoperabilidade-body">
             <a:extLst xmlns:a="http://schemas.openxmlformats.org/drawingml/2006/main">
               <a:ext uri="{FF2B5EF4-FFF2-40B4-BE49-F238E27FC236}">
-                <a16:creationId xmlns:a16="http://schemas.microsoft.com/office/drawing/2014/main" id="{558A119D-7A43-4074-AAC5-E9F383EB105E}"/>
+                <a16:creationId xmlns:a16="http://schemas.microsoft.com/office/drawing/2014/main" id="{F83D4892-7367-41D9-B9C7-F4E8FAB38F0F}"/>
               </a:ext>
             </a:extLst>
           </p:cNvPr>
@@ -2393,7 +2393,7 @@
           <p:cNvPr id="26" name="m-prev-metric">
             <a:extLst xmlns:a="http://schemas.openxmlformats.org/drawingml/2006/main">
               <a:ext uri="{FF2B5EF4-FFF2-40B4-BE49-F238E27FC236}">
-                <a16:creationId xmlns:a16="http://schemas.microsoft.com/office/drawing/2014/main" id="{6F651451-85D7-403C-A219-F541DC9764C7}"/>
+                <a16:creationId xmlns:a16="http://schemas.microsoft.com/office/drawing/2014/main" id="{A66DEDA4-1D80-47FB-B175-3BA4ADA456D1}"/>
               </a:ext>
             </a:extLst>
           </p:cNvPr>
@@ -2426,7 +2426,7 @@
           <p:cNvPr id="27" name="m-prev-metric-title">
             <a:extLst xmlns:a="http://schemas.openxmlformats.org/drawingml/2006/main">
               <a:ext uri="{FF2B5EF4-FFF2-40B4-BE49-F238E27FC236}">
-                <a16:creationId xmlns:a16="http://schemas.microsoft.com/office/drawing/2014/main" id="{5BF18A97-A241-44D9-BA31-9B922A05D88B}"/>
+                <a16:creationId xmlns:a16="http://schemas.microsoft.com/office/drawing/2014/main" id="{35E85861-E734-439E-A930-79A4B88E9644}"/>
               </a:ext>
             </a:extLst>
           </p:cNvPr>
@@ -2476,7 +2476,7 @@
           <p:cNvPr id="28" name="m-prev-metric-value">
             <a:extLst xmlns:a="http://schemas.openxmlformats.org/drawingml/2006/main">
               <a:ext uri="{FF2B5EF4-FFF2-40B4-BE49-F238E27FC236}">
-                <a16:creationId xmlns:a16="http://schemas.microsoft.com/office/drawing/2014/main" id="{95113B0D-8003-40F7-AD00-E7CBDA9A22F0}"/>
+                <a16:creationId xmlns:a16="http://schemas.microsoft.com/office/drawing/2014/main" id="{650DEEAE-CE20-4578-9EB9-041E4595BB2E}"/>
               </a:ext>
             </a:extLst>
           </p:cNvPr>
@@ -2526,7 +2526,7 @@
           <p:cNvPr id="29" name="m-prev-metric-note">
             <a:extLst xmlns:a="http://schemas.openxmlformats.org/drawingml/2006/main">
               <a:ext uri="{FF2B5EF4-FFF2-40B4-BE49-F238E27FC236}">
-                <a16:creationId xmlns:a16="http://schemas.microsoft.com/office/drawing/2014/main" id="{502821AF-76B9-4B52-AAF8-BEB580C56B47}"/>
+                <a16:creationId xmlns:a16="http://schemas.microsoft.com/office/drawing/2014/main" id="{CB53C0C0-FB00-46C9-B047-0B2E43F95081}"/>
               </a:ext>
             </a:extLst>
           </p:cNvPr>
@@ -2576,7 +2576,7 @@
           <p:cNvPr id="30" name="m-crisis-metric">
             <a:extLst xmlns:a="http://schemas.openxmlformats.org/drawingml/2006/main">
               <a:ext uri="{FF2B5EF4-FFF2-40B4-BE49-F238E27FC236}">
-                <a16:creationId xmlns:a16="http://schemas.microsoft.com/office/drawing/2014/main" id="{0E6B6631-D983-471C-844F-52E02B6F88E5}"/>
+                <a16:creationId xmlns:a16="http://schemas.microsoft.com/office/drawing/2014/main" id="{9011F2E8-1F43-41A5-BB8C-7532E146B768}"/>
               </a:ext>
             </a:extLst>
           </p:cNvPr>
@@ -2609,7 +2609,7 @@
           <p:cNvPr id="31" name="m-crisis-metric-title">
             <a:extLst xmlns:a="http://schemas.openxmlformats.org/drawingml/2006/main">
               <a:ext uri="{FF2B5EF4-FFF2-40B4-BE49-F238E27FC236}">
-                <a16:creationId xmlns:a16="http://schemas.microsoft.com/office/drawing/2014/main" id="{79DFD60D-680D-4AC8-AD28-79E21879EE6D}"/>
+                <a16:creationId xmlns:a16="http://schemas.microsoft.com/office/drawing/2014/main" id="{35CF6526-295E-42DF-8467-E3C56BE136EB}"/>
               </a:ext>
             </a:extLst>
           </p:cNvPr>
@@ -2659,7 +2659,7 @@
           <p:cNvPr id="32" name="m-crisis-metric-value">
             <a:extLst xmlns:a="http://schemas.openxmlformats.org/drawingml/2006/main">
               <a:ext uri="{FF2B5EF4-FFF2-40B4-BE49-F238E27FC236}">
-                <a16:creationId xmlns:a16="http://schemas.microsoft.com/office/drawing/2014/main" id="{7C4DBECA-A847-4042-87E8-24BD7F87A8CE}"/>
+                <a16:creationId xmlns:a16="http://schemas.microsoft.com/office/drawing/2014/main" id="{06BCD70C-DFD3-4FB5-BDCB-F3A56C659CBD}"/>
               </a:ext>
             </a:extLst>
           </p:cNvPr>
@@ -2709,7 +2709,7 @@
           <p:cNvPr id="33" name="m-crisis-metric-note">
             <a:extLst xmlns:a="http://schemas.openxmlformats.org/drawingml/2006/main">
               <a:ext uri="{FF2B5EF4-FFF2-40B4-BE49-F238E27FC236}">
-                <a16:creationId xmlns:a16="http://schemas.microsoft.com/office/drawing/2014/main" id="{F2ADFB1C-9543-4F8A-8F89-56AB2F3459CA}"/>
+                <a16:creationId xmlns:a16="http://schemas.microsoft.com/office/drawing/2014/main" id="{879C9DBB-724E-442E-9374-53085ACECBAB}"/>
               </a:ext>
             </a:extLst>
           </p:cNvPr>
@@ -2759,7 +2759,7 @@
           <p:cNvPr id="34" name="m-meds-metric">
             <a:extLst xmlns:a="http://schemas.openxmlformats.org/drawingml/2006/main">
               <a:ext uri="{FF2B5EF4-FFF2-40B4-BE49-F238E27FC236}">
-                <a16:creationId xmlns:a16="http://schemas.microsoft.com/office/drawing/2014/main" id="{D1E76BCB-28D5-447F-B78D-8C408AF8B7AD}"/>
+                <a16:creationId xmlns:a16="http://schemas.microsoft.com/office/drawing/2014/main" id="{6CCF1044-4275-4B33-A5A8-1D2623345201}"/>
               </a:ext>
             </a:extLst>
           </p:cNvPr>
@@ -2792,7 +2792,7 @@
           <p:cNvPr id="35" name="m-meds-metric-title">
             <a:extLst xmlns:a="http://schemas.openxmlformats.org/drawingml/2006/main">
               <a:ext uri="{FF2B5EF4-FFF2-40B4-BE49-F238E27FC236}">
-                <a16:creationId xmlns:a16="http://schemas.microsoft.com/office/drawing/2014/main" id="{C0F5A7F1-F92A-41CE-B533-17C8DBE01F79}"/>
+                <a16:creationId xmlns:a16="http://schemas.microsoft.com/office/drawing/2014/main" id="{3DA7B81A-61A2-4E55-AC01-5EE0D722F20F}"/>
               </a:ext>
             </a:extLst>
           </p:cNvPr>
@@ -2842,7 +2842,7 @@
           <p:cNvPr id="36" name="m-meds-metric-value">
             <a:extLst xmlns:a="http://schemas.openxmlformats.org/drawingml/2006/main">
               <a:ext uri="{FF2B5EF4-FFF2-40B4-BE49-F238E27FC236}">
-                <a16:creationId xmlns:a16="http://schemas.microsoft.com/office/drawing/2014/main" id="{B23F6705-E614-4425-BECB-AD688E698254}"/>
+                <a16:creationId xmlns:a16="http://schemas.microsoft.com/office/drawing/2014/main" id="{CC2CD425-689D-43B3-9759-B6FAB53CFB10}"/>
               </a:ext>
             </a:extLst>
           </p:cNvPr>
@@ -2892,7 +2892,7 @@
           <p:cNvPr id="37" name="m-meds-metric-note">
             <a:extLst xmlns:a="http://schemas.openxmlformats.org/drawingml/2006/main">
               <a:ext uri="{FF2B5EF4-FFF2-40B4-BE49-F238E27FC236}">
-                <a16:creationId xmlns:a16="http://schemas.microsoft.com/office/drawing/2014/main" id="{4FD3A8A4-3CBB-4971-B178-D45BB019F913}"/>
+                <a16:creationId xmlns:a16="http://schemas.microsoft.com/office/drawing/2014/main" id="{BADB289E-F605-4631-98E8-02E59C95E319}"/>
               </a:ext>
             </a:extLst>
           </p:cNvPr>
@@ -2942,7 +2942,7 @@
           <p:cNvPr id="38" name="m-chart-prev-caption">
             <a:extLst xmlns:a="http://schemas.openxmlformats.org/drawingml/2006/main">
               <a:ext uri="{FF2B5EF4-FFF2-40B4-BE49-F238E27FC236}">
-                <a16:creationId xmlns:a16="http://schemas.microsoft.com/office/drawing/2014/main" id="{4C068FBF-E996-4D40-B566-3494E8F4D9BC}"/>
+                <a16:creationId xmlns:a16="http://schemas.microsoft.com/office/drawing/2014/main" id="{008C9D9C-B88F-4BD6-BCC0-E72F8D14DF6D}"/>
               </a:ext>
             </a:extLst>
           </p:cNvPr>
@@ -2992,7 +2992,7 @@
           <p:cNvPr id="39" name="m-chart-prev-frame">
             <a:extLst xmlns:a="http://schemas.openxmlformats.org/drawingml/2006/main">
               <a:ext uri="{FF2B5EF4-FFF2-40B4-BE49-F238E27FC236}">
-                <a16:creationId xmlns:a16="http://schemas.microsoft.com/office/drawing/2014/main" id="{B5478C6F-245E-4EC0-B6A1-E7FF87AB7B74}"/>
+                <a16:creationId xmlns:a16="http://schemas.microsoft.com/office/drawing/2014/main" id="{5F42EAE7-FA26-4BFC-A444-ED2239DEDA48}"/>
               </a:ext>
             </a:extLst>
           </p:cNvPr>
@@ -3022,14 +3022,14 @@
       </p:sp>
       <p:pic>
         <p:nvPicPr>
-          <p:cNvPr id="104" name=""/>
+          <p:cNvPr id="105" name=""/>
           <p:cNvPicPr>
             <a:picLocks xmlns:a="http://schemas.openxmlformats.org/drawingml/2006/main" noChangeAspect="1"/>
           </p:cNvPicPr>
           <p:nvPr/>
         </p:nvPicPr>
         <p:blipFill>
-          <a:blip xmlns:r="http://schemas.openxmlformats.org/officeDocument/2006/relationships" xmlns:a="http://schemas.openxmlformats.org/drawingml/2006/main" r:embed="R6a4e2bac973b4711"/>
+          <a:blip xmlns:r="http://schemas.openxmlformats.org/officeDocument/2006/relationships" xmlns:a="http://schemas.openxmlformats.org/drawingml/2006/main" r:embed="R35b76420eae04ac9"/>
           <a:stretch xmlns:a="http://schemas.openxmlformats.org/drawingml/2006/main"/>
         </p:blipFill>
         <p:spPr>
@@ -3047,7 +3047,7 @@
           <p:cNvPr id="41" name="m-chart-meds-caption">
             <a:extLst xmlns:a="http://schemas.openxmlformats.org/drawingml/2006/main">
               <a:ext uri="{FF2B5EF4-FFF2-40B4-BE49-F238E27FC236}">
-                <a16:creationId xmlns:a16="http://schemas.microsoft.com/office/drawing/2014/main" id="{3A796118-72EC-4B96-A1B7-EB2657168EA6}"/>
+                <a16:creationId xmlns:a16="http://schemas.microsoft.com/office/drawing/2014/main" id="{F30A9BD1-01A4-4005-915E-0C6621FDD64B}"/>
               </a:ext>
             </a:extLst>
           </p:cNvPr>
@@ -3097,7 +3097,7 @@
           <p:cNvPr id="42" name="m-chart-meds-frame">
             <a:extLst xmlns:a="http://schemas.openxmlformats.org/drawingml/2006/main">
               <a:ext uri="{FF2B5EF4-FFF2-40B4-BE49-F238E27FC236}">
-                <a16:creationId xmlns:a16="http://schemas.microsoft.com/office/drawing/2014/main" id="{8CD01CFD-71A4-4C10-A012-67593321972B}"/>
+                <a16:creationId xmlns:a16="http://schemas.microsoft.com/office/drawing/2014/main" id="{8DEF8BAE-B22C-4BDA-8DBA-F8E21092A393}"/>
               </a:ext>
             </a:extLst>
           </p:cNvPr>
@@ -3127,14 +3127,14 @@
       </p:sp>
       <p:pic>
         <p:nvPicPr>
-          <p:cNvPr id="107" name=""/>
+          <p:cNvPr id="108" name=""/>
           <p:cNvPicPr>
             <a:picLocks xmlns:a="http://schemas.openxmlformats.org/drawingml/2006/main" noChangeAspect="1"/>
           </p:cNvPicPr>
           <p:nvPr/>
         </p:nvPicPr>
         <p:blipFill>
-          <a:blip xmlns:r="http://schemas.openxmlformats.org/officeDocument/2006/relationships" xmlns:a="http://schemas.openxmlformats.org/drawingml/2006/main" r:embed="R1e0109a757fd4a98"/>
+          <a:blip xmlns:r="http://schemas.openxmlformats.org/officeDocument/2006/relationships" xmlns:a="http://schemas.openxmlformats.org/drawingml/2006/main" r:embed="Rb6a9738b16dc4944"/>
           <a:stretch xmlns:a="http://schemas.openxmlformats.org/drawingml/2006/main"/>
         </p:blipFill>
         <p:spPr>
@@ -3152,7 +3152,7 @@
           <p:cNvPr id="44" name="m-chart-smoke-caption">
             <a:extLst xmlns:a="http://schemas.openxmlformats.org/drawingml/2006/main">
               <a:ext uri="{FF2B5EF4-FFF2-40B4-BE49-F238E27FC236}">
-                <a16:creationId xmlns:a16="http://schemas.microsoft.com/office/drawing/2014/main" id="{962DC80E-E360-4708-B26C-3FE03E4E599F}"/>
+                <a16:creationId xmlns:a16="http://schemas.microsoft.com/office/drawing/2014/main" id="{16347827-9C07-458A-8CC5-E1961D04A686}"/>
               </a:ext>
             </a:extLst>
           </p:cNvPr>
@@ -3202,7 +3202,7 @@
           <p:cNvPr id="45" name="m-chart-smoke-frame">
             <a:extLst xmlns:a="http://schemas.openxmlformats.org/drawingml/2006/main">
               <a:ext uri="{FF2B5EF4-FFF2-40B4-BE49-F238E27FC236}">
-                <a16:creationId xmlns:a16="http://schemas.microsoft.com/office/drawing/2014/main" id="{334D733F-4C39-41DA-ACC5-13DCB55A5160}"/>
+                <a16:creationId xmlns:a16="http://schemas.microsoft.com/office/drawing/2014/main" id="{6489A0C9-77CB-4AED-A63F-9C35A6DA052E}"/>
               </a:ext>
             </a:extLst>
           </p:cNvPr>
@@ -3232,14 +3232,14 @@
       </p:sp>
       <p:pic>
         <p:nvPicPr>
-          <p:cNvPr id="110" name=""/>
+          <p:cNvPr id="111" name=""/>
           <p:cNvPicPr>
             <a:picLocks xmlns:a="http://schemas.openxmlformats.org/drawingml/2006/main" noChangeAspect="1"/>
           </p:cNvPicPr>
           <p:nvPr/>
         </p:nvPicPr>
         <p:blipFill>
-          <a:blip xmlns:r="http://schemas.openxmlformats.org/officeDocument/2006/relationships" xmlns:a="http://schemas.openxmlformats.org/drawingml/2006/main" r:embed="Ra92a0ae784a94799"/>
+          <a:blip xmlns:r="http://schemas.openxmlformats.org/officeDocument/2006/relationships" xmlns:a="http://schemas.openxmlformats.org/drawingml/2006/main" r:embed="R2a527c4e129b484d"/>
           <a:stretch xmlns:a="http://schemas.openxmlformats.org/drawingml/2006/main"/>
         </p:blipFill>
         <p:spPr>
@@ -3257,7 +3257,7 @@
           <p:cNvPr id="47" name="5-Discussão-box">
             <a:extLst xmlns:a="http://schemas.openxmlformats.org/drawingml/2006/main">
               <a:ext uri="{FF2B5EF4-FFF2-40B4-BE49-F238E27FC236}">
-                <a16:creationId xmlns:a16="http://schemas.microsoft.com/office/drawing/2014/main" id="{3452B6DF-083A-40E7-9181-089DF9497783}"/>
+                <a16:creationId xmlns:a16="http://schemas.microsoft.com/office/drawing/2014/main" id="{738FFAE7-AFE6-41E0-8D85-DA6C9523DABC}"/>
               </a:ext>
             </a:extLst>
           </p:cNvPr>
@@ -3290,7 +3290,7 @@
           <p:cNvPr id="48" name="5-Discussão-head">
             <a:extLst xmlns:a="http://schemas.openxmlformats.org/drawingml/2006/main">
               <a:ext uri="{FF2B5EF4-FFF2-40B4-BE49-F238E27FC236}">
-                <a16:creationId xmlns:a16="http://schemas.microsoft.com/office/drawing/2014/main" id="{B4632AF0-68B7-4031-AD0A-37026224AF3E}"/>
+                <a16:creationId xmlns:a16="http://schemas.microsoft.com/office/drawing/2014/main" id="{74DE3F26-6D16-4595-B33C-A11E4EE45B34}"/>
               </a:ext>
             </a:extLst>
           </p:cNvPr>
@@ -3323,7 +3323,7 @@
           <p:cNvPr id="49" name="5-Discussão-title">
             <a:extLst xmlns:a="http://schemas.openxmlformats.org/drawingml/2006/main">
               <a:ext uri="{FF2B5EF4-FFF2-40B4-BE49-F238E27FC236}">
-                <a16:creationId xmlns:a16="http://schemas.microsoft.com/office/drawing/2014/main" id="{BB9723A3-3F8B-439F-A11A-3D9D9D1FF6F8}"/>
+                <a16:creationId xmlns:a16="http://schemas.microsoft.com/office/drawing/2014/main" id="{D68064AD-90C8-4E0D-971B-8008CADD3F2A}"/>
               </a:ext>
             </a:extLst>
           </p:cNvPr>
@@ -3373,7 +3373,7 @@
           <p:cNvPr id="50" name="5-Discussão-body">
             <a:extLst xmlns:a="http://schemas.openxmlformats.org/drawingml/2006/main">
               <a:ext uri="{FF2B5EF4-FFF2-40B4-BE49-F238E27FC236}">
-                <a16:creationId xmlns:a16="http://schemas.microsoft.com/office/drawing/2014/main" id="{2A2FE5FD-B3AC-4803-BFD7-0DF8997AEFA9}"/>
+                <a16:creationId xmlns:a16="http://schemas.microsoft.com/office/drawing/2014/main" id="{AAA63B26-373A-4481-983F-5E0DE5C6C2D6}"/>
               </a:ext>
             </a:extLst>
           </p:cNvPr>
@@ -3525,7 +3525,7 @@
           <p:cNvPr id="51" name="6-Conclusão central-box">
             <a:extLst xmlns:a="http://schemas.openxmlformats.org/drawingml/2006/main">
               <a:ext uri="{FF2B5EF4-FFF2-40B4-BE49-F238E27FC236}">
-                <a16:creationId xmlns:a16="http://schemas.microsoft.com/office/drawing/2014/main" id="{AA46B23C-8BA9-45D5-87D5-44036C2FA082}"/>
+                <a16:creationId xmlns:a16="http://schemas.microsoft.com/office/drawing/2014/main" id="{6148E2E8-6158-455B-9D22-C30A4451CD29}"/>
               </a:ext>
             </a:extLst>
           </p:cNvPr>
@@ -3558,7 +3558,7 @@
           <p:cNvPr id="52" name="6-Conclusão central-head">
             <a:extLst xmlns:a="http://schemas.openxmlformats.org/drawingml/2006/main">
               <a:ext uri="{FF2B5EF4-FFF2-40B4-BE49-F238E27FC236}">
-                <a16:creationId xmlns:a16="http://schemas.microsoft.com/office/drawing/2014/main" id="{078D095A-1061-4EDA-91F0-3C42676EF6E4}"/>
+                <a16:creationId xmlns:a16="http://schemas.microsoft.com/office/drawing/2014/main" id="{487DE97B-A4C6-4360-B56A-63E59DFCBF81}"/>
               </a:ext>
             </a:extLst>
           </p:cNvPr>
@@ -3591,7 +3591,7 @@
           <p:cNvPr id="53" name="6-Conclusão central-title">
             <a:extLst xmlns:a="http://schemas.openxmlformats.org/drawingml/2006/main">
               <a:ext uri="{FF2B5EF4-FFF2-40B4-BE49-F238E27FC236}">
-                <a16:creationId xmlns:a16="http://schemas.microsoft.com/office/drawing/2014/main" id="{43DEAA37-717D-47F3-9B10-96B0D9B7B8E9}"/>
+                <a16:creationId xmlns:a16="http://schemas.microsoft.com/office/drawing/2014/main" id="{65839D1C-21B5-4590-8114-C91F742B64FB}"/>
               </a:ext>
             </a:extLst>
           </p:cNvPr>
@@ -3641,7 +3641,7 @@
           <p:cNvPr id="54" name="6-Conclusão central-body">
             <a:extLst xmlns:a="http://schemas.openxmlformats.org/drawingml/2006/main">
               <a:ext uri="{FF2B5EF4-FFF2-40B4-BE49-F238E27FC236}">
-                <a16:creationId xmlns:a16="http://schemas.microsoft.com/office/drawing/2014/main" id="{74AD34DC-0E7C-4EA0-AEE7-4807AD5E2491}"/>
+                <a16:creationId xmlns:a16="http://schemas.microsoft.com/office/drawing/2014/main" id="{E4CF4199-989C-47CC-B226-844C443E49C9}"/>
               </a:ext>
             </a:extLst>
           </p:cNvPr>
@@ -3725,7 +3725,7 @@
           <p:cNvPr id="55" name="m-chart-crisis-caption">
             <a:extLst xmlns:a="http://schemas.openxmlformats.org/drawingml/2006/main">
               <a:ext uri="{FF2B5EF4-FFF2-40B4-BE49-F238E27FC236}">
-                <a16:creationId xmlns:a16="http://schemas.microsoft.com/office/drawing/2014/main" id="{ACCD8DEC-8928-4EA7-9BEA-8B35D17D2D82}"/>
+                <a16:creationId xmlns:a16="http://schemas.microsoft.com/office/drawing/2014/main" id="{9DB4A5E5-5502-4C9A-B1CC-14E080F129B7}"/>
               </a:ext>
             </a:extLst>
           </p:cNvPr>
@@ -3775,7 +3775,7 @@
           <p:cNvPr id="56" name="m-chart-crisis-frame">
             <a:extLst xmlns:a="http://schemas.openxmlformats.org/drawingml/2006/main">
               <a:ext uri="{FF2B5EF4-FFF2-40B4-BE49-F238E27FC236}">
-                <a16:creationId xmlns:a16="http://schemas.microsoft.com/office/drawing/2014/main" id="{0A5A596D-3ACC-4DBB-8DD5-D337F5FA6783}"/>
+                <a16:creationId xmlns:a16="http://schemas.microsoft.com/office/drawing/2014/main" id="{19A84A8F-4F03-484C-97DE-EEDDE616C387}"/>
               </a:ext>
             </a:extLst>
           </p:cNvPr>
@@ -3805,14 +3805,14 @@
       </p:sp>
       <p:pic>
         <p:nvPicPr>
-          <p:cNvPr id="121" name=""/>
+          <p:cNvPr id="122" name=""/>
           <p:cNvPicPr>
             <a:picLocks xmlns:a="http://schemas.openxmlformats.org/drawingml/2006/main" noChangeAspect="1"/>
           </p:cNvPicPr>
           <p:nvPr/>
         </p:nvPicPr>
         <p:blipFill>
-          <a:blip xmlns:r="http://schemas.openxmlformats.org/officeDocument/2006/relationships" xmlns:a="http://schemas.openxmlformats.org/drawingml/2006/main" r:embed="R8e50c17d8a7e42cb"/>
+          <a:blip xmlns:r="http://schemas.openxmlformats.org/officeDocument/2006/relationships" xmlns:a="http://schemas.openxmlformats.org/drawingml/2006/main" r:embed="Rc91a9edfbe0141b0"/>
           <a:stretch xmlns:a="http://schemas.openxmlformats.org/drawingml/2006/main"/>
         </p:blipFill>
         <p:spPr>
@@ -3830,7 +3830,7 @@
           <p:cNvPr id="58" name="qr-box">
             <a:extLst xmlns:a="http://schemas.openxmlformats.org/drawingml/2006/main">
               <a:ext uri="{FF2B5EF4-FFF2-40B4-BE49-F238E27FC236}">
-                <a16:creationId xmlns:a16="http://schemas.microsoft.com/office/drawing/2014/main" id="{7FE7DE80-0C0F-41B3-B1D9-66A7D2AA64BF}"/>
+                <a16:creationId xmlns:a16="http://schemas.microsoft.com/office/drawing/2014/main" id="{D9204C27-B050-4DA4-97ED-08DD741EF623}"/>
               </a:ext>
             </a:extLst>
           </p:cNvPr>
@@ -3860,14 +3860,14 @@
       </p:sp>
       <p:pic>
         <p:nvPicPr>
-          <p:cNvPr id="123" name=""/>
+          <p:cNvPr id="124" name=""/>
           <p:cNvPicPr>
             <a:picLocks xmlns:a="http://schemas.openxmlformats.org/drawingml/2006/main" noChangeAspect="1"/>
           </p:cNvPicPr>
           <p:nvPr/>
         </p:nvPicPr>
         <p:blipFill>
-          <a:blip xmlns:r="http://schemas.openxmlformats.org/officeDocument/2006/relationships" xmlns:a="http://schemas.openxmlformats.org/drawingml/2006/main" r:embed="R8b21d71c1ae8482b"/>
+          <a:blip xmlns:r="http://schemas.openxmlformats.org/officeDocument/2006/relationships" xmlns:a="http://schemas.openxmlformats.org/drawingml/2006/main" r:embed="Rb4c536cc056a44fb"/>
           <a:stretch xmlns:a="http://schemas.openxmlformats.org/drawingml/2006/main"/>
         </p:blipFill>
         <p:spPr>
@@ -3885,7 +3885,7 @@
           <p:cNvPr id="60" name="qr-label">
             <a:extLst xmlns:a="http://schemas.openxmlformats.org/drawingml/2006/main">
               <a:ext uri="{FF2B5EF4-FFF2-40B4-BE49-F238E27FC236}">
-                <a16:creationId xmlns:a16="http://schemas.microsoft.com/office/drawing/2014/main" id="{F8F0C214-E993-4CEC-B7EB-2B6B37554585}"/>
+                <a16:creationId xmlns:a16="http://schemas.microsoft.com/office/drawing/2014/main" id="{37BB7E68-CFE9-4571-93A2-A640C752A72E}"/>
               </a:ext>
             </a:extLst>
           </p:cNvPr>
@@ -3952,19 +3952,19 @@
           <p:cNvPr id="61" name="references-box">
             <a:extLst xmlns:a="http://schemas.openxmlformats.org/drawingml/2006/main">
               <a:ext uri="{FF2B5EF4-FFF2-40B4-BE49-F238E27FC236}">
-                <a16:creationId xmlns:a16="http://schemas.microsoft.com/office/drawing/2014/main" id="{7D194394-656F-48AD-BEBA-FF31FDB47B1E}"/>
-              </a:ext>
-            </a:extLst>
-          </p:cNvPr>
-          <p:cNvSpPr>
-            <a:spLocks xmlns:a="http://schemas.openxmlformats.org/drawingml/2006/main" noGrp="1"/>
-          </p:cNvSpPr>
-          <p:nvPr/>
-        </p:nvSpPr>
-        <p:spPr>
-          <a:xfrm xmlns:a="http://schemas.openxmlformats.org/drawingml/2006/main">
-            <a:off x="323850" y="12382500"/>
-            <a:ext cx="8877300" cy="857250"/>
+                <a16:creationId xmlns:a16="http://schemas.microsoft.com/office/drawing/2014/main" id="{AFF8C815-9C4D-4249-BAA5-EF11E332F397}"/>
+              </a:ext>
+            </a:extLst>
+          </p:cNvPr>
+          <p:cNvSpPr>
+            <a:spLocks xmlns:a="http://schemas.openxmlformats.org/drawingml/2006/main" noGrp="1"/>
+          </p:cNvSpPr>
+          <p:nvPr/>
+        </p:nvSpPr>
+        <p:spPr>
+          <a:xfrm xmlns:a="http://schemas.openxmlformats.org/drawingml/2006/main">
+            <a:off x="323850" y="12268200"/>
+            <a:ext cx="8877300" cy="1066800"/>
           </a:xfrm>
           <a:prstGeom xmlns:a="http://schemas.openxmlformats.org/drawingml/2006/main" prst="rect">
             <a:avLst/>
@@ -3985,18 +3985,18 @@
           <p:cNvPr id="62" name="references-title">
             <a:extLst xmlns:a="http://schemas.openxmlformats.org/drawingml/2006/main">
               <a:ext uri="{FF2B5EF4-FFF2-40B4-BE49-F238E27FC236}">
-                <a16:creationId xmlns:a16="http://schemas.microsoft.com/office/drawing/2014/main" id="{05415F6B-D5BA-4F82-815C-5D136100F12E}"/>
-              </a:ext>
-            </a:extLst>
-          </p:cNvPr>
-          <p:cNvSpPr>
-            <a:spLocks xmlns:a="http://schemas.openxmlformats.org/drawingml/2006/main" noGrp="1"/>
-          </p:cNvSpPr>
-          <p:nvPr/>
-        </p:nvSpPr>
-        <p:spPr>
-          <a:xfrm xmlns:a="http://schemas.openxmlformats.org/drawingml/2006/main">
-            <a:off x="400050" y="12449175"/>
+                <a16:creationId xmlns:a16="http://schemas.microsoft.com/office/drawing/2014/main" id="{9B717302-5795-4933-B55B-29F6B8695630}"/>
+              </a:ext>
+            </a:extLst>
+          </p:cNvPr>
+          <p:cNvSpPr>
+            <a:spLocks xmlns:a="http://schemas.openxmlformats.org/drawingml/2006/main" noGrp="1"/>
+          </p:cNvSpPr>
+          <p:nvPr/>
+        </p:nvSpPr>
+        <p:spPr>
+          <a:xfrm xmlns:a="http://schemas.openxmlformats.org/drawingml/2006/main">
+            <a:off x="400050" y="12334875"/>
             <a:ext cx="8724900" cy="171450"/>
           </a:xfrm>
           <a:prstGeom xmlns:a="http://schemas.openxmlformats.org/drawingml/2006/main" prst="rect">
@@ -4032,22 +4032,55 @@
       </p:sp>
       <p:sp>
         <p:nvSpPr>
-          <p:cNvPr id="63" name="references-body-left">
-            <a:extLst xmlns:a="http://schemas.openxmlformats.org/drawingml/2006/main">
-              <a:ext uri="{FF2B5EF4-FFF2-40B4-BE49-F238E27FC236}">
-                <a16:creationId xmlns:a16="http://schemas.microsoft.com/office/drawing/2014/main" id="{86E869F6-9AF5-42C5-8AD1-AD17303A6457}"/>
-              </a:ext>
-            </a:extLst>
-          </p:cNvPr>
-          <p:cNvSpPr>
-            <a:spLocks xmlns:a="http://schemas.openxmlformats.org/drawingml/2006/main" noGrp="1"/>
-          </p:cNvSpPr>
-          <p:nvPr/>
-        </p:nvSpPr>
-        <p:spPr>
-          <a:xfrm xmlns:a="http://schemas.openxmlformats.org/drawingml/2006/main">
-            <a:off x="400050" y="12649200"/>
-            <a:ext cx="4276725" cy="533400"/>
+          <p:cNvPr id="63" name="references-column-divider">
+            <a:extLst xmlns:a="http://schemas.openxmlformats.org/drawingml/2006/main">
+              <a:ext uri="{FF2B5EF4-FFF2-40B4-BE49-F238E27FC236}">
+                <a16:creationId xmlns:a16="http://schemas.microsoft.com/office/drawing/2014/main" id="{03513E9F-4A29-43BE-944F-690AC2287365}"/>
+              </a:ext>
+            </a:extLst>
+          </p:cNvPr>
+          <p:cNvSpPr>
+            <a:spLocks xmlns:a="http://schemas.openxmlformats.org/drawingml/2006/main" noGrp="1"/>
+          </p:cNvSpPr>
+          <p:nvPr/>
+        </p:nvSpPr>
+        <p:spPr>
+          <a:xfrm xmlns:a="http://schemas.openxmlformats.org/drawingml/2006/main">
+            <a:off x="4762500" y="12515850"/>
+            <a:ext cx="9525" cy="762000"/>
+          </a:xfrm>
+          <a:prstGeom xmlns:a="http://schemas.openxmlformats.org/drawingml/2006/main" prst="rect">
+            <a:avLst/>
+          </a:prstGeom>
+          <a:solidFill xmlns:a="http://schemas.openxmlformats.org/drawingml/2006/main">
+            <a:srgbClr val="B7D0DF"/>
+          </a:solidFill>
+          <a:ln xmlns:a="http://schemas.openxmlformats.org/drawingml/2006/main" w="9525">
+            <a:solidFill>
+              <a:srgbClr val="B7D0DF"/>
+            </a:solidFill>
+            <a:prstDash val="solid"/>
+          </a:ln>
+        </p:spPr>
+      </p:sp>
+      <p:sp>
+        <p:nvSpPr>
+          <p:cNvPr id="64" name="references-body-left">
+            <a:extLst xmlns:a="http://schemas.openxmlformats.org/drawingml/2006/main">
+              <a:ext uri="{FF2B5EF4-FFF2-40B4-BE49-F238E27FC236}">
+                <a16:creationId xmlns:a16="http://schemas.microsoft.com/office/drawing/2014/main" id="{3AF52A10-6DA0-47C7-BE59-811E9225783F}"/>
+              </a:ext>
+            </a:extLst>
+          </p:cNvPr>
+          <p:cNvSpPr>
+            <a:spLocks xmlns:a="http://schemas.openxmlformats.org/drawingml/2006/main" noGrp="1"/>
+          </p:cNvSpPr>
+          <p:nvPr/>
+        </p:nvSpPr>
+        <p:spPr>
+          <a:xfrm xmlns:a="http://schemas.openxmlformats.org/drawingml/2006/main">
+            <a:off x="400050" y="12534900"/>
+            <a:ext cx="4276725" cy="742950"/>
           </a:xfrm>
           <a:prstGeom xmlns:a="http://schemas.openxmlformats.org/drawingml/2006/main" prst="rect">
             <a:avLst/>
@@ -4063,14 +4096,14 @@
           <a:lstStyle xmlns:a="http://schemas.openxmlformats.org/drawingml/2006/main"/>
           <a:p xmlns:a="http://schemas.openxmlformats.org/drawingml/2006/main">
             <a:pPr algn="l">
-              <a:defRPr sz="368" b="0">
-                <a:solidFill>
-                  <a:srgbClr val="102536"/>
-                </a:solidFill>
-              </a:defRPr>
-            </a:pPr>
-            <a:r>
-              <a:rPr sz="368" b="0">
+              <a:defRPr sz="390" b="0">
+                <a:solidFill>
+                  <a:srgbClr val="102536"/>
+                </a:solidFill>
+              </a:defRPr>
+            </a:pPr>
+            <a:r>
+              <a:rPr sz="390" b="0">
                 <a:solidFill>
                   <a:srgbClr val="102536"/>
                 </a:solidFill>
@@ -4080,14 +4113,14 @@
           </a:p>
           <a:p xmlns:a="http://schemas.openxmlformats.org/drawingml/2006/main">
             <a:pPr algn="l">
-              <a:defRPr sz="368" b="0">
-                <a:solidFill>
-                  <a:srgbClr val="102536"/>
-                </a:solidFill>
-              </a:defRPr>
-            </a:pPr>
-            <a:r>
-              <a:rPr sz="368" b="0">
+              <a:defRPr sz="390" b="0">
+                <a:solidFill>
+                  <a:srgbClr val="102536"/>
+                </a:solidFill>
+              </a:defRPr>
+            </a:pPr>
+            <a:r>
+              <a:rPr sz="390" b="0">
                 <a:solidFill>
                   <a:srgbClr val="102536"/>
                 </a:solidFill>
@@ -4097,14 +4130,14 @@
           </a:p>
           <a:p xmlns:a="http://schemas.openxmlformats.org/drawingml/2006/main">
             <a:pPr algn="l">
-              <a:defRPr sz="368" b="0">
-                <a:solidFill>
-                  <a:srgbClr val="102536"/>
-                </a:solidFill>
-              </a:defRPr>
-            </a:pPr>
-            <a:r>
-              <a:rPr sz="368" b="0">
+              <a:defRPr sz="390" b="0">
+                <a:solidFill>
+                  <a:srgbClr val="102536"/>
+                </a:solidFill>
+              </a:defRPr>
+            </a:pPr>
+            <a:r>
+              <a:rPr sz="390" b="0">
                 <a:solidFill>
                   <a:srgbClr val="102536"/>
                 </a:solidFill>
@@ -4114,14 +4147,14 @@
           </a:p>
           <a:p xmlns:a="http://schemas.openxmlformats.org/drawingml/2006/main">
             <a:pPr algn="l">
-              <a:defRPr sz="368" b="0">
-                <a:solidFill>
-                  <a:srgbClr val="102536"/>
-                </a:solidFill>
-              </a:defRPr>
-            </a:pPr>
-            <a:r>
-              <a:rPr sz="368" b="0">
+              <a:defRPr sz="390" b="0">
+                <a:solidFill>
+                  <a:srgbClr val="102536"/>
+                </a:solidFill>
+              </a:defRPr>
+            </a:pPr>
+            <a:r>
+              <a:rPr sz="390" b="0">
                 <a:solidFill>
                   <a:srgbClr val="102536"/>
                 </a:solidFill>
@@ -4131,14 +4164,14 @@
           </a:p>
           <a:p xmlns:a="http://schemas.openxmlformats.org/drawingml/2006/main">
             <a:pPr algn="l">
-              <a:defRPr sz="368" b="0">
-                <a:solidFill>
-                  <a:srgbClr val="102536"/>
-                </a:solidFill>
-              </a:defRPr>
-            </a:pPr>
-            <a:r>
-              <a:rPr sz="368" b="0">
+              <a:defRPr sz="390" b="0">
+                <a:solidFill>
+                  <a:srgbClr val="102536"/>
+                </a:solidFill>
+              </a:defRPr>
+            </a:pPr>
+            <a:r>
+              <a:rPr sz="390" b="0">
                 <a:solidFill>
                   <a:srgbClr val="102536"/>
                 </a:solidFill>
@@ -4148,14 +4181,14 @@
           </a:p>
           <a:p xmlns:a="http://schemas.openxmlformats.org/drawingml/2006/main">
             <a:pPr algn="l">
-              <a:defRPr sz="368" b="0">
-                <a:solidFill>
-                  <a:srgbClr val="102536"/>
-                </a:solidFill>
-              </a:defRPr>
-            </a:pPr>
-            <a:r>
-              <a:rPr sz="368" b="0">
+              <a:defRPr sz="390" b="0">
+                <a:solidFill>
+                  <a:srgbClr val="102536"/>
+                </a:solidFill>
+              </a:defRPr>
+            </a:pPr>
+            <a:r>
+              <a:rPr sz="390" b="0">
                 <a:solidFill>
                   <a:srgbClr val="102536"/>
                 </a:solidFill>
@@ -4165,14 +4198,14 @@
           </a:p>
           <a:p xmlns:a="http://schemas.openxmlformats.org/drawingml/2006/main">
             <a:pPr algn="l">
-              <a:defRPr sz="368" b="0">
-                <a:solidFill>
-                  <a:srgbClr val="102536"/>
-                </a:solidFill>
-              </a:defRPr>
-            </a:pPr>
-            <a:r>
-              <a:rPr sz="368" b="0">
+              <a:defRPr sz="390" b="0">
+                <a:solidFill>
+                  <a:srgbClr val="102536"/>
+                </a:solidFill>
+              </a:defRPr>
+            </a:pPr>
+            <a:r>
+              <a:rPr sz="390" b="0">
                 <a:solidFill>
                   <a:srgbClr val="102536"/>
                 </a:solidFill>
@@ -4184,22 +4217,22 @@
       </p:sp>
       <p:sp>
         <p:nvSpPr>
-          <p:cNvPr id="64" name="references-body-right">
-            <a:extLst xmlns:a="http://schemas.openxmlformats.org/drawingml/2006/main">
-              <a:ext uri="{FF2B5EF4-FFF2-40B4-BE49-F238E27FC236}">
-                <a16:creationId xmlns:a16="http://schemas.microsoft.com/office/drawing/2014/main" id="{AE870C03-BE44-4A97-BA1D-3C1EE2AB8636}"/>
-              </a:ext>
-            </a:extLst>
-          </p:cNvPr>
-          <p:cNvSpPr>
-            <a:spLocks xmlns:a="http://schemas.openxmlformats.org/drawingml/2006/main" noGrp="1"/>
-          </p:cNvSpPr>
-          <p:nvPr/>
-        </p:nvSpPr>
-        <p:spPr>
-          <a:xfrm xmlns:a="http://schemas.openxmlformats.org/drawingml/2006/main">
-            <a:off x="4848225" y="12649200"/>
-            <a:ext cx="4276725" cy="533400"/>
+          <p:cNvPr id="65" name="references-body-right">
+            <a:extLst xmlns:a="http://schemas.openxmlformats.org/drawingml/2006/main">
+              <a:ext uri="{FF2B5EF4-FFF2-40B4-BE49-F238E27FC236}">
+                <a16:creationId xmlns:a16="http://schemas.microsoft.com/office/drawing/2014/main" id="{CDB91AD0-820B-415F-9277-14CC2A47A3F7}"/>
+              </a:ext>
+            </a:extLst>
+          </p:cNvPr>
+          <p:cNvSpPr>
+            <a:spLocks xmlns:a="http://schemas.openxmlformats.org/drawingml/2006/main" noGrp="1"/>
+          </p:cNvSpPr>
+          <p:nvPr/>
+        </p:nvSpPr>
+        <p:spPr>
+          <a:xfrm xmlns:a="http://schemas.openxmlformats.org/drawingml/2006/main">
+            <a:off x="4848225" y="12534900"/>
+            <a:ext cx="4276725" cy="742950"/>
           </a:xfrm>
           <a:prstGeom xmlns:a="http://schemas.openxmlformats.org/drawingml/2006/main" prst="rect">
             <a:avLst/>
@@ -4215,14 +4248,14 @@
           <a:lstStyle xmlns:a="http://schemas.openxmlformats.org/drawingml/2006/main"/>
           <a:p xmlns:a="http://schemas.openxmlformats.org/drawingml/2006/main">
             <a:pPr algn="l">
-              <a:defRPr sz="368" b="0">
-                <a:solidFill>
-                  <a:srgbClr val="102536"/>
-                </a:solidFill>
-              </a:defRPr>
-            </a:pPr>
-            <a:r>
-              <a:rPr sz="368" b="0">
+              <a:defRPr sz="390" b="0">
+                <a:solidFill>
+                  <a:srgbClr val="102536"/>
+                </a:solidFill>
+              </a:defRPr>
+            </a:pPr>
+            <a:r>
+              <a:rPr sz="390" b="0">
                 <a:solidFill>
                   <a:srgbClr val="102536"/>
                 </a:solidFill>
@@ -4232,14 +4265,14 @@
           </a:p>
           <a:p xmlns:a="http://schemas.openxmlformats.org/drawingml/2006/main">
             <a:pPr algn="l">
-              <a:defRPr sz="368" b="0">
-                <a:solidFill>
-                  <a:srgbClr val="102536"/>
-                </a:solidFill>
-              </a:defRPr>
-            </a:pPr>
-            <a:r>
-              <a:rPr sz="368" b="0">
+              <a:defRPr sz="390" b="0">
+                <a:solidFill>
+                  <a:srgbClr val="102536"/>
+                </a:solidFill>
+              </a:defRPr>
+            </a:pPr>
+            <a:r>
+              <a:rPr sz="390" b="0">
                 <a:solidFill>
                   <a:srgbClr val="102536"/>
                 </a:solidFill>
@@ -4249,14 +4282,14 @@
           </a:p>
           <a:p xmlns:a="http://schemas.openxmlformats.org/drawingml/2006/main">
             <a:pPr algn="l">
-              <a:defRPr sz="368" b="0">
-                <a:solidFill>
-                  <a:srgbClr val="102536"/>
-                </a:solidFill>
-              </a:defRPr>
-            </a:pPr>
-            <a:r>
-              <a:rPr sz="368" b="0">
+              <a:defRPr sz="390" b="0">
+                <a:solidFill>
+                  <a:srgbClr val="102536"/>
+                </a:solidFill>
+              </a:defRPr>
+            </a:pPr>
+            <a:r>
+              <a:rPr sz="390" b="0">
                 <a:solidFill>
                   <a:srgbClr val="102536"/>
                 </a:solidFill>
@@ -4266,14 +4299,14 @@
           </a:p>
           <a:p xmlns:a="http://schemas.openxmlformats.org/drawingml/2006/main">
             <a:pPr algn="l">
-              <a:defRPr sz="368" b="0">
-                <a:solidFill>
-                  <a:srgbClr val="102536"/>
-                </a:solidFill>
-              </a:defRPr>
-            </a:pPr>
-            <a:r>
-              <a:rPr sz="368" b="0">
+              <a:defRPr sz="390" b="0">
+                <a:solidFill>
+                  <a:srgbClr val="102536"/>
+                </a:solidFill>
+              </a:defRPr>
+            </a:pPr>
+            <a:r>
+              <a:rPr sz="390" b="0">
                 <a:solidFill>
                   <a:srgbClr val="102536"/>
                 </a:solidFill>
@@ -4283,14 +4316,14 @@
           </a:p>
           <a:p xmlns:a="http://schemas.openxmlformats.org/drawingml/2006/main">
             <a:pPr algn="l">
-              <a:defRPr sz="368" b="0">
-                <a:solidFill>
-                  <a:srgbClr val="102536"/>
-                </a:solidFill>
-              </a:defRPr>
-            </a:pPr>
-            <a:r>
-              <a:rPr sz="368" b="0">
+              <a:defRPr sz="390" b="0">
+                <a:solidFill>
+                  <a:srgbClr val="102536"/>
+                </a:solidFill>
+              </a:defRPr>
+            </a:pPr>
+            <a:r>
+              <a:rPr sz="390" b="0">
                 <a:solidFill>
                   <a:srgbClr val="102536"/>
                 </a:solidFill>
@@ -4300,14 +4333,14 @@
           </a:p>
           <a:p xmlns:a="http://schemas.openxmlformats.org/drawingml/2006/main">
             <a:pPr algn="l">
-              <a:defRPr sz="368" b="0">
-                <a:solidFill>
-                  <a:srgbClr val="102536"/>
-                </a:solidFill>
-              </a:defRPr>
-            </a:pPr>
-            <a:r>
-              <a:rPr sz="368" b="0">
+              <a:defRPr sz="390" b="0">
+                <a:solidFill>
+                  <a:srgbClr val="102536"/>
+                </a:solidFill>
+              </a:defRPr>
+            </a:pPr>
+            <a:r>
+              <a:rPr sz="390" b="0">
                 <a:solidFill>
                   <a:srgbClr val="102536"/>
                 </a:solidFill>
@@ -4320,7 +4353,7 @@
     </p:spTree>
     <p:extLst>
       <p:ext uri="{BB962C8B-B14F-4D97-AF65-F5344CB8AC3E}">
-        <p14:creationId xmlns:p14="http://schemas.microsoft.com/office/powerpoint/2010/main" val="1463940537"/>
+        <p14:creationId xmlns:p14="http://schemas.microsoft.com/office/powerpoint/2010/main" val="180333981"/>
       </p:ext>
     </p:extLst>
   </p:cSld>

--- a/outputs/posters/poster_pns_asma_morrison_pt.pptx
+++ b/outputs/posters/poster_pns_asma_morrison_pt.pptx
@@ -2,13 +2,13 @@
 <file path=ppt/presentation.xml><?xml version="1.0" encoding="utf-8"?>
 <p:presentation xmlns:p="http://schemas.openxmlformats.org/presentationml/2006/main">
   <p:sldMasterIdLst>
-    <p:sldMasterId xmlns:r="http://schemas.openxmlformats.org/officeDocument/2006/relationships" id="2147483648" r:id="Rf6364473e7154697"/>
+    <p:sldMasterId xmlns:r="http://schemas.openxmlformats.org/officeDocument/2006/relationships" id="2147483648" r:id="Rf72633087fc64a07"/>
   </p:sldMasterIdLst>
   <p:notesMasterIdLst>
-    <p:notesMasterId xmlns:r="http://schemas.openxmlformats.org/officeDocument/2006/relationships" r:id="R526eaabf8b8042ff"/>
+    <p:notesMasterId xmlns:r="http://schemas.openxmlformats.org/officeDocument/2006/relationships" r:id="R69deb99d13a0442d"/>
   </p:notesMasterIdLst>
   <p:sldIdLst>
-    <p:sldId xmlns:r="http://schemas.openxmlformats.org/officeDocument/2006/relationships" id="256" r:id="R2e78368a34434056"/>
+    <p:sldId xmlns:r="http://schemas.openxmlformats.org/officeDocument/2006/relationships" id="256" r:id="R5bd04daf82604608"/>
   </p:sldIdLst>
   <p:sldSz cx="9525000" cy="13468350"/>
   <p:notesSz cx="6858000" cy="9144000"/>
@@ -601,7 +601,7 @@
   </p:cSld>
   <p:clrMap bg1="lt1" tx1="dk1" bg2="lt2" tx2="dk2" accent1="accent1" accent2="accent2" accent3="accent3" accent4="accent4" accent5="accent5" accent6="accent6" hlink="hlink" folHlink="folHlink"/>
   <p:sldLayoutIdLst>
-    <p:sldLayoutId xmlns:r="http://schemas.openxmlformats.org/officeDocument/2006/relationships" id="2147483649" r:id="R52f151f9680a46fc"/>
+    <p:sldLayoutId xmlns:r="http://schemas.openxmlformats.org/officeDocument/2006/relationships" id="2147483649" r:id="Ra0df30ed6af4460a"/>
   </p:sldLayoutIdLst>
   <p:txStyles>
     <p:titleStyle>
@@ -1156,7 +1156,7 @@
           <p:nvPr/>
         </p:nvPicPr>
         <p:blipFill>
-          <a:blip xmlns:r="http://schemas.openxmlformats.org/officeDocument/2006/relationships" xmlns:a="http://schemas.openxmlformats.org/drawingml/2006/main" r:embed="R9775eb5e54e04607"/>
+          <a:blip xmlns:r="http://schemas.openxmlformats.org/officeDocument/2006/relationships" xmlns:a="http://schemas.openxmlformats.org/drawingml/2006/main" r:embed="R520e481d81a54c55"/>
           <a:srcRect xmlns:a="http://schemas.openxmlformats.org/drawingml/2006/main" l="0" t="38622" r="0" b="38622"/>
           <a:stretch xmlns:a="http://schemas.openxmlformats.org/drawingml/2006/main">
             <a:fillRect l="0" t="0" r="0" b="0"/>
@@ -1181,7 +1181,7 @@
           <p:nvPr/>
         </p:nvPicPr>
         <p:blipFill>
-          <a:blip xmlns:r="http://schemas.openxmlformats.org/officeDocument/2006/relationships" xmlns:a="http://schemas.openxmlformats.org/drawingml/2006/main" r:embed="R6eab862564294803"/>
+          <a:blip xmlns:r="http://schemas.openxmlformats.org/officeDocument/2006/relationships" xmlns:a="http://schemas.openxmlformats.org/drawingml/2006/main" r:embed="R56fae24eda4148c6"/>
           <a:stretch xmlns:a="http://schemas.openxmlformats.org/drawingml/2006/main"/>
         </p:blipFill>
         <p:spPr>
@@ -1203,7 +1203,7 @@
           <p:nvPr/>
         </p:nvPicPr>
         <p:blipFill>
-          <a:blip xmlns:r="http://schemas.openxmlformats.org/officeDocument/2006/relationships" xmlns:a="http://schemas.openxmlformats.org/drawingml/2006/main" r:embed="Rd25bc0feeda04874"/>
+          <a:blip xmlns:r="http://schemas.openxmlformats.org/officeDocument/2006/relationships" xmlns:a="http://schemas.openxmlformats.org/drawingml/2006/main" r:embed="R520172fda7a44012"/>
           <a:stretch xmlns:a="http://schemas.openxmlformats.org/drawingml/2006/main"/>
         </p:blipFill>
         <p:spPr>
@@ -1221,7 +1221,7 @@
           <p:cNvPr id="4" name="morrison-title">
             <a:extLst xmlns:a="http://schemas.openxmlformats.org/drawingml/2006/main">
               <a:ext uri="{FF2B5EF4-FFF2-40B4-BE49-F238E27FC236}">
-                <a16:creationId xmlns:a16="http://schemas.microsoft.com/office/drawing/2014/main" id="{D19320E0-3D44-402B-BBB3-798518CC3366}"/>
+                <a16:creationId xmlns:a16="http://schemas.microsoft.com/office/drawing/2014/main" id="{ED076812-71CA-45F5-9E4D-320A1AB1B10D}"/>
               </a:ext>
             </a:extLst>
           </p:cNvPr>
@@ -1271,7 +1271,7 @@
           <p:cNvPr id="5" name="morrison-authors">
             <a:extLst xmlns:a="http://schemas.openxmlformats.org/drawingml/2006/main">
               <a:ext uri="{FF2B5EF4-FFF2-40B4-BE49-F238E27FC236}">
-                <a16:creationId xmlns:a16="http://schemas.microsoft.com/office/drawing/2014/main" id="{1401A722-775C-4EA7-9F78-6A4466BD5AE4}"/>
+                <a16:creationId xmlns:a16="http://schemas.microsoft.com/office/drawing/2014/main" id="{F2BAFA1C-C02F-40CD-B431-1A4A69171DD1}"/>
               </a:ext>
             </a:extLst>
           </p:cNvPr>
@@ -1321,7 +1321,7 @@
           <p:cNvPr id="6" name="central-message">
             <a:extLst xmlns:a="http://schemas.openxmlformats.org/drawingml/2006/main">
               <a:ext uri="{FF2B5EF4-FFF2-40B4-BE49-F238E27FC236}">
-                <a16:creationId xmlns:a16="http://schemas.microsoft.com/office/drawing/2014/main" id="{A960F45A-939C-4348-AEBC-9738F6255EFC}"/>
+                <a16:creationId xmlns:a16="http://schemas.microsoft.com/office/drawing/2014/main" id="{81B814DB-C3A4-44A8-BBA7-1FA6F0C21B43}"/>
               </a:ext>
             </a:extLst>
           </p:cNvPr>
@@ -1375,7 +1375,7 @@
           <p:cNvPr id="7" name="1-Método em uma linha-box">
             <a:extLst xmlns:a="http://schemas.openxmlformats.org/drawingml/2006/main">
               <a:ext uri="{FF2B5EF4-FFF2-40B4-BE49-F238E27FC236}">
-                <a16:creationId xmlns:a16="http://schemas.microsoft.com/office/drawing/2014/main" id="{DC2A6A4D-D454-4B91-AD8E-C8F6DF1D31B7}"/>
+                <a16:creationId xmlns:a16="http://schemas.microsoft.com/office/drawing/2014/main" id="{AE9AFBE2-BF10-4E45-909B-C9D3E572B501}"/>
               </a:ext>
             </a:extLst>
           </p:cNvPr>
@@ -1408,7 +1408,7 @@
           <p:cNvPr id="8" name="1-Método em uma linha-head">
             <a:extLst xmlns:a="http://schemas.openxmlformats.org/drawingml/2006/main">
               <a:ext uri="{FF2B5EF4-FFF2-40B4-BE49-F238E27FC236}">
-                <a16:creationId xmlns:a16="http://schemas.microsoft.com/office/drawing/2014/main" id="{6738FC26-BF0A-47A0-94D5-99E9F0232857}"/>
+                <a16:creationId xmlns:a16="http://schemas.microsoft.com/office/drawing/2014/main" id="{36D06F60-69A8-40AD-A6E6-BC512895A1AC}"/>
               </a:ext>
             </a:extLst>
           </p:cNvPr>
@@ -1441,7 +1441,7 @@
           <p:cNvPr id="9" name="1-Método em uma linha-title">
             <a:extLst xmlns:a="http://schemas.openxmlformats.org/drawingml/2006/main">
               <a:ext uri="{FF2B5EF4-FFF2-40B4-BE49-F238E27FC236}">
-                <a16:creationId xmlns:a16="http://schemas.microsoft.com/office/drawing/2014/main" id="{91E89243-3396-48E0-8988-C4CE6AFB17C7}"/>
+                <a16:creationId xmlns:a16="http://schemas.microsoft.com/office/drawing/2014/main" id="{D0466108-2A89-4544-ABD0-8BFBA03259B1}"/>
               </a:ext>
             </a:extLst>
           </p:cNvPr>
@@ -1491,7 +1491,7 @@
           <p:cNvPr id="10" name="1-Método em uma linha-body">
             <a:extLst xmlns:a="http://schemas.openxmlformats.org/drawingml/2006/main">
               <a:ext uri="{FF2B5EF4-FFF2-40B4-BE49-F238E27FC236}">
-                <a16:creationId xmlns:a16="http://schemas.microsoft.com/office/drawing/2014/main" id="{EA699530-2CC1-4E57-AC99-5611E3246DC0}"/>
+                <a16:creationId xmlns:a16="http://schemas.microsoft.com/office/drawing/2014/main" id="{EF2BDEBD-17FB-4252-9F3A-1DAD34B96CEE}"/>
               </a:ext>
             </a:extLst>
           </p:cNvPr>
@@ -1592,7 +1592,7 @@
           <p:cNvPr id="11" name="morrison-formula-box">
             <a:extLst xmlns:a="http://schemas.openxmlformats.org/drawingml/2006/main">
               <a:ext uri="{FF2B5EF4-FFF2-40B4-BE49-F238E27FC236}">
-                <a16:creationId xmlns:a16="http://schemas.microsoft.com/office/drawing/2014/main" id="{6E82FDB5-AAF7-496A-AEF7-4E05D77BF5D5}"/>
+                <a16:creationId xmlns:a16="http://schemas.microsoft.com/office/drawing/2014/main" id="{DCC153F8-CF78-472F-98F2-FE77FB55AD33}"/>
               </a:ext>
             </a:extLst>
           </p:cNvPr>
@@ -1625,7 +1625,7 @@
           <p:cNvPr id="12" name="morrison-formula-title">
             <a:extLst xmlns:a="http://schemas.openxmlformats.org/drawingml/2006/main">
               <a:ext uri="{FF2B5EF4-FFF2-40B4-BE49-F238E27FC236}">
-                <a16:creationId xmlns:a16="http://schemas.microsoft.com/office/drawing/2014/main" id="{3CF8834F-954E-4B42-A60A-64F9936FB952}"/>
+                <a16:creationId xmlns:a16="http://schemas.microsoft.com/office/drawing/2014/main" id="{163D7F39-FCE8-4D06-9EB8-13A52386E8B2}"/>
               </a:ext>
             </a:extLst>
           </p:cNvPr>
@@ -1675,7 +1675,7 @@
           <p:cNvPr id="13" name="morrison-formula">
             <a:extLst xmlns:a="http://schemas.openxmlformats.org/drawingml/2006/main">
               <a:ext uri="{FF2B5EF4-FFF2-40B4-BE49-F238E27FC236}">
-                <a16:creationId xmlns:a16="http://schemas.microsoft.com/office/drawing/2014/main" id="{CBA92F1C-B837-42AD-9944-65349ADF6C41}"/>
+                <a16:creationId xmlns:a16="http://schemas.microsoft.com/office/drawing/2014/main" id="{D7401B21-E117-4181-9D24-C0056C0C74A3}"/>
               </a:ext>
             </a:extLst>
           </p:cNvPr>
@@ -1793,7 +1793,7 @@
           <p:cNvPr id="14" name="2-Dados e denominadores-box">
             <a:extLst xmlns:a="http://schemas.openxmlformats.org/drawingml/2006/main">
               <a:ext uri="{FF2B5EF4-FFF2-40B4-BE49-F238E27FC236}">
-                <a16:creationId xmlns:a16="http://schemas.microsoft.com/office/drawing/2014/main" id="{271E4875-CC88-4451-AC2E-ED62277892E2}"/>
+                <a16:creationId xmlns:a16="http://schemas.microsoft.com/office/drawing/2014/main" id="{9059625C-62D1-4CA3-B6C5-9ED1F127C0DA}"/>
               </a:ext>
             </a:extLst>
           </p:cNvPr>
@@ -1826,7 +1826,7 @@
           <p:cNvPr id="15" name="2-Dados e denominadores-head">
             <a:extLst xmlns:a="http://schemas.openxmlformats.org/drawingml/2006/main">
               <a:ext uri="{FF2B5EF4-FFF2-40B4-BE49-F238E27FC236}">
-                <a16:creationId xmlns:a16="http://schemas.microsoft.com/office/drawing/2014/main" id="{7352C448-B89F-459F-8AC0-18596D23C80B}"/>
+                <a16:creationId xmlns:a16="http://schemas.microsoft.com/office/drawing/2014/main" id="{328D3FCC-D8A2-41AA-9F18-CA99A944717E}"/>
               </a:ext>
             </a:extLst>
           </p:cNvPr>
@@ -1859,7 +1859,7 @@
           <p:cNvPr id="16" name="2-Dados e denominadores-title">
             <a:extLst xmlns:a="http://schemas.openxmlformats.org/drawingml/2006/main">
               <a:ext uri="{FF2B5EF4-FFF2-40B4-BE49-F238E27FC236}">
-                <a16:creationId xmlns:a16="http://schemas.microsoft.com/office/drawing/2014/main" id="{F5EF8476-1789-4940-A6FA-D2D1AA4530EE}"/>
+                <a16:creationId xmlns:a16="http://schemas.microsoft.com/office/drawing/2014/main" id="{B61AF34B-34EA-4EBD-B2C1-DB15659467C6}"/>
               </a:ext>
             </a:extLst>
           </p:cNvPr>
@@ -1909,7 +1909,7 @@
           <p:cNvPr id="17" name="2-Dados e denominadores-body">
             <a:extLst xmlns:a="http://schemas.openxmlformats.org/drawingml/2006/main">
               <a:ext uri="{FF2B5EF4-FFF2-40B4-BE49-F238E27FC236}">
-                <a16:creationId xmlns:a16="http://schemas.microsoft.com/office/drawing/2014/main" id="{8CA918A4-AB22-4B25-AF79-30EAFB07A5DC}"/>
+                <a16:creationId xmlns:a16="http://schemas.microsoft.com/office/drawing/2014/main" id="{C5513213-81EE-4267-AD9C-D3FEAB8F7CD0}"/>
               </a:ext>
             </a:extLst>
           </p:cNvPr>
@@ -1993,7 +1993,7 @@
           <p:cNvPr id="18" name="3-Por que IC beta?-box">
             <a:extLst xmlns:a="http://schemas.openxmlformats.org/drawingml/2006/main">
               <a:ext uri="{FF2B5EF4-FFF2-40B4-BE49-F238E27FC236}">
-                <a16:creationId xmlns:a16="http://schemas.microsoft.com/office/drawing/2014/main" id="{3A233A00-EDAE-4814-BC93-7F2285B76C11}"/>
+                <a16:creationId xmlns:a16="http://schemas.microsoft.com/office/drawing/2014/main" id="{902E9DDB-DE8F-4AD1-B830-A57EDFFF57A7}"/>
               </a:ext>
             </a:extLst>
           </p:cNvPr>
@@ -2026,7 +2026,7 @@
           <p:cNvPr id="19" name="3-Por que IC beta?-head">
             <a:extLst xmlns:a="http://schemas.openxmlformats.org/drawingml/2006/main">
               <a:ext uri="{FF2B5EF4-FFF2-40B4-BE49-F238E27FC236}">
-                <a16:creationId xmlns:a16="http://schemas.microsoft.com/office/drawing/2014/main" id="{BF727755-80B3-437E-B8AF-6E732EDC2EDA}"/>
+                <a16:creationId xmlns:a16="http://schemas.microsoft.com/office/drawing/2014/main" id="{8BD1B0F0-113C-4D43-B89A-97588EAADDE3}"/>
               </a:ext>
             </a:extLst>
           </p:cNvPr>
@@ -2059,7 +2059,7 @@
           <p:cNvPr id="20" name="3-Por que IC beta?-title">
             <a:extLst xmlns:a="http://schemas.openxmlformats.org/drawingml/2006/main">
               <a:ext uri="{FF2B5EF4-FFF2-40B4-BE49-F238E27FC236}">
-                <a16:creationId xmlns:a16="http://schemas.microsoft.com/office/drawing/2014/main" id="{26BF68C1-8A91-40C7-AF90-ED0BDA016DBD}"/>
+                <a16:creationId xmlns:a16="http://schemas.microsoft.com/office/drawing/2014/main" id="{F2D8F094-626C-488A-8ADE-C52903CA720C}"/>
               </a:ext>
             </a:extLst>
           </p:cNvPr>
@@ -2109,7 +2109,7 @@
           <p:cNvPr id="21" name="3-Por que IC beta?-body">
             <a:extLst xmlns:a="http://schemas.openxmlformats.org/drawingml/2006/main">
               <a:ext uri="{FF2B5EF4-FFF2-40B4-BE49-F238E27FC236}">
-                <a16:creationId xmlns:a16="http://schemas.microsoft.com/office/drawing/2014/main" id="{9039BA9B-9226-4713-A7AC-492BFF8603B7}"/>
+                <a16:creationId xmlns:a16="http://schemas.microsoft.com/office/drawing/2014/main" id="{6AE77983-67D4-462E-8B47-57FD71AD8A5D}"/>
               </a:ext>
             </a:extLst>
           </p:cNvPr>
@@ -2193,7 +2193,7 @@
           <p:cNvPr id="22" name="4-ETL e interoperabilidade-box">
             <a:extLst xmlns:a="http://schemas.openxmlformats.org/drawingml/2006/main">
               <a:ext uri="{FF2B5EF4-FFF2-40B4-BE49-F238E27FC236}">
-                <a16:creationId xmlns:a16="http://schemas.microsoft.com/office/drawing/2014/main" id="{79D95445-525C-497B-A4D3-7FD8B76854B8}"/>
+                <a16:creationId xmlns:a16="http://schemas.microsoft.com/office/drawing/2014/main" id="{D1B7D285-0403-4DF4-BC33-CD4249DF268D}"/>
               </a:ext>
             </a:extLst>
           </p:cNvPr>
@@ -2226,7 +2226,7 @@
           <p:cNvPr id="23" name="4-ETL e interoperabilidade-head">
             <a:extLst xmlns:a="http://schemas.openxmlformats.org/drawingml/2006/main">
               <a:ext uri="{FF2B5EF4-FFF2-40B4-BE49-F238E27FC236}">
-                <a16:creationId xmlns:a16="http://schemas.microsoft.com/office/drawing/2014/main" id="{5B1C2275-D958-43BE-A80B-5F0D5BFFD854}"/>
+                <a16:creationId xmlns:a16="http://schemas.microsoft.com/office/drawing/2014/main" id="{AC59B05B-2A44-4902-9679-A8158DCF42BC}"/>
               </a:ext>
             </a:extLst>
           </p:cNvPr>
@@ -2259,7 +2259,7 @@
           <p:cNvPr id="24" name="4-ETL e interoperabilidade-title">
             <a:extLst xmlns:a="http://schemas.openxmlformats.org/drawingml/2006/main">
               <a:ext uri="{FF2B5EF4-FFF2-40B4-BE49-F238E27FC236}">
-                <a16:creationId xmlns:a16="http://schemas.microsoft.com/office/drawing/2014/main" id="{99A1D20F-32E9-4FDE-8344-A43B1343AB94}"/>
+                <a16:creationId xmlns:a16="http://schemas.microsoft.com/office/drawing/2014/main" id="{9B5BABA5-F2C1-4F67-BEA8-A20665F9C187}"/>
               </a:ext>
             </a:extLst>
           </p:cNvPr>
@@ -2309,7 +2309,7 @@
           <p:cNvPr id="25" name="4-ETL e interoperabilidade-body">
             <a:extLst xmlns:a="http://schemas.openxmlformats.org/drawingml/2006/main">
               <a:ext uri="{FF2B5EF4-FFF2-40B4-BE49-F238E27FC236}">
-                <a16:creationId xmlns:a16="http://schemas.microsoft.com/office/drawing/2014/main" id="{F83D4892-7367-41D9-B9C7-F4E8FAB38F0F}"/>
+                <a16:creationId xmlns:a16="http://schemas.microsoft.com/office/drawing/2014/main" id="{2FCB5CB9-3C45-4179-95D1-AC3D763C1C5F}"/>
               </a:ext>
             </a:extLst>
           </p:cNvPr>
@@ -2393,7 +2393,7 @@
           <p:cNvPr id="26" name="m-prev-metric">
             <a:extLst xmlns:a="http://schemas.openxmlformats.org/drawingml/2006/main">
               <a:ext uri="{FF2B5EF4-FFF2-40B4-BE49-F238E27FC236}">
-                <a16:creationId xmlns:a16="http://schemas.microsoft.com/office/drawing/2014/main" id="{A66DEDA4-1D80-47FB-B175-3BA4ADA456D1}"/>
+                <a16:creationId xmlns:a16="http://schemas.microsoft.com/office/drawing/2014/main" id="{CDC4002C-34B6-449B-B03B-357C8F7E2F99}"/>
               </a:ext>
             </a:extLst>
           </p:cNvPr>
@@ -2426,7 +2426,7 @@
           <p:cNvPr id="27" name="m-prev-metric-title">
             <a:extLst xmlns:a="http://schemas.openxmlformats.org/drawingml/2006/main">
               <a:ext uri="{FF2B5EF4-FFF2-40B4-BE49-F238E27FC236}">
-                <a16:creationId xmlns:a16="http://schemas.microsoft.com/office/drawing/2014/main" id="{35E85861-E734-439E-A930-79A4B88E9644}"/>
+                <a16:creationId xmlns:a16="http://schemas.microsoft.com/office/drawing/2014/main" id="{C547065C-F64C-473B-BC43-37BA997E5C82}"/>
               </a:ext>
             </a:extLst>
           </p:cNvPr>
@@ -2476,7 +2476,7 @@
           <p:cNvPr id="28" name="m-prev-metric-value">
             <a:extLst xmlns:a="http://schemas.openxmlformats.org/drawingml/2006/main">
               <a:ext uri="{FF2B5EF4-FFF2-40B4-BE49-F238E27FC236}">
-                <a16:creationId xmlns:a16="http://schemas.microsoft.com/office/drawing/2014/main" id="{650DEEAE-CE20-4578-9EB9-041E4595BB2E}"/>
+                <a16:creationId xmlns:a16="http://schemas.microsoft.com/office/drawing/2014/main" id="{72495F01-389B-45C3-A1FD-605312411C2A}"/>
               </a:ext>
             </a:extLst>
           </p:cNvPr>
@@ -2526,7 +2526,7 @@
           <p:cNvPr id="29" name="m-prev-metric-note">
             <a:extLst xmlns:a="http://schemas.openxmlformats.org/drawingml/2006/main">
               <a:ext uri="{FF2B5EF4-FFF2-40B4-BE49-F238E27FC236}">
-                <a16:creationId xmlns:a16="http://schemas.microsoft.com/office/drawing/2014/main" id="{CB53C0C0-FB00-46C9-B047-0B2E43F95081}"/>
+                <a16:creationId xmlns:a16="http://schemas.microsoft.com/office/drawing/2014/main" id="{073C1C0A-B6BB-46CF-8E90-524A4FCD7171}"/>
               </a:ext>
             </a:extLst>
           </p:cNvPr>
@@ -2576,7 +2576,7 @@
           <p:cNvPr id="30" name="m-crisis-metric">
             <a:extLst xmlns:a="http://schemas.openxmlformats.org/drawingml/2006/main">
               <a:ext uri="{FF2B5EF4-FFF2-40B4-BE49-F238E27FC236}">
-                <a16:creationId xmlns:a16="http://schemas.microsoft.com/office/drawing/2014/main" id="{9011F2E8-1F43-41A5-BB8C-7532E146B768}"/>
+                <a16:creationId xmlns:a16="http://schemas.microsoft.com/office/drawing/2014/main" id="{F7A2E38B-D945-4255-9938-42DB914EBE91}"/>
               </a:ext>
             </a:extLst>
           </p:cNvPr>
@@ -2609,7 +2609,7 @@
           <p:cNvPr id="31" name="m-crisis-metric-title">
             <a:extLst xmlns:a="http://schemas.openxmlformats.org/drawingml/2006/main">
               <a:ext uri="{FF2B5EF4-FFF2-40B4-BE49-F238E27FC236}">
-                <a16:creationId xmlns:a16="http://schemas.microsoft.com/office/drawing/2014/main" id="{35CF6526-295E-42DF-8467-E3C56BE136EB}"/>
+                <a16:creationId xmlns:a16="http://schemas.microsoft.com/office/drawing/2014/main" id="{B5BFB124-531E-449B-95BE-6D4BDB80D1BB}"/>
               </a:ext>
             </a:extLst>
           </p:cNvPr>
@@ -2659,7 +2659,7 @@
           <p:cNvPr id="32" name="m-crisis-metric-value">
             <a:extLst xmlns:a="http://schemas.openxmlformats.org/drawingml/2006/main">
               <a:ext uri="{FF2B5EF4-FFF2-40B4-BE49-F238E27FC236}">
-                <a16:creationId xmlns:a16="http://schemas.microsoft.com/office/drawing/2014/main" id="{06BCD70C-DFD3-4FB5-BDCB-F3A56C659CBD}"/>
+                <a16:creationId xmlns:a16="http://schemas.microsoft.com/office/drawing/2014/main" id="{C2C0EA6C-1D1D-4B1B-A609-CF2FDC085FC8}"/>
               </a:ext>
             </a:extLst>
           </p:cNvPr>
@@ -2709,7 +2709,7 @@
           <p:cNvPr id="33" name="m-crisis-metric-note">
             <a:extLst xmlns:a="http://schemas.openxmlformats.org/drawingml/2006/main">
               <a:ext uri="{FF2B5EF4-FFF2-40B4-BE49-F238E27FC236}">
-                <a16:creationId xmlns:a16="http://schemas.microsoft.com/office/drawing/2014/main" id="{879C9DBB-724E-442E-9374-53085ACECBAB}"/>
+                <a16:creationId xmlns:a16="http://schemas.microsoft.com/office/drawing/2014/main" id="{66F5C5B6-A35E-43DD-8CBC-CB5806730BD5}"/>
               </a:ext>
             </a:extLst>
           </p:cNvPr>
@@ -2759,7 +2759,7 @@
           <p:cNvPr id="34" name="m-meds-metric">
             <a:extLst xmlns:a="http://schemas.openxmlformats.org/drawingml/2006/main">
               <a:ext uri="{FF2B5EF4-FFF2-40B4-BE49-F238E27FC236}">
-                <a16:creationId xmlns:a16="http://schemas.microsoft.com/office/drawing/2014/main" id="{6CCF1044-4275-4B33-A5A8-1D2623345201}"/>
+                <a16:creationId xmlns:a16="http://schemas.microsoft.com/office/drawing/2014/main" id="{5A6EF800-83E1-47C2-85C1-E7A73688397F}"/>
               </a:ext>
             </a:extLst>
           </p:cNvPr>
@@ -2792,7 +2792,7 @@
           <p:cNvPr id="35" name="m-meds-metric-title">
             <a:extLst xmlns:a="http://schemas.openxmlformats.org/drawingml/2006/main">
               <a:ext uri="{FF2B5EF4-FFF2-40B4-BE49-F238E27FC236}">
-                <a16:creationId xmlns:a16="http://schemas.microsoft.com/office/drawing/2014/main" id="{3DA7B81A-61A2-4E55-AC01-5EE0D722F20F}"/>
+                <a16:creationId xmlns:a16="http://schemas.microsoft.com/office/drawing/2014/main" id="{CFD761EA-56DB-4723-A06E-2F7A6098C707}"/>
               </a:ext>
             </a:extLst>
           </p:cNvPr>
@@ -2842,7 +2842,7 @@
           <p:cNvPr id="36" name="m-meds-metric-value">
             <a:extLst xmlns:a="http://schemas.openxmlformats.org/drawingml/2006/main">
               <a:ext uri="{FF2B5EF4-FFF2-40B4-BE49-F238E27FC236}">
-                <a16:creationId xmlns:a16="http://schemas.microsoft.com/office/drawing/2014/main" id="{CC2CD425-689D-43B3-9759-B6FAB53CFB10}"/>
+                <a16:creationId xmlns:a16="http://schemas.microsoft.com/office/drawing/2014/main" id="{607AFE6F-2696-4038-BBDD-E46BEC909D19}"/>
               </a:ext>
             </a:extLst>
           </p:cNvPr>
@@ -2892,7 +2892,7 @@
           <p:cNvPr id="37" name="m-meds-metric-note">
             <a:extLst xmlns:a="http://schemas.openxmlformats.org/drawingml/2006/main">
               <a:ext uri="{FF2B5EF4-FFF2-40B4-BE49-F238E27FC236}">
-                <a16:creationId xmlns:a16="http://schemas.microsoft.com/office/drawing/2014/main" id="{BADB289E-F605-4631-98E8-02E59C95E319}"/>
+                <a16:creationId xmlns:a16="http://schemas.microsoft.com/office/drawing/2014/main" id="{6A1DFA96-5DF1-4033-9EB0-123274788CCC}"/>
               </a:ext>
             </a:extLst>
           </p:cNvPr>
@@ -2942,7 +2942,7 @@
           <p:cNvPr id="38" name="m-chart-prev-caption">
             <a:extLst xmlns:a="http://schemas.openxmlformats.org/drawingml/2006/main">
               <a:ext uri="{FF2B5EF4-FFF2-40B4-BE49-F238E27FC236}">
-                <a16:creationId xmlns:a16="http://schemas.microsoft.com/office/drawing/2014/main" id="{008C9D9C-B88F-4BD6-BCC0-E72F8D14DF6D}"/>
+                <a16:creationId xmlns:a16="http://schemas.microsoft.com/office/drawing/2014/main" id="{11DD7011-BDB7-4602-B94F-B54856193C72}"/>
               </a:ext>
             </a:extLst>
           </p:cNvPr>
@@ -2992,7 +2992,7 @@
           <p:cNvPr id="39" name="m-chart-prev-frame">
             <a:extLst xmlns:a="http://schemas.openxmlformats.org/drawingml/2006/main">
               <a:ext uri="{FF2B5EF4-FFF2-40B4-BE49-F238E27FC236}">
-                <a16:creationId xmlns:a16="http://schemas.microsoft.com/office/drawing/2014/main" id="{5F42EAE7-FA26-4BFC-A444-ED2239DEDA48}"/>
+                <a16:creationId xmlns:a16="http://schemas.microsoft.com/office/drawing/2014/main" id="{95B764C1-34EC-4437-BBFE-0C7138484192}"/>
               </a:ext>
             </a:extLst>
           </p:cNvPr>
@@ -3029,7 +3029,7 @@
           <p:nvPr/>
         </p:nvPicPr>
         <p:blipFill>
-          <a:blip xmlns:r="http://schemas.openxmlformats.org/officeDocument/2006/relationships" xmlns:a="http://schemas.openxmlformats.org/drawingml/2006/main" r:embed="R35b76420eae04ac9"/>
+          <a:blip xmlns:r="http://schemas.openxmlformats.org/officeDocument/2006/relationships" xmlns:a="http://schemas.openxmlformats.org/drawingml/2006/main" r:embed="Rac61da0692e143a9"/>
           <a:stretch xmlns:a="http://schemas.openxmlformats.org/drawingml/2006/main"/>
         </p:blipFill>
         <p:spPr>
@@ -3047,7 +3047,7 @@
           <p:cNvPr id="41" name="m-chart-meds-caption">
             <a:extLst xmlns:a="http://schemas.openxmlformats.org/drawingml/2006/main">
               <a:ext uri="{FF2B5EF4-FFF2-40B4-BE49-F238E27FC236}">
-                <a16:creationId xmlns:a16="http://schemas.microsoft.com/office/drawing/2014/main" id="{F30A9BD1-01A4-4005-915E-0C6621FDD64B}"/>
+                <a16:creationId xmlns:a16="http://schemas.microsoft.com/office/drawing/2014/main" id="{A1B72FAC-4495-40E4-A302-F6887F912F5D}"/>
               </a:ext>
             </a:extLst>
           </p:cNvPr>
@@ -3097,7 +3097,7 @@
           <p:cNvPr id="42" name="m-chart-meds-frame">
             <a:extLst xmlns:a="http://schemas.openxmlformats.org/drawingml/2006/main">
               <a:ext uri="{FF2B5EF4-FFF2-40B4-BE49-F238E27FC236}">
-                <a16:creationId xmlns:a16="http://schemas.microsoft.com/office/drawing/2014/main" id="{8DEF8BAE-B22C-4BDA-8DBA-F8E21092A393}"/>
+                <a16:creationId xmlns:a16="http://schemas.microsoft.com/office/drawing/2014/main" id="{9E4E2AC4-0535-4CF4-ADED-0887A7CF03B0}"/>
               </a:ext>
             </a:extLst>
           </p:cNvPr>
@@ -3134,13 +3134,13 @@
           <p:nvPr/>
         </p:nvPicPr>
         <p:blipFill>
-          <a:blip xmlns:r="http://schemas.openxmlformats.org/officeDocument/2006/relationships" xmlns:a="http://schemas.openxmlformats.org/drawingml/2006/main" r:embed="Rb6a9738b16dc4944"/>
+          <a:blip xmlns:r="http://schemas.openxmlformats.org/officeDocument/2006/relationships" xmlns:a="http://schemas.openxmlformats.org/drawingml/2006/main" r:embed="R2d791f2bbc7543eb"/>
           <a:stretch xmlns:a="http://schemas.openxmlformats.org/drawingml/2006/main"/>
         </p:blipFill>
         <p:spPr>
           <a:xfrm xmlns:a="http://schemas.openxmlformats.org/drawingml/2006/main">
-            <a:off x="3480513" y="7143750"/>
-            <a:ext cx="3040224" cy="2190750"/>
+            <a:off x="3464428" y="7143750"/>
+            <a:ext cx="3072393" cy="2190750"/>
           </a:xfrm>
           <a:prstGeom xmlns:a="http://schemas.openxmlformats.org/drawingml/2006/main" prst="rect">
             <a:avLst/>
@@ -3152,7 +3152,7 @@
           <p:cNvPr id="44" name="m-chart-smoke-caption">
             <a:extLst xmlns:a="http://schemas.openxmlformats.org/drawingml/2006/main">
               <a:ext uri="{FF2B5EF4-FFF2-40B4-BE49-F238E27FC236}">
-                <a16:creationId xmlns:a16="http://schemas.microsoft.com/office/drawing/2014/main" id="{16347827-9C07-458A-8CC5-E1961D04A686}"/>
+                <a16:creationId xmlns:a16="http://schemas.microsoft.com/office/drawing/2014/main" id="{FFDDFC67-E78D-4854-81C5-32CA611F834A}"/>
               </a:ext>
             </a:extLst>
           </p:cNvPr>
@@ -3202,7 +3202,7 @@
           <p:cNvPr id="45" name="m-chart-smoke-frame">
             <a:extLst xmlns:a="http://schemas.openxmlformats.org/drawingml/2006/main">
               <a:ext uri="{FF2B5EF4-FFF2-40B4-BE49-F238E27FC236}">
-                <a16:creationId xmlns:a16="http://schemas.microsoft.com/office/drawing/2014/main" id="{6489A0C9-77CB-4AED-A63F-9C35A6DA052E}"/>
+                <a16:creationId xmlns:a16="http://schemas.microsoft.com/office/drawing/2014/main" id="{383F3024-477B-4A21-A381-D61EF51D3E49}"/>
               </a:ext>
             </a:extLst>
           </p:cNvPr>
@@ -3239,7 +3239,7 @@
           <p:nvPr/>
         </p:nvPicPr>
         <p:blipFill>
-          <a:blip xmlns:r="http://schemas.openxmlformats.org/officeDocument/2006/relationships" xmlns:a="http://schemas.openxmlformats.org/drawingml/2006/main" r:embed="R2a527c4e129b484d"/>
+          <a:blip xmlns:r="http://schemas.openxmlformats.org/officeDocument/2006/relationships" xmlns:a="http://schemas.openxmlformats.org/drawingml/2006/main" r:embed="Reb734ce9ff824a0e"/>
           <a:stretch xmlns:a="http://schemas.openxmlformats.org/drawingml/2006/main"/>
         </p:blipFill>
         <p:spPr>
@@ -3257,7 +3257,7 @@
           <p:cNvPr id="47" name="5-Discussão-box">
             <a:extLst xmlns:a="http://schemas.openxmlformats.org/drawingml/2006/main">
               <a:ext uri="{FF2B5EF4-FFF2-40B4-BE49-F238E27FC236}">
-                <a16:creationId xmlns:a16="http://schemas.microsoft.com/office/drawing/2014/main" id="{738FFAE7-AFE6-41E0-8D85-DA6C9523DABC}"/>
+                <a16:creationId xmlns:a16="http://schemas.microsoft.com/office/drawing/2014/main" id="{1FF8489F-789C-4043-B4B3-5D00DCB6117C}"/>
               </a:ext>
             </a:extLst>
           </p:cNvPr>
@@ -3290,7 +3290,7 @@
           <p:cNvPr id="48" name="5-Discussão-head">
             <a:extLst xmlns:a="http://schemas.openxmlformats.org/drawingml/2006/main">
               <a:ext uri="{FF2B5EF4-FFF2-40B4-BE49-F238E27FC236}">
-                <a16:creationId xmlns:a16="http://schemas.microsoft.com/office/drawing/2014/main" id="{74DE3F26-6D16-4595-B33C-A11E4EE45B34}"/>
+                <a16:creationId xmlns:a16="http://schemas.microsoft.com/office/drawing/2014/main" id="{12393B80-E738-4247-944C-BB89B17F0D2B}"/>
               </a:ext>
             </a:extLst>
           </p:cNvPr>
@@ -3323,7 +3323,7 @@
           <p:cNvPr id="49" name="5-Discussão-title">
             <a:extLst xmlns:a="http://schemas.openxmlformats.org/drawingml/2006/main">
               <a:ext uri="{FF2B5EF4-FFF2-40B4-BE49-F238E27FC236}">
-                <a16:creationId xmlns:a16="http://schemas.microsoft.com/office/drawing/2014/main" id="{D68064AD-90C8-4E0D-971B-8008CADD3F2A}"/>
+                <a16:creationId xmlns:a16="http://schemas.microsoft.com/office/drawing/2014/main" id="{D144C4C2-F9ED-4CA2-9295-B659D3CCA5D8}"/>
               </a:ext>
             </a:extLst>
           </p:cNvPr>
@@ -3373,7 +3373,7 @@
           <p:cNvPr id="50" name="5-Discussão-body">
             <a:extLst xmlns:a="http://schemas.openxmlformats.org/drawingml/2006/main">
               <a:ext uri="{FF2B5EF4-FFF2-40B4-BE49-F238E27FC236}">
-                <a16:creationId xmlns:a16="http://schemas.microsoft.com/office/drawing/2014/main" id="{AAA63B26-373A-4481-983F-5E0DE5C6C2D6}"/>
+                <a16:creationId xmlns:a16="http://schemas.microsoft.com/office/drawing/2014/main" id="{65A0AE66-B940-4CEB-8863-37F24A1DEF56}"/>
               </a:ext>
             </a:extLst>
           </p:cNvPr>
@@ -3525,7 +3525,7 @@
           <p:cNvPr id="51" name="6-Conclusão central-box">
             <a:extLst xmlns:a="http://schemas.openxmlformats.org/drawingml/2006/main">
               <a:ext uri="{FF2B5EF4-FFF2-40B4-BE49-F238E27FC236}">
-                <a16:creationId xmlns:a16="http://schemas.microsoft.com/office/drawing/2014/main" id="{6148E2E8-6158-455B-9D22-C30A4451CD29}"/>
+                <a16:creationId xmlns:a16="http://schemas.microsoft.com/office/drawing/2014/main" id="{229532D2-20AC-4804-A8C0-AFBB5F8C2024}"/>
               </a:ext>
             </a:extLst>
           </p:cNvPr>
@@ -3558,7 +3558,7 @@
           <p:cNvPr id="52" name="6-Conclusão central-head">
             <a:extLst xmlns:a="http://schemas.openxmlformats.org/drawingml/2006/main">
               <a:ext uri="{FF2B5EF4-FFF2-40B4-BE49-F238E27FC236}">
-                <a16:creationId xmlns:a16="http://schemas.microsoft.com/office/drawing/2014/main" id="{487DE97B-A4C6-4360-B56A-63E59DFCBF81}"/>
+                <a16:creationId xmlns:a16="http://schemas.microsoft.com/office/drawing/2014/main" id="{4B08D485-EDE7-4351-B0C2-C547E1DF33C9}"/>
               </a:ext>
             </a:extLst>
           </p:cNvPr>
@@ -3591,7 +3591,7 @@
           <p:cNvPr id="53" name="6-Conclusão central-title">
             <a:extLst xmlns:a="http://schemas.openxmlformats.org/drawingml/2006/main">
               <a:ext uri="{FF2B5EF4-FFF2-40B4-BE49-F238E27FC236}">
-                <a16:creationId xmlns:a16="http://schemas.microsoft.com/office/drawing/2014/main" id="{65839D1C-21B5-4590-8114-C91F742B64FB}"/>
+                <a16:creationId xmlns:a16="http://schemas.microsoft.com/office/drawing/2014/main" id="{8782E428-1DCE-40E1-9E7C-EE0E8C3FFF92}"/>
               </a:ext>
             </a:extLst>
           </p:cNvPr>
@@ -3641,7 +3641,7 @@
           <p:cNvPr id="54" name="6-Conclusão central-body">
             <a:extLst xmlns:a="http://schemas.openxmlformats.org/drawingml/2006/main">
               <a:ext uri="{FF2B5EF4-FFF2-40B4-BE49-F238E27FC236}">
-                <a16:creationId xmlns:a16="http://schemas.microsoft.com/office/drawing/2014/main" id="{E4CF4199-989C-47CC-B226-844C443E49C9}"/>
+                <a16:creationId xmlns:a16="http://schemas.microsoft.com/office/drawing/2014/main" id="{CDC24767-BEEF-4857-BD44-1BB5E8F63547}"/>
               </a:ext>
             </a:extLst>
           </p:cNvPr>
@@ -3725,7 +3725,7 @@
           <p:cNvPr id="55" name="m-chart-crisis-caption">
             <a:extLst xmlns:a="http://schemas.openxmlformats.org/drawingml/2006/main">
               <a:ext uri="{FF2B5EF4-FFF2-40B4-BE49-F238E27FC236}">
-                <a16:creationId xmlns:a16="http://schemas.microsoft.com/office/drawing/2014/main" id="{9DB4A5E5-5502-4C9A-B1CC-14E080F129B7}"/>
+                <a16:creationId xmlns:a16="http://schemas.microsoft.com/office/drawing/2014/main" id="{CB087D47-37D2-4BF9-84B0-4EDBF7058853}"/>
               </a:ext>
             </a:extLst>
           </p:cNvPr>
@@ -3775,7 +3775,7 @@
           <p:cNvPr id="56" name="m-chart-crisis-frame">
             <a:extLst xmlns:a="http://schemas.openxmlformats.org/drawingml/2006/main">
               <a:ext uri="{FF2B5EF4-FFF2-40B4-BE49-F238E27FC236}">
-                <a16:creationId xmlns:a16="http://schemas.microsoft.com/office/drawing/2014/main" id="{19A84A8F-4F03-484C-97DE-EEDDE616C387}"/>
+                <a16:creationId xmlns:a16="http://schemas.microsoft.com/office/drawing/2014/main" id="{1EE7016E-658C-43BA-9C77-DEF7D4D6D989}"/>
               </a:ext>
             </a:extLst>
           </p:cNvPr>
@@ -3812,7 +3812,7 @@
           <p:nvPr/>
         </p:nvPicPr>
         <p:blipFill>
-          <a:blip xmlns:r="http://schemas.openxmlformats.org/officeDocument/2006/relationships" xmlns:a="http://schemas.openxmlformats.org/drawingml/2006/main" r:embed="Rc91a9edfbe0141b0"/>
+          <a:blip xmlns:r="http://schemas.openxmlformats.org/officeDocument/2006/relationships" xmlns:a="http://schemas.openxmlformats.org/drawingml/2006/main" r:embed="R0fe4a57fe89741e4"/>
           <a:stretch xmlns:a="http://schemas.openxmlformats.org/drawingml/2006/main"/>
         </p:blipFill>
         <p:spPr>
@@ -3830,7 +3830,7 @@
           <p:cNvPr id="58" name="qr-box">
             <a:extLst xmlns:a="http://schemas.openxmlformats.org/drawingml/2006/main">
               <a:ext uri="{FF2B5EF4-FFF2-40B4-BE49-F238E27FC236}">
-                <a16:creationId xmlns:a16="http://schemas.microsoft.com/office/drawing/2014/main" id="{D9204C27-B050-4DA4-97ED-08DD741EF623}"/>
+                <a16:creationId xmlns:a16="http://schemas.microsoft.com/office/drawing/2014/main" id="{D0CA9DCA-BFAF-4AF7-B895-333DF179F245}"/>
               </a:ext>
             </a:extLst>
           </p:cNvPr>
@@ -3867,7 +3867,7 @@
           <p:nvPr/>
         </p:nvPicPr>
         <p:blipFill>
-          <a:blip xmlns:r="http://schemas.openxmlformats.org/officeDocument/2006/relationships" xmlns:a="http://schemas.openxmlformats.org/drawingml/2006/main" r:embed="Rb4c536cc056a44fb"/>
+          <a:blip xmlns:r="http://schemas.openxmlformats.org/officeDocument/2006/relationships" xmlns:a="http://schemas.openxmlformats.org/drawingml/2006/main" r:embed="Re9407090c66540e2"/>
           <a:stretch xmlns:a="http://schemas.openxmlformats.org/drawingml/2006/main"/>
         </p:blipFill>
         <p:spPr>
@@ -3885,7 +3885,7 @@
           <p:cNvPr id="60" name="qr-label">
             <a:extLst xmlns:a="http://schemas.openxmlformats.org/drawingml/2006/main">
               <a:ext uri="{FF2B5EF4-FFF2-40B4-BE49-F238E27FC236}">
-                <a16:creationId xmlns:a16="http://schemas.microsoft.com/office/drawing/2014/main" id="{37BB7E68-CFE9-4571-93A2-A640C752A72E}"/>
+                <a16:creationId xmlns:a16="http://schemas.microsoft.com/office/drawing/2014/main" id="{73229D56-B212-4198-B212-DEB276F4FC5F}"/>
               </a:ext>
             </a:extLst>
           </p:cNvPr>
@@ -3952,7 +3952,7 @@
           <p:cNvPr id="61" name="references-box">
             <a:extLst xmlns:a="http://schemas.openxmlformats.org/drawingml/2006/main">
               <a:ext uri="{FF2B5EF4-FFF2-40B4-BE49-F238E27FC236}">
-                <a16:creationId xmlns:a16="http://schemas.microsoft.com/office/drawing/2014/main" id="{AFF8C815-9C4D-4249-BAA5-EF11E332F397}"/>
+                <a16:creationId xmlns:a16="http://schemas.microsoft.com/office/drawing/2014/main" id="{D989F8EB-7845-4702-B1CA-DB274B64D883}"/>
               </a:ext>
             </a:extLst>
           </p:cNvPr>
@@ -3985,7 +3985,7 @@
           <p:cNvPr id="62" name="references-title">
             <a:extLst xmlns:a="http://schemas.openxmlformats.org/drawingml/2006/main">
               <a:ext uri="{FF2B5EF4-FFF2-40B4-BE49-F238E27FC236}">
-                <a16:creationId xmlns:a16="http://schemas.microsoft.com/office/drawing/2014/main" id="{9B717302-5795-4933-B55B-29F6B8695630}"/>
+                <a16:creationId xmlns:a16="http://schemas.microsoft.com/office/drawing/2014/main" id="{09FD53DD-AB37-4EF3-9DAB-7C49394F01D1}"/>
               </a:ext>
             </a:extLst>
           </p:cNvPr>
@@ -4035,7 +4035,7 @@
           <p:cNvPr id="63" name="references-column-divider">
             <a:extLst xmlns:a="http://schemas.openxmlformats.org/drawingml/2006/main">
               <a:ext uri="{FF2B5EF4-FFF2-40B4-BE49-F238E27FC236}">
-                <a16:creationId xmlns:a16="http://schemas.microsoft.com/office/drawing/2014/main" id="{03513E9F-4A29-43BE-944F-690AC2287365}"/>
+                <a16:creationId xmlns:a16="http://schemas.microsoft.com/office/drawing/2014/main" id="{AB2BCD08-BA65-4C15-8C98-5D15126A33F9}"/>
               </a:ext>
             </a:extLst>
           </p:cNvPr>
@@ -4068,7 +4068,7 @@
           <p:cNvPr id="64" name="references-body-left">
             <a:extLst xmlns:a="http://schemas.openxmlformats.org/drawingml/2006/main">
               <a:ext uri="{FF2B5EF4-FFF2-40B4-BE49-F238E27FC236}">
-                <a16:creationId xmlns:a16="http://schemas.microsoft.com/office/drawing/2014/main" id="{3AF52A10-6DA0-47C7-BE59-811E9225783F}"/>
+                <a16:creationId xmlns:a16="http://schemas.microsoft.com/office/drawing/2014/main" id="{3DC8A400-BC78-44EF-A2DC-398014D62971}"/>
               </a:ext>
             </a:extLst>
           </p:cNvPr>
@@ -4220,7 +4220,7 @@
           <p:cNvPr id="65" name="references-body-right">
             <a:extLst xmlns:a="http://schemas.openxmlformats.org/drawingml/2006/main">
               <a:ext uri="{FF2B5EF4-FFF2-40B4-BE49-F238E27FC236}">
-                <a16:creationId xmlns:a16="http://schemas.microsoft.com/office/drawing/2014/main" id="{CDB91AD0-820B-415F-9277-14CC2A47A3F7}"/>
+                <a16:creationId xmlns:a16="http://schemas.microsoft.com/office/drawing/2014/main" id="{D114646F-CB40-4B1A-A2E7-585CB25E0D5C}"/>
               </a:ext>
             </a:extLst>
           </p:cNvPr>
@@ -4353,7 +4353,7 @@
     </p:spTree>
     <p:extLst>
       <p:ext uri="{BB962C8B-B14F-4D97-AF65-F5344CB8AC3E}">
-        <p14:creationId xmlns:p14="http://schemas.microsoft.com/office/powerpoint/2010/main" val="180333981"/>
+        <p14:creationId xmlns:p14="http://schemas.microsoft.com/office/powerpoint/2010/main" val="375221753"/>
       </p:ext>
     </p:extLst>
   </p:cSld>
